--- a/docs/community/marketing/decks/exec-phase1/OCM-Sovereign-Delivery-Internal-Sponsor.pptx
+++ b/docs/community/marketing/decks/exec-phase1/OCM-Sovereign-Delivery-Internal-Sponsor.pptx
@@ -1086,8 +1086,8 @@
         </ns0:nvSpPr>
         <ns0:spPr>
           <ns2:xfrm xmlns:ns2="http://schemas.openxmlformats.org/drawingml/2006/main">
-            <ns2:off x="1143000" y="5753100"/>
-            <ns2:ext cx="4972050" cy="4381500"/>
+            <ns2:off x="1143000" y="5905500"/>
+            <ns2:ext cx="4972050" cy="4229100"/>
           </ns2:xfrm>
           <ns3:prstGeom xmlns:ns3="http://schemas.openxmlformats.org/drawingml/2006/main" prst="rect">
             <ns3:avLst/>
@@ -1199,8 +1199,8 @@
         </ns0:nvSpPr>
         <ns0:spPr>
           <ns2:xfrm xmlns:ns2="http://schemas.openxmlformats.org/drawingml/2006/main">
-            <ns2:off x="6648450" y="5753100"/>
-            <ns2:ext cx="4972050" cy="4381500"/>
+            <ns2:off x="6648450" y="5905500"/>
+            <ns2:ext cx="4972050" cy="4229100"/>
           </ns2:xfrm>
           <ns3:prstGeom xmlns:ns3="http://schemas.openxmlformats.org/drawingml/2006/main" prst="rect">
             <ns3:avLst/>
@@ -1312,8 +1312,8 @@
         </ns0:nvSpPr>
         <ns0:spPr>
           <ns2:xfrm xmlns:ns2="http://schemas.openxmlformats.org/drawingml/2006/main">
-            <ns2:off x="12153900" y="5753100"/>
-            <ns2:ext cx="4972050" cy="4381500"/>
+            <ns2:off x="12153900" y="5905500"/>
+            <ns2:ext cx="4972050" cy="4229100"/>
           </ns2:xfrm>
           <ns3:prstGeom xmlns:ns3="http://schemas.openxmlformats.org/drawingml/2006/main" prst="rect">
             <ns3:avLst/>
@@ -1510,8 +1510,8 @@
         </ns0:nvSpPr>
         <ns0:spPr>
           <ns2:xfrm xmlns:ns2="http://schemas.openxmlformats.org/drawingml/2006/main">
-            <ns2:off x="762000" y="4381500"/>
-            <ns2:ext cx="16764000" cy="5334000"/>
+            <ns2:off x="571500" y="4381500"/>
+            <ns2:ext cx="17145000" cy="5715000"/>
           </ns2:xfrm>
           <ns3:prstGeom xmlns:ns3="http://schemas.openxmlformats.org/drawingml/2006/main" prst="rect">
             <ns3:avLst/>

--- a/docs/community/marketing/decks/exec-phase1/OCM-Sovereign-Delivery-Internal-Sponsor.pptx
+++ b/docs/community/marketing/decks/exec-phase1/OCM-Sovereign-Delivery-Internal-Sponsor.pptx
@@ -5613,7 +5613,7 @@
       </p:sp>
       <p:pic>
         <p:nvPicPr>
-          <p:cNvPr id="4" name="Picture 3" descr="04-sbom-inside-sbod_1680.png"/>
+          <p:cNvPr id="4" name="Picture 3" descr="04-sbom-inside-sbod_1478.png"/>
           <p:cNvPicPr>
             <a:picLocks noChangeAspect="1"/>
           </p:cNvPicPr>
@@ -5627,8 +5627,8 @@
         </p:blipFill>
         <p:spPr>
           <a:xfrm>
-            <a:off x="3640667" y="4953000"/>
-            <a:ext cx="11006666" cy="4953000"/>
+            <a:off x="1867944" y="3952875"/>
+            <a:ext cx="14056811" cy="6334125"/>
           </a:xfrm>
           <a:prstGeom prst="rect">
             <a:avLst/>

--- a/docs/community/marketing/decks/exec-phase1/OCM-Sovereign-Delivery-Internal-Sponsor.pptx
+++ b/docs/community/marketing/decks/exec-phase1/OCM-Sovereign-Delivery-Internal-Sponsor.pptx
@@ -157,8 +157,8 @@
         </ns0:nvSpPr>
         <ns0:spPr>
           <ns2:xfrm xmlns:ns2="http://schemas.openxmlformats.org/drawingml/2006/main">
-            <ns2:off x="914400" y="1524000"/>
-            <ns2:ext cx="16192500" cy="1905000"/>
+            <ns2:off x="914400" y="1905000"/>
+            <ns2:ext cx="16192500" cy="1333500"/>
           </ns2:xfrm>
           <ns3:prstGeom xmlns:ns3="http://schemas.openxmlformats.org/drawingml/2006/main" prst="rect">
             <ns3:avLst/>
@@ -200,8 +200,8 @@
         </ns0:nvSpPr>
         <ns0:spPr>
           <ns2:xfrm xmlns:ns2="http://schemas.openxmlformats.org/drawingml/2006/main">
-            <ns2:off x="914400" y="3619500"/>
-            <ns2:ext cx="16192500" cy="1524000"/>
+            <ns2:off x="914400" y="3333750"/>
+            <ns2:ext cx="16192500" cy="1333500"/>
           </ns2:xfrm>
           <ns3:prstGeom xmlns:ns3="http://schemas.openxmlformats.org/drawingml/2006/main" prst="rect">
             <ns3:avLst/>
@@ -243,8 +243,8 @@
         </ns0:nvSpPr>
         <ns0:spPr>
           <ns2:xfrm xmlns:ns2="http://schemas.openxmlformats.org/drawingml/2006/main">
-            <ns2:off x="914400" y="5715000"/>
-            <ns2:ext cx="16192500" cy="1143000"/>
+            <ns2:off x="914400" y="5048250"/>
+            <ns2:ext cx="16192500" cy="857250"/>
           </ns2:xfrm>
           <ns3:prstGeom xmlns:ns3="http://schemas.openxmlformats.org/drawingml/2006/main" prst="rect">
             <ns3:avLst/>
@@ -289,7 +289,7 @@
         </ns0:nvSpPr>
         <ns0:spPr>
           <ns2:xfrm xmlns:ns2="http://schemas.openxmlformats.org/drawingml/2006/main">
-            <ns2:off x="914400" y="8191500"/>
+            <ns2:off x="914400" y="6286500"/>
             <ns2:ext cx="16192500" cy="571500"/>
           </ns2:xfrm>
           <ns3:prstGeom xmlns:ns3="http://schemas.openxmlformats.org/drawingml/2006/main" prst="rect">
@@ -328,7 +328,2310 @@
 </p:sldLayout>
 </file>
 
-<file path=ppt/slideLayouts/slideLayout10.xml><?xml version="1.0" encoding="utf-8"?>
+<file path=ppt/slideLayouts/slideLayout2.xml><?xml version="1.0" encoding="utf-8"?>
+<p:sldLayout xmlns:a="http://schemas.openxmlformats.org/drawingml/2006/main" xmlns:r="http://schemas.openxmlformats.org/officeDocument/2006/relationships" xmlns:p="http://schemas.openxmlformats.org/presentationml/2006/main" type="obj" preserve="1" userDrawn="1">
+  <p:cSld name="CTA">
+    <p:bg>
+      <p:bgPr>
+        <a:solidFill>
+          <a:srgbClr val="0A1530"/>
+        </a:solidFill>
+        <a:effectLst/>
+      </p:bgPr>
+    </p:bg>
+    <p:spTree>
+      <p:nvGrpSpPr>
+        <p:cNvPr id="1" name=""/>
+        <p:cNvGrpSpPr/>
+        <p:nvPr/>
+      </p:nvGrpSpPr>
+      <p:grpSpPr>
+        <a:xfrm>
+          <a:off x="0" y="0"/>
+          <a:ext cx="0" cy="0"/>
+          <a:chOff x="0" y="0"/>
+          <a:chExt cx="0" cy="0"/>
+        </a:xfrm>
+      </p:grpSpPr>
+      <ns0:sp xmlns:ns0="http://schemas.openxmlformats.org/presentationml/2006/main">
+        <ns0:nvSpPr>
+          <ns0:cNvPr id="10" name="CTA Title"/>
+          <ns0:cNvSpPr>
+            <ns1:spLocks xmlns:ns1="http://schemas.openxmlformats.org/drawingml/2006/main" noGrp="1"/>
+          </ns0:cNvSpPr>
+          <ns0:nvPr>
+            <ns0:ph type="title" idx="1"/>
+          </ns0:nvPr>
+        </ns0:nvSpPr>
+        <ns0:spPr>
+          <ns2:xfrm xmlns:ns2="http://schemas.openxmlformats.org/drawingml/2006/main">
+            <ns2:off x="914400" y="3048000"/>
+            <ns2:ext cx="16192500" cy="952500"/>
+          </ns2:xfrm>
+          <ns3:prstGeom xmlns:ns3="http://schemas.openxmlformats.org/drawingml/2006/main" prst="rect">
+            <ns3:avLst/>
+          </ns3:prstGeom>
+        </ns0:spPr>
+        <ns0:txBody>
+          <ns4:bodyPr xmlns:ns4="http://schemas.openxmlformats.org/drawingml/2006/main" wrap="square" rtlCol="0" anchor="t" lIns="0" tIns="0" rIns="0" bIns="0"/>
+          <ns5:lstStyle xmlns:ns5="http://schemas.openxmlformats.org/drawingml/2006/main">
+            <ns5:lvl1pPr marL="0" indent="0" algn="l">
+              <ns5:buNone/>
+              <ns5:defRPr sz="5600" b="1">
+                <ns5:solidFill>
+                  <ns5:srgbClr val="FFFFFF"/>
+                </ns5:solidFill>
+                <ns5:latin typeface="Aptos Display"/>
+              </ns5:defRPr>
+            </ns5:lvl1pPr>
+          </ns5:lstStyle>
+          <ns6:p xmlns:ns6="http://schemas.openxmlformats.org/drawingml/2006/main">
+            <ns6:r>
+              <ns6:rPr lang="en-US"/>
+              <ns6:t>Call to action</ns6:t>
+            </ns6:r>
+            <ns6:endParaRPr lang="en-US"/>
+          </ns6:p>
+        </ns0:txBody>
+      </ns0:sp>
+      <ns0:sp xmlns:ns0="http://schemas.openxmlformats.org/presentationml/2006/main">
+        <ns0:nvSpPr>
+          <ns0:cNvPr id="11" name="CTA Body"/>
+          <ns0:cNvSpPr>
+            <ns1:spLocks xmlns:ns1="http://schemas.openxmlformats.org/drawingml/2006/main" noGrp="1"/>
+          </ns0:cNvSpPr>
+          <ns0:nvPr>
+            <ns0:ph type="body" idx="2"/>
+          </ns0:nvPr>
+        </ns0:nvSpPr>
+        <ns0:spPr>
+          <ns2:xfrm xmlns:ns2="http://schemas.openxmlformats.org/drawingml/2006/main">
+            <ns2:off x="914400" y="4381500"/>
+            <ns2:ext cx="16192500" cy="3810000"/>
+          </ns2:xfrm>
+          <ns3:prstGeom xmlns:ns3="http://schemas.openxmlformats.org/drawingml/2006/main" prst="rect">
+            <ns3:avLst/>
+          </ns3:prstGeom>
+        </ns0:spPr>
+        <ns0:txBody>
+          <ns4:bodyPr xmlns:ns4="http://schemas.openxmlformats.org/drawingml/2006/main" wrap="square" rtlCol="0" anchor="t" lIns="0" tIns="0" rIns="0" bIns="0"/>
+          <ns5:lstStyle xmlns:ns5="http://schemas.openxmlformats.org/drawingml/2006/main">
+            <ns5:lvl1pPr marL="0" indent="0" algn="l">
+              <ns5:buNone/>
+              <ns5:defRPr sz="2200">
+                <ns5:solidFill>
+                  <ns5:srgbClr val="FFFFFF"/>
+                </ns5:solidFill>
+                <ns5:latin typeface="Aptos"/>
+              </ns5:defRPr>
+            </ns5:lvl1pPr>
+          </ns5:lstStyle>
+          <ns6:p xmlns:ns6="http://schemas.openxmlformats.org/drawingml/2006/main">
+            <ns6:r>
+              <ns6:rPr lang="en-US"/>
+              <ns6:t>Three-line CTA bullets go here.</ns6:t>
+            </ns6:r>
+            <ns6:endParaRPr lang="en-US"/>
+          </ns6:p>
+        </ns0:txBody>
+      </ns0:sp>
+    </p:spTree>
+  </p:cSld>
+  <p:clrMapOvr>
+    <a:masterClrMapping/>
+  </p:clrMapOvr>
+</p:sldLayout>
+</file>
+
+<file path=ppt/slideLayouts/slideLayout3.xml><?xml version="1.0" encoding="utf-8"?>
+<p:sldLayout xmlns:a="http://schemas.openxmlformats.org/drawingml/2006/main" xmlns:r="http://schemas.openxmlformats.org/officeDocument/2006/relationships" xmlns:p="http://schemas.openxmlformats.org/presentationml/2006/main" type="obj" preserve="1" userDrawn="1">
+  <p:cSld name="Content / 3-Column">
+    <p:bg>
+      <p:bgPr>
+        <a:solidFill>
+          <a:srgbClr val="FFFFFF"/>
+        </a:solidFill>
+        <a:effectLst/>
+      </p:bgPr>
+    </p:bg>
+    <p:spTree>
+      <p:nvGrpSpPr>
+        <p:cNvPr id="1" name=""/>
+        <p:cNvGrpSpPr/>
+        <p:nvPr/>
+      </p:nvGrpSpPr>
+      <p:grpSpPr>
+        <a:xfrm>
+          <a:off x="0" y="0"/>
+          <a:ext cx="0" cy="0"/>
+          <a:chOff x="0" y="0"/>
+          <a:chExt cx="0" cy="0"/>
+        </a:xfrm>
+      </p:grpSpPr>
+      <ns0:sp xmlns:ns0="http://schemas.openxmlformats.org/presentationml/2006/main">
+        <ns0:nvSpPr>
+          <ns0:cNvPr id="10" name="Eyebrow"/>
+          <ns0:cNvSpPr>
+            <ns1:spLocks xmlns:ns1="http://schemas.openxmlformats.org/drawingml/2006/main" noGrp="1"/>
+          </ns0:cNvSpPr>
+          <ns0:nvPr>
+            <ns0:ph type="body" idx="1"/>
+          </ns0:nvPr>
+        </ns0:nvSpPr>
+        <ns0:spPr>
+          <ns2:xfrm xmlns:ns2="http://schemas.openxmlformats.org/drawingml/2006/main">
+            <ns2:off x="1143000" y="2428875"/>
+            <ns2:ext cx="16002000" cy="457200"/>
+          </ns2:xfrm>
+          <ns3:prstGeom xmlns:ns3="http://schemas.openxmlformats.org/drawingml/2006/main" prst="rect">
+            <ns3:avLst/>
+          </ns3:prstGeom>
+        </ns0:spPr>
+        <ns0:txBody>
+          <ns4:bodyPr xmlns:ns4="http://schemas.openxmlformats.org/drawingml/2006/main" wrap="square" rtlCol="0" anchor="t" lIns="0" tIns="0" rIns="0" bIns="0"/>
+          <ns5:lstStyle xmlns:ns5="http://schemas.openxmlformats.org/drawingml/2006/main">
+            <ns5:lvl1pPr marL="0" indent="0" algn="l">
+              <ns5:buNone/>
+              <ns5:defRPr sz="2800" b="1" cap="all" spc="140">
+                <ns5:solidFill>
+                  <ns5:srgbClr val="0F6BFF"/>
+                </ns5:solidFill>
+                <ns5:latin typeface="Aptos"/>
+              </ns5:defRPr>
+            </ns5:lvl1pPr>
+          </ns5:lstStyle>
+          <ns6:p xmlns:ns6="http://schemas.openxmlformats.org/drawingml/2006/main">
+            <ns6:r>
+              <ns6:rPr lang="en-US"/>
+              <ns6:t>EYEBROW</ns6:t>
+            </ns6:r>
+            <ns6:endParaRPr lang="en-US"/>
+          </ns6:p>
+        </ns0:txBody>
+      </ns0:sp>
+      <ns0:sp xmlns:ns0="http://schemas.openxmlformats.org/presentationml/2006/main">
+        <ns0:nvSpPr>
+          <ns0:cNvPr id="11" name="Title"/>
+          <ns0:cNvSpPr>
+            <ns1:spLocks xmlns:ns1="http://schemas.openxmlformats.org/drawingml/2006/main" noGrp="1"/>
+          </ns0:cNvSpPr>
+          <ns0:nvPr>
+            <ns0:ph type="title" idx="2"/>
+          </ns0:nvPr>
+        </ns0:nvSpPr>
+        <ns0:spPr>
+          <ns2:xfrm xmlns:ns2="http://schemas.openxmlformats.org/drawingml/2006/main">
+            <ns2:off x="1143000" y="2933700"/>
+            <ns2:ext cx="16002000" cy="1905000"/>
+          </ns2:xfrm>
+          <ns3:prstGeom xmlns:ns3="http://schemas.openxmlformats.org/drawingml/2006/main" prst="rect">
+            <ns3:avLst/>
+          </ns3:prstGeom>
+        </ns0:spPr>
+        <ns0:txBody>
+          <ns4:bodyPr xmlns:ns4="http://schemas.openxmlformats.org/drawingml/2006/main" wrap="square" rtlCol="0" anchor="t" lIns="0" tIns="0" rIns="0" bIns="0"/>
+          <ns5:lstStyle xmlns:ns5="http://schemas.openxmlformats.org/drawingml/2006/main">
+            <ns5:lvl1pPr marL="0" indent="0" algn="l">
+              <ns5:lnSpc>
+                <ns5:spcPct val="90000"/>
+              </ns5:lnSpc>
+              <ns5:buNone/>
+              <ns5:defRPr sz="6400" b="1">
+                <ns5:solidFill>
+                  <ns5:srgbClr val="000000"/>
+                </ns5:solidFill>
+                <ns5:latin typeface="Aptos Display"/>
+              </ns5:defRPr>
+            </ns5:lvl1pPr>
+          </ns5:lstStyle>
+          <ns6:p xmlns:ns6="http://schemas.openxmlformats.org/drawingml/2006/main">
+            <ns6:r>
+              <ns6:rPr lang="en-US"/>
+              <ns6:t>Section title goes here.</ns6:t>
+            </ns6:r>
+            <ns6:endParaRPr lang="en-US"/>
+          </ns6:p>
+        </ns0:txBody>
+      </ns0:sp>
+      <ns0:sp xmlns:ns0="http://schemas.openxmlformats.org/presentationml/2006/main">
+        <ns0:nvSpPr>
+          <ns0:cNvPr id="12" name="Col1 Rule"/>
+          <ns0:cNvSpPr/>
+          <ns0:nvPr/>
+        </ns0:nvSpPr>
+        <ns0:spPr>
+          <ns1:xfrm xmlns:ns1="http://schemas.openxmlformats.org/drawingml/2006/main">
+            <ns1:off x="1143000" y="4953000"/>
+            <ns1:ext cx="4972050" cy="38100"/>
+          </ns1:xfrm>
+          <ns2:prstGeom xmlns:ns2="http://schemas.openxmlformats.org/drawingml/2006/main" prst="rect">
+            <ns2:avLst/>
+          </ns2:prstGeom>
+          <ns3:solidFill xmlns:ns3="http://schemas.openxmlformats.org/drawingml/2006/main">
+            <ns3:srgbClr val="0F6BFF"/>
+          </ns3:solidFill>
+          <ns4:ln xmlns:ns4="http://schemas.openxmlformats.org/drawingml/2006/main">
+            <ns4:noFill/>
+          </ns4:ln>
+        </ns0:spPr>
+        <ns0:txBody>
+          <ns5:bodyPr xmlns:ns5="http://schemas.openxmlformats.org/drawingml/2006/main" rtlCol="0" anchor="ctr"/>
+          <ns6:lstStyle xmlns:ns6="http://schemas.openxmlformats.org/drawingml/2006/main"/>
+          <ns7:p xmlns:ns7="http://schemas.openxmlformats.org/drawingml/2006/main">
+            <ns7:endParaRPr lang="en-US"/>
+          </ns7:p>
+        </ns0:txBody>
+      </ns0:sp>
+      <ns0:sp xmlns:ns0="http://schemas.openxmlformats.org/presentationml/2006/main">
+        <ns0:nvSpPr>
+          <ns0:cNvPr id="13" name="Col1 Header"/>
+          <ns0:cNvSpPr>
+            <ns1:spLocks xmlns:ns1="http://schemas.openxmlformats.org/drawingml/2006/main" noGrp="1"/>
+          </ns0:cNvSpPr>
+          <ns0:nvPr>
+            <ns0:ph type="body" idx="10"/>
+          </ns0:nvPr>
+        </ns0:nvSpPr>
+        <ns0:spPr>
+          <ns2:xfrm xmlns:ns2="http://schemas.openxmlformats.org/drawingml/2006/main">
+            <ns2:off x="1143000" y="5105400"/>
+            <ns2:ext cx="4972050" cy="533400"/>
+          </ns2:xfrm>
+          <ns3:prstGeom xmlns:ns3="http://schemas.openxmlformats.org/drawingml/2006/main" prst="rect">
+            <ns3:avLst/>
+          </ns3:prstGeom>
+        </ns0:spPr>
+        <ns0:txBody>
+          <ns4:bodyPr xmlns:ns4="http://schemas.openxmlformats.org/drawingml/2006/main" wrap="square" rtlCol="0" anchor="t" lIns="0" tIns="0" rIns="0" bIns="0">
+            <ns4:noAutofit/>
+          </ns4:bodyPr>
+          <ns5:lstStyle xmlns:ns5="http://schemas.openxmlformats.org/drawingml/2006/main">
+            <ns5:lvl1pPr marL="0" indent="0" algn="l">
+              <ns5:buNone/>
+              <ns5:defRPr sz="2000" b="1" cap="all" spc="130">
+                <ns5:solidFill>
+                  <ns5:srgbClr val="0F6BFF"/>
+                </ns5:solidFill>
+                <ns5:latin typeface="Aptos"/>
+              </ns5:defRPr>
+            </ns5:lvl1pPr>
+          </ns5:lstStyle>
+          <ns6:p xmlns:ns6="http://schemas.openxmlformats.org/drawingml/2006/main">
+            <ns6:r>
+              <ns6:rPr lang="en-US"/>
+              <ns6:t>COLUMN 1 HEADER</ns6:t>
+            </ns6:r>
+            <ns6:endParaRPr lang="en-US"/>
+          </ns6:p>
+        </ns0:txBody>
+      </ns0:sp>
+      <ns0:sp xmlns:ns0="http://schemas.openxmlformats.org/presentationml/2006/main">
+        <ns0:nvSpPr>
+          <ns0:cNvPr id="14" name="Col1 Body"/>
+          <ns0:cNvSpPr>
+            <ns1:spLocks xmlns:ns1="http://schemas.openxmlformats.org/drawingml/2006/main" noGrp="1"/>
+          </ns0:cNvSpPr>
+          <ns0:nvPr>
+            <ns0:ph type="body" idx="11"/>
+          </ns0:nvPr>
+        </ns0:nvSpPr>
+        <ns0:spPr>
+          <ns2:xfrm xmlns:ns2="http://schemas.openxmlformats.org/drawingml/2006/main">
+            <ns2:off x="1143000" y="5753100"/>
+            <ns2:ext cx="4972050" cy="4381500"/>
+          </ns2:xfrm>
+          <ns3:prstGeom xmlns:ns3="http://schemas.openxmlformats.org/drawingml/2006/main" prst="rect">
+            <ns3:avLst/>
+          </ns3:prstGeom>
+        </ns0:spPr>
+        <ns0:txBody>
+          <ns4:bodyPr xmlns:ns4="http://schemas.openxmlformats.org/drawingml/2006/main" wrap="square" rtlCol="0" anchor="t" lIns="0" tIns="0" rIns="0" bIns="0"/>
+          <ns5:lstStyle xmlns:ns5="http://schemas.openxmlformats.org/drawingml/2006/main">
+            <ns5:lvl1pPr marL="0" indent="0" algn="l">
+              <ns5:buNone/>
+              <ns5:defRPr sz="2200">
+                <ns5:solidFill>
+                  <ns5:srgbClr val="000000"/>
+                </ns5:solidFill>
+                <ns5:latin typeface="Aptos"/>
+              </ns5:defRPr>
+            </ns5:lvl1pPr>
+          </ns5:lstStyle>
+          <ns6:p xmlns:ns6="http://schemas.openxmlformats.org/drawingml/2006/main">
+            <ns6:r>
+              <ns6:rPr lang="en-US"/>
+              <ns6:t>Column 1 body. Replace with one or two short sentences.</ns6:t>
+            </ns6:r>
+            <ns6:endParaRPr lang="en-US"/>
+          </ns6:p>
+        </ns0:txBody>
+      </ns0:sp>
+      <ns0:sp xmlns:ns0="http://schemas.openxmlformats.org/presentationml/2006/main">
+        <ns0:nvSpPr>
+          <ns0:cNvPr id="15" name="Col2 Rule"/>
+          <ns0:cNvSpPr/>
+          <ns0:nvPr/>
+        </ns0:nvSpPr>
+        <ns0:spPr>
+          <ns1:xfrm xmlns:ns1="http://schemas.openxmlformats.org/drawingml/2006/main">
+            <ns1:off x="6648450" y="4953000"/>
+            <ns1:ext cx="4972050" cy="38100"/>
+          </ns1:xfrm>
+          <ns2:prstGeom xmlns:ns2="http://schemas.openxmlformats.org/drawingml/2006/main" prst="rect">
+            <ns2:avLst/>
+          </ns2:prstGeom>
+          <ns3:solidFill xmlns:ns3="http://schemas.openxmlformats.org/drawingml/2006/main">
+            <ns3:srgbClr val="0F6BFF"/>
+          </ns3:solidFill>
+          <ns4:ln xmlns:ns4="http://schemas.openxmlformats.org/drawingml/2006/main">
+            <ns4:noFill/>
+          </ns4:ln>
+        </ns0:spPr>
+        <ns0:txBody>
+          <ns5:bodyPr xmlns:ns5="http://schemas.openxmlformats.org/drawingml/2006/main" rtlCol="0" anchor="ctr"/>
+          <ns6:lstStyle xmlns:ns6="http://schemas.openxmlformats.org/drawingml/2006/main"/>
+          <ns7:p xmlns:ns7="http://schemas.openxmlformats.org/drawingml/2006/main">
+            <ns7:endParaRPr lang="en-US"/>
+          </ns7:p>
+        </ns0:txBody>
+      </ns0:sp>
+      <ns0:sp xmlns:ns0="http://schemas.openxmlformats.org/presentationml/2006/main">
+        <ns0:nvSpPr>
+          <ns0:cNvPr id="16" name="Col2 Header"/>
+          <ns0:cNvSpPr>
+            <ns1:spLocks xmlns:ns1="http://schemas.openxmlformats.org/drawingml/2006/main" noGrp="1"/>
+          </ns0:cNvSpPr>
+          <ns0:nvPr>
+            <ns0:ph type="body" idx="12"/>
+          </ns0:nvPr>
+        </ns0:nvSpPr>
+        <ns0:spPr>
+          <ns2:xfrm xmlns:ns2="http://schemas.openxmlformats.org/drawingml/2006/main">
+            <ns2:off x="6648450" y="5105400"/>
+            <ns2:ext cx="4972050" cy="533400"/>
+          </ns2:xfrm>
+          <ns3:prstGeom xmlns:ns3="http://schemas.openxmlformats.org/drawingml/2006/main" prst="rect">
+            <ns3:avLst/>
+          </ns3:prstGeom>
+        </ns0:spPr>
+        <ns0:txBody>
+          <ns4:bodyPr xmlns:ns4="http://schemas.openxmlformats.org/drawingml/2006/main" wrap="square" rtlCol="0" anchor="t" lIns="0" tIns="0" rIns="0" bIns="0">
+            <ns4:noAutofit/>
+          </ns4:bodyPr>
+          <ns5:lstStyle xmlns:ns5="http://schemas.openxmlformats.org/drawingml/2006/main">
+            <ns5:lvl1pPr marL="0" indent="0" algn="l">
+              <ns5:buNone/>
+              <ns5:defRPr sz="2000" b="1" cap="all" spc="130">
+                <ns5:solidFill>
+                  <ns5:srgbClr val="0F6BFF"/>
+                </ns5:solidFill>
+                <ns5:latin typeface="Aptos"/>
+              </ns5:defRPr>
+            </ns5:lvl1pPr>
+          </ns5:lstStyle>
+          <ns6:p xmlns:ns6="http://schemas.openxmlformats.org/drawingml/2006/main">
+            <ns6:r>
+              <ns6:rPr lang="en-US"/>
+              <ns6:t>COLUMN 2 HEADER</ns6:t>
+            </ns6:r>
+            <ns6:endParaRPr lang="en-US"/>
+          </ns6:p>
+        </ns0:txBody>
+      </ns0:sp>
+      <ns0:sp xmlns:ns0="http://schemas.openxmlformats.org/presentationml/2006/main">
+        <ns0:nvSpPr>
+          <ns0:cNvPr id="17" name="Col2 Body"/>
+          <ns0:cNvSpPr>
+            <ns1:spLocks xmlns:ns1="http://schemas.openxmlformats.org/drawingml/2006/main" noGrp="1"/>
+          </ns0:cNvSpPr>
+          <ns0:nvPr>
+            <ns0:ph type="body" idx="13"/>
+          </ns0:nvPr>
+        </ns0:nvSpPr>
+        <ns0:spPr>
+          <ns2:xfrm xmlns:ns2="http://schemas.openxmlformats.org/drawingml/2006/main">
+            <ns2:off x="6648450" y="5753100"/>
+            <ns2:ext cx="4972050" cy="4381500"/>
+          </ns2:xfrm>
+          <ns3:prstGeom xmlns:ns3="http://schemas.openxmlformats.org/drawingml/2006/main" prst="rect">
+            <ns3:avLst/>
+          </ns3:prstGeom>
+        </ns0:spPr>
+        <ns0:txBody>
+          <ns4:bodyPr xmlns:ns4="http://schemas.openxmlformats.org/drawingml/2006/main" wrap="square" rtlCol="0" anchor="t" lIns="0" tIns="0" rIns="0" bIns="0"/>
+          <ns5:lstStyle xmlns:ns5="http://schemas.openxmlformats.org/drawingml/2006/main">
+            <ns5:lvl1pPr marL="0" indent="0" algn="l">
+              <ns5:buNone/>
+              <ns5:defRPr sz="2200">
+                <ns5:solidFill>
+                  <ns5:srgbClr val="000000"/>
+                </ns5:solidFill>
+                <ns5:latin typeface="Aptos"/>
+              </ns5:defRPr>
+            </ns5:lvl1pPr>
+          </ns5:lstStyle>
+          <ns6:p xmlns:ns6="http://schemas.openxmlformats.org/drawingml/2006/main">
+            <ns6:r>
+              <ns6:rPr lang="en-US"/>
+              <ns6:t>Column 2 body. Replace with one or two short sentences.</ns6:t>
+            </ns6:r>
+            <ns6:endParaRPr lang="en-US"/>
+          </ns6:p>
+        </ns0:txBody>
+      </ns0:sp>
+      <ns0:sp xmlns:ns0="http://schemas.openxmlformats.org/presentationml/2006/main">
+        <ns0:nvSpPr>
+          <ns0:cNvPr id="18" name="Col3 Rule"/>
+          <ns0:cNvSpPr/>
+          <ns0:nvPr/>
+        </ns0:nvSpPr>
+        <ns0:spPr>
+          <ns1:xfrm xmlns:ns1="http://schemas.openxmlformats.org/drawingml/2006/main">
+            <ns1:off x="12153900" y="4953000"/>
+            <ns1:ext cx="4972050" cy="38100"/>
+          </ns1:xfrm>
+          <ns2:prstGeom xmlns:ns2="http://schemas.openxmlformats.org/drawingml/2006/main" prst="rect">
+            <ns2:avLst/>
+          </ns2:prstGeom>
+          <ns3:solidFill xmlns:ns3="http://schemas.openxmlformats.org/drawingml/2006/main">
+            <ns3:srgbClr val="0F6BFF"/>
+          </ns3:solidFill>
+          <ns4:ln xmlns:ns4="http://schemas.openxmlformats.org/drawingml/2006/main">
+            <ns4:noFill/>
+          </ns4:ln>
+        </ns0:spPr>
+        <ns0:txBody>
+          <ns5:bodyPr xmlns:ns5="http://schemas.openxmlformats.org/drawingml/2006/main" rtlCol="0" anchor="ctr"/>
+          <ns6:lstStyle xmlns:ns6="http://schemas.openxmlformats.org/drawingml/2006/main"/>
+          <ns7:p xmlns:ns7="http://schemas.openxmlformats.org/drawingml/2006/main">
+            <ns7:endParaRPr lang="en-US"/>
+          </ns7:p>
+        </ns0:txBody>
+      </ns0:sp>
+      <ns0:sp xmlns:ns0="http://schemas.openxmlformats.org/presentationml/2006/main">
+        <ns0:nvSpPr>
+          <ns0:cNvPr id="19" name="Col3 Header"/>
+          <ns0:cNvSpPr>
+            <ns1:spLocks xmlns:ns1="http://schemas.openxmlformats.org/drawingml/2006/main" noGrp="1"/>
+          </ns0:cNvSpPr>
+          <ns0:nvPr>
+            <ns0:ph type="body" idx="14"/>
+          </ns0:nvPr>
+        </ns0:nvSpPr>
+        <ns0:spPr>
+          <ns2:xfrm xmlns:ns2="http://schemas.openxmlformats.org/drawingml/2006/main">
+            <ns2:off x="12153900" y="5105400"/>
+            <ns2:ext cx="4972050" cy="533400"/>
+          </ns2:xfrm>
+          <ns3:prstGeom xmlns:ns3="http://schemas.openxmlformats.org/drawingml/2006/main" prst="rect">
+            <ns3:avLst/>
+          </ns3:prstGeom>
+        </ns0:spPr>
+        <ns0:txBody>
+          <ns4:bodyPr xmlns:ns4="http://schemas.openxmlformats.org/drawingml/2006/main" wrap="square" rtlCol="0" anchor="t" lIns="0" tIns="0" rIns="0" bIns="0">
+            <ns4:noAutofit/>
+          </ns4:bodyPr>
+          <ns5:lstStyle xmlns:ns5="http://schemas.openxmlformats.org/drawingml/2006/main">
+            <ns5:lvl1pPr marL="0" indent="0" algn="l">
+              <ns5:buNone/>
+              <ns5:defRPr sz="2000" b="1" cap="all" spc="130">
+                <ns5:solidFill>
+                  <ns5:srgbClr val="0F6BFF"/>
+                </ns5:solidFill>
+                <ns5:latin typeface="Aptos"/>
+              </ns5:defRPr>
+            </ns5:lvl1pPr>
+          </ns5:lstStyle>
+          <ns6:p xmlns:ns6="http://schemas.openxmlformats.org/drawingml/2006/main">
+            <ns6:r>
+              <ns6:rPr lang="en-US"/>
+              <ns6:t>COLUMN 3 HEADER</ns6:t>
+            </ns6:r>
+            <ns6:endParaRPr lang="en-US"/>
+          </ns6:p>
+        </ns0:txBody>
+      </ns0:sp>
+      <ns0:sp xmlns:ns0="http://schemas.openxmlformats.org/presentationml/2006/main">
+        <ns0:nvSpPr>
+          <ns0:cNvPr id="20" name="Col3 Body"/>
+          <ns0:cNvSpPr>
+            <ns1:spLocks xmlns:ns1="http://schemas.openxmlformats.org/drawingml/2006/main" noGrp="1"/>
+          </ns0:cNvSpPr>
+          <ns0:nvPr>
+            <ns0:ph type="body" idx="15"/>
+          </ns0:nvPr>
+        </ns0:nvSpPr>
+        <ns0:spPr>
+          <ns2:xfrm xmlns:ns2="http://schemas.openxmlformats.org/drawingml/2006/main">
+            <ns2:off x="12153900" y="5753100"/>
+            <ns2:ext cx="4972050" cy="4381500"/>
+          </ns2:xfrm>
+          <ns3:prstGeom xmlns:ns3="http://schemas.openxmlformats.org/drawingml/2006/main" prst="rect">
+            <ns3:avLst/>
+          </ns3:prstGeom>
+        </ns0:spPr>
+        <ns0:txBody>
+          <ns4:bodyPr xmlns:ns4="http://schemas.openxmlformats.org/drawingml/2006/main" wrap="square" rtlCol="0" anchor="t" lIns="0" tIns="0" rIns="0" bIns="0"/>
+          <ns5:lstStyle xmlns:ns5="http://schemas.openxmlformats.org/drawingml/2006/main">
+            <ns5:lvl1pPr marL="0" indent="0" algn="l">
+              <ns5:buNone/>
+              <ns5:defRPr sz="2200">
+                <ns5:solidFill>
+                  <ns5:srgbClr val="000000"/>
+                </ns5:solidFill>
+                <ns5:latin typeface="Aptos"/>
+              </ns5:defRPr>
+            </ns5:lvl1pPr>
+          </ns5:lstStyle>
+          <ns6:p xmlns:ns6="http://schemas.openxmlformats.org/drawingml/2006/main">
+            <ns6:r>
+              <ns6:rPr lang="en-US"/>
+              <ns6:t>Column 3 body. Replace with one or two short sentences.</ns6:t>
+            </ns6:r>
+            <ns6:endParaRPr lang="en-US"/>
+          </ns6:p>
+        </ns0:txBody>
+      </ns0:sp>
+      <ns0:sp xmlns:ns0="http://schemas.openxmlformats.org/presentationml/2006/main">
+        <ns0:nvSpPr>
+          <ns0:cNvPr id="21" name="Footer"/>
+          <ns0:cNvSpPr>
+            <ns1:spLocks xmlns:ns1="http://schemas.openxmlformats.org/drawingml/2006/main" noGrp="1"/>
+          </ns0:cNvSpPr>
+          <ns0:nvPr/>
+        </ns0:nvSpPr>
+        <ns0:spPr>
+          <ns2:xfrm xmlns:ns2="http://schemas.openxmlformats.org/drawingml/2006/main">
+            <ns2:off x="1143000" y="9982200"/>
+            <ns2:ext cx="16002000" cy="228600"/>
+          </ns2:xfrm>
+          <ns3:prstGeom xmlns:ns3="http://schemas.openxmlformats.org/drawingml/2006/main" prst="rect">
+            <ns3:avLst/>
+          </ns3:prstGeom>
+        </ns0:spPr>
+        <ns0:txBody>
+          <ns4:bodyPr xmlns:ns4="http://schemas.openxmlformats.org/drawingml/2006/main" wrap="square" rtlCol="0" anchor="t" lIns="0" tIns="0" rIns="0" bIns="0"/>
+          <ns5:lstStyle xmlns:ns5="http://schemas.openxmlformats.org/drawingml/2006/main">
+            <ns5:lvl1pPr marL="0" indent="0" algn="l">
+              <ns5:buNone/>
+              <ns5:defRPr sz="900" cap="all" spc="50">
+                <ns5:solidFill>
+                  <ns5:srgbClr val="6B7280"/>
+                </ns5:solidFill>
+                <ns5:latin typeface="Aptos"/>
+              </ns5:defRPr>
+            </ns5:lvl1pPr>
+          </ns5:lstStyle>
+          <ns6:p xmlns:ns6="http://schemas.openxmlformats.org/drawingml/2006/main">
+            <ns6:r>
+              <ns6:rPr lang="en-US"/>
+              <ns6:t>OPEN COMPONENT MODEL · OCM.SOFTWARE</ns6:t>
+            </ns6:r>
+            <ns6:endParaRPr lang="en-US"/>
+          </ns6:p>
+        </ns0:txBody>
+      </ns0:sp>
+    </p:spTree>
+  </p:cSld>
+  <p:clrMapOvr>
+    <a:masterClrMapping/>
+  </p:clrMapOvr>
+</p:sldLayout>
+</file>
+
+<file path=ppt/slideLayouts/slideLayout4.xml><?xml version="1.0" encoding="utf-8"?>
+<p:sldLayout xmlns:a="http://schemas.openxmlformats.org/drawingml/2006/main" xmlns:r="http://schemas.openxmlformats.org/officeDocument/2006/relationships" xmlns:p="http://schemas.openxmlformats.org/presentationml/2006/main" type="obj" preserve="1" userDrawn="1">
+  <p:cSld name="Content / Diagram">
+    <p:bg>
+      <p:bgPr>
+        <a:solidFill>
+          <a:srgbClr val="FFFFFF"/>
+        </a:solidFill>
+        <a:effectLst/>
+      </p:bgPr>
+    </p:bg>
+    <p:spTree>
+      <p:nvGrpSpPr>
+        <p:cNvPr id="1" name=""/>
+        <p:cNvGrpSpPr/>
+        <p:nvPr/>
+      </p:nvGrpSpPr>
+      <p:grpSpPr>
+        <a:xfrm>
+          <a:off x="0" y="0"/>
+          <a:ext cx="0" cy="0"/>
+          <a:chOff x="0" y="0"/>
+          <a:chExt cx="0" cy="0"/>
+        </a:xfrm>
+      </p:grpSpPr>
+      <ns0:sp xmlns:ns0="http://schemas.openxmlformats.org/presentationml/2006/main">
+        <ns0:nvSpPr>
+          <ns0:cNvPr id="10" name="Eyebrow"/>
+          <ns0:cNvSpPr>
+            <ns1:spLocks xmlns:ns1="http://schemas.openxmlformats.org/drawingml/2006/main" noGrp="1"/>
+          </ns0:cNvSpPr>
+          <ns0:nvPr>
+            <ns0:ph type="body" idx="1"/>
+          </ns0:nvPr>
+        </ns0:nvSpPr>
+        <ns0:spPr>
+          <ns2:xfrm xmlns:ns2="http://schemas.openxmlformats.org/drawingml/2006/main">
+            <ns2:off x="1143000" y="2428875"/>
+            <ns2:ext cx="16002000" cy="457200"/>
+          </ns2:xfrm>
+          <ns3:prstGeom xmlns:ns3="http://schemas.openxmlformats.org/drawingml/2006/main" prst="rect">
+            <ns3:avLst/>
+          </ns3:prstGeom>
+        </ns0:spPr>
+        <ns0:txBody>
+          <ns4:bodyPr xmlns:ns4="http://schemas.openxmlformats.org/drawingml/2006/main" wrap="square" rtlCol="0" anchor="t" lIns="0" tIns="0" rIns="0" bIns="0"/>
+          <ns5:lstStyle xmlns:ns5="http://schemas.openxmlformats.org/drawingml/2006/main">
+            <ns5:lvl1pPr marL="0" indent="0" algn="l">
+              <ns5:buNone/>
+              <ns5:defRPr sz="2800" b="1" cap="all" spc="140">
+                <ns5:solidFill>
+                  <ns5:srgbClr val="0F6BFF"/>
+                </ns5:solidFill>
+                <ns5:latin typeface="Aptos"/>
+              </ns5:defRPr>
+            </ns5:lvl1pPr>
+          </ns5:lstStyle>
+          <ns6:p xmlns:ns6="http://schemas.openxmlformats.org/drawingml/2006/main">
+            <ns6:r>
+              <ns6:rPr lang="en-US"/>
+              <ns6:t>EYEBROW</ns6:t>
+            </ns6:r>
+            <ns6:endParaRPr lang="en-US"/>
+          </ns6:p>
+        </ns0:txBody>
+      </ns0:sp>
+      <ns0:sp xmlns:ns0="http://schemas.openxmlformats.org/presentationml/2006/main">
+        <ns0:nvSpPr>
+          <ns0:cNvPr id="11" name="Title"/>
+          <ns0:cNvSpPr>
+            <ns1:spLocks xmlns:ns1="http://schemas.openxmlformats.org/drawingml/2006/main" noGrp="1"/>
+          </ns0:cNvSpPr>
+          <ns0:nvPr>
+            <ns0:ph type="title" idx="2"/>
+          </ns0:nvPr>
+        </ns0:nvSpPr>
+        <ns0:spPr>
+          <ns2:xfrm xmlns:ns2="http://schemas.openxmlformats.org/drawingml/2006/main">
+            <ns2:off x="1143000" y="2933700"/>
+            <ns2:ext cx="16002000" cy="1143000"/>
+          </ns2:xfrm>
+          <ns3:prstGeom xmlns:ns3="http://schemas.openxmlformats.org/drawingml/2006/main" prst="rect">
+            <ns3:avLst/>
+          </ns3:prstGeom>
+        </ns0:spPr>
+        <ns0:txBody>
+          <ns4:bodyPr xmlns:ns4="http://schemas.openxmlformats.org/drawingml/2006/main" wrap="square" rtlCol="0" anchor="t" lIns="0" tIns="0" rIns="0" bIns="0"/>
+          <ns5:lstStyle xmlns:ns5="http://schemas.openxmlformats.org/drawingml/2006/main">
+            <ns5:lvl1pPr marL="0" indent="0" algn="l">
+              <ns5:lnSpc>
+                <ns5:spcPct val="90000"/>
+              </ns5:lnSpc>
+              <ns5:buNone/>
+              <ns5:defRPr sz="6400" b="1">
+                <ns5:solidFill>
+                  <ns5:srgbClr val="000000"/>
+                </ns5:solidFill>
+                <ns5:latin typeface="Aptos Display"/>
+              </ns5:defRPr>
+            </ns5:lvl1pPr>
+          </ns5:lstStyle>
+          <ns6:p xmlns:ns6="http://schemas.openxmlformats.org/drawingml/2006/main">
+            <ns6:r>
+              <ns6:rPr lang="en-US"/>
+              <ns6:t>Section title goes here.</ns6:t>
+            </ns6:r>
+            <ns6:endParaRPr lang="en-US"/>
+          </ns6:p>
+        </ns0:txBody>
+      </ns0:sp>
+      <ns0:sp xmlns:ns0="http://schemas.openxmlformats.org/presentationml/2006/main">
+        <ns0:nvSpPr>
+          <ns0:cNvPr id="12" name="Diagram"/>
+          <ns0:cNvSpPr>
+            <ns1:spLocks xmlns:ns1="http://schemas.openxmlformats.org/drawingml/2006/main" noGrp="1"/>
+          </ns0:cNvSpPr>
+          <ns0:nvPr>
+            <ns0:ph type="pic" idx="10"/>
+          </ns0:nvPr>
+        </ns0:nvSpPr>
+        <ns0:spPr>
+          <ns2:xfrm xmlns:ns2="http://schemas.openxmlformats.org/drawingml/2006/main">
+            <ns2:off x="571500" y="4381500"/>
+            <ns2:ext cx="17145000" cy="5715000"/>
+          </ns2:xfrm>
+          <ns3:prstGeom xmlns:ns3="http://schemas.openxmlformats.org/drawingml/2006/main" prst="rect">
+            <ns3:avLst/>
+          </ns3:prstGeom>
+        </ns0:spPr>
+        <ns0:txBody>
+          <ns4:bodyPr xmlns:ns4="http://schemas.openxmlformats.org/drawingml/2006/main" rtlCol="0" anchor="ctr"/>
+          <ns5:lstStyle xmlns:ns5="http://schemas.openxmlformats.org/drawingml/2006/main"/>
+          <ns6:p xmlns:ns6="http://schemas.openxmlformats.org/drawingml/2006/main">
+            <ns6:endParaRPr lang="en-US"/>
+          </ns6:p>
+        </ns0:txBody>
+      </ns0:sp>
+      <ns0:sp xmlns:ns0="http://schemas.openxmlformats.org/presentationml/2006/main">
+        <ns0:nvSpPr>
+          <ns0:cNvPr id="13" name="Footer"/>
+          <ns0:cNvSpPr>
+            <ns1:spLocks xmlns:ns1="http://schemas.openxmlformats.org/drawingml/2006/main" noGrp="1"/>
+          </ns0:cNvSpPr>
+          <ns0:nvPr/>
+        </ns0:nvSpPr>
+        <ns0:spPr>
+          <ns2:xfrm xmlns:ns2="http://schemas.openxmlformats.org/drawingml/2006/main">
+            <ns2:off x="1143000" y="9982200"/>
+            <ns2:ext cx="16002000" cy="228600"/>
+          </ns2:xfrm>
+          <ns3:prstGeom xmlns:ns3="http://schemas.openxmlformats.org/drawingml/2006/main" prst="rect">
+            <ns3:avLst/>
+          </ns3:prstGeom>
+        </ns0:spPr>
+        <ns0:txBody>
+          <ns4:bodyPr xmlns:ns4="http://schemas.openxmlformats.org/drawingml/2006/main" wrap="square" rtlCol="0" anchor="t" lIns="0" tIns="0" rIns="0" bIns="0"/>
+          <ns5:lstStyle xmlns:ns5="http://schemas.openxmlformats.org/drawingml/2006/main">
+            <ns5:lvl1pPr marL="0" indent="0" algn="l">
+              <ns5:buNone/>
+              <ns5:defRPr sz="900" cap="all" spc="50">
+                <ns5:solidFill>
+                  <ns5:srgbClr val="6B7280"/>
+                </ns5:solidFill>
+                <ns5:latin typeface="Aptos"/>
+              </ns5:defRPr>
+            </ns5:lvl1pPr>
+          </ns5:lstStyle>
+          <ns6:p xmlns:ns6="http://schemas.openxmlformats.org/drawingml/2006/main">
+            <ns6:r>
+              <ns6:rPr lang="en-US"/>
+              <ns6:t>OPEN COMPONENT MODEL · OCM.SOFTWARE</ns6:t>
+            </ns6:r>
+            <ns6:endParaRPr lang="en-US"/>
+          </ns6:p>
+        </ns0:txBody>
+      </ns0:sp>
+    </p:spTree>
+  </p:cSld>
+  <p:clrMapOvr>
+    <a:masterClrMapping/>
+  </p:clrMapOvr>
+</p:sldLayout>
+</file>
+
+<file path=ppt/slideLayouts/slideLayout5.xml><?xml version="1.0" encoding="utf-8"?>
+<p:sldLayout xmlns:a="http://schemas.openxmlformats.org/drawingml/2006/main" xmlns:r="http://schemas.openxmlformats.org/officeDocument/2006/relationships" xmlns:p="http://schemas.openxmlformats.org/presentationml/2006/main" type="obj" preserve="1" userDrawn="1">
+  <p:cSld name="Content / Tiles">
+    <p:bg>
+      <p:bgPr>
+        <a:solidFill>
+          <a:srgbClr val="FFFFFF"/>
+        </a:solidFill>
+        <a:effectLst/>
+      </p:bgPr>
+    </p:bg>
+    <p:spTree>
+      <p:nvGrpSpPr>
+        <p:cNvPr id="1" name=""/>
+        <p:cNvGrpSpPr/>
+        <p:nvPr/>
+      </p:nvGrpSpPr>
+      <p:grpSpPr>
+        <a:xfrm>
+          <a:off x="0" y="0"/>
+          <a:ext cx="0" cy="0"/>
+          <a:chOff x="0" y="0"/>
+          <a:chExt cx="0" cy="0"/>
+        </a:xfrm>
+      </p:grpSpPr>
+      <ns0:sp xmlns:ns0="http://schemas.openxmlformats.org/presentationml/2006/main">
+        <ns0:nvSpPr>
+          <ns0:cNvPr id="10" name="Eyebrow"/>
+          <ns0:cNvSpPr>
+            <ns1:spLocks xmlns:ns1="http://schemas.openxmlformats.org/drawingml/2006/main" noGrp="1"/>
+          </ns0:cNvSpPr>
+          <ns0:nvPr>
+            <ns0:ph type="body" idx="1"/>
+          </ns0:nvPr>
+        </ns0:nvSpPr>
+        <ns0:spPr>
+          <ns2:xfrm xmlns:ns2="http://schemas.openxmlformats.org/drawingml/2006/main">
+            <ns2:off x="1143000" y="2428875"/>
+            <ns2:ext cx="16002000" cy="457200"/>
+          </ns2:xfrm>
+          <ns3:prstGeom xmlns:ns3="http://schemas.openxmlformats.org/drawingml/2006/main" prst="rect">
+            <ns3:avLst/>
+          </ns3:prstGeom>
+        </ns0:spPr>
+        <ns0:txBody>
+          <ns4:bodyPr xmlns:ns4="http://schemas.openxmlformats.org/drawingml/2006/main" wrap="square" rtlCol="0" anchor="t" lIns="0" tIns="0" rIns="0" bIns="0"/>
+          <ns5:lstStyle xmlns:ns5="http://schemas.openxmlformats.org/drawingml/2006/main">
+            <ns5:lvl1pPr marL="0" indent="0" algn="l">
+              <ns5:buNone/>
+              <ns5:defRPr sz="2800" b="1" cap="all" spc="140">
+                <ns5:solidFill>
+                  <ns5:srgbClr val="0F6BFF"/>
+                </ns5:solidFill>
+                <ns5:latin typeface="Aptos"/>
+              </ns5:defRPr>
+            </ns5:lvl1pPr>
+          </ns5:lstStyle>
+          <ns6:p xmlns:ns6="http://schemas.openxmlformats.org/drawingml/2006/main">
+            <ns6:r>
+              <ns6:rPr lang="en-US"/>
+              <ns6:t>EYEBROW</ns6:t>
+            </ns6:r>
+            <ns6:endParaRPr lang="en-US"/>
+          </ns6:p>
+        </ns0:txBody>
+      </ns0:sp>
+      <ns0:sp xmlns:ns0="http://schemas.openxmlformats.org/presentationml/2006/main">
+        <ns0:nvSpPr>
+          <ns0:cNvPr id="11" name="Title"/>
+          <ns0:cNvSpPr>
+            <ns1:spLocks xmlns:ns1="http://schemas.openxmlformats.org/drawingml/2006/main" noGrp="1"/>
+          </ns0:cNvSpPr>
+          <ns0:nvPr>
+            <ns0:ph type="title" idx="2"/>
+          </ns0:nvPr>
+        </ns0:nvSpPr>
+        <ns0:spPr>
+          <ns2:xfrm xmlns:ns2="http://schemas.openxmlformats.org/drawingml/2006/main">
+            <ns2:off x="1143000" y="2933700"/>
+            <ns2:ext cx="16002000" cy="1905000"/>
+          </ns2:xfrm>
+          <ns3:prstGeom xmlns:ns3="http://schemas.openxmlformats.org/drawingml/2006/main" prst="rect">
+            <ns3:avLst/>
+          </ns3:prstGeom>
+        </ns0:spPr>
+        <ns0:txBody>
+          <ns4:bodyPr xmlns:ns4="http://schemas.openxmlformats.org/drawingml/2006/main" wrap="square" rtlCol="0" anchor="t" lIns="0" tIns="0" rIns="0" bIns="0"/>
+          <ns5:lstStyle xmlns:ns5="http://schemas.openxmlformats.org/drawingml/2006/main">
+            <ns5:lvl1pPr marL="0" indent="0" algn="l">
+              <ns5:lnSpc>
+                <ns5:spcPct val="90000"/>
+              </ns5:lnSpc>
+              <ns5:buNone/>
+              <ns5:defRPr sz="6400" b="1">
+                <ns5:solidFill>
+                  <ns5:srgbClr val="000000"/>
+                </ns5:solidFill>
+                <ns5:latin typeface="Aptos Display"/>
+              </ns5:defRPr>
+            </ns5:lvl1pPr>
+          </ns5:lstStyle>
+          <ns6:p xmlns:ns6="http://schemas.openxmlformats.org/drawingml/2006/main">
+            <ns6:r>
+              <ns6:rPr lang="en-US"/>
+              <ns6:t>Section title goes here.</ns6:t>
+            </ns6:r>
+            <ns6:endParaRPr lang="en-US"/>
+          </ns6:p>
+        </ns0:txBody>
+      </ns0:sp>
+      <ns0:sp xmlns:ns0="http://schemas.openxmlformats.org/presentationml/2006/main">
+        <ns0:nvSpPr>
+          <ns0:cNvPr id="12" name="Tile1 Bg"/>
+          <ns0:cNvSpPr/>
+          <ns0:nvPr/>
+        </ns0:nvSpPr>
+        <ns0:spPr>
+          <ns1:xfrm xmlns:ns1="http://schemas.openxmlformats.org/drawingml/2006/main">
+            <ns1:off x="1143000" y="4953000"/>
+            <ns1:ext cx="5181600" cy="2190750"/>
+          </ns1:xfrm>
+          <ns2:prstGeom xmlns:ns2="http://schemas.openxmlformats.org/drawingml/2006/main" prst="rect">
+            <ns2:avLst/>
+          </ns2:prstGeom>
+          <ns3:solidFill xmlns:ns3="http://schemas.openxmlformats.org/drawingml/2006/main">
+            <ns3:srgbClr val="F3F4F6"/>
+          </ns3:solidFill>
+          <ns4:ln xmlns:ns4="http://schemas.openxmlformats.org/drawingml/2006/main">
+            <ns4:noFill/>
+          </ns4:ln>
+        </ns0:spPr>
+        <ns0:txBody>
+          <ns5:bodyPr xmlns:ns5="http://schemas.openxmlformats.org/drawingml/2006/main" rtlCol="0" anchor="ctr"/>
+          <ns6:lstStyle xmlns:ns6="http://schemas.openxmlformats.org/drawingml/2006/main"/>
+          <ns7:p xmlns:ns7="http://schemas.openxmlformats.org/drawingml/2006/main">
+            <ns7:endParaRPr lang="en-US"/>
+          </ns7:p>
+        </ns0:txBody>
+      </ns0:sp>
+      <ns0:sp xmlns:ns0="http://schemas.openxmlformats.org/presentationml/2006/main">
+        <ns0:nvSpPr>
+          <ns0:cNvPr id="13" name="Tile1 Rule"/>
+          <ns0:cNvSpPr/>
+          <ns0:nvPr/>
+        </ns0:nvSpPr>
+        <ns0:spPr>
+          <ns1:xfrm xmlns:ns1="http://schemas.openxmlformats.org/drawingml/2006/main">
+            <ns1:off x="1143000" y="4953000"/>
+            <ns1:ext cx="5181600" cy="28575"/>
+          </ns1:xfrm>
+          <ns2:prstGeom xmlns:ns2="http://schemas.openxmlformats.org/drawingml/2006/main" prst="rect">
+            <ns2:avLst/>
+          </ns2:prstGeom>
+          <ns3:solidFill xmlns:ns3="http://schemas.openxmlformats.org/drawingml/2006/main">
+            <ns3:srgbClr val="0F6BFF"/>
+          </ns3:solidFill>
+          <ns4:ln xmlns:ns4="http://schemas.openxmlformats.org/drawingml/2006/main">
+            <ns4:noFill/>
+          </ns4:ln>
+        </ns0:spPr>
+        <ns0:txBody>
+          <ns5:bodyPr xmlns:ns5="http://schemas.openxmlformats.org/drawingml/2006/main" rtlCol="0" anchor="ctr"/>
+          <ns6:lstStyle xmlns:ns6="http://schemas.openxmlformats.org/drawingml/2006/main"/>
+          <ns7:p xmlns:ns7="http://schemas.openxmlformats.org/drawingml/2006/main">
+            <ns7:endParaRPr lang="en-US"/>
+          </ns7:p>
+        </ns0:txBody>
+      </ns0:sp>
+      <ns0:sp xmlns:ns0="http://schemas.openxmlformats.org/presentationml/2006/main">
+        <ns0:nvSpPr>
+          <ns0:cNvPr id="14" name="Tile1 Label"/>
+          <ns0:cNvSpPr>
+            <ns1:spLocks xmlns:ns1="http://schemas.openxmlformats.org/drawingml/2006/main" noGrp="1"/>
+          </ns0:cNvSpPr>
+          <ns0:nvPr>
+            <ns0:ph type="body" idx="20"/>
+          </ns0:nvPr>
+        </ns0:nvSpPr>
+        <ns0:spPr>
+          <ns2:xfrm xmlns:ns2="http://schemas.openxmlformats.org/drawingml/2006/main">
+            <ns2:off x="1371600" y="5791200"/>
+            <ns2:ext cx="4724400" cy="304800"/>
+          </ns2:xfrm>
+          <ns3:prstGeom xmlns:ns3="http://schemas.openxmlformats.org/drawingml/2006/main" prst="rect">
+            <ns3:avLst/>
+          </ns3:prstGeom>
+        </ns0:spPr>
+        <ns0:txBody>
+          <ns4:bodyPr xmlns:ns4="http://schemas.openxmlformats.org/drawingml/2006/main" wrap="square" rtlCol="0" anchor="t" lIns="0" tIns="0" rIns="0" bIns="0"/>
+          <ns5:lstStyle xmlns:ns5="http://schemas.openxmlformats.org/drawingml/2006/main">
+            <ns5:lvl1pPr marL="0" indent="0" algn="l">
+              <ns5:buNone/>
+              <ns5:defRPr sz="1600" b="1">
+                <ns5:solidFill>
+                  <ns5:srgbClr val="0F6BFF"/>
+                </ns5:solidFill>
+                <ns5:latin typeface="Aptos"/>
+              </ns5:defRPr>
+            </ns5:lvl1pPr>
+          </ns5:lstStyle>
+          <ns6:p xmlns:ns6="http://schemas.openxmlformats.org/drawingml/2006/main">
+            <ns6:r>
+              <ns6:rPr lang="en-US"/>
+              <ns6:t>Tile 1 label</ns6:t>
+            </ns6:r>
+            <ns6:endParaRPr lang="en-US"/>
+          </ns6:p>
+        </ns0:txBody>
+      </ns0:sp>
+      <ns0:sp xmlns:ns0="http://schemas.openxmlformats.org/presentationml/2006/main">
+        <ns0:nvSpPr>
+          <ns0:cNvPr id="15" name="Tile1 Body"/>
+          <ns0:cNvSpPr>
+            <ns1:spLocks xmlns:ns1="http://schemas.openxmlformats.org/drawingml/2006/main" noGrp="1"/>
+          </ns0:cNvSpPr>
+          <ns0:nvPr>
+            <ns0:ph type="body" idx="21"/>
+          </ns0:nvPr>
+        </ns0:nvSpPr>
+        <ns0:spPr>
+          <ns2:xfrm xmlns:ns2="http://schemas.openxmlformats.org/drawingml/2006/main">
+            <ns2:off x="1371600" y="6134100"/>
+            <ns2:ext cx="4724400" cy="857250"/>
+          </ns2:xfrm>
+          <ns3:prstGeom xmlns:ns3="http://schemas.openxmlformats.org/drawingml/2006/main" prst="rect">
+            <ns3:avLst/>
+          </ns3:prstGeom>
+        </ns0:spPr>
+        <ns0:txBody>
+          <ns4:bodyPr xmlns:ns4="http://schemas.openxmlformats.org/drawingml/2006/main" wrap="square" rtlCol="0" anchor="t" lIns="0" tIns="0" rIns="0" bIns="0"/>
+          <ns5:lstStyle xmlns:ns5="http://schemas.openxmlformats.org/drawingml/2006/main">
+            <ns5:lvl1pPr marL="0" indent="0" algn="l">
+              <ns5:buNone/>
+              <ns5:defRPr sz="1800">
+                <ns5:solidFill>
+                  <ns5:srgbClr val="000000"/>
+                </ns5:solidFill>
+                <ns5:latin typeface="Aptos"/>
+              </ns5:defRPr>
+            </ns5:lvl1pPr>
+          </ns5:lstStyle>
+          <ns6:p xmlns:ns6="http://schemas.openxmlformats.org/drawingml/2006/main">
+            <ns6:r>
+              <ns6:rPr lang="en-US"/>
+              <ns6:t>One short sentence describing this tile.</ns6:t>
+            </ns6:r>
+            <ns6:endParaRPr lang="en-US"/>
+          </ns6:p>
+        </ns0:txBody>
+      </ns0:sp>
+      <ns0:sp xmlns:ns0="http://schemas.openxmlformats.org/presentationml/2006/main">
+        <ns0:nvSpPr>
+          <ns0:cNvPr id="16" name="Tile2 Bg"/>
+          <ns0:cNvSpPr/>
+          <ns0:nvPr/>
+        </ns0:nvSpPr>
+        <ns0:spPr>
+          <ns1:xfrm xmlns:ns1="http://schemas.openxmlformats.org/drawingml/2006/main">
+            <ns1:off x="6553200" y="4953000"/>
+            <ns1:ext cx="5181600" cy="2190750"/>
+          </ns1:xfrm>
+          <ns2:prstGeom xmlns:ns2="http://schemas.openxmlformats.org/drawingml/2006/main" prst="rect">
+            <ns2:avLst/>
+          </ns2:prstGeom>
+          <ns3:solidFill xmlns:ns3="http://schemas.openxmlformats.org/drawingml/2006/main">
+            <ns3:srgbClr val="F3F4F6"/>
+          </ns3:solidFill>
+          <ns4:ln xmlns:ns4="http://schemas.openxmlformats.org/drawingml/2006/main">
+            <ns4:noFill/>
+          </ns4:ln>
+        </ns0:spPr>
+        <ns0:txBody>
+          <ns5:bodyPr xmlns:ns5="http://schemas.openxmlformats.org/drawingml/2006/main" rtlCol="0" anchor="ctr"/>
+          <ns6:lstStyle xmlns:ns6="http://schemas.openxmlformats.org/drawingml/2006/main"/>
+          <ns7:p xmlns:ns7="http://schemas.openxmlformats.org/drawingml/2006/main">
+            <ns7:endParaRPr lang="en-US"/>
+          </ns7:p>
+        </ns0:txBody>
+      </ns0:sp>
+      <ns0:sp xmlns:ns0="http://schemas.openxmlformats.org/presentationml/2006/main">
+        <ns0:nvSpPr>
+          <ns0:cNvPr id="17" name="Tile2 Rule"/>
+          <ns0:cNvSpPr/>
+          <ns0:nvPr/>
+        </ns0:nvSpPr>
+        <ns0:spPr>
+          <ns1:xfrm xmlns:ns1="http://schemas.openxmlformats.org/drawingml/2006/main">
+            <ns1:off x="6553200" y="4953000"/>
+            <ns1:ext cx="5181600" cy="28575"/>
+          </ns1:xfrm>
+          <ns2:prstGeom xmlns:ns2="http://schemas.openxmlformats.org/drawingml/2006/main" prst="rect">
+            <ns2:avLst/>
+          </ns2:prstGeom>
+          <ns3:solidFill xmlns:ns3="http://schemas.openxmlformats.org/drawingml/2006/main">
+            <ns3:srgbClr val="0F6BFF"/>
+          </ns3:solidFill>
+          <ns4:ln xmlns:ns4="http://schemas.openxmlformats.org/drawingml/2006/main">
+            <ns4:noFill/>
+          </ns4:ln>
+        </ns0:spPr>
+        <ns0:txBody>
+          <ns5:bodyPr xmlns:ns5="http://schemas.openxmlformats.org/drawingml/2006/main" rtlCol="0" anchor="ctr"/>
+          <ns6:lstStyle xmlns:ns6="http://schemas.openxmlformats.org/drawingml/2006/main"/>
+          <ns7:p xmlns:ns7="http://schemas.openxmlformats.org/drawingml/2006/main">
+            <ns7:endParaRPr lang="en-US"/>
+          </ns7:p>
+        </ns0:txBody>
+      </ns0:sp>
+      <ns0:sp xmlns:ns0="http://schemas.openxmlformats.org/presentationml/2006/main">
+        <ns0:nvSpPr>
+          <ns0:cNvPr id="18" name="Tile2 Label"/>
+          <ns0:cNvSpPr>
+            <ns1:spLocks xmlns:ns1="http://schemas.openxmlformats.org/drawingml/2006/main" noGrp="1"/>
+          </ns0:cNvSpPr>
+          <ns0:nvPr>
+            <ns0:ph type="body" idx="22"/>
+          </ns0:nvPr>
+        </ns0:nvSpPr>
+        <ns0:spPr>
+          <ns2:xfrm xmlns:ns2="http://schemas.openxmlformats.org/drawingml/2006/main">
+            <ns2:off x="6781800" y="5791200"/>
+            <ns2:ext cx="4724400" cy="304800"/>
+          </ns2:xfrm>
+          <ns3:prstGeom xmlns:ns3="http://schemas.openxmlformats.org/drawingml/2006/main" prst="rect">
+            <ns3:avLst/>
+          </ns3:prstGeom>
+        </ns0:spPr>
+        <ns0:txBody>
+          <ns4:bodyPr xmlns:ns4="http://schemas.openxmlformats.org/drawingml/2006/main" wrap="square" rtlCol="0" anchor="t" lIns="0" tIns="0" rIns="0" bIns="0"/>
+          <ns5:lstStyle xmlns:ns5="http://schemas.openxmlformats.org/drawingml/2006/main">
+            <ns5:lvl1pPr marL="0" indent="0" algn="l">
+              <ns5:buNone/>
+              <ns5:defRPr sz="1600" b="1">
+                <ns5:solidFill>
+                  <ns5:srgbClr val="0F6BFF"/>
+                </ns5:solidFill>
+                <ns5:latin typeface="Aptos"/>
+              </ns5:defRPr>
+            </ns5:lvl1pPr>
+          </ns5:lstStyle>
+          <ns6:p xmlns:ns6="http://schemas.openxmlformats.org/drawingml/2006/main">
+            <ns6:r>
+              <ns6:rPr lang="en-US"/>
+              <ns6:t>Tile 2 label</ns6:t>
+            </ns6:r>
+            <ns6:endParaRPr lang="en-US"/>
+          </ns6:p>
+        </ns0:txBody>
+      </ns0:sp>
+      <ns0:sp xmlns:ns0="http://schemas.openxmlformats.org/presentationml/2006/main">
+        <ns0:nvSpPr>
+          <ns0:cNvPr id="19" name="Tile2 Body"/>
+          <ns0:cNvSpPr>
+            <ns1:spLocks xmlns:ns1="http://schemas.openxmlformats.org/drawingml/2006/main" noGrp="1"/>
+          </ns0:cNvSpPr>
+          <ns0:nvPr>
+            <ns0:ph type="body" idx="23"/>
+          </ns0:nvPr>
+        </ns0:nvSpPr>
+        <ns0:spPr>
+          <ns2:xfrm xmlns:ns2="http://schemas.openxmlformats.org/drawingml/2006/main">
+            <ns2:off x="6781800" y="6134100"/>
+            <ns2:ext cx="4724400" cy="857250"/>
+          </ns2:xfrm>
+          <ns3:prstGeom xmlns:ns3="http://schemas.openxmlformats.org/drawingml/2006/main" prst="rect">
+            <ns3:avLst/>
+          </ns3:prstGeom>
+        </ns0:spPr>
+        <ns0:txBody>
+          <ns4:bodyPr xmlns:ns4="http://schemas.openxmlformats.org/drawingml/2006/main" wrap="square" rtlCol="0" anchor="t" lIns="0" tIns="0" rIns="0" bIns="0"/>
+          <ns5:lstStyle xmlns:ns5="http://schemas.openxmlformats.org/drawingml/2006/main">
+            <ns5:lvl1pPr marL="0" indent="0" algn="l">
+              <ns5:buNone/>
+              <ns5:defRPr sz="1800">
+                <ns5:solidFill>
+                  <ns5:srgbClr val="000000"/>
+                </ns5:solidFill>
+                <ns5:latin typeface="Aptos"/>
+              </ns5:defRPr>
+            </ns5:lvl1pPr>
+          </ns5:lstStyle>
+          <ns6:p xmlns:ns6="http://schemas.openxmlformats.org/drawingml/2006/main">
+            <ns6:r>
+              <ns6:rPr lang="en-US"/>
+              <ns6:t>One short sentence describing this tile.</ns6:t>
+            </ns6:r>
+            <ns6:endParaRPr lang="en-US"/>
+          </ns6:p>
+        </ns0:txBody>
+      </ns0:sp>
+      <ns0:sp xmlns:ns0="http://schemas.openxmlformats.org/presentationml/2006/main">
+        <ns0:nvSpPr>
+          <ns0:cNvPr id="20" name="Tile3 Bg"/>
+          <ns0:cNvSpPr/>
+          <ns0:nvPr/>
+        </ns0:nvSpPr>
+        <ns0:spPr>
+          <ns1:xfrm xmlns:ns1="http://schemas.openxmlformats.org/drawingml/2006/main">
+            <ns1:off x="11963400" y="4953000"/>
+            <ns1:ext cx="5181600" cy="2190750"/>
+          </ns1:xfrm>
+          <ns2:prstGeom xmlns:ns2="http://schemas.openxmlformats.org/drawingml/2006/main" prst="rect">
+            <ns2:avLst/>
+          </ns2:prstGeom>
+          <ns3:solidFill xmlns:ns3="http://schemas.openxmlformats.org/drawingml/2006/main">
+            <ns3:srgbClr val="F3F4F6"/>
+          </ns3:solidFill>
+          <ns4:ln xmlns:ns4="http://schemas.openxmlformats.org/drawingml/2006/main">
+            <ns4:noFill/>
+          </ns4:ln>
+        </ns0:spPr>
+        <ns0:txBody>
+          <ns5:bodyPr xmlns:ns5="http://schemas.openxmlformats.org/drawingml/2006/main" rtlCol="0" anchor="ctr"/>
+          <ns6:lstStyle xmlns:ns6="http://schemas.openxmlformats.org/drawingml/2006/main"/>
+          <ns7:p xmlns:ns7="http://schemas.openxmlformats.org/drawingml/2006/main">
+            <ns7:endParaRPr lang="en-US"/>
+          </ns7:p>
+        </ns0:txBody>
+      </ns0:sp>
+      <ns0:sp xmlns:ns0="http://schemas.openxmlformats.org/presentationml/2006/main">
+        <ns0:nvSpPr>
+          <ns0:cNvPr id="21" name="Tile3 Rule"/>
+          <ns0:cNvSpPr/>
+          <ns0:nvPr/>
+        </ns0:nvSpPr>
+        <ns0:spPr>
+          <ns1:xfrm xmlns:ns1="http://schemas.openxmlformats.org/drawingml/2006/main">
+            <ns1:off x="11963400" y="4953000"/>
+            <ns1:ext cx="5181600" cy="28575"/>
+          </ns1:xfrm>
+          <ns2:prstGeom xmlns:ns2="http://schemas.openxmlformats.org/drawingml/2006/main" prst="rect">
+            <ns2:avLst/>
+          </ns2:prstGeom>
+          <ns3:solidFill xmlns:ns3="http://schemas.openxmlformats.org/drawingml/2006/main">
+            <ns3:srgbClr val="0F6BFF"/>
+          </ns3:solidFill>
+          <ns4:ln xmlns:ns4="http://schemas.openxmlformats.org/drawingml/2006/main">
+            <ns4:noFill/>
+          </ns4:ln>
+        </ns0:spPr>
+        <ns0:txBody>
+          <ns5:bodyPr xmlns:ns5="http://schemas.openxmlformats.org/drawingml/2006/main" rtlCol="0" anchor="ctr"/>
+          <ns6:lstStyle xmlns:ns6="http://schemas.openxmlformats.org/drawingml/2006/main"/>
+          <ns7:p xmlns:ns7="http://schemas.openxmlformats.org/drawingml/2006/main">
+            <ns7:endParaRPr lang="en-US"/>
+          </ns7:p>
+        </ns0:txBody>
+      </ns0:sp>
+      <ns0:sp xmlns:ns0="http://schemas.openxmlformats.org/presentationml/2006/main">
+        <ns0:nvSpPr>
+          <ns0:cNvPr id="22" name="Tile3 Label"/>
+          <ns0:cNvSpPr>
+            <ns1:spLocks xmlns:ns1="http://schemas.openxmlformats.org/drawingml/2006/main" noGrp="1"/>
+          </ns0:cNvSpPr>
+          <ns0:nvPr>
+            <ns0:ph type="body" idx="24"/>
+          </ns0:nvPr>
+        </ns0:nvSpPr>
+        <ns0:spPr>
+          <ns2:xfrm xmlns:ns2="http://schemas.openxmlformats.org/drawingml/2006/main">
+            <ns2:off x="12192000" y="5791200"/>
+            <ns2:ext cx="4724400" cy="304800"/>
+          </ns2:xfrm>
+          <ns3:prstGeom xmlns:ns3="http://schemas.openxmlformats.org/drawingml/2006/main" prst="rect">
+            <ns3:avLst/>
+          </ns3:prstGeom>
+        </ns0:spPr>
+        <ns0:txBody>
+          <ns4:bodyPr xmlns:ns4="http://schemas.openxmlformats.org/drawingml/2006/main" wrap="square" rtlCol="0" anchor="t" lIns="0" tIns="0" rIns="0" bIns="0"/>
+          <ns5:lstStyle xmlns:ns5="http://schemas.openxmlformats.org/drawingml/2006/main">
+            <ns5:lvl1pPr marL="0" indent="0" algn="l">
+              <ns5:buNone/>
+              <ns5:defRPr sz="1600" b="1">
+                <ns5:solidFill>
+                  <ns5:srgbClr val="0F6BFF"/>
+                </ns5:solidFill>
+                <ns5:latin typeface="Aptos"/>
+              </ns5:defRPr>
+            </ns5:lvl1pPr>
+          </ns5:lstStyle>
+          <ns6:p xmlns:ns6="http://schemas.openxmlformats.org/drawingml/2006/main">
+            <ns6:r>
+              <ns6:rPr lang="en-US"/>
+              <ns6:t>Tile 3 label</ns6:t>
+            </ns6:r>
+            <ns6:endParaRPr lang="en-US"/>
+          </ns6:p>
+        </ns0:txBody>
+      </ns0:sp>
+      <ns0:sp xmlns:ns0="http://schemas.openxmlformats.org/presentationml/2006/main">
+        <ns0:nvSpPr>
+          <ns0:cNvPr id="23" name="Tile3 Body"/>
+          <ns0:cNvSpPr>
+            <ns1:spLocks xmlns:ns1="http://schemas.openxmlformats.org/drawingml/2006/main" noGrp="1"/>
+          </ns0:cNvSpPr>
+          <ns0:nvPr>
+            <ns0:ph type="body" idx="25"/>
+          </ns0:nvPr>
+        </ns0:nvSpPr>
+        <ns0:spPr>
+          <ns2:xfrm xmlns:ns2="http://schemas.openxmlformats.org/drawingml/2006/main">
+            <ns2:off x="12192000" y="6134100"/>
+            <ns2:ext cx="4724400" cy="857250"/>
+          </ns2:xfrm>
+          <ns3:prstGeom xmlns:ns3="http://schemas.openxmlformats.org/drawingml/2006/main" prst="rect">
+            <ns3:avLst/>
+          </ns3:prstGeom>
+        </ns0:spPr>
+        <ns0:txBody>
+          <ns4:bodyPr xmlns:ns4="http://schemas.openxmlformats.org/drawingml/2006/main" wrap="square" rtlCol="0" anchor="t" lIns="0" tIns="0" rIns="0" bIns="0"/>
+          <ns5:lstStyle xmlns:ns5="http://schemas.openxmlformats.org/drawingml/2006/main">
+            <ns5:lvl1pPr marL="0" indent="0" algn="l">
+              <ns5:buNone/>
+              <ns5:defRPr sz="1800">
+                <ns5:solidFill>
+                  <ns5:srgbClr val="000000"/>
+                </ns5:solidFill>
+                <ns5:latin typeface="Aptos"/>
+              </ns5:defRPr>
+            </ns5:lvl1pPr>
+          </ns5:lstStyle>
+          <ns6:p xmlns:ns6="http://schemas.openxmlformats.org/drawingml/2006/main">
+            <ns6:r>
+              <ns6:rPr lang="en-US"/>
+              <ns6:t>One short sentence describing this tile.</ns6:t>
+            </ns6:r>
+            <ns6:endParaRPr lang="en-US"/>
+          </ns6:p>
+        </ns0:txBody>
+      </ns0:sp>
+      <ns0:sp xmlns:ns0="http://schemas.openxmlformats.org/presentationml/2006/main">
+        <ns0:nvSpPr>
+          <ns0:cNvPr id="24" name="Tile4 Bg"/>
+          <ns0:cNvSpPr/>
+          <ns0:nvPr/>
+        </ns0:nvSpPr>
+        <ns0:spPr>
+          <ns1:xfrm xmlns:ns1="http://schemas.openxmlformats.org/drawingml/2006/main">
+            <ns1:off x="1143000" y="7372350"/>
+            <ns1:ext cx="5181600" cy="2190750"/>
+          </ns1:xfrm>
+          <ns2:prstGeom xmlns:ns2="http://schemas.openxmlformats.org/drawingml/2006/main" prst="rect">
+            <ns2:avLst/>
+          </ns2:prstGeom>
+          <ns3:solidFill xmlns:ns3="http://schemas.openxmlformats.org/drawingml/2006/main">
+            <ns3:srgbClr val="F3F4F6"/>
+          </ns3:solidFill>
+          <ns4:ln xmlns:ns4="http://schemas.openxmlformats.org/drawingml/2006/main">
+            <ns4:noFill/>
+          </ns4:ln>
+        </ns0:spPr>
+        <ns0:txBody>
+          <ns5:bodyPr xmlns:ns5="http://schemas.openxmlformats.org/drawingml/2006/main" rtlCol="0" anchor="ctr"/>
+          <ns6:lstStyle xmlns:ns6="http://schemas.openxmlformats.org/drawingml/2006/main"/>
+          <ns7:p xmlns:ns7="http://schemas.openxmlformats.org/drawingml/2006/main">
+            <ns7:endParaRPr lang="en-US"/>
+          </ns7:p>
+        </ns0:txBody>
+      </ns0:sp>
+      <ns0:sp xmlns:ns0="http://schemas.openxmlformats.org/presentationml/2006/main">
+        <ns0:nvSpPr>
+          <ns0:cNvPr id="25" name="Tile4 Rule"/>
+          <ns0:cNvSpPr/>
+          <ns0:nvPr/>
+        </ns0:nvSpPr>
+        <ns0:spPr>
+          <ns1:xfrm xmlns:ns1="http://schemas.openxmlformats.org/drawingml/2006/main">
+            <ns1:off x="1143000" y="7372350"/>
+            <ns1:ext cx="5181600" cy="28575"/>
+          </ns1:xfrm>
+          <ns2:prstGeom xmlns:ns2="http://schemas.openxmlformats.org/drawingml/2006/main" prst="rect">
+            <ns2:avLst/>
+          </ns2:prstGeom>
+          <ns3:solidFill xmlns:ns3="http://schemas.openxmlformats.org/drawingml/2006/main">
+            <ns3:srgbClr val="0F6BFF"/>
+          </ns3:solidFill>
+          <ns4:ln xmlns:ns4="http://schemas.openxmlformats.org/drawingml/2006/main">
+            <ns4:noFill/>
+          </ns4:ln>
+        </ns0:spPr>
+        <ns0:txBody>
+          <ns5:bodyPr xmlns:ns5="http://schemas.openxmlformats.org/drawingml/2006/main" rtlCol="0" anchor="ctr"/>
+          <ns6:lstStyle xmlns:ns6="http://schemas.openxmlformats.org/drawingml/2006/main"/>
+          <ns7:p xmlns:ns7="http://schemas.openxmlformats.org/drawingml/2006/main">
+            <ns7:endParaRPr lang="en-US"/>
+          </ns7:p>
+        </ns0:txBody>
+      </ns0:sp>
+      <ns0:sp xmlns:ns0="http://schemas.openxmlformats.org/presentationml/2006/main">
+        <ns0:nvSpPr>
+          <ns0:cNvPr id="26" name="Tile4 Label"/>
+          <ns0:cNvSpPr>
+            <ns1:spLocks xmlns:ns1="http://schemas.openxmlformats.org/drawingml/2006/main" noGrp="1"/>
+          </ns0:cNvSpPr>
+          <ns0:nvPr>
+            <ns0:ph type="body" idx="26"/>
+          </ns0:nvPr>
+        </ns0:nvSpPr>
+        <ns0:spPr>
+          <ns2:xfrm xmlns:ns2="http://schemas.openxmlformats.org/drawingml/2006/main">
+            <ns2:off x="1371600" y="8210550"/>
+            <ns2:ext cx="4724400" cy="304800"/>
+          </ns2:xfrm>
+          <ns3:prstGeom xmlns:ns3="http://schemas.openxmlformats.org/drawingml/2006/main" prst="rect">
+            <ns3:avLst/>
+          </ns3:prstGeom>
+        </ns0:spPr>
+        <ns0:txBody>
+          <ns4:bodyPr xmlns:ns4="http://schemas.openxmlformats.org/drawingml/2006/main" wrap="square" rtlCol="0" anchor="t" lIns="0" tIns="0" rIns="0" bIns="0"/>
+          <ns5:lstStyle xmlns:ns5="http://schemas.openxmlformats.org/drawingml/2006/main">
+            <ns5:lvl1pPr marL="0" indent="0" algn="l">
+              <ns5:buNone/>
+              <ns5:defRPr sz="1600" b="1">
+                <ns5:solidFill>
+                  <ns5:srgbClr val="0F6BFF"/>
+                </ns5:solidFill>
+                <ns5:latin typeface="Aptos"/>
+              </ns5:defRPr>
+            </ns5:lvl1pPr>
+          </ns5:lstStyle>
+          <ns6:p xmlns:ns6="http://schemas.openxmlformats.org/drawingml/2006/main">
+            <ns6:r>
+              <ns6:rPr lang="en-US"/>
+              <ns6:t>Tile 4 label</ns6:t>
+            </ns6:r>
+            <ns6:endParaRPr lang="en-US"/>
+          </ns6:p>
+        </ns0:txBody>
+      </ns0:sp>
+      <ns0:sp xmlns:ns0="http://schemas.openxmlformats.org/presentationml/2006/main">
+        <ns0:nvSpPr>
+          <ns0:cNvPr id="27" name="Tile4 Body"/>
+          <ns0:cNvSpPr>
+            <ns1:spLocks xmlns:ns1="http://schemas.openxmlformats.org/drawingml/2006/main" noGrp="1"/>
+          </ns0:cNvSpPr>
+          <ns0:nvPr>
+            <ns0:ph type="body" idx="27"/>
+          </ns0:nvPr>
+        </ns0:nvSpPr>
+        <ns0:spPr>
+          <ns2:xfrm xmlns:ns2="http://schemas.openxmlformats.org/drawingml/2006/main">
+            <ns2:off x="1371600" y="8553450"/>
+            <ns2:ext cx="4724400" cy="857250"/>
+          </ns2:xfrm>
+          <ns3:prstGeom xmlns:ns3="http://schemas.openxmlformats.org/drawingml/2006/main" prst="rect">
+            <ns3:avLst/>
+          </ns3:prstGeom>
+        </ns0:spPr>
+        <ns0:txBody>
+          <ns4:bodyPr xmlns:ns4="http://schemas.openxmlformats.org/drawingml/2006/main" wrap="square" rtlCol="0" anchor="t" lIns="0" tIns="0" rIns="0" bIns="0"/>
+          <ns5:lstStyle xmlns:ns5="http://schemas.openxmlformats.org/drawingml/2006/main">
+            <ns5:lvl1pPr marL="0" indent="0" algn="l">
+              <ns5:buNone/>
+              <ns5:defRPr sz="1800">
+                <ns5:solidFill>
+                  <ns5:srgbClr val="000000"/>
+                </ns5:solidFill>
+                <ns5:latin typeface="Aptos"/>
+              </ns5:defRPr>
+            </ns5:lvl1pPr>
+          </ns5:lstStyle>
+          <ns6:p xmlns:ns6="http://schemas.openxmlformats.org/drawingml/2006/main">
+            <ns6:r>
+              <ns6:rPr lang="en-US"/>
+              <ns6:t>One short sentence describing this tile.</ns6:t>
+            </ns6:r>
+            <ns6:endParaRPr lang="en-US"/>
+          </ns6:p>
+        </ns0:txBody>
+      </ns0:sp>
+      <ns0:sp xmlns:ns0="http://schemas.openxmlformats.org/presentationml/2006/main">
+        <ns0:nvSpPr>
+          <ns0:cNvPr id="28" name="Tile5 Bg"/>
+          <ns0:cNvSpPr/>
+          <ns0:nvPr/>
+        </ns0:nvSpPr>
+        <ns0:spPr>
+          <ns1:xfrm xmlns:ns1="http://schemas.openxmlformats.org/drawingml/2006/main">
+            <ns1:off x="6553200" y="7372350"/>
+            <ns1:ext cx="5181600" cy="2190750"/>
+          </ns1:xfrm>
+          <ns2:prstGeom xmlns:ns2="http://schemas.openxmlformats.org/drawingml/2006/main" prst="rect">
+            <ns2:avLst/>
+          </ns2:prstGeom>
+          <ns3:solidFill xmlns:ns3="http://schemas.openxmlformats.org/drawingml/2006/main">
+            <ns3:srgbClr val="F3F4F6"/>
+          </ns3:solidFill>
+          <ns4:ln xmlns:ns4="http://schemas.openxmlformats.org/drawingml/2006/main">
+            <ns4:noFill/>
+          </ns4:ln>
+        </ns0:spPr>
+        <ns0:txBody>
+          <ns5:bodyPr xmlns:ns5="http://schemas.openxmlformats.org/drawingml/2006/main" rtlCol="0" anchor="ctr"/>
+          <ns6:lstStyle xmlns:ns6="http://schemas.openxmlformats.org/drawingml/2006/main"/>
+          <ns7:p xmlns:ns7="http://schemas.openxmlformats.org/drawingml/2006/main">
+            <ns7:endParaRPr lang="en-US"/>
+          </ns7:p>
+        </ns0:txBody>
+      </ns0:sp>
+      <ns0:sp xmlns:ns0="http://schemas.openxmlformats.org/presentationml/2006/main">
+        <ns0:nvSpPr>
+          <ns0:cNvPr id="29" name="Tile5 Rule"/>
+          <ns0:cNvSpPr/>
+          <ns0:nvPr/>
+        </ns0:nvSpPr>
+        <ns0:spPr>
+          <ns1:xfrm xmlns:ns1="http://schemas.openxmlformats.org/drawingml/2006/main">
+            <ns1:off x="6553200" y="7372350"/>
+            <ns1:ext cx="5181600" cy="28575"/>
+          </ns1:xfrm>
+          <ns2:prstGeom xmlns:ns2="http://schemas.openxmlformats.org/drawingml/2006/main" prst="rect">
+            <ns2:avLst/>
+          </ns2:prstGeom>
+          <ns3:solidFill xmlns:ns3="http://schemas.openxmlformats.org/drawingml/2006/main">
+            <ns3:srgbClr val="0F6BFF"/>
+          </ns3:solidFill>
+          <ns4:ln xmlns:ns4="http://schemas.openxmlformats.org/drawingml/2006/main">
+            <ns4:noFill/>
+          </ns4:ln>
+        </ns0:spPr>
+        <ns0:txBody>
+          <ns5:bodyPr xmlns:ns5="http://schemas.openxmlformats.org/drawingml/2006/main" rtlCol="0" anchor="ctr"/>
+          <ns6:lstStyle xmlns:ns6="http://schemas.openxmlformats.org/drawingml/2006/main"/>
+          <ns7:p xmlns:ns7="http://schemas.openxmlformats.org/drawingml/2006/main">
+            <ns7:endParaRPr lang="en-US"/>
+          </ns7:p>
+        </ns0:txBody>
+      </ns0:sp>
+      <ns0:sp xmlns:ns0="http://schemas.openxmlformats.org/presentationml/2006/main">
+        <ns0:nvSpPr>
+          <ns0:cNvPr id="30" name="Tile5 Label"/>
+          <ns0:cNvSpPr>
+            <ns1:spLocks xmlns:ns1="http://schemas.openxmlformats.org/drawingml/2006/main" noGrp="1"/>
+          </ns0:cNvSpPr>
+          <ns0:nvPr>
+            <ns0:ph type="body" idx="28"/>
+          </ns0:nvPr>
+        </ns0:nvSpPr>
+        <ns0:spPr>
+          <ns2:xfrm xmlns:ns2="http://schemas.openxmlformats.org/drawingml/2006/main">
+            <ns2:off x="6781800" y="8210550"/>
+            <ns2:ext cx="4724400" cy="304800"/>
+          </ns2:xfrm>
+          <ns3:prstGeom xmlns:ns3="http://schemas.openxmlformats.org/drawingml/2006/main" prst="rect">
+            <ns3:avLst/>
+          </ns3:prstGeom>
+        </ns0:spPr>
+        <ns0:txBody>
+          <ns4:bodyPr xmlns:ns4="http://schemas.openxmlformats.org/drawingml/2006/main" wrap="square" rtlCol="0" anchor="t" lIns="0" tIns="0" rIns="0" bIns="0"/>
+          <ns5:lstStyle xmlns:ns5="http://schemas.openxmlformats.org/drawingml/2006/main">
+            <ns5:lvl1pPr marL="0" indent="0" algn="l">
+              <ns5:buNone/>
+              <ns5:defRPr sz="1600" b="1">
+                <ns5:solidFill>
+                  <ns5:srgbClr val="0F6BFF"/>
+                </ns5:solidFill>
+                <ns5:latin typeface="Aptos"/>
+              </ns5:defRPr>
+            </ns5:lvl1pPr>
+          </ns5:lstStyle>
+          <ns6:p xmlns:ns6="http://schemas.openxmlformats.org/drawingml/2006/main">
+            <ns6:r>
+              <ns6:rPr lang="en-US"/>
+              <ns6:t>Tile 5 label</ns6:t>
+            </ns6:r>
+            <ns6:endParaRPr lang="en-US"/>
+          </ns6:p>
+        </ns0:txBody>
+      </ns0:sp>
+      <ns0:sp xmlns:ns0="http://schemas.openxmlformats.org/presentationml/2006/main">
+        <ns0:nvSpPr>
+          <ns0:cNvPr id="31" name="Tile5 Body"/>
+          <ns0:cNvSpPr>
+            <ns1:spLocks xmlns:ns1="http://schemas.openxmlformats.org/drawingml/2006/main" noGrp="1"/>
+          </ns0:cNvSpPr>
+          <ns0:nvPr>
+            <ns0:ph type="body" idx="29"/>
+          </ns0:nvPr>
+        </ns0:nvSpPr>
+        <ns0:spPr>
+          <ns2:xfrm xmlns:ns2="http://schemas.openxmlformats.org/drawingml/2006/main">
+            <ns2:off x="6781800" y="8553450"/>
+            <ns2:ext cx="4724400" cy="857250"/>
+          </ns2:xfrm>
+          <ns3:prstGeom xmlns:ns3="http://schemas.openxmlformats.org/drawingml/2006/main" prst="rect">
+            <ns3:avLst/>
+          </ns3:prstGeom>
+        </ns0:spPr>
+        <ns0:txBody>
+          <ns4:bodyPr xmlns:ns4="http://schemas.openxmlformats.org/drawingml/2006/main" wrap="square" rtlCol="0" anchor="t" lIns="0" tIns="0" rIns="0" bIns="0"/>
+          <ns5:lstStyle xmlns:ns5="http://schemas.openxmlformats.org/drawingml/2006/main">
+            <ns5:lvl1pPr marL="0" indent="0" algn="l">
+              <ns5:buNone/>
+              <ns5:defRPr sz="1800">
+                <ns5:solidFill>
+                  <ns5:srgbClr val="000000"/>
+                </ns5:solidFill>
+                <ns5:latin typeface="Aptos"/>
+              </ns5:defRPr>
+            </ns5:lvl1pPr>
+          </ns5:lstStyle>
+          <ns6:p xmlns:ns6="http://schemas.openxmlformats.org/drawingml/2006/main">
+            <ns6:r>
+              <ns6:rPr lang="en-US"/>
+              <ns6:t>One short sentence describing this tile.</ns6:t>
+            </ns6:r>
+            <ns6:endParaRPr lang="en-US"/>
+          </ns6:p>
+        </ns0:txBody>
+      </ns0:sp>
+      <ns0:sp xmlns:ns0="http://schemas.openxmlformats.org/presentationml/2006/main">
+        <ns0:nvSpPr>
+          <ns0:cNvPr id="32" name="Tile6 Bg"/>
+          <ns0:cNvSpPr/>
+          <ns0:nvPr/>
+        </ns0:nvSpPr>
+        <ns0:spPr>
+          <ns1:xfrm xmlns:ns1="http://schemas.openxmlformats.org/drawingml/2006/main">
+            <ns1:off x="11963400" y="7372350"/>
+            <ns1:ext cx="5181600" cy="2190750"/>
+          </ns1:xfrm>
+          <ns2:prstGeom xmlns:ns2="http://schemas.openxmlformats.org/drawingml/2006/main" prst="rect">
+            <ns2:avLst/>
+          </ns2:prstGeom>
+          <ns3:solidFill xmlns:ns3="http://schemas.openxmlformats.org/drawingml/2006/main">
+            <ns3:srgbClr val="F3F4F6"/>
+          </ns3:solidFill>
+          <ns4:ln xmlns:ns4="http://schemas.openxmlformats.org/drawingml/2006/main">
+            <ns4:noFill/>
+          </ns4:ln>
+        </ns0:spPr>
+        <ns0:txBody>
+          <ns5:bodyPr xmlns:ns5="http://schemas.openxmlformats.org/drawingml/2006/main" rtlCol="0" anchor="ctr"/>
+          <ns6:lstStyle xmlns:ns6="http://schemas.openxmlformats.org/drawingml/2006/main"/>
+          <ns7:p xmlns:ns7="http://schemas.openxmlformats.org/drawingml/2006/main">
+            <ns7:endParaRPr lang="en-US"/>
+          </ns7:p>
+        </ns0:txBody>
+      </ns0:sp>
+      <ns0:sp xmlns:ns0="http://schemas.openxmlformats.org/presentationml/2006/main">
+        <ns0:nvSpPr>
+          <ns0:cNvPr id="33" name="Tile6 Rule"/>
+          <ns0:cNvSpPr/>
+          <ns0:nvPr/>
+        </ns0:nvSpPr>
+        <ns0:spPr>
+          <ns1:xfrm xmlns:ns1="http://schemas.openxmlformats.org/drawingml/2006/main">
+            <ns1:off x="11963400" y="7372350"/>
+            <ns1:ext cx="5181600" cy="28575"/>
+          </ns1:xfrm>
+          <ns2:prstGeom xmlns:ns2="http://schemas.openxmlformats.org/drawingml/2006/main" prst="rect">
+            <ns2:avLst/>
+          </ns2:prstGeom>
+          <ns3:solidFill xmlns:ns3="http://schemas.openxmlformats.org/drawingml/2006/main">
+            <ns3:srgbClr val="0F6BFF"/>
+          </ns3:solidFill>
+          <ns4:ln xmlns:ns4="http://schemas.openxmlformats.org/drawingml/2006/main">
+            <ns4:noFill/>
+          </ns4:ln>
+        </ns0:spPr>
+        <ns0:txBody>
+          <ns5:bodyPr xmlns:ns5="http://schemas.openxmlformats.org/drawingml/2006/main" rtlCol="0" anchor="ctr"/>
+          <ns6:lstStyle xmlns:ns6="http://schemas.openxmlformats.org/drawingml/2006/main"/>
+          <ns7:p xmlns:ns7="http://schemas.openxmlformats.org/drawingml/2006/main">
+            <ns7:endParaRPr lang="en-US"/>
+          </ns7:p>
+        </ns0:txBody>
+      </ns0:sp>
+      <ns0:sp xmlns:ns0="http://schemas.openxmlformats.org/presentationml/2006/main">
+        <ns0:nvSpPr>
+          <ns0:cNvPr id="34" name="Tile6 Label"/>
+          <ns0:cNvSpPr>
+            <ns1:spLocks xmlns:ns1="http://schemas.openxmlformats.org/drawingml/2006/main" noGrp="1"/>
+          </ns0:cNvSpPr>
+          <ns0:nvPr>
+            <ns0:ph type="body" idx="30"/>
+          </ns0:nvPr>
+        </ns0:nvSpPr>
+        <ns0:spPr>
+          <ns2:xfrm xmlns:ns2="http://schemas.openxmlformats.org/drawingml/2006/main">
+            <ns2:off x="12192000" y="8210550"/>
+            <ns2:ext cx="4724400" cy="304800"/>
+          </ns2:xfrm>
+          <ns3:prstGeom xmlns:ns3="http://schemas.openxmlformats.org/drawingml/2006/main" prst="rect">
+            <ns3:avLst/>
+          </ns3:prstGeom>
+        </ns0:spPr>
+        <ns0:txBody>
+          <ns4:bodyPr xmlns:ns4="http://schemas.openxmlformats.org/drawingml/2006/main" wrap="square" rtlCol="0" anchor="t" lIns="0" tIns="0" rIns="0" bIns="0"/>
+          <ns5:lstStyle xmlns:ns5="http://schemas.openxmlformats.org/drawingml/2006/main">
+            <ns5:lvl1pPr marL="0" indent="0" algn="l">
+              <ns5:buNone/>
+              <ns5:defRPr sz="1600" b="1">
+                <ns5:solidFill>
+                  <ns5:srgbClr val="0F6BFF"/>
+                </ns5:solidFill>
+                <ns5:latin typeface="Aptos"/>
+              </ns5:defRPr>
+            </ns5:lvl1pPr>
+          </ns5:lstStyle>
+          <ns6:p xmlns:ns6="http://schemas.openxmlformats.org/drawingml/2006/main">
+            <ns6:r>
+              <ns6:rPr lang="en-US"/>
+              <ns6:t>Tile 6 label</ns6:t>
+            </ns6:r>
+            <ns6:endParaRPr lang="en-US"/>
+          </ns6:p>
+        </ns0:txBody>
+      </ns0:sp>
+      <ns0:sp xmlns:ns0="http://schemas.openxmlformats.org/presentationml/2006/main">
+        <ns0:nvSpPr>
+          <ns0:cNvPr id="35" name="Tile6 Body"/>
+          <ns0:cNvSpPr>
+            <ns1:spLocks xmlns:ns1="http://schemas.openxmlformats.org/drawingml/2006/main" noGrp="1"/>
+          </ns0:cNvSpPr>
+          <ns0:nvPr>
+            <ns0:ph type="body" idx="31"/>
+          </ns0:nvPr>
+        </ns0:nvSpPr>
+        <ns0:spPr>
+          <ns2:xfrm xmlns:ns2="http://schemas.openxmlformats.org/drawingml/2006/main">
+            <ns2:off x="12192000" y="8553450"/>
+            <ns2:ext cx="4724400" cy="857250"/>
+          </ns2:xfrm>
+          <ns3:prstGeom xmlns:ns3="http://schemas.openxmlformats.org/drawingml/2006/main" prst="rect">
+            <ns3:avLst/>
+          </ns3:prstGeom>
+        </ns0:spPr>
+        <ns0:txBody>
+          <ns4:bodyPr xmlns:ns4="http://schemas.openxmlformats.org/drawingml/2006/main" wrap="square" rtlCol="0" anchor="t" lIns="0" tIns="0" rIns="0" bIns="0"/>
+          <ns5:lstStyle xmlns:ns5="http://schemas.openxmlformats.org/drawingml/2006/main">
+            <ns5:lvl1pPr marL="0" indent="0" algn="l">
+              <ns5:buNone/>
+              <ns5:defRPr sz="1800">
+                <ns5:solidFill>
+                  <ns5:srgbClr val="000000"/>
+                </ns5:solidFill>
+                <ns5:latin typeface="Aptos"/>
+              </ns5:defRPr>
+            </ns5:lvl1pPr>
+          </ns5:lstStyle>
+          <ns6:p xmlns:ns6="http://schemas.openxmlformats.org/drawingml/2006/main">
+            <ns6:r>
+              <ns6:rPr lang="en-US"/>
+              <ns6:t>One short sentence describing this tile.</ns6:t>
+            </ns6:r>
+            <ns6:endParaRPr lang="en-US"/>
+          </ns6:p>
+        </ns0:txBody>
+      </ns0:sp>
+      <ns0:sp xmlns:ns0="http://schemas.openxmlformats.org/presentationml/2006/main">
+        <ns0:nvSpPr>
+          <ns0:cNvPr id="36" name="Footer"/>
+          <ns0:cNvSpPr>
+            <ns1:spLocks xmlns:ns1="http://schemas.openxmlformats.org/drawingml/2006/main" noGrp="1"/>
+          </ns0:cNvSpPr>
+          <ns0:nvPr/>
+        </ns0:nvSpPr>
+        <ns0:spPr>
+          <ns2:xfrm xmlns:ns2="http://schemas.openxmlformats.org/drawingml/2006/main">
+            <ns2:off x="1143000" y="9982200"/>
+            <ns2:ext cx="16002000" cy="228600"/>
+          </ns2:xfrm>
+          <ns3:prstGeom xmlns:ns3="http://schemas.openxmlformats.org/drawingml/2006/main" prst="rect">
+            <ns3:avLst/>
+          </ns3:prstGeom>
+        </ns0:spPr>
+        <ns0:txBody>
+          <ns4:bodyPr xmlns:ns4="http://schemas.openxmlformats.org/drawingml/2006/main" wrap="square" rtlCol="0" anchor="t" lIns="0" tIns="0" rIns="0" bIns="0"/>
+          <ns5:lstStyle xmlns:ns5="http://schemas.openxmlformats.org/drawingml/2006/main">
+            <ns5:lvl1pPr marL="0" indent="0" algn="l">
+              <ns5:buNone/>
+              <ns5:defRPr sz="900" cap="all" spc="50">
+                <ns5:solidFill>
+                  <ns5:srgbClr val="6B7280"/>
+                </ns5:solidFill>
+                <ns5:latin typeface="Aptos"/>
+              </ns5:defRPr>
+            </ns5:lvl1pPr>
+          </ns5:lstStyle>
+          <ns6:p xmlns:ns6="http://schemas.openxmlformats.org/drawingml/2006/main">
+            <ns6:r>
+              <ns6:rPr lang="en-US"/>
+              <ns6:t>OPEN COMPONENT MODEL · OCM.SOFTWARE</ns6:t>
+            </ns6:r>
+            <ns6:endParaRPr lang="en-US"/>
+          </ns6:p>
+        </ns0:txBody>
+      </ns0:sp>
+    </p:spTree>
+  </p:cSld>
+  <p:clrMapOvr>
+    <a:masterClrMapping/>
+  </p:clrMapOvr>
+</p:sldLayout>
+</file>
+
+<file path=ppt/slideLayouts/slideLayout6.xml><?xml version="1.0" encoding="utf-8"?>
+<p:sldLayout xmlns:a="http://schemas.openxmlformats.org/drawingml/2006/main" xmlns:r="http://schemas.openxmlformats.org/officeDocument/2006/relationships" xmlns:p="http://schemas.openxmlformats.org/presentationml/2006/main" type="twoObj" preserve="1" userDrawn="1">
+  <p:cSld name="Content / 2-Column">
+    <p:bg>
+      <p:bgPr>
+        <a:solidFill>
+          <a:srgbClr val="FFFFFF"/>
+        </a:solidFill>
+        <a:effectLst/>
+      </p:bgPr>
+    </p:bg>
+    <p:spTree>
+      <p:nvGrpSpPr>
+        <p:cNvPr id="1" name=""/>
+        <p:cNvGrpSpPr/>
+        <p:nvPr/>
+      </p:nvGrpSpPr>
+      <p:grpSpPr>
+        <a:xfrm>
+          <a:off x="0" y="0"/>
+          <a:ext cx="0" cy="0"/>
+          <a:chOff x="0" y="0"/>
+          <a:chExt cx="0" cy="0"/>
+        </a:xfrm>
+      </p:grpSpPr>
+      <ns0:sp xmlns:ns0="http://schemas.openxmlformats.org/presentationml/2006/main">
+        <ns0:nvSpPr>
+          <ns0:cNvPr id="10" name="Eyebrow"/>
+          <ns0:cNvSpPr>
+            <ns1:spLocks xmlns:ns1="http://schemas.openxmlformats.org/drawingml/2006/main" noGrp="1"/>
+          </ns0:cNvSpPr>
+          <ns0:nvPr>
+            <ns0:ph type="body" idx="1"/>
+          </ns0:nvPr>
+        </ns0:nvSpPr>
+        <ns0:spPr>
+          <ns2:xfrm xmlns:ns2="http://schemas.openxmlformats.org/drawingml/2006/main">
+            <ns2:off x="1143000" y="2428875"/>
+            <ns2:ext cx="16002000" cy="457200"/>
+          </ns2:xfrm>
+          <ns3:prstGeom xmlns:ns3="http://schemas.openxmlformats.org/drawingml/2006/main" prst="rect">
+            <ns3:avLst/>
+          </ns3:prstGeom>
+        </ns0:spPr>
+        <ns0:txBody>
+          <ns4:bodyPr xmlns:ns4="http://schemas.openxmlformats.org/drawingml/2006/main" wrap="square" rtlCol="0" anchor="t" lIns="0" tIns="0" rIns="0" bIns="0"/>
+          <ns5:lstStyle xmlns:ns5="http://schemas.openxmlformats.org/drawingml/2006/main">
+            <ns5:lvl1pPr marL="0" indent="0" algn="l">
+              <ns5:buNone/>
+              <ns5:defRPr sz="2800" b="1" cap="all" spc="140">
+                <ns5:solidFill>
+                  <ns5:srgbClr val="0F6BFF"/>
+                </ns5:solidFill>
+                <ns5:latin typeface="Aptos"/>
+              </ns5:defRPr>
+            </ns5:lvl1pPr>
+          </ns5:lstStyle>
+          <ns6:p xmlns:ns6="http://schemas.openxmlformats.org/drawingml/2006/main">
+            <ns6:r>
+              <ns6:rPr lang="en-US"/>
+              <ns6:t>EYEBROW</ns6:t>
+            </ns6:r>
+            <ns6:endParaRPr lang="en-US"/>
+          </ns6:p>
+        </ns0:txBody>
+      </ns0:sp>
+      <ns0:sp xmlns:ns0="http://schemas.openxmlformats.org/presentationml/2006/main">
+        <ns0:nvSpPr>
+          <ns0:cNvPr id="11" name="Title"/>
+          <ns0:cNvSpPr>
+            <ns1:spLocks xmlns:ns1="http://schemas.openxmlformats.org/drawingml/2006/main" noGrp="1"/>
+          </ns0:cNvSpPr>
+          <ns0:nvPr>
+            <ns0:ph type="title" idx="2"/>
+          </ns0:nvPr>
+        </ns0:nvSpPr>
+        <ns0:spPr>
+          <ns2:xfrm xmlns:ns2="http://schemas.openxmlformats.org/drawingml/2006/main">
+            <ns2:off x="1143000" y="2933700"/>
+            <ns2:ext cx="16002000" cy="1905000"/>
+          </ns2:xfrm>
+          <ns3:prstGeom xmlns:ns3="http://schemas.openxmlformats.org/drawingml/2006/main" prst="rect">
+            <ns3:avLst/>
+          </ns3:prstGeom>
+        </ns0:spPr>
+        <ns0:txBody>
+          <ns4:bodyPr xmlns:ns4="http://schemas.openxmlformats.org/drawingml/2006/main" wrap="square" rtlCol="0" anchor="t" lIns="0" tIns="0" rIns="0" bIns="0"/>
+          <ns5:lstStyle xmlns:ns5="http://schemas.openxmlformats.org/drawingml/2006/main">
+            <ns5:lvl1pPr marL="0" indent="0" algn="l">
+              <ns5:lnSpc>
+                <ns5:spcPct val="90000"/>
+              </ns5:lnSpc>
+              <ns5:buNone/>
+              <ns5:defRPr sz="6400" b="1">
+                <ns5:solidFill>
+                  <ns5:srgbClr val="000000"/>
+                </ns5:solidFill>
+                <ns5:latin typeface="Aptos Display"/>
+              </ns5:defRPr>
+            </ns5:lvl1pPr>
+          </ns5:lstStyle>
+          <ns6:p xmlns:ns6="http://schemas.openxmlformats.org/drawingml/2006/main">
+            <ns6:r>
+              <ns6:rPr lang="en-US"/>
+              <ns6:t>Section title goes here.</ns6:t>
+            </ns6:r>
+            <ns6:endParaRPr lang="en-US"/>
+          </ns6:p>
+        </ns0:txBody>
+      </ns0:sp>
+      <ns0:sp xmlns:ns0="http://schemas.openxmlformats.org/presentationml/2006/main">
+        <ns0:nvSpPr>
+          <ns0:cNvPr id="12" name="Left Body"/>
+          <ns0:cNvSpPr>
+            <ns1:spLocks xmlns:ns1="http://schemas.openxmlformats.org/drawingml/2006/main" noGrp="1"/>
+          </ns0:cNvSpPr>
+          <ns0:nvPr>
+            <ns0:ph type="body" idx="10"/>
+          </ns0:nvPr>
+        </ns0:nvSpPr>
+        <ns0:spPr>
+          <ns2:xfrm xmlns:ns2="http://schemas.openxmlformats.org/drawingml/2006/main">
+            <ns2:off x="1143000" y="4953000"/>
+            <ns2:ext cx="7810500" cy="4381500"/>
+          </ns2:xfrm>
+          <ns3:prstGeom xmlns:ns3="http://schemas.openxmlformats.org/drawingml/2006/main" prst="rect">
+            <ns3:avLst/>
+          </ns3:prstGeom>
+        </ns0:spPr>
+        <ns0:txBody>
+          <ns4:bodyPr xmlns:ns4="http://schemas.openxmlformats.org/drawingml/2006/main" wrap="square" rtlCol="0" anchor="t" lIns="0" tIns="0" rIns="0" bIns="0"/>
+          <ns5:lstStyle xmlns:ns5="http://schemas.openxmlformats.org/drawingml/2006/main">
+            <ns5:lvl1pPr marL="0" indent="0" algn="l">
+              <ns5:buNone/>
+              <ns5:defRPr sz="2200">
+                <ns5:solidFill>
+                  <ns5:srgbClr val="000000"/>
+                </ns5:solidFill>
+                <ns5:latin typeface="Aptos"/>
+              </ns5:defRPr>
+            </ns5:lvl1pPr>
+          </ns5:lstStyle>
+          <ns6:p xmlns:ns6="http://schemas.openxmlformats.org/drawingml/2006/main">
+            <ns6:r>
+              <ns6:rPr lang="en-US"/>
+              <ns6:t>Left column body.</ns6:t>
+            </ns6:r>
+            <ns6:endParaRPr lang="en-US"/>
+          </ns6:p>
+        </ns0:txBody>
+      </ns0:sp>
+      <ns0:sp xmlns:ns0="http://schemas.openxmlformats.org/presentationml/2006/main">
+        <ns0:nvSpPr>
+          <ns0:cNvPr id="13" name="Right Body"/>
+          <ns0:cNvSpPr>
+            <ns1:spLocks xmlns:ns1="http://schemas.openxmlformats.org/drawingml/2006/main" noGrp="1"/>
+          </ns0:cNvSpPr>
+          <ns0:nvPr>
+            <ns0:ph type="body" idx="11"/>
+          </ns0:nvPr>
+        </ns0:nvSpPr>
+        <ns0:spPr>
+          <ns2:xfrm xmlns:ns2="http://schemas.openxmlformats.org/drawingml/2006/main">
+            <ns2:off x="9334500" y="4953000"/>
+            <ns2:ext cx="7810500" cy="4381500"/>
+          </ns2:xfrm>
+          <ns3:prstGeom xmlns:ns3="http://schemas.openxmlformats.org/drawingml/2006/main" prst="rect">
+            <ns3:avLst/>
+          </ns3:prstGeom>
+        </ns0:spPr>
+        <ns0:txBody>
+          <ns4:bodyPr xmlns:ns4="http://schemas.openxmlformats.org/drawingml/2006/main" wrap="square" rtlCol="0" anchor="t" lIns="0" tIns="0" rIns="0" bIns="0"/>
+          <ns5:lstStyle xmlns:ns5="http://schemas.openxmlformats.org/drawingml/2006/main">
+            <ns5:lvl1pPr marL="0" indent="0" algn="l">
+              <ns5:buNone/>
+              <ns5:defRPr sz="2200">
+                <ns5:solidFill>
+                  <ns5:srgbClr val="000000"/>
+                </ns5:solidFill>
+                <ns5:latin typeface="Aptos"/>
+              </ns5:defRPr>
+            </ns5:lvl1pPr>
+          </ns5:lstStyle>
+          <ns6:p xmlns:ns6="http://schemas.openxmlformats.org/drawingml/2006/main">
+            <ns6:r>
+              <ns6:rPr lang="en-US"/>
+              <ns6:t>Right column body.</ns6:t>
+            </ns6:r>
+            <ns6:endParaRPr lang="en-US"/>
+          </ns6:p>
+        </ns0:txBody>
+      </ns0:sp>
+      <ns0:sp xmlns:ns0="http://schemas.openxmlformats.org/presentationml/2006/main">
+        <ns0:nvSpPr>
+          <ns0:cNvPr id="14" name="Footer"/>
+          <ns0:cNvSpPr>
+            <ns1:spLocks xmlns:ns1="http://schemas.openxmlformats.org/drawingml/2006/main" noGrp="1"/>
+          </ns0:cNvSpPr>
+          <ns0:nvPr/>
+        </ns0:nvSpPr>
+        <ns0:spPr>
+          <ns2:xfrm xmlns:ns2="http://schemas.openxmlformats.org/drawingml/2006/main">
+            <ns2:off x="1143000" y="9982200"/>
+            <ns2:ext cx="16002000" cy="228600"/>
+          </ns2:xfrm>
+          <ns3:prstGeom xmlns:ns3="http://schemas.openxmlformats.org/drawingml/2006/main" prst="rect">
+            <ns3:avLst/>
+          </ns3:prstGeom>
+        </ns0:spPr>
+        <ns0:txBody>
+          <ns4:bodyPr xmlns:ns4="http://schemas.openxmlformats.org/drawingml/2006/main" wrap="square" rtlCol="0" anchor="t" lIns="0" tIns="0" rIns="0" bIns="0"/>
+          <ns5:lstStyle xmlns:ns5="http://schemas.openxmlformats.org/drawingml/2006/main">
+            <ns5:lvl1pPr marL="0" indent="0" algn="l">
+              <ns5:buNone/>
+              <ns5:defRPr sz="900" cap="all" spc="50">
+                <ns5:solidFill>
+                  <ns5:srgbClr val="6B7280"/>
+                </ns5:solidFill>
+                <ns5:latin typeface="Aptos"/>
+              </ns5:defRPr>
+            </ns5:lvl1pPr>
+          </ns5:lstStyle>
+          <ns6:p xmlns:ns6="http://schemas.openxmlformats.org/drawingml/2006/main">
+            <ns6:r>
+              <ns6:rPr lang="en-US"/>
+              <ns6:t>OPEN COMPONENT MODEL · OCM.SOFTWARE</ns6:t>
+            </ns6:r>
+            <ns6:endParaRPr lang="en-US"/>
+          </ns6:p>
+        </ns0:txBody>
+      </ns0:sp>
+    </p:spTree>
+  </p:cSld>
+  <p:clrMapOvr>
+    <a:masterClrMapping/>
+  </p:clrMapOvr>
+</p:sldLayout>
+</file>
+
+<file path=ppt/slideLayouts/slideLayout7.xml><?xml version="1.0" encoding="utf-8"?>
+<p:sldLayout xmlns:a="http://schemas.openxmlformats.org/drawingml/2006/main" xmlns:r="http://schemas.openxmlformats.org/officeDocument/2006/relationships" xmlns:p="http://schemas.openxmlformats.org/presentationml/2006/main" type="secHead" preserve="1" userDrawn="1">
+  <p:cSld name="Section Divider">
+    <p:bg>
+      <p:bgPr>
+        <a:solidFill>
+          <a:srgbClr val="0F6BFF"/>
+        </a:solidFill>
+        <a:effectLst/>
+      </p:bgPr>
+    </p:bg>
+    <p:spTree>
+      <p:nvGrpSpPr>
+        <p:cNvPr id="1" name=""/>
+        <p:cNvGrpSpPr/>
+        <p:nvPr/>
+      </p:nvGrpSpPr>
+      <p:grpSpPr>
+        <a:xfrm>
+          <a:off x="0" y="0"/>
+          <a:ext cx="0" cy="0"/>
+          <a:chOff x="0" y="0"/>
+          <a:chExt cx="0" cy="0"/>
+        </a:xfrm>
+      </p:grpSpPr>
+      <ns0:sp xmlns:ns0="http://schemas.openxmlformats.org/presentationml/2006/main">
+        <ns0:nvSpPr>
+          <ns0:cNvPr id="10" name="Section Title"/>
+          <ns0:cNvSpPr>
+            <ns1:spLocks xmlns:ns1="http://schemas.openxmlformats.org/drawingml/2006/main" noGrp="1"/>
+          </ns0:cNvSpPr>
+          <ns0:nvPr>
+            <ns0:ph type="title" idx="1"/>
+          </ns0:nvPr>
+        </ns0:nvSpPr>
+        <ns0:spPr>
+          <ns2:xfrm xmlns:ns2="http://schemas.openxmlformats.org/drawingml/2006/main">
+            <ns2:off x="762000" y="4381500"/>
+            <ns2:ext cx="16764000" cy="1905000"/>
+          </ns2:xfrm>
+          <ns3:prstGeom xmlns:ns3="http://schemas.openxmlformats.org/drawingml/2006/main" prst="rect">
+            <ns3:avLst/>
+          </ns3:prstGeom>
+        </ns0:spPr>
+        <ns0:txBody>
+          <ns4:bodyPr xmlns:ns4="http://schemas.openxmlformats.org/drawingml/2006/main" wrap="square" rtlCol="0" anchor="ctr" lIns="0" tIns="0" rIns="0" bIns="0"/>
+          <ns5:lstStyle xmlns:ns5="http://schemas.openxmlformats.org/drawingml/2006/main">
+            <ns5:lvl1pPr marL="0" indent="0" algn="ctr">
+              <ns5:buNone/>
+              <ns5:defRPr sz="7200" b="1">
+                <ns5:solidFill>
+                  <ns5:srgbClr val="FFFFFF"/>
+                </ns5:solidFill>
+                <ns5:latin typeface="Aptos Display"/>
+              </ns5:defRPr>
+            </ns5:lvl1pPr>
+          </ns5:lstStyle>
+          <ns6:p xmlns:ns6="http://schemas.openxmlformats.org/drawingml/2006/main">
+            <ns6:r>
+              <ns6:rPr lang="en-US"/>
+              <ns6:t>Section</ns6:t>
+            </ns6:r>
+            <ns6:endParaRPr lang="en-US"/>
+          </ns6:p>
+        </ns0:txBody>
+      </ns0:sp>
+    </p:spTree>
+  </p:cSld>
+  <p:clrMapOvr>
+    <a:masterClrMapping/>
+  </p:clrMapOvr>
+</p:sldLayout>
+</file>
+
+<file path=ppt/slideLayouts/slideLayout8.xml><?xml version="1.0" encoding="utf-8"?>
+<p:sldLayout xmlns:a="http://schemas.openxmlformats.org/drawingml/2006/main" xmlns:r="http://schemas.openxmlformats.org/officeDocument/2006/relationships" xmlns:p="http://schemas.openxmlformats.org/presentationml/2006/main" type="obj" preserve="1" userDrawn="1">
+  <p:cSld name="Plain">
+    <p:bg>
+      <p:bgPr>
+        <a:solidFill>
+          <a:srgbClr val="FFFFFF"/>
+        </a:solidFill>
+        <a:effectLst/>
+      </p:bgPr>
+    </p:bg>
+    <p:spTree>
+      <p:nvGrpSpPr>
+        <p:cNvPr id="1" name=""/>
+        <p:cNvGrpSpPr/>
+        <p:nvPr/>
+      </p:nvGrpSpPr>
+      <p:grpSpPr>
+        <a:xfrm>
+          <a:off x="0" y="0"/>
+          <a:ext cx="0" cy="0"/>
+          <a:chOff x="0" y="0"/>
+          <a:chExt cx="0" cy="0"/>
+        </a:xfrm>
+      </p:grpSpPr>
+      <ns0:sp xmlns:ns0="http://schemas.openxmlformats.org/presentationml/2006/main">
+        <ns0:nvSpPr>
+          <ns0:cNvPr id="10" name="Eyebrow"/>
+          <ns0:cNvSpPr>
+            <ns1:spLocks xmlns:ns1="http://schemas.openxmlformats.org/drawingml/2006/main" noGrp="1"/>
+          </ns0:cNvSpPr>
+          <ns0:nvPr>
+            <ns0:ph type="body" idx="1"/>
+          </ns0:nvPr>
+        </ns0:nvSpPr>
+        <ns0:spPr>
+          <ns2:xfrm xmlns:ns2="http://schemas.openxmlformats.org/drawingml/2006/main">
+            <ns2:off x="1143000" y="2428875"/>
+            <ns2:ext cx="16002000" cy="457200"/>
+          </ns2:xfrm>
+          <ns3:prstGeom xmlns:ns3="http://schemas.openxmlformats.org/drawingml/2006/main" prst="rect">
+            <ns3:avLst/>
+          </ns3:prstGeom>
+        </ns0:spPr>
+        <ns0:txBody>
+          <ns4:bodyPr xmlns:ns4="http://schemas.openxmlformats.org/drawingml/2006/main" wrap="square" rtlCol="0" anchor="t" lIns="0" tIns="0" rIns="0" bIns="0"/>
+          <ns5:lstStyle xmlns:ns5="http://schemas.openxmlformats.org/drawingml/2006/main">
+            <ns5:lvl1pPr marL="0" indent="0" algn="l">
+              <ns5:buNone/>
+              <ns5:defRPr sz="2800" b="1" cap="all" spc="140">
+                <ns5:solidFill>
+                  <ns5:srgbClr val="0F6BFF"/>
+                </ns5:solidFill>
+                <ns5:latin typeface="Aptos"/>
+              </ns5:defRPr>
+            </ns5:lvl1pPr>
+          </ns5:lstStyle>
+          <ns6:p xmlns:ns6="http://schemas.openxmlformats.org/drawingml/2006/main">
+            <ns6:r>
+              <ns6:rPr lang="en-US"/>
+              <ns6:t>EYEBROW</ns6:t>
+            </ns6:r>
+            <ns6:endParaRPr lang="en-US"/>
+          </ns6:p>
+        </ns0:txBody>
+      </ns0:sp>
+      <ns0:sp xmlns:ns0="http://schemas.openxmlformats.org/presentationml/2006/main">
+        <ns0:nvSpPr>
+          <ns0:cNvPr id="11" name="Title"/>
+          <ns0:cNvSpPr>
+            <ns1:spLocks xmlns:ns1="http://schemas.openxmlformats.org/drawingml/2006/main" noGrp="1"/>
+          </ns0:cNvSpPr>
+          <ns0:nvPr>
+            <ns0:ph type="title" idx="2"/>
+          </ns0:nvPr>
+        </ns0:nvSpPr>
+        <ns0:spPr>
+          <ns2:xfrm xmlns:ns2="http://schemas.openxmlformats.org/drawingml/2006/main">
+            <ns2:off x="1143000" y="2933700"/>
+            <ns2:ext cx="16002000" cy="1905000"/>
+          </ns2:xfrm>
+          <ns3:prstGeom xmlns:ns3="http://schemas.openxmlformats.org/drawingml/2006/main" prst="rect">
+            <ns3:avLst/>
+          </ns3:prstGeom>
+        </ns0:spPr>
+        <ns0:txBody>
+          <ns4:bodyPr xmlns:ns4="http://schemas.openxmlformats.org/drawingml/2006/main" wrap="square" rtlCol="0" anchor="t" lIns="0" tIns="0" rIns="0" bIns="0"/>
+          <ns5:lstStyle xmlns:ns5="http://schemas.openxmlformats.org/drawingml/2006/main">
+            <ns5:lvl1pPr marL="0" indent="0" algn="l">
+              <ns5:lnSpc>
+                <ns5:spcPct val="90000"/>
+              </ns5:lnSpc>
+              <ns5:buNone/>
+              <ns5:defRPr sz="6400" b="1">
+                <ns5:solidFill>
+                  <ns5:srgbClr val="000000"/>
+                </ns5:solidFill>
+                <ns5:latin typeface="Aptos Display"/>
+              </ns5:defRPr>
+            </ns5:lvl1pPr>
+          </ns5:lstStyle>
+          <ns6:p xmlns:ns6="http://schemas.openxmlformats.org/drawingml/2006/main">
+            <ns6:r>
+              <ns6:rPr lang="en-US"/>
+              <ns6:t>Section title goes here.</ns6:t>
+            </ns6:r>
+            <ns6:endParaRPr lang="en-US"/>
+          </ns6:p>
+        </ns0:txBody>
+      </ns0:sp>
+      <ns0:sp xmlns:ns0="http://schemas.openxmlformats.org/presentationml/2006/main">
+        <ns0:nvSpPr>
+          <ns0:cNvPr id="12" name="Body"/>
+          <ns0:cNvSpPr>
+            <ns1:spLocks xmlns:ns1="http://schemas.openxmlformats.org/drawingml/2006/main" noGrp="1"/>
+          </ns0:cNvSpPr>
+          <ns0:nvPr>
+            <ns0:ph type="body" idx="10"/>
+          </ns0:nvPr>
+        </ns0:nvSpPr>
+        <ns0:spPr>
+          <ns2:xfrm xmlns:ns2="http://schemas.openxmlformats.org/drawingml/2006/main">
+            <ns2:off x="1143000" y="5524500"/>
+            <ns2:ext cx="16002000" cy="3810000"/>
+          </ns2:xfrm>
+          <ns3:prstGeom xmlns:ns3="http://schemas.openxmlformats.org/drawingml/2006/main" prst="rect">
+            <ns3:avLst/>
+          </ns3:prstGeom>
+        </ns0:spPr>
+        <ns0:txBody>
+          <ns4:bodyPr xmlns:ns4="http://schemas.openxmlformats.org/drawingml/2006/main" wrap="square" rtlCol="0" anchor="t" lIns="0" tIns="0" rIns="0" bIns="0"/>
+          <ns5:lstStyle xmlns:ns5="http://schemas.openxmlformats.org/drawingml/2006/main">
+            <ns5:lvl1pPr marL="0" indent="0" algn="l">
+              <ns5:buNone/>
+              <ns5:defRPr sz="2200">
+                <ns5:solidFill>
+                  <ns5:srgbClr val="000000"/>
+                </ns5:solidFill>
+                <ns5:latin typeface="Aptos"/>
+              </ns5:defRPr>
+            </ns5:lvl1pPr>
+          </ns5:lstStyle>
+          <ns6:p xmlns:ns6="http://schemas.openxmlformats.org/drawingml/2006/main">
+            <ns6:r>
+              <ns6:rPr lang="en-US"/>
+              <ns6:t>Body text.</ns6:t>
+            </ns6:r>
+            <ns6:endParaRPr lang="en-US"/>
+          </ns6:p>
+        </ns0:txBody>
+      </ns0:sp>
+      <ns0:sp xmlns:ns0="http://schemas.openxmlformats.org/presentationml/2006/main">
+        <ns0:nvSpPr>
+          <ns0:cNvPr id="13" name="Footer"/>
+          <ns0:cNvSpPr>
+            <ns1:spLocks xmlns:ns1="http://schemas.openxmlformats.org/drawingml/2006/main" noGrp="1"/>
+          </ns0:cNvSpPr>
+          <ns0:nvPr/>
+        </ns0:nvSpPr>
+        <ns0:spPr>
+          <ns2:xfrm xmlns:ns2="http://schemas.openxmlformats.org/drawingml/2006/main">
+            <ns2:off x="1143000" y="9982200"/>
+            <ns2:ext cx="16002000" cy="228600"/>
+          </ns2:xfrm>
+          <ns3:prstGeom xmlns:ns3="http://schemas.openxmlformats.org/drawingml/2006/main" prst="rect">
+            <ns3:avLst/>
+          </ns3:prstGeom>
+        </ns0:spPr>
+        <ns0:txBody>
+          <ns4:bodyPr xmlns:ns4="http://schemas.openxmlformats.org/drawingml/2006/main" wrap="square" rtlCol="0" anchor="t" lIns="0" tIns="0" rIns="0" bIns="0"/>
+          <ns5:lstStyle xmlns:ns5="http://schemas.openxmlformats.org/drawingml/2006/main">
+            <ns5:lvl1pPr marL="0" indent="0" algn="l">
+              <ns5:buNone/>
+              <ns5:defRPr sz="900" cap="all" spc="50">
+                <ns5:solidFill>
+                  <ns5:srgbClr val="6B7280"/>
+                </ns5:solidFill>
+                <ns5:latin typeface="Aptos"/>
+              </ns5:defRPr>
+            </ns5:lvl1pPr>
+          </ns5:lstStyle>
+          <ns6:p xmlns:ns6="http://schemas.openxmlformats.org/drawingml/2006/main">
+            <ns6:r>
+              <ns6:rPr lang="en-US"/>
+              <ns6:t>OPEN COMPONENT MODEL · OCM.SOFTWARE</ns6:t>
+            </ns6:r>
+            <ns6:endParaRPr lang="en-US"/>
+          </ns6:p>
+        </ns0:txBody>
+      </ns0:sp>
+    </p:spTree>
+  </p:cSld>
+  <p:clrMapOvr>
+    <a:masterClrMapping/>
+  </p:clrMapOvr>
+</p:sldLayout>
+</file>
+
+<file path=ppt/slideLayouts/slideLayout9.xml><?xml version="1.0" encoding="utf-8"?>
 <p:sldLayout xmlns:a="http://schemas.openxmlformats.org/drawingml/2006/main" xmlns:r="http://schemas.openxmlformats.org/officeDocument/2006/relationships" xmlns:p="http://schemas.openxmlformats.org/presentationml/2006/main" type="obj" preserve="1" userDrawn="1">
   <p:cSld name="Plain / Compact">
     <p:bg>
@@ -452,2560 +2755,6 @@
           <ns2:xfrm xmlns:ns2="http://schemas.openxmlformats.org/drawingml/2006/main">
             <ns2:off x="1143000" y="4953000"/>
             <ns2:ext cx="16002000" cy="4381500"/>
-          </ns2:xfrm>
-          <ns3:prstGeom xmlns:ns3="http://schemas.openxmlformats.org/drawingml/2006/main" prst="rect">
-            <ns3:avLst/>
-          </ns3:prstGeom>
-        </ns0:spPr>
-        <ns0:txBody>
-          <ns4:bodyPr xmlns:ns4="http://schemas.openxmlformats.org/drawingml/2006/main" wrap="square" rtlCol="0" anchor="t" lIns="0" tIns="0" rIns="0" bIns="0"/>
-          <ns5:lstStyle xmlns:ns5="http://schemas.openxmlformats.org/drawingml/2006/main">
-            <ns5:lvl1pPr marL="0" indent="0" algn="l">
-              <ns5:buNone/>
-              <ns5:defRPr sz="2200">
-                <ns5:solidFill>
-                  <ns5:srgbClr val="000000"/>
-                </ns5:solidFill>
-                <ns5:latin typeface="Aptos"/>
-              </ns5:defRPr>
-            </ns5:lvl1pPr>
-          </ns5:lstStyle>
-          <ns6:p xmlns:ns6="http://schemas.openxmlformats.org/drawingml/2006/main">
-            <ns6:r>
-              <ns6:rPr lang="en-US"/>
-              <ns6:t>Body text.</ns6:t>
-            </ns6:r>
-            <ns6:endParaRPr lang="en-US"/>
-          </ns6:p>
-        </ns0:txBody>
-      </ns0:sp>
-      <ns0:sp xmlns:ns0="http://schemas.openxmlformats.org/presentationml/2006/main">
-        <ns0:nvSpPr>
-          <ns0:cNvPr id="13" name="Footer"/>
-          <ns0:cNvSpPr>
-            <ns1:spLocks xmlns:ns1="http://schemas.openxmlformats.org/drawingml/2006/main" noGrp="1"/>
-          </ns0:cNvSpPr>
-          <ns0:nvPr/>
-        </ns0:nvSpPr>
-        <ns0:spPr>
-          <ns2:xfrm xmlns:ns2="http://schemas.openxmlformats.org/drawingml/2006/main">
-            <ns2:off x="1143000" y="9982200"/>
-            <ns2:ext cx="16002000" cy="228600"/>
-          </ns2:xfrm>
-          <ns3:prstGeom xmlns:ns3="http://schemas.openxmlformats.org/drawingml/2006/main" prst="rect">
-            <ns3:avLst/>
-          </ns3:prstGeom>
-        </ns0:spPr>
-        <ns0:txBody>
-          <ns4:bodyPr xmlns:ns4="http://schemas.openxmlformats.org/drawingml/2006/main" wrap="square" rtlCol="0" anchor="t" lIns="0" tIns="0" rIns="0" bIns="0"/>
-          <ns5:lstStyle xmlns:ns5="http://schemas.openxmlformats.org/drawingml/2006/main">
-            <ns5:lvl1pPr marL="0" indent="0" algn="l">
-              <ns5:buNone/>
-              <ns5:defRPr sz="900" cap="all" spc="50">
-                <ns5:solidFill>
-                  <ns5:srgbClr val="6B7280"/>
-                </ns5:solidFill>
-                <ns5:latin typeface="Aptos"/>
-              </ns5:defRPr>
-            </ns5:lvl1pPr>
-          </ns5:lstStyle>
-          <ns6:p xmlns:ns6="http://schemas.openxmlformats.org/drawingml/2006/main">
-            <ns6:r>
-              <ns6:rPr lang="en-US"/>
-              <ns6:t>OPEN COMPONENT MODEL · OCM.SOFTWARE</ns6:t>
-            </ns6:r>
-            <ns6:endParaRPr lang="en-US"/>
-          </ns6:p>
-        </ns0:txBody>
-      </ns0:sp>
-    </p:spTree>
-  </p:cSld>
-  <p:clrMapOvr>
-    <a:masterClrMapping/>
-  </p:clrMapOvr>
-</p:sldLayout>
-</file>
-
-<file path=ppt/slideLayouts/slideLayout2.xml><?xml version="1.0" encoding="utf-8"?>
-<p:sldLayout xmlns:a="http://schemas.openxmlformats.org/drawingml/2006/main" xmlns:r="http://schemas.openxmlformats.org/officeDocument/2006/relationships" xmlns:p="http://schemas.openxmlformats.org/presentationml/2006/main" type="title" preserve="1" userDrawn="1">
-  <p:cSld name="Hero / 3-Line">
-    <p:bg>
-      <p:bgPr>
-        <a:solidFill>
-          <a:srgbClr val="0A1530"/>
-        </a:solidFill>
-        <a:effectLst/>
-      </p:bgPr>
-    </p:bg>
-    <p:spTree>
-      <p:nvGrpSpPr>
-        <p:cNvPr id="1" name=""/>
-        <p:cNvGrpSpPr/>
-        <p:nvPr/>
-      </p:nvGrpSpPr>
-      <p:grpSpPr>
-        <a:xfrm>
-          <a:off x="0" y="0"/>
-          <a:ext cx="0" cy="0"/>
-          <a:chOff x="0" y="0"/>
-          <a:chExt cx="0" cy="0"/>
-        </a:xfrm>
-      </p:grpSpPr>
-      <ns0:sp xmlns:ns0="http://schemas.openxmlformats.org/presentationml/2006/main">
-        <ns0:nvSpPr>
-          <ns0:cNvPr id="10" name="Hero Title Line 1"/>
-          <ns0:cNvSpPr>
-            <ns1:spLocks xmlns:ns1="http://schemas.openxmlformats.org/drawingml/2006/main" noGrp="1"/>
-          </ns0:cNvSpPr>
-          <ns0:nvPr>
-            <ns0:ph type="title" idx="1"/>
-          </ns0:nvPr>
-        </ns0:nvSpPr>
-        <ns0:spPr>
-          <ns2:xfrm xmlns:ns2="http://schemas.openxmlformats.org/drawingml/2006/main">
-            <ns2:off x="914400" y="1143000"/>
-            <ns2:ext cx="16192500" cy="1333500"/>
-          </ns2:xfrm>
-          <ns3:prstGeom xmlns:ns3="http://schemas.openxmlformats.org/drawingml/2006/main" prst="rect">
-            <ns3:avLst/>
-          </ns3:prstGeom>
-        </ns0:spPr>
-        <ns0:txBody>
-          <ns4:bodyPr xmlns:ns4="http://schemas.openxmlformats.org/drawingml/2006/main" wrap="square" rtlCol="0" anchor="t" lIns="0" tIns="0" rIns="0" bIns="0">
-            <ns4:noAutofit/>
-          </ns4:bodyPr>
-          <ns5:lstStyle xmlns:ns5="http://schemas.openxmlformats.org/drawingml/2006/main">
-            <ns5:lvl1pPr marL="0" indent="0" algn="l">
-              <ns5:buNone/>
-              <ns5:defRPr sz="11500" b="1">
-                <ns5:solidFill>
-                  <ns5:srgbClr val="FFFFFF"/>
-                </ns5:solidFill>
-                <ns5:latin typeface="Aptos Display"/>
-              </ns5:defRPr>
-            </ns5:lvl1pPr>
-          </ns5:lstStyle>
-          <ns6:p xmlns:ns6="http://schemas.openxmlformats.org/drawingml/2006/main">
-            <ns6:r>
-              <ns6:rPr lang="en-US"/>
-              <ns6:t>Three minutes from now,</ns6:t>
-            </ns6:r>
-            <ns6:endParaRPr lang="en-US"/>
-          </ns6:p>
-        </ns0:txBody>
-      </ns0:sp>
-      <ns0:sp xmlns:ns0="http://schemas.openxmlformats.org/presentationml/2006/main">
-        <ns0:nvSpPr>
-          <ns0:cNvPr id="11" name="Hero Title Line 2"/>
-          <ns0:cNvSpPr>
-            <ns1:spLocks xmlns:ns1="http://schemas.openxmlformats.org/drawingml/2006/main" noGrp="1"/>
-          </ns0:cNvSpPr>
-          <ns0:nvPr>
-            <ns0:ph type="body" idx="2"/>
-          </ns0:nvPr>
-        </ns0:nvSpPr>
-        <ns0:spPr>
-          <ns2:xfrm xmlns:ns2="http://schemas.openxmlformats.org/drawingml/2006/main">
-            <ns2:off x="914400" y="2571750"/>
-            <ns2:ext cx="16192500" cy="1333500"/>
-          </ns2:xfrm>
-          <ns3:prstGeom xmlns:ns3="http://schemas.openxmlformats.org/drawingml/2006/main" prst="rect">
-            <ns3:avLst/>
-          </ns3:prstGeom>
-        </ns0:spPr>
-        <ns0:txBody>
-          <ns4:bodyPr xmlns:ns4="http://schemas.openxmlformats.org/drawingml/2006/main" wrap="square" rtlCol="0" anchor="t" lIns="0" tIns="0" rIns="0" bIns="0">
-            <ns4:noAutofit/>
-          </ns4:bodyPr>
-          <ns5:lstStyle xmlns:ns5="http://schemas.openxmlformats.org/drawingml/2006/main">
-            <ns5:lvl1pPr marL="0" indent="0" algn="l">
-              <ns5:buNone/>
-              <ns5:defRPr sz="11500" b="1">
-                <ns5:solidFill>
-                  <ns5:srgbClr val="FFFFFF"/>
-                </ns5:solidFill>
-                <ns5:latin typeface="Aptos Display"/>
-              </ns5:defRPr>
-            </ns5:lvl1pPr>
-          </ns5:lstStyle>
-          <ns6:p xmlns:ns6="http://schemas.openxmlformats.org/drawingml/2006/main">
-            <ns6:r>
-              <ns6:rPr lang="en-US"/>
-              <ns6:t>you'll know what your</ns6:t>
-            </ns6:r>
-            <ns6:endParaRPr lang="en-US"/>
-          </ns6:p>
-        </ns0:txBody>
-      </ns0:sp>
-      <ns0:sp xmlns:ns0="http://schemas.openxmlformats.org/presentationml/2006/main">
-        <ns0:nvSpPr>
-          <ns0:cNvPr id="12" name="Hero Title Line 3 (Gradient)"/>
-          <ns0:cNvSpPr>
-            <ns1:spLocks xmlns:ns1="http://schemas.openxmlformats.org/drawingml/2006/main" noGrp="1"/>
-          </ns0:cNvSpPr>
-          <ns0:nvPr>
-            <ns0:ph type="body" idx="3"/>
-          </ns0:nvPr>
-        </ns0:nvSpPr>
-        <ns0:spPr>
-          <ns2:xfrm xmlns:ns2="http://schemas.openxmlformats.org/drawingml/2006/main">
-            <ns2:off x="914400" y="4000500"/>
-            <ns2:ext cx="16192500" cy="1333500"/>
-          </ns2:xfrm>
-          <ns3:prstGeom xmlns:ns3="http://schemas.openxmlformats.org/drawingml/2006/main" prst="rect">
-            <ns3:avLst/>
-          </ns3:prstGeom>
-        </ns0:spPr>
-        <ns0:txBody>
-          <ns4:bodyPr xmlns:ns4="http://schemas.openxmlformats.org/drawingml/2006/main" wrap="square" rtlCol="0" anchor="t" lIns="0" tIns="0" rIns="0" bIns="0">
-            <ns4:noAutofit/>
-          </ns4:bodyPr>
-          <ns5:lstStyle xmlns:ns5="http://schemas.openxmlformats.org/drawingml/2006/main">
-            <ns5:lvl1pPr marL="0" indent="0" algn="l">
-              <ns5:buNone/>
-              <ns5:defRPr sz="11500" b="1">
-                <ns5:solidFill>
-                  <ns5:srgbClr val="5CD6FF"/>
-                </ns5:solidFill>
-                <ns5:latin typeface="Aptos Display"/>
-              </ns5:defRPr>
-            </ns5:lvl1pPr>
-          </ns5:lstStyle>
-          <ns6:p xmlns:ns6="http://schemas.openxmlformats.org/drawingml/2006/main">
-            <ns6:r>
-              <ns6:rPr lang="en-US"/>
-              <ns6:t>supply chain doesn't</ns6:t>
-            </ns6:r>
-            <ns6:endParaRPr lang="en-US"/>
-          </ns6:p>
-        </ns0:txBody>
-      </ns0:sp>
-      <ns0:sp xmlns:ns0="http://schemas.openxmlformats.org/presentationml/2006/main">
-        <ns0:nvSpPr>
-          <ns0:cNvPr id="13" name="Hero Subtitle"/>
-          <ns0:cNvSpPr>
-            <ns1:spLocks xmlns:ns1="http://schemas.openxmlformats.org/drawingml/2006/main" noGrp="1"/>
-          </ns0:cNvSpPr>
-          <ns0:nvPr>
-            <ns0:ph type="body" idx="4"/>
-          </ns0:nvPr>
-        </ns0:nvSpPr>
-        <ns0:spPr>
-          <ns2:xfrm xmlns:ns2="http://schemas.openxmlformats.org/drawingml/2006/main">
-            <ns2:off x="914400" y="5905500"/>
-            <ns2:ext cx="16192500" cy="1143000"/>
-          </ns2:xfrm>
-          <ns3:prstGeom xmlns:ns3="http://schemas.openxmlformats.org/drawingml/2006/main" prst="rect">
-            <ns3:avLst/>
-          </ns3:prstGeom>
-        </ns0:spPr>
-        <ns0:txBody>
-          <ns4:bodyPr xmlns:ns4="http://schemas.openxmlformats.org/drawingml/2006/main" wrap="square" rtlCol="0" anchor="t" lIns="0" tIns="0" rIns="0" bIns="0">
-            <ns4:noAutofit/>
-          </ns4:bodyPr>
-          <ns5:lstStyle xmlns:ns5="http://schemas.openxmlformats.org/drawingml/2006/main">
-            <ns5:lvl1pPr marL="0" indent="0" algn="l">
-              <ns5:lnSpc>
-                <ns5:spcPct val="114999"/>
-              </ns5:lnSpc>
-              <ns5:buNone/>
-              <ns5:defRPr sz="3000">
-                <ns5:solidFill>
-                  <ns5:srgbClr val="5CD6FF"/>
-                </ns5:solidFill>
-                <ns5:latin typeface="Aptos"/>
-              </ns5:defRPr>
-            </ns5:lvl1pPr>
-          </ns5:lstStyle>
-          <ns6:p xmlns:ns6="http://schemas.openxmlformats.org/drawingml/2006/main">
-            <ns6:r>
-              <ns6:rPr lang="en-US"/>
-              <ns6:t>Subtitle — one sentence describing the deck.</ns6:t>
-            </ns6:r>
-            <ns6:endParaRPr lang="en-US"/>
-          </ns6:p>
-        </ns0:txBody>
-      </ns0:sp>
-      <ns0:sp xmlns:ns0="http://schemas.openxmlformats.org/presentationml/2006/main">
-        <ns0:nvSpPr>
-          <ns0:cNvPr id="14" name="Hero Org Line"/>
-          <ns0:cNvSpPr>
-            <ns1:spLocks xmlns:ns1="http://schemas.openxmlformats.org/drawingml/2006/main" noGrp="1"/>
-          </ns0:cNvSpPr>
-          <ns0:nvPr>
-            <ns0:ph type="body" idx="5"/>
-          </ns0:nvPr>
-        </ns0:nvSpPr>
-        <ns0:spPr>
-          <ns2:xfrm xmlns:ns2="http://schemas.openxmlformats.org/drawingml/2006/main">
-            <ns2:off x="914400" y="8191500"/>
-            <ns2:ext cx="16192500" cy="571500"/>
-          </ns2:xfrm>
-          <ns3:prstGeom xmlns:ns3="http://schemas.openxmlformats.org/drawingml/2006/main" prst="rect">
-            <ns3:avLst/>
-          </ns3:prstGeom>
-        </ns0:spPr>
-        <ns0:txBody>
-          <ns4:bodyPr xmlns:ns4="http://schemas.openxmlformats.org/drawingml/2006/main" wrap="square" rtlCol="0" anchor="t" lIns="0" tIns="0" rIns="0" bIns="0">
-            <ns4:noAutofit/>
-          </ns4:bodyPr>
-          <ns5:lstStyle xmlns:ns5="http://schemas.openxmlformats.org/drawingml/2006/main">
-            <ns5:lvl1pPr marL="0" indent="0" algn="l">
-              <ns5:buNone/>
-              <ns5:defRPr sz="2400">
-                <ns5:solidFill>
-                  <ns5:srgbClr val="FFFFFF"/>
-                </ns5:solidFill>
-                <ns5:latin typeface="Aptos"/>
-              </ns5:defRPr>
-            </ns5:lvl1pPr>
-          </ns5:lstStyle>
-          <ns6:p xmlns:ns6="http://schemas.openxmlformats.org/drawingml/2006/main">
-            <ns6:r>
-              <ns6:rPr lang="en-US"/>
-              <ns6:t>Open Component Model — open source, NeoNephos Foundation.</ns6:t>
-            </ns6:r>
-            <ns6:endParaRPr lang="en-US"/>
-          </ns6:p>
-        </ns0:txBody>
-      </ns0:sp>
-    </p:spTree>
-  </p:cSld>
-  <p:clrMapOvr>
-    <a:masterClrMapping/>
-  </p:clrMapOvr>
-</p:sldLayout>
-</file>
-
-<file path=ppt/slideLayouts/slideLayout3.xml><?xml version="1.0" encoding="utf-8"?>
-<p:sldLayout xmlns:a="http://schemas.openxmlformats.org/drawingml/2006/main" xmlns:r="http://schemas.openxmlformats.org/officeDocument/2006/relationships" xmlns:p="http://schemas.openxmlformats.org/presentationml/2006/main" type="obj" preserve="1" userDrawn="1">
-  <p:cSld name="CTA">
-    <p:bg>
-      <p:bgPr>
-        <a:solidFill>
-          <a:srgbClr val="0A1530"/>
-        </a:solidFill>
-        <a:effectLst/>
-      </p:bgPr>
-    </p:bg>
-    <p:spTree>
-      <p:nvGrpSpPr>
-        <p:cNvPr id="1" name=""/>
-        <p:cNvGrpSpPr/>
-        <p:nvPr/>
-      </p:nvGrpSpPr>
-      <p:grpSpPr>
-        <a:xfrm>
-          <a:off x="0" y="0"/>
-          <a:ext cx="0" cy="0"/>
-          <a:chOff x="0" y="0"/>
-          <a:chExt cx="0" cy="0"/>
-        </a:xfrm>
-      </p:grpSpPr>
-      <ns0:sp xmlns:ns0="http://schemas.openxmlformats.org/presentationml/2006/main">
-        <ns0:nvSpPr>
-          <ns0:cNvPr id="10" name="CTA Title"/>
-          <ns0:cNvSpPr>
-            <ns1:spLocks xmlns:ns1="http://schemas.openxmlformats.org/drawingml/2006/main" noGrp="1"/>
-          </ns0:cNvSpPr>
-          <ns0:nvPr>
-            <ns0:ph type="title" idx="1"/>
-          </ns0:nvPr>
-        </ns0:nvSpPr>
-        <ns0:spPr>
-          <ns2:xfrm xmlns:ns2="http://schemas.openxmlformats.org/drawingml/2006/main">
-            <ns2:off x="914400" y="3048000"/>
-            <ns2:ext cx="16192500" cy="952500"/>
-          </ns2:xfrm>
-          <ns3:prstGeom xmlns:ns3="http://schemas.openxmlformats.org/drawingml/2006/main" prst="rect">
-            <ns3:avLst/>
-          </ns3:prstGeom>
-        </ns0:spPr>
-        <ns0:txBody>
-          <ns4:bodyPr xmlns:ns4="http://schemas.openxmlformats.org/drawingml/2006/main" wrap="square" rtlCol="0" anchor="t" lIns="0" tIns="0" rIns="0" bIns="0"/>
-          <ns5:lstStyle xmlns:ns5="http://schemas.openxmlformats.org/drawingml/2006/main">
-            <ns5:lvl1pPr marL="0" indent="0" algn="l">
-              <ns5:buNone/>
-              <ns5:defRPr sz="5600" b="1">
-                <ns5:solidFill>
-                  <ns5:srgbClr val="FFFFFF"/>
-                </ns5:solidFill>
-                <ns5:latin typeface="Aptos Display"/>
-              </ns5:defRPr>
-            </ns5:lvl1pPr>
-          </ns5:lstStyle>
-          <ns6:p xmlns:ns6="http://schemas.openxmlformats.org/drawingml/2006/main">
-            <ns6:r>
-              <ns6:rPr lang="en-US"/>
-              <ns6:t>Call to action</ns6:t>
-            </ns6:r>
-            <ns6:endParaRPr lang="en-US"/>
-          </ns6:p>
-        </ns0:txBody>
-      </ns0:sp>
-      <ns0:sp xmlns:ns0="http://schemas.openxmlformats.org/presentationml/2006/main">
-        <ns0:nvSpPr>
-          <ns0:cNvPr id="11" name="CTA Body"/>
-          <ns0:cNvSpPr>
-            <ns1:spLocks xmlns:ns1="http://schemas.openxmlformats.org/drawingml/2006/main" noGrp="1"/>
-          </ns0:cNvSpPr>
-          <ns0:nvPr>
-            <ns0:ph type="body" idx="2"/>
-          </ns0:nvPr>
-        </ns0:nvSpPr>
-        <ns0:spPr>
-          <ns2:xfrm xmlns:ns2="http://schemas.openxmlformats.org/drawingml/2006/main">
-            <ns2:off x="914400" y="4381500"/>
-            <ns2:ext cx="16192500" cy="3810000"/>
-          </ns2:xfrm>
-          <ns3:prstGeom xmlns:ns3="http://schemas.openxmlformats.org/drawingml/2006/main" prst="rect">
-            <ns3:avLst/>
-          </ns3:prstGeom>
-        </ns0:spPr>
-        <ns0:txBody>
-          <ns4:bodyPr xmlns:ns4="http://schemas.openxmlformats.org/drawingml/2006/main" wrap="square" rtlCol="0" anchor="t" lIns="0" tIns="0" rIns="0" bIns="0"/>
-          <ns5:lstStyle xmlns:ns5="http://schemas.openxmlformats.org/drawingml/2006/main">
-            <ns5:lvl1pPr marL="0" indent="0" algn="l">
-              <ns5:buNone/>
-              <ns5:defRPr sz="2200">
-                <ns5:solidFill>
-                  <ns5:srgbClr val="FFFFFF"/>
-                </ns5:solidFill>
-                <ns5:latin typeface="Aptos"/>
-              </ns5:defRPr>
-            </ns5:lvl1pPr>
-          </ns5:lstStyle>
-          <ns6:p xmlns:ns6="http://schemas.openxmlformats.org/drawingml/2006/main">
-            <ns6:r>
-              <ns6:rPr lang="en-US"/>
-              <ns6:t>Three-line CTA bullets go here.</ns6:t>
-            </ns6:r>
-            <ns6:endParaRPr lang="en-US"/>
-          </ns6:p>
-        </ns0:txBody>
-      </ns0:sp>
-    </p:spTree>
-  </p:cSld>
-  <p:clrMapOvr>
-    <a:masterClrMapping/>
-  </p:clrMapOvr>
-</p:sldLayout>
-</file>
-
-<file path=ppt/slideLayouts/slideLayout4.xml><?xml version="1.0" encoding="utf-8"?>
-<p:sldLayout xmlns:a="http://schemas.openxmlformats.org/drawingml/2006/main" xmlns:r="http://schemas.openxmlformats.org/officeDocument/2006/relationships" xmlns:p="http://schemas.openxmlformats.org/presentationml/2006/main" type="obj" preserve="1" userDrawn="1">
-  <p:cSld name="Content / 3-Column">
-    <p:bg>
-      <p:bgPr>
-        <a:solidFill>
-          <a:srgbClr val="FFFFFF"/>
-        </a:solidFill>
-        <a:effectLst/>
-      </p:bgPr>
-    </p:bg>
-    <p:spTree>
-      <p:nvGrpSpPr>
-        <p:cNvPr id="1" name=""/>
-        <p:cNvGrpSpPr/>
-        <p:nvPr/>
-      </p:nvGrpSpPr>
-      <p:grpSpPr>
-        <a:xfrm>
-          <a:off x="0" y="0"/>
-          <a:ext cx="0" cy="0"/>
-          <a:chOff x="0" y="0"/>
-          <a:chExt cx="0" cy="0"/>
-        </a:xfrm>
-      </p:grpSpPr>
-      <ns0:sp xmlns:ns0="http://schemas.openxmlformats.org/presentationml/2006/main">
-        <ns0:nvSpPr>
-          <ns0:cNvPr id="10" name="Eyebrow"/>
-          <ns0:cNvSpPr>
-            <ns1:spLocks xmlns:ns1="http://schemas.openxmlformats.org/drawingml/2006/main" noGrp="1"/>
-          </ns0:cNvSpPr>
-          <ns0:nvPr>
-            <ns0:ph type="body" idx="1"/>
-          </ns0:nvPr>
-        </ns0:nvSpPr>
-        <ns0:spPr>
-          <ns2:xfrm xmlns:ns2="http://schemas.openxmlformats.org/drawingml/2006/main">
-            <ns2:off x="1143000" y="2428875"/>
-            <ns2:ext cx="16002000" cy="457200"/>
-          </ns2:xfrm>
-          <ns3:prstGeom xmlns:ns3="http://schemas.openxmlformats.org/drawingml/2006/main" prst="rect">
-            <ns3:avLst/>
-          </ns3:prstGeom>
-        </ns0:spPr>
-        <ns0:txBody>
-          <ns4:bodyPr xmlns:ns4="http://schemas.openxmlformats.org/drawingml/2006/main" wrap="square" rtlCol="0" anchor="t" lIns="0" tIns="0" rIns="0" bIns="0"/>
-          <ns5:lstStyle xmlns:ns5="http://schemas.openxmlformats.org/drawingml/2006/main">
-            <ns5:lvl1pPr marL="0" indent="0" algn="l">
-              <ns5:buNone/>
-              <ns5:defRPr sz="2800" b="1" cap="all" spc="140">
-                <ns5:solidFill>
-                  <ns5:srgbClr val="0F6BFF"/>
-                </ns5:solidFill>
-                <ns5:latin typeface="Aptos"/>
-              </ns5:defRPr>
-            </ns5:lvl1pPr>
-          </ns5:lstStyle>
-          <ns6:p xmlns:ns6="http://schemas.openxmlformats.org/drawingml/2006/main">
-            <ns6:r>
-              <ns6:rPr lang="en-US"/>
-              <ns6:t>EYEBROW</ns6:t>
-            </ns6:r>
-            <ns6:endParaRPr lang="en-US"/>
-          </ns6:p>
-        </ns0:txBody>
-      </ns0:sp>
-      <ns0:sp xmlns:ns0="http://schemas.openxmlformats.org/presentationml/2006/main">
-        <ns0:nvSpPr>
-          <ns0:cNvPr id="11" name="Title"/>
-          <ns0:cNvSpPr>
-            <ns1:spLocks xmlns:ns1="http://schemas.openxmlformats.org/drawingml/2006/main" noGrp="1"/>
-          </ns0:cNvSpPr>
-          <ns0:nvPr>
-            <ns0:ph type="title" idx="2"/>
-          </ns0:nvPr>
-        </ns0:nvSpPr>
-        <ns0:spPr>
-          <ns2:xfrm xmlns:ns2="http://schemas.openxmlformats.org/drawingml/2006/main">
-            <ns2:off x="1143000" y="2933700"/>
-            <ns2:ext cx="16002000" cy="1905000"/>
-          </ns2:xfrm>
-          <ns3:prstGeom xmlns:ns3="http://schemas.openxmlformats.org/drawingml/2006/main" prst="rect">
-            <ns3:avLst/>
-          </ns3:prstGeom>
-        </ns0:spPr>
-        <ns0:txBody>
-          <ns4:bodyPr xmlns:ns4="http://schemas.openxmlformats.org/drawingml/2006/main" wrap="square" rtlCol="0" anchor="t" lIns="0" tIns="0" rIns="0" bIns="0"/>
-          <ns5:lstStyle xmlns:ns5="http://schemas.openxmlformats.org/drawingml/2006/main">
-            <ns5:lvl1pPr marL="0" indent="0" algn="l">
-              <ns5:lnSpc>
-                <ns5:spcPct val="90000"/>
-              </ns5:lnSpc>
-              <ns5:buNone/>
-              <ns5:defRPr sz="6400" b="1">
-                <ns5:solidFill>
-                  <ns5:srgbClr val="000000"/>
-                </ns5:solidFill>
-                <ns5:latin typeface="Aptos Display"/>
-              </ns5:defRPr>
-            </ns5:lvl1pPr>
-          </ns5:lstStyle>
-          <ns6:p xmlns:ns6="http://schemas.openxmlformats.org/drawingml/2006/main">
-            <ns6:r>
-              <ns6:rPr lang="en-US"/>
-              <ns6:t>Section title goes here.</ns6:t>
-            </ns6:r>
-            <ns6:endParaRPr lang="en-US"/>
-          </ns6:p>
-        </ns0:txBody>
-      </ns0:sp>
-      <ns0:sp xmlns:ns0="http://schemas.openxmlformats.org/presentationml/2006/main">
-        <ns0:nvSpPr>
-          <ns0:cNvPr id="12" name="Col1 Rule"/>
-          <ns0:cNvSpPr/>
-          <ns0:nvPr/>
-        </ns0:nvSpPr>
-        <ns0:spPr>
-          <ns1:xfrm xmlns:ns1="http://schemas.openxmlformats.org/drawingml/2006/main">
-            <ns1:off x="1143000" y="4953000"/>
-            <ns1:ext cx="4972050" cy="38100"/>
-          </ns1:xfrm>
-          <ns2:prstGeom xmlns:ns2="http://schemas.openxmlformats.org/drawingml/2006/main" prst="rect">
-            <ns2:avLst/>
-          </ns2:prstGeom>
-          <ns3:solidFill xmlns:ns3="http://schemas.openxmlformats.org/drawingml/2006/main">
-            <ns3:srgbClr val="0F6BFF"/>
-          </ns3:solidFill>
-          <ns4:ln xmlns:ns4="http://schemas.openxmlformats.org/drawingml/2006/main">
-            <ns4:noFill/>
-          </ns4:ln>
-        </ns0:spPr>
-        <ns0:txBody>
-          <ns5:bodyPr xmlns:ns5="http://schemas.openxmlformats.org/drawingml/2006/main" rtlCol="0" anchor="ctr"/>
-          <ns6:lstStyle xmlns:ns6="http://schemas.openxmlformats.org/drawingml/2006/main"/>
-          <ns7:p xmlns:ns7="http://schemas.openxmlformats.org/drawingml/2006/main">
-            <ns7:endParaRPr lang="en-US"/>
-          </ns7:p>
-        </ns0:txBody>
-      </ns0:sp>
-      <ns0:sp xmlns:ns0="http://schemas.openxmlformats.org/presentationml/2006/main">
-        <ns0:nvSpPr>
-          <ns0:cNvPr id="13" name="Col1 Header"/>
-          <ns0:cNvSpPr>
-            <ns1:spLocks xmlns:ns1="http://schemas.openxmlformats.org/drawingml/2006/main" noGrp="1"/>
-          </ns0:cNvSpPr>
-          <ns0:nvPr>
-            <ns0:ph type="body" idx="10"/>
-          </ns0:nvPr>
-        </ns0:nvSpPr>
-        <ns0:spPr>
-          <ns2:xfrm xmlns:ns2="http://schemas.openxmlformats.org/drawingml/2006/main">
-            <ns2:off x="1143000" y="5105400"/>
-            <ns2:ext cx="4972050" cy="533400"/>
-          </ns2:xfrm>
-          <ns3:prstGeom xmlns:ns3="http://schemas.openxmlformats.org/drawingml/2006/main" prst="rect">
-            <ns3:avLst/>
-          </ns3:prstGeom>
-        </ns0:spPr>
-        <ns0:txBody>
-          <ns4:bodyPr xmlns:ns4="http://schemas.openxmlformats.org/drawingml/2006/main" wrap="square" rtlCol="0" anchor="t" lIns="0" tIns="0" rIns="0" bIns="0">
-            <ns4:noAutofit/>
-          </ns4:bodyPr>
-          <ns5:lstStyle xmlns:ns5="http://schemas.openxmlformats.org/drawingml/2006/main">
-            <ns5:lvl1pPr marL="0" indent="0" algn="l">
-              <ns5:buNone/>
-              <ns5:defRPr sz="2000" b="1" cap="all" spc="130">
-                <ns5:solidFill>
-                  <ns5:srgbClr val="0F6BFF"/>
-                </ns5:solidFill>
-                <ns5:latin typeface="Aptos"/>
-              </ns5:defRPr>
-            </ns5:lvl1pPr>
-          </ns5:lstStyle>
-          <ns6:p xmlns:ns6="http://schemas.openxmlformats.org/drawingml/2006/main">
-            <ns6:r>
-              <ns6:rPr lang="en-US"/>
-              <ns6:t>COLUMN 1 HEADER</ns6:t>
-            </ns6:r>
-            <ns6:endParaRPr lang="en-US"/>
-          </ns6:p>
-        </ns0:txBody>
-      </ns0:sp>
-      <ns0:sp xmlns:ns0="http://schemas.openxmlformats.org/presentationml/2006/main">
-        <ns0:nvSpPr>
-          <ns0:cNvPr id="14" name="Col1 Body"/>
-          <ns0:cNvSpPr>
-            <ns1:spLocks xmlns:ns1="http://schemas.openxmlformats.org/drawingml/2006/main" noGrp="1"/>
-          </ns0:cNvSpPr>
-          <ns0:nvPr>
-            <ns0:ph type="body" idx="11"/>
-          </ns0:nvPr>
-        </ns0:nvSpPr>
-        <ns0:spPr>
-          <ns2:xfrm xmlns:ns2="http://schemas.openxmlformats.org/drawingml/2006/main">
-            <ns2:off x="1143000" y="5905500"/>
-            <ns2:ext cx="4972050" cy="4229100"/>
-          </ns2:xfrm>
-          <ns3:prstGeom xmlns:ns3="http://schemas.openxmlformats.org/drawingml/2006/main" prst="rect">
-            <ns3:avLst/>
-          </ns3:prstGeom>
-        </ns0:spPr>
-        <ns0:txBody>
-          <ns4:bodyPr xmlns:ns4="http://schemas.openxmlformats.org/drawingml/2006/main" wrap="square" rtlCol="0" anchor="t" lIns="0" tIns="0" rIns="0" bIns="0"/>
-          <ns5:lstStyle xmlns:ns5="http://schemas.openxmlformats.org/drawingml/2006/main">
-            <ns5:lvl1pPr marL="0" indent="0" algn="l">
-              <ns5:buNone/>
-              <ns5:defRPr sz="2200">
-                <ns5:solidFill>
-                  <ns5:srgbClr val="000000"/>
-                </ns5:solidFill>
-                <ns5:latin typeface="Aptos"/>
-              </ns5:defRPr>
-            </ns5:lvl1pPr>
-          </ns5:lstStyle>
-          <ns6:p xmlns:ns6="http://schemas.openxmlformats.org/drawingml/2006/main">
-            <ns6:r>
-              <ns6:rPr lang="en-US"/>
-              <ns6:t>Column 1 body. Replace with one or two short sentences.</ns6:t>
-            </ns6:r>
-            <ns6:endParaRPr lang="en-US"/>
-          </ns6:p>
-        </ns0:txBody>
-      </ns0:sp>
-      <ns0:sp xmlns:ns0="http://schemas.openxmlformats.org/presentationml/2006/main">
-        <ns0:nvSpPr>
-          <ns0:cNvPr id="15" name="Col2 Rule"/>
-          <ns0:cNvSpPr/>
-          <ns0:nvPr/>
-        </ns0:nvSpPr>
-        <ns0:spPr>
-          <ns1:xfrm xmlns:ns1="http://schemas.openxmlformats.org/drawingml/2006/main">
-            <ns1:off x="6648450" y="4953000"/>
-            <ns1:ext cx="4972050" cy="38100"/>
-          </ns1:xfrm>
-          <ns2:prstGeom xmlns:ns2="http://schemas.openxmlformats.org/drawingml/2006/main" prst="rect">
-            <ns2:avLst/>
-          </ns2:prstGeom>
-          <ns3:solidFill xmlns:ns3="http://schemas.openxmlformats.org/drawingml/2006/main">
-            <ns3:srgbClr val="0F6BFF"/>
-          </ns3:solidFill>
-          <ns4:ln xmlns:ns4="http://schemas.openxmlformats.org/drawingml/2006/main">
-            <ns4:noFill/>
-          </ns4:ln>
-        </ns0:spPr>
-        <ns0:txBody>
-          <ns5:bodyPr xmlns:ns5="http://schemas.openxmlformats.org/drawingml/2006/main" rtlCol="0" anchor="ctr"/>
-          <ns6:lstStyle xmlns:ns6="http://schemas.openxmlformats.org/drawingml/2006/main"/>
-          <ns7:p xmlns:ns7="http://schemas.openxmlformats.org/drawingml/2006/main">
-            <ns7:endParaRPr lang="en-US"/>
-          </ns7:p>
-        </ns0:txBody>
-      </ns0:sp>
-      <ns0:sp xmlns:ns0="http://schemas.openxmlformats.org/presentationml/2006/main">
-        <ns0:nvSpPr>
-          <ns0:cNvPr id="16" name="Col2 Header"/>
-          <ns0:cNvSpPr>
-            <ns1:spLocks xmlns:ns1="http://schemas.openxmlformats.org/drawingml/2006/main" noGrp="1"/>
-          </ns0:cNvSpPr>
-          <ns0:nvPr>
-            <ns0:ph type="body" idx="12"/>
-          </ns0:nvPr>
-        </ns0:nvSpPr>
-        <ns0:spPr>
-          <ns2:xfrm xmlns:ns2="http://schemas.openxmlformats.org/drawingml/2006/main">
-            <ns2:off x="6648450" y="5105400"/>
-            <ns2:ext cx="4972050" cy="533400"/>
-          </ns2:xfrm>
-          <ns3:prstGeom xmlns:ns3="http://schemas.openxmlformats.org/drawingml/2006/main" prst="rect">
-            <ns3:avLst/>
-          </ns3:prstGeom>
-        </ns0:spPr>
-        <ns0:txBody>
-          <ns4:bodyPr xmlns:ns4="http://schemas.openxmlformats.org/drawingml/2006/main" wrap="square" rtlCol="0" anchor="t" lIns="0" tIns="0" rIns="0" bIns="0">
-            <ns4:noAutofit/>
-          </ns4:bodyPr>
-          <ns5:lstStyle xmlns:ns5="http://schemas.openxmlformats.org/drawingml/2006/main">
-            <ns5:lvl1pPr marL="0" indent="0" algn="l">
-              <ns5:buNone/>
-              <ns5:defRPr sz="2000" b="1" cap="all" spc="130">
-                <ns5:solidFill>
-                  <ns5:srgbClr val="0F6BFF"/>
-                </ns5:solidFill>
-                <ns5:latin typeface="Aptos"/>
-              </ns5:defRPr>
-            </ns5:lvl1pPr>
-          </ns5:lstStyle>
-          <ns6:p xmlns:ns6="http://schemas.openxmlformats.org/drawingml/2006/main">
-            <ns6:r>
-              <ns6:rPr lang="en-US"/>
-              <ns6:t>COLUMN 2 HEADER</ns6:t>
-            </ns6:r>
-            <ns6:endParaRPr lang="en-US"/>
-          </ns6:p>
-        </ns0:txBody>
-      </ns0:sp>
-      <ns0:sp xmlns:ns0="http://schemas.openxmlformats.org/presentationml/2006/main">
-        <ns0:nvSpPr>
-          <ns0:cNvPr id="17" name="Col2 Body"/>
-          <ns0:cNvSpPr>
-            <ns1:spLocks xmlns:ns1="http://schemas.openxmlformats.org/drawingml/2006/main" noGrp="1"/>
-          </ns0:cNvSpPr>
-          <ns0:nvPr>
-            <ns0:ph type="body" idx="13"/>
-          </ns0:nvPr>
-        </ns0:nvSpPr>
-        <ns0:spPr>
-          <ns2:xfrm xmlns:ns2="http://schemas.openxmlformats.org/drawingml/2006/main">
-            <ns2:off x="6648450" y="5905500"/>
-            <ns2:ext cx="4972050" cy="4229100"/>
-          </ns2:xfrm>
-          <ns3:prstGeom xmlns:ns3="http://schemas.openxmlformats.org/drawingml/2006/main" prst="rect">
-            <ns3:avLst/>
-          </ns3:prstGeom>
-        </ns0:spPr>
-        <ns0:txBody>
-          <ns4:bodyPr xmlns:ns4="http://schemas.openxmlformats.org/drawingml/2006/main" wrap="square" rtlCol="0" anchor="t" lIns="0" tIns="0" rIns="0" bIns="0"/>
-          <ns5:lstStyle xmlns:ns5="http://schemas.openxmlformats.org/drawingml/2006/main">
-            <ns5:lvl1pPr marL="0" indent="0" algn="l">
-              <ns5:buNone/>
-              <ns5:defRPr sz="2200">
-                <ns5:solidFill>
-                  <ns5:srgbClr val="000000"/>
-                </ns5:solidFill>
-                <ns5:latin typeface="Aptos"/>
-              </ns5:defRPr>
-            </ns5:lvl1pPr>
-          </ns5:lstStyle>
-          <ns6:p xmlns:ns6="http://schemas.openxmlformats.org/drawingml/2006/main">
-            <ns6:r>
-              <ns6:rPr lang="en-US"/>
-              <ns6:t>Column 2 body. Replace with one or two short sentences.</ns6:t>
-            </ns6:r>
-            <ns6:endParaRPr lang="en-US"/>
-          </ns6:p>
-        </ns0:txBody>
-      </ns0:sp>
-      <ns0:sp xmlns:ns0="http://schemas.openxmlformats.org/presentationml/2006/main">
-        <ns0:nvSpPr>
-          <ns0:cNvPr id="18" name="Col3 Rule"/>
-          <ns0:cNvSpPr/>
-          <ns0:nvPr/>
-        </ns0:nvSpPr>
-        <ns0:spPr>
-          <ns1:xfrm xmlns:ns1="http://schemas.openxmlformats.org/drawingml/2006/main">
-            <ns1:off x="12153900" y="4953000"/>
-            <ns1:ext cx="4972050" cy="38100"/>
-          </ns1:xfrm>
-          <ns2:prstGeom xmlns:ns2="http://schemas.openxmlformats.org/drawingml/2006/main" prst="rect">
-            <ns2:avLst/>
-          </ns2:prstGeom>
-          <ns3:solidFill xmlns:ns3="http://schemas.openxmlformats.org/drawingml/2006/main">
-            <ns3:srgbClr val="0F6BFF"/>
-          </ns3:solidFill>
-          <ns4:ln xmlns:ns4="http://schemas.openxmlformats.org/drawingml/2006/main">
-            <ns4:noFill/>
-          </ns4:ln>
-        </ns0:spPr>
-        <ns0:txBody>
-          <ns5:bodyPr xmlns:ns5="http://schemas.openxmlformats.org/drawingml/2006/main" rtlCol="0" anchor="ctr"/>
-          <ns6:lstStyle xmlns:ns6="http://schemas.openxmlformats.org/drawingml/2006/main"/>
-          <ns7:p xmlns:ns7="http://schemas.openxmlformats.org/drawingml/2006/main">
-            <ns7:endParaRPr lang="en-US"/>
-          </ns7:p>
-        </ns0:txBody>
-      </ns0:sp>
-      <ns0:sp xmlns:ns0="http://schemas.openxmlformats.org/presentationml/2006/main">
-        <ns0:nvSpPr>
-          <ns0:cNvPr id="19" name="Col3 Header"/>
-          <ns0:cNvSpPr>
-            <ns1:spLocks xmlns:ns1="http://schemas.openxmlformats.org/drawingml/2006/main" noGrp="1"/>
-          </ns0:cNvSpPr>
-          <ns0:nvPr>
-            <ns0:ph type="body" idx="14"/>
-          </ns0:nvPr>
-        </ns0:nvSpPr>
-        <ns0:spPr>
-          <ns2:xfrm xmlns:ns2="http://schemas.openxmlformats.org/drawingml/2006/main">
-            <ns2:off x="12153900" y="5105400"/>
-            <ns2:ext cx="4972050" cy="533400"/>
-          </ns2:xfrm>
-          <ns3:prstGeom xmlns:ns3="http://schemas.openxmlformats.org/drawingml/2006/main" prst="rect">
-            <ns3:avLst/>
-          </ns3:prstGeom>
-        </ns0:spPr>
-        <ns0:txBody>
-          <ns4:bodyPr xmlns:ns4="http://schemas.openxmlformats.org/drawingml/2006/main" wrap="square" rtlCol="0" anchor="t" lIns="0" tIns="0" rIns="0" bIns="0">
-            <ns4:noAutofit/>
-          </ns4:bodyPr>
-          <ns5:lstStyle xmlns:ns5="http://schemas.openxmlformats.org/drawingml/2006/main">
-            <ns5:lvl1pPr marL="0" indent="0" algn="l">
-              <ns5:buNone/>
-              <ns5:defRPr sz="2000" b="1" cap="all" spc="130">
-                <ns5:solidFill>
-                  <ns5:srgbClr val="0F6BFF"/>
-                </ns5:solidFill>
-                <ns5:latin typeface="Aptos"/>
-              </ns5:defRPr>
-            </ns5:lvl1pPr>
-          </ns5:lstStyle>
-          <ns6:p xmlns:ns6="http://schemas.openxmlformats.org/drawingml/2006/main">
-            <ns6:r>
-              <ns6:rPr lang="en-US"/>
-              <ns6:t>COLUMN 3 HEADER</ns6:t>
-            </ns6:r>
-            <ns6:endParaRPr lang="en-US"/>
-          </ns6:p>
-        </ns0:txBody>
-      </ns0:sp>
-      <ns0:sp xmlns:ns0="http://schemas.openxmlformats.org/presentationml/2006/main">
-        <ns0:nvSpPr>
-          <ns0:cNvPr id="20" name="Col3 Body"/>
-          <ns0:cNvSpPr>
-            <ns1:spLocks xmlns:ns1="http://schemas.openxmlformats.org/drawingml/2006/main" noGrp="1"/>
-          </ns0:cNvSpPr>
-          <ns0:nvPr>
-            <ns0:ph type="body" idx="15"/>
-          </ns0:nvPr>
-        </ns0:nvSpPr>
-        <ns0:spPr>
-          <ns2:xfrm xmlns:ns2="http://schemas.openxmlformats.org/drawingml/2006/main">
-            <ns2:off x="12153900" y="5905500"/>
-            <ns2:ext cx="4972050" cy="4229100"/>
-          </ns2:xfrm>
-          <ns3:prstGeom xmlns:ns3="http://schemas.openxmlformats.org/drawingml/2006/main" prst="rect">
-            <ns3:avLst/>
-          </ns3:prstGeom>
-        </ns0:spPr>
-        <ns0:txBody>
-          <ns4:bodyPr xmlns:ns4="http://schemas.openxmlformats.org/drawingml/2006/main" wrap="square" rtlCol="0" anchor="t" lIns="0" tIns="0" rIns="0" bIns="0"/>
-          <ns5:lstStyle xmlns:ns5="http://schemas.openxmlformats.org/drawingml/2006/main">
-            <ns5:lvl1pPr marL="0" indent="0" algn="l">
-              <ns5:buNone/>
-              <ns5:defRPr sz="2200">
-                <ns5:solidFill>
-                  <ns5:srgbClr val="000000"/>
-                </ns5:solidFill>
-                <ns5:latin typeface="Aptos"/>
-              </ns5:defRPr>
-            </ns5:lvl1pPr>
-          </ns5:lstStyle>
-          <ns6:p xmlns:ns6="http://schemas.openxmlformats.org/drawingml/2006/main">
-            <ns6:r>
-              <ns6:rPr lang="en-US"/>
-              <ns6:t>Column 3 body. Replace with one or two short sentences.</ns6:t>
-            </ns6:r>
-            <ns6:endParaRPr lang="en-US"/>
-          </ns6:p>
-        </ns0:txBody>
-      </ns0:sp>
-      <ns0:sp xmlns:ns0="http://schemas.openxmlformats.org/presentationml/2006/main">
-        <ns0:nvSpPr>
-          <ns0:cNvPr id="21" name="Footer"/>
-          <ns0:cNvSpPr>
-            <ns1:spLocks xmlns:ns1="http://schemas.openxmlformats.org/drawingml/2006/main" noGrp="1"/>
-          </ns0:cNvSpPr>
-          <ns0:nvPr/>
-        </ns0:nvSpPr>
-        <ns0:spPr>
-          <ns2:xfrm xmlns:ns2="http://schemas.openxmlformats.org/drawingml/2006/main">
-            <ns2:off x="1143000" y="9982200"/>
-            <ns2:ext cx="16002000" cy="228600"/>
-          </ns2:xfrm>
-          <ns3:prstGeom xmlns:ns3="http://schemas.openxmlformats.org/drawingml/2006/main" prst="rect">
-            <ns3:avLst/>
-          </ns3:prstGeom>
-        </ns0:spPr>
-        <ns0:txBody>
-          <ns4:bodyPr xmlns:ns4="http://schemas.openxmlformats.org/drawingml/2006/main" wrap="square" rtlCol="0" anchor="t" lIns="0" tIns="0" rIns="0" bIns="0"/>
-          <ns5:lstStyle xmlns:ns5="http://schemas.openxmlformats.org/drawingml/2006/main">
-            <ns5:lvl1pPr marL="0" indent="0" algn="l">
-              <ns5:buNone/>
-              <ns5:defRPr sz="900" cap="all" spc="50">
-                <ns5:solidFill>
-                  <ns5:srgbClr val="6B7280"/>
-                </ns5:solidFill>
-                <ns5:latin typeface="Aptos"/>
-              </ns5:defRPr>
-            </ns5:lvl1pPr>
-          </ns5:lstStyle>
-          <ns6:p xmlns:ns6="http://schemas.openxmlformats.org/drawingml/2006/main">
-            <ns6:r>
-              <ns6:rPr lang="en-US"/>
-              <ns6:t>OPEN COMPONENT MODEL · OCM.SOFTWARE</ns6:t>
-            </ns6:r>
-            <ns6:endParaRPr lang="en-US"/>
-          </ns6:p>
-        </ns0:txBody>
-      </ns0:sp>
-    </p:spTree>
-  </p:cSld>
-  <p:clrMapOvr>
-    <a:masterClrMapping/>
-  </p:clrMapOvr>
-</p:sldLayout>
-</file>
-
-<file path=ppt/slideLayouts/slideLayout5.xml><?xml version="1.0" encoding="utf-8"?>
-<p:sldLayout xmlns:a="http://schemas.openxmlformats.org/drawingml/2006/main" xmlns:r="http://schemas.openxmlformats.org/officeDocument/2006/relationships" xmlns:p="http://schemas.openxmlformats.org/presentationml/2006/main" type="obj" preserve="1" userDrawn="1">
-  <p:cSld name="Content / Diagram">
-    <p:bg>
-      <p:bgPr>
-        <a:solidFill>
-          <a:srgbClr val="FFFFFF"/>
-        </a:solidFill>
-        <a:effectLst/>
-      </p:bgPr>
-    </p:bg>
-    <p:spTree>
-      <p:nvGrpSpPr>
-        <p:cNvPr id="1" name=""/>
-        <p:cNvGrpSpPr/>
-        <p:nvPr/>
-      </p:nvGrpSpPr>
-      <p:grpSpPr>
-        <a:xfrm>
-          <a:off x="0" y="0"/>
-          <a:ext cx="0" cy="0"/>
-          <a:chOff x="0" y="0"/>
-          <a:chExt cx="0" cy="0"/>
-        </a:xfrm>
-      </p:grpSpPr>
-      <ns0:sp xmlns:ns0="http://schemas.openxmlformats.org/presentationml/2006/main">
-        <ns0:nvSpPr>
-          <ns0:cNvPr id="10" name="Eyebrow"/>
-          <ns0:cNvSpPr>
-            <ns1:spLocks xmlns:ns1="http://schemas.openxmlformats.org/drawingml/2006/main" noGrp="1"/>
-          </ns0:cNvSpPr>
-          <ns0:nvPr>
-            <ns0:ph type="body" idx="1"/>
-          </ns0:nvPr>
-        </ns0:nvSpPr>
-        <ns0:spPr>
-          <ns2:xfrm xmlns:ns2="http://schemas.openxmlformats.org/drawingml/2006/main">
-            <ns2:off x="1143000" y="2428875"/>
-            <ns2:ext cx="16002000" cy="457200"/>
-          </ns2:xfrm>
-          <ns3:prstGeom xmlns:ns3="http://schemas.openxmlformats.org/drawingml/2006/main" prst="rect">
-            <ns3:avLst/>
-          </ns3:prstGeom>
-        </ns0:spPr>
-        <ns0:txBody>
-          <ns4:bodyPr xmlns:ns4="http://schemas.openxmlformats.org/drawingml/2006/main" wrap="square" rtlCol="0" anchor="t" lIns="0" tIns="0" rIns="0" bIns="0"/>
-          <ns5:lstStyle xmlns:ns5="http://schemas.openxmlformats.org/drawingml/2006/main">
-            <ns5:lvl1pPr marL="0" indent="0" algn="l">
-              <ns5:buNone/>
-              <ns5:defRPr sz="2800" b="1" cap="all" spc="140">
-                <ns5:solidFill>
-                  <ns5:srgbClr val="0F6BFF"/>
-                </ns5:solidFill>
-                <ns5:latin typeface="Aptos"/>
-              </ns5:defRPr>
-            </ns5:lvl1pPr>
-          </ns5:lstStyle>
-          <ns6:p xmlns:ns6="http://schemas.openxmlformats.org/drawingml/2006/main">
-            <ns6:r>
-              <ns6:rPr lang="en-US"/>
-              <ns6:t>EYEBROW</ns6:t>
-            </ns6:r>
-            <ns6:endParaRPr lang="en-US"/>
-          </ns6:p>
-        </ns0:txBody>
-      </ns0:sp>
-      <ns0:sp xmlns:ns0="http://schemas.openxmlformats.org/presentationml/2006/main">
-        <ns0:nvSpPr>
-          <ns0:cNvPr id="11" name="Title"/>
-          <ns0:cNvSpPr>
-            <ns1:spLocks xmlns:ns1="http://schemas.openxmlformats.org/drawingml/2006/main" noGrp="1"/>
-          </ns0:cNvSpPr>
-          <ns0:nvPr>
-            <ns0:ph type="title" idx="2"/>
-          </ns0:nvPr>
-        </ns0:nvSpPr>
-        <ns0:spPr>
-          <ns2:xfrm xmlns:ns2="http://schemas.openxmlformats.org/drawingml/2006/main">
-            <ns2:off x="1143000" y="2933700"/>
-            <ns2:ext cx="16002000" cy="1143000"/>
-          </ns2:xfrm>
-          <ns3:prstGeom xmlns:ns3="http://schemas.openxmlformats.org/drawingml/2006/main" prst="rect">
-            <ns3:avLst/>
-          </ns3:prstGeom>
-        </ns0:spPr>
-        <ns0:txBody>
-          <ns4:bodyPr xmlns:ns4="http://schemas.openxmlformats.org/drawingml/2006/main" wrap="square" rtlCol="0" anchor="t" lIns="0" tIns="0" rIns="0" bIns="0"/>
-          <ns5:lstStyle xmlns:ns5="http://schemas.openxmlformats.org/drawingml/2006/main">
-            <ns5:lvl1pPr marL="0" indent="0" algn="l">
-              <ns5:lnSpc>
-                <ns5:spcPct val="90000"/>
-              </ns5:lnSpc>
-              <ns5:buNone/>
-              <ns5:defRPr sz="6400" b="1">
-                <ns5:solidFill>
-                  <ns5:srgbClr val="000000"/>
-                </ns5:solidFill>
-                <ns5:latin typeface="Aptos Display"/>
-              </ns5:defRPr>
-            </ns5:lvl1pPr>
-          </ns5:lstStyle>
-          <ns6:p xmlns:ns6="http://schemas.openxmlformats.org/drawingml/2006/main">
-            <ns6:r>
-              <ns6:rPr lang="en-US"/>
-              <ns6:t>Section title goes here.</ns6:t>
-            </ns6:r>
-            <ns6:endParaRPr lang="en-US"/>
-          </ns6:p>
-        </ns0:txBody>
-      </ns0:sp>
-      <ns0:sp xmlns:ns0="http://schemas.openxmlformats.org/presentationml/2006/main">
-        <ns0:nvSpPr>
-          <ns0:cNvPr id="12" name="Diagram"/>
-          <ns0:cNvSpPr>
-            <ns1:spLocks xmlns:ns1="http://schemas.openxmlformats.org/drawingml/2006/main" noGrp="1"/>
-          </ns0:cNvSpPr>
-          <ns0:nvPr>
-            <ns0:ph type="pic" idx="10"/>
-          </ns0:nvPr>
-        </ns0:nvSpPr>
-        <ns0:spPr>
-          <ns2:xfrm xmlns:ns2="http://schemas.openxmlformats.org/drawingml/2006/main">
-            <ns2:off x="571500" y="4381500"/>
-            <ns2:ext cx="17145000" cy="5715000"/>
-          </ns2:xfrm>
-          <ns3:prstGeom xmlns:ns3="http://schemas.openxmlformats.org/drawingml/2006/main" prst="rect">
-            <ns3:avLst/>
-          </ns3:prstGeom>
-        </ns0:spPr>
-        <ns0:txBody>
-          <ns4:bodyPr xmlns:ns4="http://schemas.openxmlformats.org/drawingml/2006/main" rtlCol="0" anchor="ctr"/>
-          <ns5:lstStyle xmlns:ns5="http://schemas.openxmlformats.org/drawingml/2006/main"/>
-          <ns6:p xmlns:ns6="http://schemas.openxmlformats.org/drawingml/2006/main">
-            <ns6:endParaRPr lang="en-US"/>
-          </ns6:p>
-        </ns0:txBody>
-      </ns0:sp>
-      <ns0:sp xmlns:ns0="http://schemas.openxmlformats.org/presentationml/2006/main">
-        <ns0:nvSpPr>
-          <ns0:cNvPr id="13" name="Footer"/>
-          <ns0:cNvSpPr>
-            <ns1:spLocks xmlns:ns1="http://schemas.openxmlformats.org/drawingml/2006/main" noGrp="1"/>
-          </ns0:cNvSpPr>
-          <ns0:nvPr/>
-        </ns0:nvSpPr>
-        <ns0:spPr>
-          <ns2:xfrm xmlns:ns2="http://schemas.openxmlformats.org/drawingml/2006/main">
-            <ns2:off x="1143000" y="9982200"/>
-            <ns2:ext cx="16002000" cy="228600"/>
-          </ns2:xfrm>
-          <ns3:prstGeom xmlns:ns3="http://schemas.openxmlformats.org/drawingml/2006/main" prst="rect">
-            <ns3:avLst/>
-          </ns3:prstGeom>
-        </ns0:spPr>
-        <ns0:txBody>
-          <ns4:bodyPr xmlns:ns4="http://schemas.openxmlformats.org/drawingml/2006/main" wrap="square" rtlCol="0" anchor="t" lIns="0" tIns="0" rIns="0" bIns="0"/>
-          <ns5:lstStyle xmlns:ns5="http://schemas.openxmlformats.org/drawingml/2006/main">
-            <ns5:lvl1pPr marL="0" indent="0" algn="l">
-              <ns5:buNone/>
-              <ns5:defRPr sz="900" cap="all" spc="50">
-                <ns5:solidFill>
-                  <ns5:srgbClr val="6B7280"/>
-                </ns5:solidFill>
-                <ns5:latin typeface="Aptos"/>
-              </ns5:defRPr>
-            </ns5:lvl1pPr>
-          </ns5:lstStyle>
-          <ns6:p xmlns:ns6="http://schemas.openxmlformats.org/drawingml/2006/main">
-            <ns6:r>
-              <ns6:rPr lang="en-US"/>
-              <ns6:t>OPEN COMPONENT MODEL · OCM.SOFTWARE</ns6:t>
-            </ns6:r>
-            <ns6:endParaRPr lang="en-US"/>
-          </ns6:p>
-        </ns0:txBody>
-      </ns0:sp>
-    </p:spTree>
-  </p:cSld>
-  <p:clrMapOvr>
-    <a:masterClrMapping/>
-  </p:clrMapOvr>
-</p:sldLayout>
-</file>
-
-<file path=ppt/slideLayouts/slideLayout6.xml><?xml version="1.0" encoding="utf-8"?>
-<p:sldLayout xmlns:a="http://schemas.openxmlformats.org/drawingml/2006/main" xmlns:r="http://schemas.openxmlformats.org/officeDocument/2006/relationships" xmlns:p="http://schemas.openxmlformats.org/presentationml/2006/main" type="obj" preserve="1" userDrawn="1">
-  <p:cSld name="Content / Tiles">
-    <p:bg>
-      <p:bgPr>
-        <a:solidFill>
-          <a:srgbClr val="FFFFFF"/>
-        </a:solidFill>
-        <a:effectLst/>
-      </p:bgPr>
-    </p:bg>
-    <p:spTree>
-      <p:nvGrpSpPr>
-        <p:cNvPr id="1" name=""/>
-        <p:cNvGrpSpPr/>
-        <p:nvPr/>
-      </p:nvGrpSpPr>
-      <p:grpSpPr>
-        <a:xfrm>
-          <a:off x="0" y="0"/>
-          <a:ext cx="0" cy="0"/>
-          <a:chOff x="0" y="0"/>
-          <a:chExt cx="0" cy="0"/>
-        </a:xfrm>
-      </p:grpSpPr>
-      <ns0:sp xmlns:ns0="http://schemas.openxmlformats.org/presentationml/2006/main">
-        <ns0:nvSpPr>
-          <ns0:cNvPr id="10" name="Eyebrow"/>
-          <ns0:cNvSpPr>
-            <ns1:spLocks xmlns:ns1="http://schemas.openxmlformats.org/drawingml/2006/main" noGrp="1"/>
-          </ns0:cNvSpPr>
-          <ns0:nvPr>
-            <ns0:ph type="body" idx="1"/>
-          </ns0:nvPr>
-        </ns0:nvSpPr>
-        <ns0:spPr>
-          <ns2:xfrm xmlns:ns2="http://schemas.openxmlformats.org/drawingml/2006/main">
-            <ns2:off x="1143000" y="2428875"/>
-            <ns2:ext cx="16002000" cy="457200"/>
-          </ns2:xfrm>
-          <ns3:prstGeom xmlns:ns3="http://schemas.openxmlformats.org/drawingml/2006/main" prst="rect">
-            <ns3:avLst/>
-          </ns3:prstGeom>
-        </ns0:spPr>
-        <ns0:txBody>
-          <ns4:bodyPr xmlns:ns4="http://schemas.openxmlformats.org/drawingml/2006/main" wrap="square" rtlCol="0" anchor="t" lIns="0" tIns="0" rIns="0" bIns="0"/>
-          <ns5:lstStyle xmlns:ns5="http://schemas.openxmlformats.org/drawingml/2006/main">
-            <ns5:lvl1pPr marL="0" indent="0" algn="l">
-              <ns5:buNone/>
-              <ns5:defRPr sz="2800" b="1" cap="all" spc="140">
-                <ns5:solidFill>
-                  <ns5:srgbClr val="0F6BFF"/>
-                </ns5:solidFill>
-                <ns5:latin typeface="Aptos"/>
-              </ns5:defRPr>
-            </ns5:lvl1pPr>
-          </ns5:lstStyle>
-          <ns6:p xmlns:ns6="http://schemas.openxmlformats.org/drawingml/2006/main">
-            <ns6:r>
-              <ns6:rPr lang="en-US"/>
-              <ns6:t>EYEBROW</ns6:t>
-            </ns6:r>
-            <ns6:endParaRPr lang="en-US"/>
-          </ns6:p>
-        </ns0:txBody>
-      </ns0:sp>
-      <ns0:sp xmlns:ns0="http://schemas.openxmlformats.org/presentationml/2006/main">
-        <ns0:nvSpPr>
-          <ns0:cNvPr id="11" name="Title"/>
-          <ns0:cNvSpPr>
-            <ns1:spLocks xmlns:ns1="http://schemas.openxmlformats.org/drawingml/2006/main" noGrp="1"/>
-          </ns0:cNvSpPr>
-          <ns0:nvPr>
-            <ns0:ph type="title" idx="2"/>
-          </ns0:nvPr>
-        </ns0:nvSpPr>
-        <ns0:spPr>
-          <ns2:xfrm xmlns:ns2="http://schemas.openxmlformats.org/drawingml/2006/main">
-            <ns2:off x="1143000" y="2933700"/>
-            <ns2:ext cx="16002000" cy="1905000"/>
-          </ns2:xfrm>
-          <ns3:prstGeom xmlns:ns3="http://schemas.openxmlformats.org/drawingml/2006/main" prst="rect">
-            <ns3:avLst/>
-          </ns3:prstGeom>
-        </ns0:spPr>
-        <ns0:txBody>
-          <ns4:bodyPr xmlns:ns4="http://schemas.openxmlformats.org/drawingml/2006/main" wrap="square" rtlCol="0" anchor="t" lIns="0" tIns="0" rIns="0" bIns="0"/>
-          <ns5:lstStyle xmlns:ns5="http://schemas.openxmlformats.org/drawingml/2006/main">
-            <ns5:lvl1pPr marL="0" indent="0" algn="l">
-              <ns5:lnSpc>
-                <ns5:spcPct val="90000"/>
-              </ns5:lnSpc>
-              <ns5:buNone/>
-              <ns5:defRPr sz="6400" b="1">
-                <ns5:solidFill>
-                  <ns5:srgbClr val="000000"/>
-                </ns5:solidFill>
-                <ns5:latin typeface="Aptos Display"/>
-              </ns5:defRPr>
-            </ns5:lvl1pPr>
-          </ns5:lstStyle>
-          <ns6:p xmlns:ns6="http://schemas.openxmlformats.org/drawingml/2006/main">
-            <ns6:r>
-              <ns6:rPr lang="en-US"/>
-              <ns6:t>Section title goes here.</ns6:t>
-            </ns6:r>
-            <ns6:endParaRPr lang="en-US"/>
-          </ns6:p>
-        </ns0:txBody>
-      </ns0:sp>
-      <ns0:sp xmlns:ns0="http://schemas.openxmlformats.org/presentationml/2006/main">
-        <ns0:nvSpPr>
-          <ns0:cNvPr id="12" name="Tile1 Bg"/>
-          <ns0:cNvSpPr/>
-          <ns0:nvPr/>
-        </ns0:nvSpPr>
-        <ns0:spPr>
-          <ns1:xfrm xmlns:ns1="http://schemas.openxmlformats.org/drawingml/2006/main">
-            <ns1:off x="1143000" y="4953000"/>
-            <ns1:ext cx="5181600" cy="2190750"/>
-          </ns1:xfrm>
-          <ns2:prstGeom xmlns:ns2="http://schemas.openxmlformats.org/drawingml/2006/main" prst="rect">
-            <ns2:avLst/>
-          </ns2:prstGeom>
-          <ns3:solidFill xmlns:ns3="http://schemas.openxmlformats.org/drawingml/2006/main">
-            <ns3:srgbClr val="F3F4F6"/>
-          </ns3:solidFill>
-          <ns4:ln xmlns:ns4="http://schemas.openxmlformats.org/drawingml/2006/main">
-            <ns4:noFill/>
-          </ns4:ln>
-        </ns0:spPr>
-        <ns0:txBody>
-          <ns5:bodyPr xmlns:ns5="http://schemas.openxmlformats.org/drawingml/2006/main" rtlCol="0" anchor="ctr"/>
-          <ns6:lstStyle xmlns:ns6="http://schemas.openxmlformats.org/drawingml/2006/main"/>
-          <ns7:p xmlns:ns7="http://schemas.openxmlformats.org/drawingml/2006/main">
-            <ns7:endParaRPr lang="en-US"/>
-          </ns7:p>
-        </ns0:txBody>
-      </ns0:sp>
-      <ns0:sp xmlns:ns0="http://schemas.openxmlformats.org/presentationml/2006/main">
-        <ns0:nvSpPr>
-          <ns0:cNvPr id="13" name="Tile1 Rule"/>
-          <ns0:cNvSpPr/>
-          <ns0:nvPr/>
-        </ns0:nvSpPr>
-        <ns0:spPr>
-          <ns1:xfrm xmlns:ns1="http://schemas.openxmlformats.org/drawingml/2006/main">
-            <ns1:off x="1143000" y="4953000"/>
-            <ns1:ext cx="5181600" cy="28575"/>
-          </ns1:xfrm>
-          <ns2:prstGeom xmlns:ns2="http://schemas.openxmlformats.org/drawingml/2006/main" prst="rect">
-            <ns2:avLst/>
-          </ns2:prstGeom>
-          <ns3:solidFill xmlns:ns3="http://schemas.openxmlformats.org/drawingml/2006/main">
-            <ns3:srgbClr val="0F6BFF"/>
-          </ns3:solidFill>
-          <ns4:ln xmlns:ns4="http://schemas.openxmlformats.org/drawingml/2006/main">
-            <ns4:noFill/>
-          </ns4:ln>
-        </ns0:spPr>
-        <ns0:txBody>
-          <ns5:bodyPr xmlns:ns5="http://schemas.openxmlformats.org/drawingml/2006/main" rtlCol="0" anchor="ctr"/>
-          <ns6:lstStyle xmlns:ns6="http://schemas.openxmlformats.org/drawingml/2006/main"/>
-          <ns7:p xmlns:ns7="http://schemas.openxmlformats.org/drawingml/2006/main">
-            <ns7:endParaRPr lang="en-US"/>
-          </ns7:p>
-        </ns0:txBody>
-      </ns0:sp>
-      <ns0:sp xmlns:ns0="http://schemas.openxmlformats.org/presentationml/2006/main">
-        <ns0:nvSpPr>
-          <ns0:cNvPr id="14" name="Tile1 Label"/>
-          <ns0:cNvSpPr>
-            <ns1:spLocks xmlns:ns1="http://schemas.openxmlformats.org/drawingml/2006/main" noGrp="1"/>
-          </ns0:cNvSpPr>
-          <ns0:nvPr>
-            <ns0:ph type="body" idx="20"/>
-          </ns0:nvPr>
-        </ns0:nvSpPr>
-        <ns0:spPr>
-          <ns2:xfrm xmlns:ns2="http://schemas.openxmlformats.org/drawingml/2006/main">
-            <ns2:off x="1371600" y="5791200"/>
-            <ns2:ext cx="4724400" cy="304800"/>
-          </ns2:xfrm>
-          <ns3:prstGeom xmlns:ns3="http://schemas.openxmlformats.org/drawingml/2006/main" prst="rect">
-            <ns3:avLst/>
-          </ns3:prstGeom>
-        </ns0:spPr>
-        <ns0:txBody>
-          <ns4:bodyPr xmlns:ns4="http://schemas.openxmlformats.org/drawingml/2006/main" wrap="square" rtlCol="0" anchor="t" lIns="0" tIns="0" rIns="0" bIns="0"/>
-          <ns5:lstStyle xmlns:ns5="http://schemas.openxmlformats.org/drawingml/2006/main">
-            <ns5:lvl1pPr marL="0" indent="0" algn="l">
-              <ns5:buNone/>
-              <ns5:defRPr sz="1600" b="1">
-                <ns5:solidFill>
-                  <ns5:srgbClr val="0F6BFF"/>
-                </ns5:solidFill>
-                <ns5:latin typeface="Aptos"/>
-              </ns5:defRPr>
-            </ns5:lvl1pPr>
-          </ns5:lstStyle>
-          <ns6:p xmlns:ns6="http://schemas.openxmlformats.org/drawingml/2006/main">
-            <ns6:r>
-              <ns6:rPr lang="en-US"/>
-              <ns6:t>Tile 1 label</ns6:t>
-            </ns6:r>
-            <ns6:endParaRPr lang="en-US"/>
-          </ns6:p>
-        </ns0:txBody>
-      </ns0:sp>
-      <ns0:sp xmlns:ns0="http://schemas.openxmlformats.org/presentationml/2006/main">
-        <ns0:nvSpPr>
-          <ns0:cNvPr id="15" name="Tile1 Body"/>
-          <ns0:cNvSpPr>
-            <ns1:spLocks xmlns:ns1="http://schemas.openxmlformats.org/drawingml/2006/main" noGrp="1"/>
-          </ns0:cNvSpPr>
-          <ns0:nvPr>
-            <ns0:ph type="body" idx="21"/>
-          </ns0:nvPr>
-        </ns0:nvSpPr>
-        <ns0:spPr>
-          <ns2:xfrm xmlns:ns2="http://schemas.openxmlformats.org/drawingml/2006/main">
-            <ns2:off x="1371600" y="6134100"/>
-            <ns2:ext cx="4724400" cy="857250"/>
-          </ns2:xfrm>
-          <ns3:prstGeom xmlns:ns3="http://schemas.openxmlformats.org/drawingml/2006/main" prst="rect">
-            <ns3:avLst/>
-          </ns3:prstGeom>
-        </ns0:spPr>
-        <ns0:txBody>
-          <ns4:bodyPr xmlns:ns4="http://schemas.openxmlformats.org/drawingml/2006/main" wrap="square" rtlCol="0" anchor="t" lIns="0" tIns="0" rIns="0" bIns="0"/>
-          <ns5:lstStyle xmlns:ns5="http://schemas.openxmlformats.org/drawingml/2006/main">
-            <ns5:lvl1pPr marL="0" indent="0" algn="l">
-              <ns5:buNone/>
-              <ns5:defRPr sz="1800">
-                <ns5:solidFill>
-                  <ns5:srgbClr val="000000"/>
-                </ns5:solidFill>
-                <ns5:latin typeface="Aptos"/>
-              </ns5:defRPr>
-            </ns5:lvl1pPr>
-          </ns5:lstStyle>
-          <ns6:p xmlns:ns6="http://schemas.openxmlformats.org/drawingml/2006/main">
-            <ns6:r>
-              <ns6:rPr lang="en-US"/>
-              <ns6:t>One short sentence describing this tile.</ns6:t>
-            </ns6:r>
-            <ns6:endParaRPr lang="en-US"/>
-          </ns6:p>
-        </ns0:txBody>
-      </ns0:sp>
-      <ns0:sp xmlns:ns0="http://schemas.openxmlformats.org/presentationml/2006/main">
-        <ns0:nvSpPr>
-          <ns0:cNvPr id="16" name="Tile2 Bg"/>
-          <ns0:cNvSpPr/>
-          <ns0:nvPr/>
-        </ns0:nvSpPr>
-        <ns0:spPr>
-          <ns1:xfrm xmlns:ns1="http://schemas.openxmlformats.org/drawingml/2006/main">
-            <ns1:off x="6553200" y="4953000"/>
-            <ns1:ext cx="5181600" cy="2190750"/>
-          </ns1:xfrm>
-          <ns2:prstGeom xmlns:ns2="http://schemas.openxmlformats.org/drawingml/2006/main" prst="rect">
-            <ns2:avLst/>
-          </ns2:prstGeom>
-          <ns3:solidFill xmlns:ns3="http://schemas.openxmlformats.org/drawingml/2006/main">
-            <ns3:srgbClr val="F3F4F6"/>
-          </ns3:solidFill>
-          <ns4:ln xmlns:ns4="http://schemas.openxmlformats.org/drawingml/2006/main">
-            <ns4:noFill/>
-          </ns4:ln>
-        </ns0:spPr>
-        <ns0:txBody>
-          <ns5:bodyPr xmlns:ns5="http://schemas.openxmlformats.org/drawingml/2006/main" rtlCol="0" anchor="ctr"/>
-          <ns6:lstStyle xmlns:ns6="http://schemas.openxmlformats.org/drawingml/2006/main"/>
-          <ns7:p xmlns:ns7="http://schemas.openxmlformats.org/drawingml/2006/main">
-            <ns7:endParaRPr lang="en-US"/>
-          </ns7:p>
-        </ns0:txBody>
-      </ns0:sp>
-      <ns0:sp xmlns:ns0="http://schemas.openxmlformats.org/presentationml/2006/main">
-        <ns0:nvSpPr>
-          <ns0:cNvPr id="17" name="Tile2 Rule"/>
-          <ns0:cNvSpPr/>
-          <ns0:nvPr/>
-        </ns0:nvSpPr>
-        <ns0:spPr>
-          <ns1:xfrm xmlns:ns1="http://schemas.openxmlformats.org/drawingml/2006/main">
-            <ns1:off x="6553200" y="4953000"/>
-            <ns1:ext cx="5181600" cy="28575"/>
-          </ns1:xfrm>
-          <ns2:prstGeom xmlns:ns2="http://schemas.openxmlformats.org/drawingml/2006/main" prst="rect">
-            <ns2:avLst/>
-          </ns2:prstGeom>
-          <ns3:solidFill xmlns:ns3="http://schemas.openxmlformats.org/drawingml/2006/main">
-            <ns3:srgbClr val="0F6BFF"/>
-          </ns3:solidFill>
-          <ns4:ln xmlns:ns4="http://schemas.openxmlformats.org/drawingml/2006/main">
-            <ns4:noFill/>
-          </ns4:ln>
-        </ns0:spPr>
-        <ns0:txBody>
-          <ns5:bodyPr xmlns:ns5="http://schemas.openxmlformats.org/drawingml/2006/main" rtlCol="0" anchor="ctr"/>
-          <ns6:lstStyle xmlns:ns6="http://schemas.openxmlformats.org/drawingml/2006/main"/>
-          <ns7:p xmlns:ns7="http://schemas.openxmlformats.org/drawingml/2006/main">
-            <ns7:endParaRPr lang="en-US"/>
-          </ns7:p>
-        </ns0:txBody>
-      </ns0:sp>
-      <ns0:sp xmlns:ns0="http://schemas.openxmlformats.org/presentationml/2006/main">
-        <ns0:nvSpPr>
-          <ns0:cNvPr id="18" name="Tile2 Label"/>
-          <ns0:cNvSpPr>
-            <ns1:spLocks xmlns:ns1="http://schemas.openxmlformats.org/drawingml/2006/main" noGrp="1"/>
-          </ns0:cNvSpPr>
-          <ns0:nvPr>
-            <ns0:ph type="body" idx="22"/>
-          </ns0:nvPr>
-        </ns0:nvSpPr>
-        <ns0:spPr>
-          <ns2:xfrm xmlns:ns2="http://schemas.openxmlformats.org/drawingml/2006/main">
-            <ns2:off x="6781800" y="5791200"/>
-            <ns2:ext cx="4724400" cy="304800"/>
-          </ns2:xfrm>
-          <ns3:prstGeom xmlns:ns3="http://schemas.openxmlformats.org/drawingml/2006/main" prst="rect">
-            <ns3:avLst/>
-          </ns3:prstGeom>
-        </ns0:spPr>
-        <ns0:txBody>
-          <ns4:bodyPr xmlns:ns4="http://schemas.openxmlformats.org/drawingml/2006/main" wrap="square" rtlCol="0" anchor="t" lIns="0" tIns="0" rIns="0" bIns="0"/>
-          <ns5:lstStyle xmlns:ns5="http://schemas.openxmlformats.org/drawingml/2006/main">
-            <ns5:lvl1pPr marL="0" indent="0" algn="l">
-              <ns5:buNone/>
-              <ns5:defRPr sz="1600" b="1">
-                <ns5:solidFill>
-                  <ns5:srgbClr val="0F6BFF"/>
-                </ns5:solidFill>
-                <ns5:latin typeface="Aptos"/>
-              </ns5:defRPr>
-            </ns5:lvl1pPr>
-          </ns5:lstStyle>
-          <ns6:p xmlns:ns6="http://schemas.openxmlformats.org/drawingml/2006/main">
-            <ns6:r>
-              <ns6:rPr lang="en-US"/>
-              <ns6:t>Tile 2 label</ns6:t>
-            </ns6:r>
-            <ns6:endParaRPr lang="en-US"/>
-          </ns6:p>
-        </ns0:txBody>
-      </ns0:sp>
-      <ns0:sp xmlns:ns0="http://schemas.openxmlformats.org/presentationml/2006/main">
-        <ns0:nvSpPr>
-          <ns0:cNvPr id="19" name="Tile2 Body"/>
-          <ns0:cNvSpPr>
-            <ns1:spLocks xmlns:ns1="http://schemas.openxmlformats.org/drawingml/2006/main" noGrp="1"/>
-          </ns0:cNvSpPr>
-          <ns0:nvPr>
-            <ns0:ph type="body" idx="23"/>
-          </ns0:nvPr>
-        </ns0:nvSpPr>
-        <ns0:spPr>
-          <ns2:xfrm xmlns:ns2="http://schemas.openxmlformats.org/drawingml/2006/main">
-            <ns2:off x="6781800" y="6134100"/>
-            <ns2:ext cx="4724400" cy="857250"/>
-          </ns2:xfrm>
-          <ns3:prstGeom xmlns:ns3="http://schemas.openxmlformats.org/drawingml/2006/main" prst="rect">
-            <ns3:avLst/>
-          </ns3:prstGeom>
-        </ns0:spPr>
-        <ns0:txBody>
-          <ns4:bodyPr xmlns:ns4="http://schemas.openxmlformats.org/drawingml/2006/main" wrap="square" rtlCol="0" anchor="t" lIns="0" tIns="0" rIns="0" bIns="0"/>
-          <ns5:lstStyle xmlns:ns5="http://schemas.openxmlformats.org/drawingml/2006/main">
-            <ns5:lvl1pPr marL="0" indent="0" algn="l">
-              <ns5:buNone/>
-              <ns5:defRPr sz="1800">
-                <ns5:solidFill>
-                  <ns5:srgbClr val="000000"/>
-                </ns5:solidFill>
-                <ns5:latin typeface="Aptos"/>
-              </ns5:defRPr>
-            </ns5:lvl1pPr>
-          </ns5:lstStyle>
-          <ns6:p xmlns:ns6="http://schemas.openxmlformats.org/drawingml/2006/main">
-            <ns6:r>
-              <ns6:rPr lang="en-US"/>
-              <ns6:t>One short sentence describing this tile.</ns6:t>
-            </ns6:r>
-            <ns6:endParaRPr lang="en-US"/>
-          </ns6:p>
-        </ns0:txBody>
-      </ns0:sp>
-      <ns0:sp xmlns:ns0="http://schemas.openxmlformats.org/presentationml/2006/main">
-        <ns0:nvSpPr>
-          <ns0:cNvPr id="20" name="Tile3 Bg"/>
-          <ns0:cNvSpPr/>
-          <ns0:nvPr/>
-        </ns0:nvSpPr>
-        <ns0:spPr>
-          <ns1:xfrm xmlns:ns1="http://schemas.openxmlformats.org/drawingml/2006/main">
-            <ns1:off x="11963400" y="4953000"/>
-            <ns1:ext cx="5181600" cy="2190750"/>
-          </ns1:xfrm>
-          <ns2:prstGeom xmlns:ns2="http://schemas.openxmlformats.org/drawingml/2006/main" prst="rect">
-            <ns2:avLst/>
-          </ns2:prstGeom>
-          <ns3:solidFill xmlns:ns3="http://schemas.openxmlformats.org/drawingml/2006/main">
-            <ns3:srgbClr val="F3F4F6"/>
-          </ns3:solidFill>
-          <ns4:ln xmlns:ns4="http://schemas.openxmlformats.org/drawingml/2006/main">
-            <ns4:noFill/>
-          </ns4:ln>
-        </ns0:spPr>
-        <ns0:txBody>
-          <ns5:bodyPr xmlns:ns5="http://schemas.openxmlformats.org/drawingml/2006/main" rtlCol="0" anchor="ctr"/>
-          <ns6:lstStyle xmlns:ns6="http://schemas.openxmlformats.org/drawingml/2006/main"/>
-          <ns7:p xmlns:ns7="http://schemas.openxmlformats.org/drawingml/2006/main">
-            <ns7:endParaRPr lang="en-US"/>
-          </ns7:p>
-        </ns0:txBody>
-      </ns0:sp>
-      <ns0:sp xmlns:ns0="http://schemas.openxmlformats.org/presentationml/2006/main">
-        <ns0:nvSpPr>
-          <ns0:cNvPr id="21" name="Tile3 Rule"/>
-          <ns0:cNvSpPr/>
-          <ns0:nvPr/>
-        </ns0:nvSpPr>
-        <ns0:spPr>
-          <ns1:xfrm xmlns:ns1="http://schemas.openxmlformats.org/drawingml/2006/main">
-            <ns1:off x="11963400" y="4953000"/>
-            <ns1:ext cx="5181600" cy="28575"/>
-          </ns1:xfrm>
-          <ns2:prstGeom xmlns:ns2="http://schemas.openxmlformats.org/drawingml/2006/main" prst="rect">
-            <ns2:avLst/>
-          </ns2:prstGeom>
-          <ns3:solidFill xmlns:ns3="http://schemas.openxmlformats.org/drawingml/2006/main">
-            <ns3:srgbClr val="0F6BFF"/>
-          </ns3:solidFill>
-          <ns4:ln xmlns:ns4="http://schemas.openxmlformats.org/drawingml/2006/main">
-            <ns4:noFill/>
-          </ns4:ln>
-        </ns0:spPr>
-        <ns0:txBody>
-          <ns5:bodyPr xmlns:ns5="http://schemas.openxmlformats.org/drawingml/2006/main" rtlCol="0" anchor="ctr"/>
-          <ns6:lstStyle xmlns:ns6="http://schemas.openxmlformats.org/drawingml/2006/main"/>
-          <ns7:p xmlns:ns7="http://schemas.openxmlformats.org/drawingml/2006/main">
-            <ns7:endParaRPr lang="en-US"/>
-          </ns7:p>
-        </ns0:txBody>
-      </ns0:sp>
-      <ns0:sp xmlns:ns0="http://schemas.openxmlformats.org/presentationml/2006/main">
-        <ns0:nvSpPr>
-          <ns0:cNvPr id="22" name="Tile3 Label"/>
-          <ns0:cNvSpPr>
-            <ns1:spLocks xmlns:ns1="http://schemas.openxmlformats.org/drawingml/2006/main" noGrp="1"/>
-          </ns0:cNvSpPr>
-          <ns0:nvPr>
-            <ns0:ph type="body" idx="24"/>
-          </ns0:nvPr>
-        </ns0:nvSpPr>
-        <ns0:spPr>
-          <ns2:xfrm xmlns:ns2="http://schemas.openxmlformats.org/drawingml/2006/main">
-            <ns2:off x="12192000" y="5791200"/>
-            <ns2:ext cx="4724400" cy="304800"/>
-          </ns2:xfrm>
-          <ns3:prstGeom xmlns:ns3="http://schemas.openxmlformats.org/drawingml/2006/main" prst="rect">
-            <ns3:avLst/>
-          </ns3:prstGeom>
-        </ns0:spPr>
-        <ns0:txBody>
-          <ns4:bodyPr xmlns:ns4="http://schemas.openxmlformats.org/drawingml/2006/main" wrap="square" rtlCol="0" anchor="t" lIns="0" tIns="0" rIns="0" bIns="0"/>
-          <ns5:lstStyle xmlns:ns5="http://schemas.openxmlformats.org/drawingml/2006/main">
-            <ns5:lvl1pPr marL="0" indent="0" algn="l">
-              <ns5:buNone/>
-              <ns5:defRPr sz="1600" b="1">
-                <ns5:solidFill>
-                  <ns5:srgbClr val="0F6BFF"/>
-                </ns5:solidFill>
-                <ns5:latin typeface="Aptos"/>
-              </ns5:defRPr>
-            </ns5:lvl1pPr>
-          </ns5:lstStyle>
-          <ns6:p xmlns:ns6="http://schemas.openxmlformats.org/drawingml/2006/main">
-            <ns6:r>
-              <ns6:rPr lang="en-US"/>
-              <ns6:t>Tile 3 label</ns6:t>
-            </ns6:r>
-            <ns6:endParaRPr lang="en-US"/>
-          </ns6:p>
-        </ns0:txBody>
-      </ns0:sp>
-      <ns0:sp xmlns:ns0="http://schemas.openxmlformats.org/presentationml/2006/main">
-        <ns0:nvSpPr>
-          <ns0:cNvPr id="23" name="Tile3 Body"/>
-          <ns0:cNvSpPr>
-            <ns1:spLocks xmlns:ns1="http://schemas.openxmlformats.org/drawingml/2006/main" noGrp="1"/>
-          </ns0:cNvSpPr>
-          <ns0:nvPr>
-            <ns0:ph type="body" idx="25"/>
-          </ns0:nvPr>
-        </ns0:nvSpPr>
-        <ns0:spPr>
-          <ns2:xfrm xmlns:ns2="http://schemas.openxmlformats.org/drawingml/2006/main">
-            <ns2:off x="12192000" y="6134100"/>
-            <ns2:ext cx="4724400" cy="857250"/>
-          </ns2:xfrm>
-          <ns3:prstGeom xmlns:ns3="http://schemas.openxmlformats.org/drawingml/2006/main" prst="rect">
-            <ns3:avLst/>
-          </ns3:prstGeom>
-        </ns0:spPr>
-        <ns0:txBody>
-          <ns4:bodyPr xmlns:ns4="http://schemas.openxmlformats.org/drawingml/2006/main" wrap="square" rtlCol="0" anchor="t" lIns="0" tIns="0" rIns="0" bIns="0"/>
-          <ns5:lstStyle xmlns:ns5="http://schemas.openxmlformats.org/drawingml/2006/main">
-            <ns5:lvl1pPr marL="0" indent="0" algn="l">
-              <ns5:buNone/>
-              <ns5:defRPr sz="1800">
-                <ns5:solidFill>
-                  <ns5:srgbClr val="000000"/>
-                </ns5:solidFill>
-                <ns5:latin typeface="Aptos"/>
-              </ns5:defRPr>
-            </ns5:lvl1pPr>
-          </ns5:lstStyle>
-          <ns6:p xmlns:ns6="http://schemas.openxmlformats.org/drawingml/2006/main">
-            <ns6:r>
-              <ns6:rPr lang="en-US"/>
-              <ns6:t>One short sentence describing this tile.</ns6:t>
-            </ns6:r>
-            <ns6:endParaRPr lang="en-US"/>
-          </ns6:p>
-        </ns0:txBody>
-      </ns0:sp>
-      <ns0:sp xmlns:ns0="http://schemas.openxmlformats.org/presentationml/2006/main">
-        <ns0:nvSpPr>
-          <ns0:cNvPr id="24" name="Tile4 Bg"/>
-          <ns0:cNvSpPr/>
-          <ns0:nvPr/>
-        </ns0:nvSpPr>
-        <ns0:spPr>
-          <ns1:xfrm xmlns:ns1="http://schemas.openxmlformats.org/drawingml/2006/main">
-            <ns1:off x="1143000" y="7372350"/>
-            <ns1:ext cx="5181600" cy="2190750"/>
-          </ns1:xfrm>
-          <ns2:prstGeom xmlns:ns2="http://schemas.openxmlformats.org/drawingml/2006/main" prst="rect">
-            <ns2:avLst/>
-          </ns2:prstGeom>
-          <ns3:solidFill xmlns:ns3="http://schemas.openxmlformats.org/drawingml/2006/main">
-            <ns3:srgbClr val="F3F4F6"/>
-          </ns3:solidFill>
-          <ns4:ln xmlns:ns4="http://schemas.openxmlformats.org/drawingml/2006/main">
-            <ns4:noFill/>
-          </ns4:ln>
-        </ns0:spPr>
-        <ns0:txBody>
-          <ns5:bodyPr xmlns:ns5="http://schemas.openxmlformats.org/drawingml/2006/main" rtlCol="0" anchor="ctr"/>
-          <ns6:lstStyle xmlns:ns6="http://schemas.openxmlformats.org/drawingml/2006/main"/>
-          <ns7:p xmlns:ns7="http://schemas.openxmlformats.org/drawingml/2006/main">
-            <ns7:endParaRPr lang="en-US"/>
-          </ns7:p>
-        </ns0:txBody>
-      </ns0:sp>
-      <ns0:sp xmlns:ns0="http://schemas.openxmlformats.org/presentationml/2006/main">
-        <ns0:nvSpPr>
-          <ns0:cNvPr id="25" name="Tile4 Rule"/>
-          <ns0:cNvSpPr/>
-          <ns0:nvPr/>
-        </ns0:nvSpPr>
-        <ns0:spPr>
-          <ns1:xfrm xmlns:ns1="http://schemas.openxmlformats.org/drawingml/2006/main">
-            <ns1:off x="1143000" y="7372350"/>
-            <ns1:ext cx="5181600" cy="28575"/>
-          </ns1:xfrm>
-          <ns2:prstGeom xmlns:ns2="http://schemas.openxmlformats.org/drawingml/2006/main" prst="rect">
-            <ns2:avLst/>
-          </ns2:prstGeom>
-          <ns3:solidFill xmlns:ns3="http://schemas.openxmlformats.org/drawingml/2006/main">
-            <ns3:srgbClr val="0F6BFF"/>
-          </ns3:solidFill>
-          <ns4:ln xmlns:ns4="http://schemas.openxmlformats.org/drawingml/2006/main">
-            <ns4:noFill/>
-          </ns4:ln>
-        </ns0:spPr>
-        <ns0:txBody>
-          <ns5:bodyPr xmlns:ns5="http://schemas.openxmlformats.org/drawingml/2006/main" rtlCol="0" anchor="ctr"/>
-          <ns6:lstStyle xmlns:ns6="http://schemas.openxmlformats.org/drawingml/2006/main"/>
-          <ns7:p xmlns:ns7="http://schemas.openxmlformats.org/drawingml/2006/main">
-            <ns7:endParaRPr lang="en-US"/>
-          </ns7:p>
-        </ns0:txBody>
-      </ns0:sp>
-      <ns0:sp xmlns:ns0="http://schemas.openxmlformats.org/presentationml/2006/main">
-        <ns0:nvSpPr>
-          <ns0:cNvPr id="26" name="Tile4 Label"/>
-          <ns0:cNvSpPr>
-            <ns1:spLocks xmlns:ns1="http://schemas.openxmlformats.org/drawingml/2006/main" noGrp="1"/>
-          </ns0:cNvSpPr>
-          <ns0:nvPr>
-            <ns0:ph type="body" idx="26"/>
-          </ns0:nvPr>
-        </ns0:nvSpPr>
-        <ns0:spPr>
-          <ns2:xfrm xmlns:ns2="http://schemas.openxmlformats.org/drawingml/2006/main">
-            <ns2:off x="1371600" y="8210550"/>
-            <ns2:ext cx="4724400" cy="304800"/>
-          </ns2:xfrm>
-          <ns3:prstGeom xmlns:ns3="http://schemas.openxmlformats.org/drawingml/2006/main" prst="rect">
-            <ns3:avLst/>
-          </ns3:prstGeom>
-        </ns0:spPr>
-        <ns0:txBody>
-          <ns4:bodyPr xmlns:ns4="http://schemas.openxmlformats.org/drawingml/2006/main" wrap="square" rtlCol="0" anchor="t" lIns="0" tIns="0" rIns="0" bIns="0"/>
-          <ns5:lstStyle xmlns:ns5="http://schemas.openxmlformats.org/drawingml/2006/main">
-            <ns5:lvl1pPr marL="0" indent="0" algn="l">
-              <ns5:buNone/>
-              <ns5:defRPr sz="1600" b="1">
-                <ns5:solidFill>
-                  <ns5:srgbClr val="0F6BFF"/>
-                </ns5:solidFill>
-                <ns5:latin typeface="Aptos"/>
-              </ns5:defRPr>
-            </ns5:lvl1pPr>
-          </ns5:lstStyle>
-          <ns6:p xmlns:ns6="http://schemas.openxmlformats.org/drawingml/2006/main">
-            <ns6:r>
-              <ns6:rPr lang="en-US"/>
-              <ns6:t>Tile 4 label</ns6:t>
-            </ns6:r>
-            <ns6:endParaRPr lang="en-US"/>
-          </ns6:p>
-        </ns0:txBody>
-      </ns0:sp>
-      <ns0:sp xmlns:ns0="http://schemas.openxmlformats.org/presentationml/2006/main">
-        <ns0:nvSpPr>
-          <ns0:cNvPr id="27" name="Tile4 Body"/>
-          <ns0:cNvSpPr>
-            <ns1:spLocks xmlns:ns1="http://schemas.openxmlformats.org/drawingml/2006/main" noGrp="1"/>
-          </ns0:cNvSpPr>
-          <ns0:nvPr>
-            <ns0:ph type="body" idx="27"/>
-          </ns0:nvPr>
-        </ns0:nvSpPr>
-        <ns0:spPr>
-          <ns2:xfrm xmlns:ns2="http://schemas.openxmlformats.org/drawingml/2006/main">
-            <ns2:off x="1371600" y="8553450"/>
-            <ns2:ext cx="4724400" cy="857250"/>
-          </ns2:xfrm>
-          <ns3:prstGeom xmlns:ns3="http://schemas.openxmlformats.org/drawingml/2006/main" prst="rect">
-            <ns3:avLst/>
-          </ns3:prstGeom>
-        </ns0:spPr>
-        <ns0:txBody>
-          <ns4:bodyPr xmlns:ns4="http://schemas.openxmlformats.org/drawingml/2006/main" wrap="square" rtlCol="0" anchor="t" lIns="0" tIns="0" rIns="0" bIns="0"/>
-          <ns5:lstStyle xmlns:ns5="http://schemas.openxmlformats.org/drawingml/2006/main">
-            <ns5:lvl1pPr marL="0" indent="0" algn="l">
-              <ns5:buNone/>
-              <ns5:defRPr sz="1800">
-                <ns5:solidFill>
-                  <ns5:srgbClr val="000000"/>
-                </ns5:solidFill>
-                <ns5:latin typeface="Aptos"/>
-              </ns5:defRPr>
-            </ns5:lvl1pPr>
-          </ns5:lstStyle>
-          <ns6:p xmlns:ns6="http://schemas.openxmlformats.org/drawingml/2006/main">
-            <ns6:r>
-              <ns6:rPr lang="en-US"/>
-              <ns6:t>One short sentence describing this tile.</ns6:t>
-            </ns6:r>
-            <ns6:endParaRPr lang="en-US"/>
-          </ns6:p>
-        </ns0:txBody>
-      </ns0:sp>
-      <ns0:sp xmlns:ns0="http://schemas.openxmlformats.org/presentationml/2006/main">
-        <ns0:nvSpPr>
-          <ns0:cNvPr id="28" name="Tile5 Bg"/>
-          <ns0:cNvSpPr/>
-          <ns0:nvPr/>
-        </ns0:nvSpPr>
-        <ns0:spPr>
-          <ns1:xfrm xmlns:ns1="http://schemas.openxmlformats.org/drawingml/2006/main">
-            <ns1:off x="6553200" y="7372350"/>
-            <ns1:ext cx="5181600" cy="2190750"/>
-          </ns1:xfrm>
-          <ns2:prstGeom xmlns:ns2="http://schemas.openxmlformats.org/drawingml/2006/main" prst="rect">
-            <ns2:avLst/>
-          </ns2:prstGeom>
-          <ns3:solidFill xmlns:ns3="http://schemas.openxmlformats.org/drawingml/2006/main">
-            <ns3:srgbClr val="F3F4F6"/>
-          </ns3:solidFill>
-          <ns4:ln xmlns:ns4="http://schemas.openxmlformats.org/drawingml/2006/main">
-            <ns4:noFill/>
-          </ns4:ln>
-        </ns0:spPr>
-        <ns0:txBody>
-          <ns5:bodyPr xmlns:ns5="http://schemas.openxmlformats.org/drawingml/2006/main" rtlCol="0" anchor="ctr"/>
-          <ns6:lstStyle xmlns:ns6="http://schemas.openxmlformats.org/drawingml/2006/main"/>
-          <ns7:p xmlns:ns7="http://schemas.openxmlformats.org/drawingml/2006/main">
-            <ns7:endParaRPr lang="en-US"/>
-          </ns7:p>
-        </ns0:txBody>
-      </ns0:sp>
-      <ns0:sp xmlns:ns0="http://schemas.openxmlformats.org/presentationml/2006/main">
-        <ns0:nvSpPr>
-          <ns0:cNvPr id="29" name="Tile5 Rule"/>
-          <ns0:cNvSpPr/>
-          <ns0:nvPr/>
-        </ns0:nvSpPr>
-        <ns0:spPr>
-          <ns1:xfrm xmlns:ns1="http://schemas.openxmlformats.org/drawingml/2006/main">
-            <ns1:off x="6553200" y="7372350"/>
-            <ns1:ext cx="5181600" cy="28575"/>
-          </ns1:xfrm>
-          <ns2:prstGeom xmlns:ns2="http://schemas.openxmlformats.org/drawingml/2006/main" prst="rect">
-            <ns2:avLst/>
-          </ns2:prstGeom>
-          <ns3:solidFill xmlns:ns3="http://schemas.openxmlformats.org/drawingml/2006/main">
-            <ns3:srgbClr val="0F6BFF"/>
-          </ns3:solidFill>
-          <ns4:ln xmlns:ns4="http://schemas.openxmlformats.org/drawingml/2006/main">
-            <ns4:noFill/>
-          </ns4:ln>
-        </ns0:spPr>
-        <ns0:txBody>
-          <ns5:bodyPr xmlns:ns5="http://schemas.openxmlformats.org/drawingml/2006/main" rtlCol="0" anchor="ctr"/>
-          <ns6:lstStyle xmlns:ns6="http://schemas.openxmlformats.org/drawingml/2006/main"/>
-          <ns7:p xmlns:ns7="http://schemas.openxmlformats.org/drawingml/2006/main">
-            <ns7:endParaRPr lang="en-US"/>
-          </ns7:p>
-        </ns0:txBody>
-      </ns0:sp>
-      <ns0:sp xmlns:ns0="http://schemas.openxmlformats.org/presentationml/2006/main">
-        <ns0:nvSpPr>
-          <ns0:cNvPr id="30" name="Tile5 Label"/>
-          <ns0:cNvSpPr>
-            <ns1:spLocks xmlns:ns1="http://schemas.openxmlformats.org/drawingml/2006/main" noGrp="1"/>
-          </ns0:cNvSpPr>
-          <ns0:nvPr>
-            <ns0:ph type="body" idx="28"/>
-          </ns0:nvPr>
-        </ns0:nvSpPr>
-        <ns0:spPr>
-          <ns2:xfrm xmlns:ns2="http://schemas.openxmlformats.org/drawingml/2006/main">
-            <ns2:off x="6781800" y="8210550"/>
-            <ns2:ext cx="4724400" cy="304800"/>
-          </ns2:xfrm>
-          <ns3:prstGeom xmlns:ns3="http://schemas.openxmlformats.org/drawingml/2006/main" prst="rect">
-            <ns3:avLst/>
-          </ns3:prstGeom>
-        </ns0:spPr>
-        <ns0:txBody>
-          <ns4:bodyPr xmlns:ns4="http://schemas.openxmlformats.org/drawingml/2006/main" wrap="square" rtlCol="0" anchor="t" lIns="0" tIns="0" rIns="0" bIns="0"/>
-          <ns5:lstStyle xmlns:ns5="http://schemas.openxmlformats.org/drawingml/2006/main">
-            <ns5:lvl1pPr marL="0" indent="0" algn="l">
-              <ns5:buNone/>
-              <ns5:defRPr sz="1600" b="1">
-                <ns5:solidFill>
-                  <ns5:srgbClr val="0F6BFF"/>
-                </ns5:solidFill>
-                <ns5:latin typeface="Aptos"/>
-              </ns5:defRPr>
-            </ns5:lvl1pPr>
-          </ns5:lstStyle>
-          <ns6:p xmlns:ns6="http://schemas.openxmlformats.org/drawingml/2006/main">
-            <ns6:r>
-              <ns6:rPr lang="en-US"/>
-              <ns6:t>Tile 5 label</ns6:t>
-            </ns6:r>
-            <ns6:endParaRPr lang="en-US"/>
-          </ns6:p>
-        </ns0:txBody>
-      </ns0:sp>
-      <ns0:sp xmlns:ns0="http://schemas.openxmlformats.org/presentationml/2006/main">
-        <ns0:nvSpPr>
-          <ns0:cNvPr id="31" name="Tile5 Body"/>
-          <ns0:cNvSpPr>
-            <ns1:spLocks xmlns:ns1="http://schemas.openxmlformats.org/drawingml/2006/main" noGrp="1"/>
-          </ns0:cNvSpPr>
-          <ns0:nvPr>
-            <ns0:ph type="body" idx="29"/>
-          </ns0:nvPr>
-        </ns0:nvSpPr>
-        <ns0:spPr>
-          <ns2:xfrm xmlns:ns2="http://schemas.openxmlformats.org/drawingml/2006/main">
-            <ns2:off x="6781800" y="8553450"/>
-            <ns2:ext cx="4724400" cy="857250"/>
-          </ns2:xfrm>
-          <ns3:prstGeom xmlns:ns3="http://schemas.openxmlformats.org/drawingml/2006/main" prst="rect">
-            <ns3:avLst/>
-          </ns3:prstGeom>
-        </ns0:spPr>
-        <ns0:txBody>
-          <ns4:bodyPr xmlns:ns4="http://schemas.openxmlformats.org/drawingml/2006/main" wrap="square" rtlCol="0" anchor="t" lIns="0" tIns="0" rIns="0" bIns="0"/>
-          <ns5:lstStyle xmlns:ns5="http://schemas.openxmlformats.org/drawingml/2006/main">
-            <ns5:lvl1pPr marL="0" indent="0" algn="l">
-              <ns5:buNone/>
-              <ns5:defRPr sz="1800">
-                <ns5:solidFill>
-                  <ns5:srgbClr val="000000"/>
-                </ns5:solidFill>
-                <ns5:latin typeface="Aptos"/>
-              </ns5:defRPr>
-            </ns5:lvl1pPr>
-          </ns5:lstStyle>
-          <ns6:p xmlns:ns6="http://schemas.openxmlformats.org/drawingml/2006/main">
-            <ns6:r>
-              <ns6:rPr lang="en-US"/>
-              <ns6:t>One short sentence describing this tile.</ns6:t>
-            </ns6:r>
-            <ns6:endParaRPr lang="en-US"/>
-          </ns6:p>
-        </ns0:txBody>
-      </ns0:sp>
-      <ns0:sp xmlns:ns0="http://schemas.openxmlformats.org/presentationml/2006/main">
-        <ns0:nvSpPr>
-          <ns0:cNvPr id="32" name="Tile6 Bg"/>
-          <ns0:cNvSpPr/>
-          <ns0:nvPr/>
-        </ns0:nvSpPr>
-        <ns0:spPr>
-          <ns1:xfrm xmlns:ns1="http://schemas.openxmlformats.org/drawingml/2006/main">
-            <ns1:off x="11963400" y="7372350"/>
-            <ns1:ext cx="5181600" cy="2190750"/>
-          </ns1:xfrm>
-          <ns2:prstGeom xmlns:ns2="http://schemas.openxmlformats.org/drawingml/2006/main" prst="rect">
-            <ns2:avLst/>
-          </ns2:prstGeom>
-          <ns3:solidFill xmlns:ns3="http://schemas.openxmlformats.org/drawingml/2006/main">
-            <ns3:srgbClr val="F3F4F6"/>
-          </ns3:solidFill>
-          <ns4:ln xmlns:ns4="http://schemas.openxmlformats.org/drawingml/2006/main">
-            <ns4:noFill/>
-          </ns4:ln>
-        </ns0:spPr>
-        <ns0:txBody>
-          <ns5:bodyPr xmlns:ns5="http://schemas.openxmlformats.org/drawingml/2006/main" rtlCol="0" anchor="ctr"/>
-          <ns6:lstStyle xmlns:ns6="http://schemas.openxmlformats.org/drawingml/2006/main"/>
-          <ns7:p xmlns:ns7="http://schemas.openxmlformats.org/drawingml/2006/main">
-            <ns7:endParaRPr lang="en-US"/>
-          </ns7:p>
-        </ns0:txBody>
-      </ns0:sp>
-      <ns0:sp xmlns:ns0="http://schemas.openxmlformats.org/presentationml/2006/main">
-        <ns0:nvSpPr>
-          <ns0:cNvPr id="33" name="Tile6 Rule"/>
-          <ns0:cNvSpPr/>
-          <ns0:nvPr/>
-        </ns0:nvSpPr>
-        <ns0:spPr>
-          <ns1:xfrm xmlns:ns1="http://schemas.openxmlformats.org/drawingml/2006/main">
-            <ns1:off x="11963400" y="7372350"/>
-            <ns1:ext cx="5181600" cy="28575"/>
-          </ns1:xfrm>
-          <ns2:prstGeom xmlns:ns2="http://schemas.openxmlformats.org/drawingml/2006/main" prst="rect">
-            <ns2:avLst/>
-          </ns2:prstGeom>
-          <ns3:solidFill xmlns:ns3="http://schemas.openxmlformats.org/drawingml/2006/main">
-            <ns3:srgbClr val="0F6BFF"/>
-          </ns3:solidFill>
-          <ns4:ln xmlns:ns4="http://schemas.openxmlformats.org/drawingml/2006/main">
-            <ns4:noFill/>
-          </ns4:ln>
-        </ns0:spPr>
-        <ns0:txBody>
-          <ns5:bodyPr xmlns:ns5="http://schemas.openxmlformats.org/drawingml/2006/main" rtlCol="0" anchor="ctr"/>
-          <ns6:lstStyle xmlns:ns6="http://schemas.openxmlformats.org/drawingml/2006/main"/>
-          <ns7:p xmlns:ns7="http://schemas.openxmlformats.org/drawingml/2006/main">
-            <ns7:endParaRPr lang="en-US"/>
-          </ns7:p>
-        </ns0:txBody>
-      </ns0:sp>
-      <ns0:sp xmlns:ns0="http://schemas.openxmlformats.org/presentationml/2006/main">
-        <ns0:nvSpPr>
-          <ns0:cNvPr id="34" name="Tile6 Label"/>
-          <ns0:cNvSpPr>
-            <ns1:spLocks xmlns:ns1="http://schemas.openxmlformats.org/drawingml/2006/main" noGrp="1"/>
-          </ns0:cNvSpPr>
-          <ns0:nvPr>
-            <ns0:ph type="body" idx="30"/>
-          </ns0:nvPr>
-        </ns0:nvSpPr>
-        <ns0:spPr>
-          <ns2:xfrm xmlns:ns2="http://schemas.openxmlformats.org/drawingml/2006/main">
-            <ns2:off x="12192000" y="8210550"/>
-            <ns2:ext cx="4724400" cy="304800"/>
-          </ns2:xfrm>
-          <ns3:prstGeom xmlns:ns3="http://schemas.openxmlformats.org/drawingml/2006/main" prst="rect">
-            <ns3:avLst/>
-          </ns3:prstGeom>
-        </ns0:spPr>
-        <ns0:txBody>
-          <ns4:bodyPr xmlns:ns4="http://schemas.openxmlformats.org/drawingml/2006/main" wrap="square" rtlCol="0" anchor="t" lIns="0" tIns="0" rIns="0" bIns="0"/>
-          <ns5:lstStyle xmlns:ns5="http://schemas.openxmlformats.org/drawingml/2006/main">
-            <ns5:lvl1pPr marL="0" indent="0" algn="l">
-              <ns5:buNone/>
-              <ns5:defRPr sz="1600" b="1">
-                <ns5:solidFill>
-                  <ns5:srgbClr val="0F6BFF"/>
-                </ns5:solidFill>
-                <ns5:latin typeface="Aptos"/>
-              </ns5:defRPr>
-            </ns5:lvl1pPr>
-          </ns5:lstStyle>
-          <ns6:p xmlns:ns6="http://schemas.openxmlformats.org/drawingml/2006/main">
-            <ns6:r>
-              <ns6:rPr lang="en-US"/>
-              <ns6:t>Tile 6 label</ns6:t>
-            </ns6:r>
-            <ns6:endParaRPr lang="en-US"/>
-          </ns6:p>
-        </ns0:txBody>
-      </ns0:sp>
-      <ns0:sp xmlns:ns0="http://schemas.openxmlformats.org/presentationml/2006/main">
-        <ns0:nvSpPr>
-          <ns0:cNvPr id="35" name="Tile6 Body"/>
-          <ns0:cNvSpPr>
-            <ns1:spLocks xmlns:ns1="http://schemas.openxmlformats.org/drawingml/2006/main" noGrp="1"/>
-          </ns0:cNvSpPr>
-          <ns0:nvPr>
-            <ns0:ph type="body" idx="31"/>
-          </ns0:nvPr>
-        </ns0:nvSpPr>
-        <ns0:spPr>
-          <ns2:xfrm xmlns:ns2="http://schemas.openxmlformats.org/drawingml/2006/main">
-            <ns2:off x="12192000" y="8553450"/>
-            <ns2:ext cx="4724400" cy="857250"/>
-          </ns2:xfrm>
-          <ns3:prstGeom xmlns:ns3="http://schemas.openxmlformats.org/drawingml/2006/main" prst="rect">
-            <ns3:avLst/>
-          </ns3:prstGeom>
-        </ns0:spPr>
-        <ns0:txBody>
-          <ns4:bodyPr xmlns:ns4="http://schemas.openxmlformats.org/drawingml/2006/main" wrap="square" rtlCol="0" anchor="t" lIns="0" tIns="0" rIns="0" bIns="0"/>
-          <ns5:lstStyle xmlns:ns5="http://schemas.openxmlformats.org/drawingml/2006/main">
-            <ns5:lvl1pPr marL="0" indent="0" algn="l">
-              <ns5:buNone/>
-              <ns5:defRPr sz="1800">
-                <ns5:solidFill>
-                  <ns5:srgbClr val="000000"/>
-                </ns5:solidFill>
-                <ns5:latin typeface="Aptos"/>
-              </ns5:defRPr>
-            </ns5:lvl1pPr>
-          </ns5:lstStyle>
-          <ns6:p xmlns:ns6="http://schemas.openxmlformats.org/drawingml/2006/main">
-            <ns6:r>
-              <ns6:rPr lang="en-US"/>
-              <ns6:t>One short sentence describing this tile.</ns6:t>
-            </ns6:r>
-            <ns6:endParaRPr lang="en-US"/>
-          </ns6:p>
-        </ns0:txBody>
-      </ns0:sp>
-      <ns0:sp xmlns:ns0="http://schemas.openxmlformats.org/presentationml/2006/main">
-        <ns0:nvSpPr>
-          <ns0:cNvPr id="36" name="Footer"/>
-          <ns0:cNvSpPr>
-            <ns1:spLocks xmlns:ns1="http://schemas.openxmlformats.org/drawingml/2006/main" noGrp="1"/>
-          </ns0:cNvSpPr>
-          <ns0:nvPr/>
-        </ns0:nvSpPr>
-        <ns0:spPr>
-          <ns2:xfrm xmlns:ns2="http://schemas.openxmlformats.org/drawingml/2006/main">
-            <ns2:off x="1143000" y="9982200"/>
-            <ns2:ext cx="16002000" cy="228600"/>
-          </ns2:xfrm>
-          <ns3:prstGeom xmlns:ns3="http://schemas.openxmlformats.org/drawingml/2006/main" prst="rect">
-            <ns3:avLst/>
-          </ns3:prstGeom>
-        </ns0:spPr>
-        <ns0:txBody>
-          <ns4:bodyPr xmlns:ns4="http://schemas.openxmlformats.org/drawingml/2006/main" wrap="square" rtlCol="0" anchor="t" lIns="0" tIns="0" rIns="0" bIns="0"/>
-          <ns5:lstStyle xmlns:ns5="http://schemas.openxmlformats.org/drawingml/2006/main">
-            <ns5:lvl1pPr marL="0" indent="0" algn="l">
-              <ns5:buNone/>
-              <ns5:defRPr sz="900" cap="all" spc="50">
-                <ns5:solidFill>
-                  <ns5:srgbClr val="6B7280"/>
-                </ns5:solidFill>
-                <ns5:latin typeface="Aptos"/>
-              </ns5:defRPr>
-            </ns5:lvl1pPr>
-          </ns5:lstStyle>
-          <ns6:p xmlns:ns6="http://schemas.openxmlformats.org/drawingml/2006/main">
-            <ns6:r>
-              <ns6:rPr lang="en-US"/>
-              <ns6:t>OPEN COMPONENT MODEL · OCM.SOFTWARE</ns6:t>
-            </ns6:r>
-            <ns6:endParaRPr lang="en-US"/>
-          </ns6:p>
-        </ns0:txBody>
-      </ns0:sp>
-    </p:spTree>
-  </p:cSld>
-  <p:clrMapOvr>
-    <a:masterClrMapping/>
-  </p:clrMapOvr>
-</p:sldLayout>
-</file>
-
-<file path=ppt/slideLayouts/slideLayout7.xml><?xml version="1.0" encoding="utf-8"?>
-<p:sldLayout xmlns:a="http://schemas.openxmlformats.org/drawingml/2006/main" xmlns:r="http://schemas.openxmlformats.org/officeDocument/2006/relationships" xmlns:p="http://schemas.openxmlformats.org/presentationml/2006/main" type="twoObj" preserve="1" userDrawn="1">
-  <p:cSld name="Content / 2-Column">
-    <p:bg>
-      <p:bgPr>
-        <a:solidFill>
-          <a:srgbClr val="FFFFFF"/>
-        </a:solidFill>
-        <a:effectLst/>
-      </p:bgPr>
-    </p:bg>
-    <p:spTree>
-      <p:nvGrpSpPr>
-        <p:cNvPr id="1" name=""/>
-        <p:cNvGrpSpPr/>
-        <p:nvPr/>
-      </p:nvGrpSpPr>
-      <p:grpSpPr>
-        <a:xfrm>
-          <a:off x="0" y="0"/>
-          <a:ext cx="0" cy="0"/>
-          <a:chOff x="0" y="0"/>
-          <a:chExt cx="0" cy="0"/>
-        </a:xfrm>
-      </p:grpSpPr>
-      <ns0:sp xmlns:ns0="http://schemas.openxmlformats.org/presentationml/2006/main">
-        <ns0:nvSpPr>
-          <ns0:cNvPr id="10" name="Eyebrow"/>
-          <ns0:cNvSpPr>
-            <ns1:spLocks xmlns:ns1="http://schemas.openxmlformats.org/drawingml/2006/main" noGrp="1"/>
-          </ns0:cNvSpPr>
-          <ns0:nvPr>
-            <ns0:ph type="body" idx="1"/>
-          </ns0:nvPr>
-        </ns0:nvSpPr>
-        <ns0:spPr>
-          <ns2:xfrm xmlns:ns2="http://schemas.openxmlformats.org/drawingml/2006/main">
-            <ns2:off x="1143000" y="2428875"/>
-            <ns2:ext cx="16002000" cy="457200"/>
-          </ns2:xfrm>
-          <ns3:prstGeom xmlns:ns3="http://schemas.openxmlformats.org/drawingml/2006/main" prst="rect">
-            <ns3:avLst/>
-          </ns3:prstGeom>
-        </ns0:spPr>
-        <ns0:txBody>
-          <ns4:bodyPr xmlns:ns4="http://schemas.openxmlformats.org/drawingml/2006/main" wrap="square" rtlCol="0" anchor="t" lIns="0" tIns="0" rIns="0" bIns="0"/>
-          <ns5:lstStyle xmlns:ns5="http://schemas.openxmlformats.org/drawingml/2006/main">
-            <ns5:lvl1pPr marL="0" indent="0" algn="l">
-              <ns5:buNone/>
-              <ns5:defRPr sz="2800" b="1" cap="all" spc="140">
-                <ns5:solidFill>
-                  <ns5:srgbClr val="0F6BFF"/>
-                </ns5:solidFill>
-                <ns5:latin typeface="Aptos"/>
-              </ns5:defRPr>
-            </ns5:lvl1pPr>
-          </ns5:lstStyle>
-          <ns6:p xmlns:ns6="http://schemas.openxmlformats.org/drawingml/2006/main">
-            <ns6:r>
-              <ns6:rPr lang="en-US"/>
-              <ns6:t>EYEBROW</ns6:t>
-            </ns6:r>
-            <ns6:endParaRPr lang="en-US"/>
-          </ns6:p>
-        </ns0:txBody>
-      </ns0:sp>
-      <ns0:sp xmlns:ns0="http://schemas.openxmlformats.org/presentationml/2006/main">
-        <ns0:nvSpPr>
-          <ns0:cNvPr id="11" name="Title"/>
-          <ns0:cNvSpPr>
-            <ns1:spLocks xmlns:ns1="http://schemas.openxmlformats.org/drawingml/2006/main" noGrp="1"/>
-          </ns0:cNvSpPr>
-          <ns0:nvPr>
-            <ns0:ph type="title" idx="2"/>
-          </ns0:nvPr>
-        </ns0:nvSpPr>
-        <ns0:spPr>
-          <ns2:xfrm xmlns:ns2="http://schemas.openxmlformats.org/drawingml/2006/main">
-            <ns2:off x="1143000" y="2933700"/>
-            <ns2:ext cx="16002000" cy="1905000"/>
-          </ns2:xfrm>
-          <ns3:prstGeom xmlns:ns3="http://schemas.openxmlformats.org/drawingml/2006/main" prst="rect">
-            <ns3:avLst/>
-          </ns3:prstGeom>
-        </ns0:spPr>
-        <ns0:txBody>
-          <ns4:bodyPr xmlns:ns4="http://schemas.openxmlformats.org/drawingml/2006/main" wrap="square" rtlCol="0" anchor="t" lIns="0" tIns="0" rIns="0" bIns="0"/>
-          <ns5:lstStyle xmlns:ns5="http://schemas.openxmlformats.org/drawingml/2006/main">
-            <ns5:lvl1pPr marL="0" indent="0" algn="l">
-              <ns5:lnSpc>
-                <ns5:spcPct val="90000"/>
-              </ns5:lnSpc>
-              <ns5:buNone/>
-              <ns5:defRPr sz="6400" b="1">
-                <ns5:solidFill>
-                  <ns5:srgbClr val="000000"/>
-                </ns5:solidFill>
-                <ns5:latin typeface="Aptos Display"/>
-              </ns5:defRPr>
-            </ns5:lvl1pPr>
-          </ns5:lstStyle>
-          <ns6:p xmlns:ns6="http://schemas.openxmlformats.org/drawingml/2006/main">
-            <ns6:r>
-              <ns6:rPr lang="en-US"/>
-              <ns6:t>Section title goes here.</ns6:t>
-            </ns6:r>
-            <ns6:endParaRPr lang="en-US"/>
-          </ns6:p>
-        </ns0:txBody>
-      </ns0:sp>
-      <ns0:sp xmlns:ns0="http://schemas.openxmlformats.org/presentationml/2006/main">
-        <ns0:nvSpPr>
-          <ns0:cNvPr id="12" name="Left Body"/>
-          <ns0:cNvSpPr>
-            <ns1:spLocks xmlns:ns1="http://schemas.openxmlformats.org/drawingml/2006/main" noGrp="1"/>
-          </ns0:cNvSpPr>
-          <ns0:nvPr>
-            <ns0:ph type="body" idx="10"/>
-          </ns0:nvPr>
-        </ns0:nvSpPr>
-        <ns0:spPr>
-          <ns2:xfrm xmlns:ns2="http://schemas.openxmlformats.org/drawingml/2006/main">
-            <ns2:off x="1143000" y="4953000"/>
-            <ns2:ext cx="7810500" cy="4381500"/>
-          </ns2:xfrm>
-          <ns3:prstGeom xmlns:ns3="http://schemas.openxmlformats.org/drawingml/2006/main" prst="rect">
-            <ns3:avLst/>
-          </ns3:prstGeom>
-        </ns0:spPr>
-        <ns0:txBody>
-          <ns4:bodyPr xmlns:ns4="http://schemas.openxmlformats.org/drawingml/2006/main" wrap="square" rtlCol="0" anchor="t" lIns="0" tIns="0" rIns="0" bIns="0"/>
-          <ns5:lstStyle xmlns:ns5="http://schemas.openxmlformats.org/drawingml/2006/main">
-            <ns5:lvl1pPr marL="0" indent="0" algn="l">
-              <ns5:buNone/>
-              <ns5:defRPr sz="2200">
-                <ns5:solidFill>
-                  <ns5:srgbClr val="000000"/>
-                </ns5:solidFill>
-                <ns5:latin typeface="Aptos"/>
-              </ns5:defRPr>
-            </ns5:lvl1pPr>
-          </ns5:lstStyle>
-          <ns6:p xmlns:ns6="http://schemas.openxmlformats.org/drawingml/2006/main">
-            <ns6:r>
-              <ns6:rPr lang="en-US"/>
-              <ns6:t>Left column body.</ns6:t>
-            </ns6:r>
-            <ns6:endParaRPr lang="en-US"/>
-          </ns6:p>
-        </ns0:txBody>
-      </ns0:sp>
-      <ns0:sp xmlns:ns0="http://schemas.openxmlformats.org/presentationml/2006/main">
-        <ns0:nvSpPr>
-          <ns0:cNvPr id="13" name="Right Body"/>
-          <ns0:cNvSpPr>
-            <ns1:spLocks xmlns:ns1="http://schemas.openxmlformats.org/drawingml/2006/main" noGrp="1"/>
-          </ns0:cNvSpPr>
-          <ns0:nvPr>
-            <ns0:ph type="body" idx="11"/>
-          </ns0:nvPr>
-        </ns0:nvSpPr>
-        <ns0:spPr>
-          <ns2:xfrm xmlns:ns2="http://schemas.openxmlformats.org/drawingml/2006/main">
-            <ns2:off x="9334500" y="4953000"/>
-            <ns2:ext cx="7810500" cy="4381500"/>
-          </ns2:xfrm>
-          <ns3:prstGeom xmlns:ns3="http://schemas.openxmlformats.org/drawingml/2006/main" prst="rect">
-            <ns3:avLst/>
-          </ns3:prstGeom>
-        </ns0:spPr>
-        <ns0:txBody>
-          <ns4:bodyPr xmlns:ns4="http://schemas.openxmlformats.org/drawingml/2006/main" wrap="square" rtlCol="0" anchor="t" lIns="0" tIns="0" rIns="0" bIns="0"/>
-          <ns5:lstStyle xmlns:ns5="http://schemas.openxmlformats.org/drawingml/2006/main">
-            <ns5:lvl1pPr marL="0" indent="0" algn="l">
-              <ns5:buNone/>
-              <ns5:defRPr sz="2200">
-                <ns5:solidFill>
-                  <ns5:srgbClr val="000000"/>
-                </ns5:solidFill>
-                <ns5:latin typeface="Aptos"/>
-              </ns5:defRPr>
-            </ns5:lvl1pPr>
-          </ns5:lstStyle>
-          <ns6:p xmlns:ns6="http://schemas.openxmlformats.org/drawingml/2006/main">
-            <ns6:r>
-              <ns6:rPr lang="en-US"/>
-              <ns6:t>Right column body.</ns6:t>
-            </ns6:r>
-            <ns6:endParaRPr lang="en-US"/>
-          </ns6:p>
-        </ns0:txBody>
-      </ns0:sp>
-      <ns0:sp xmlns:ns0="http://schemas.openxmlformats.org/presentationml/2006/main">
-        <ns0:nvSpPr>
-          <ns0:cNvPr id="14" name="Footer"/>
-          <ns0:cNvSpPr>
-            <ns1:spLocks xmlns:ns1="http://schemas.openxmlformats.org/drawingml/2006/main" noGrp="1"/>
-          </ns0:cNvSpPr>
-          <ns0:nvPr/>
-        </ns0:nvSpPr>
-        <ns0:spPr>
-          <ns2:xfrm xmlns:ns2="http://schemas.openxmlformats.org/drawingml/2006/main">
-            <ns2:off x="1143000" y="9982200"/>
-            <ns2:ext cx="16002000" cy="228600"/>
-          </ns2:xfrm>
-          <ns3:prstGeom xmlns:ns3="http://schemas.openxmlformats.org/drawingml/2006/main" prst="rect">
-            <ns3:avLst/>
-          </ns3:prstGeom>
-        </ns0:spPr>
-        <ns0:txBody>
-          <ns4:bodyPr xmlns:ns4="http://schemas.openxmlformats.org/drawingml/2006/main" wrap="square" rtlCol="0" anchor="t" lIns="0" tIns="0" rIns="0" bIns="0"/>
-          <ns5:lstStyle xmlns:ns5="http://schemas.openxmlformats.org/drawingml/2006/main">
-            <ns5:lvl1pPr marL="0" indent="0" algn="l">
-              <ns5:buNone/>
-              <ns5:defRPr sz="900" cap="all" spc="50">
-                <ns5:solidFill>
-                  <ns5:srgbClr val="6B7280"/>
-                </ns5:solidFill>
-                <ns5:latin typeface="Aptos"/>
-              </ns5:defRPr>
-            </ns5:lvl1pPr>
-          </ns5:lstStyle>
-          <ns6:p xmlns:ns6="http://schemas.openxmlformats.org/drawingml/2006/main">
-            <ns6:r>
-              <ns6:rPr lang="en-US"/>
-              <ns6:t>OPEN COMPONENT MODEL · OCM.SOFTWARE</ns6:t>
-            </ns6:r>
-            <ns6:endParaRPr lang="en-US"/>
-          </ns6:p>
-        </ns0:txBody>
-      </ns0:sp>
-    </p:spTree>
-  </p:cSld>
-  <p:clrMapOvr>
-    <a:masterClrMapping/>
-  </p:clrMapOvr>
-</p:sldLayout>
-</file>
-
-<file path=ppt/slideLayouts/slideLayout8.xml><?xml version="1.0" encoding="utf-8"?>
-<p:sldLayout xmlns:a="http://schemas.openxmlformats.org/drawingml/2006/main" xmlns:r="http://schemas.openxmlformats.org/officeDocument/2006/relationships" xmlns:p="http://schemas.openxmlformats.org/presentationml/2006/main" type="secHead" preserve="1" userDrawn="1">
-  <p:cSld name="Section Divider">
-    <p:bg>
-      <p:bgPr>
-        <a:solidFill>
-          <a:srgbClr val="0F6BFF"/>
-        </a:solidFill>
-        <a:effectLst/>
-      </p:bgPr>
-    </p:bg>
-    <p:spTree>
-      <p:nvGrpSpPr>
-        <p:cNvPr id="1" name=""/>
-        <p:cNvGrpSpPr/>
-        <p:nvPr/>
-      </p:nvGrpSpPr>
-      <p:grpSpPr>
-        <a:xfrm>
-          <a:off x="0" y="0"/>
-          <a:ext cx="0" cy="0"/>
-          <a:chOff x="0" y="0"/>
-          <a:chExt cx="0" cy="0"/>
-        </a:xfrm>
-      </p:grpSpPr>
-      <ns0:sp xmlns:ns0="http://schemas.openxmlformats.org/presentationml/2006/main">
-        <ns0:nvSpPr>
-          <ns0:cNvPr id="10" name="Section Title"/>
-          <ns0:cNvSpPr>
-            <ns1:spLocks xmlns:ns1="http://schemas.openxmlformats.org/drawingml/2006/main" noGrp="1"/>
-          </ns0:cNvSpPr>
-          <ns0:nvPr>
-            <ns0:ph type="title" idx="1"/>
-          </ns0:nvPr>
-        </ns0:nvSpPr>
-        <ns0:spPr>
-          <ns2:xfrm xmlns:ns2="http://schemas.openxmlformats.org/drawingml/2006/main">
-            <ns2:off x="762000" y="4381500"/>
-            <ns2:ext cx="16764000" cy="1905000"/>
-          </ns2:xfrm>
-          <ns3:prstGeom xmlns:ns3="http://schemas.openxmlformats.org/drawingml/2006/main" prst="rect">
-            <ns3:avLst/>
-          </ns3:prstGeom>
-        </ns0:spPr>
-        <ns0:txBody>
-          <ns4:bodyPr xmlns:ns4="http://schemas.openxmlformats.org/drawingml/2006/main" wrap="square" rtlCol="0" anchor="ctr" lIns="0" tIns="0" rIns="0" bIns="0"/>
-          <ns5:lstStyle xmlns:ns5="http://schemas.openxmlformats.org/drawingml/2006/main">
-            <ns5:lvl1pPr marL="0" indent="0" algn="ctr">
-              <ns5:buNone/>
-              <ns5:defRPr sz="7200" b="1">
-                <ns5:solidFill>
-                  <ns5:srgbClr val="FFFFFF"/>
-                </ns5:solidFill>
-                <ns5:latin typeface="Aptos Display"/>
-              </ns5:defRPr>
-            </ns5:lvl1pPr>
-          </ns5:lstStyle>
-          <ns6:p xmlns:ns6="http://schemas.openxmlformats.org/drawingml/2006/main">
-            <ns6:r>
-              <ns6:rPr lang="en-US"/>
-              <ns6:t>Section</ns6:t>
-            </ns6:r>
-            <ns6:endParaRPr lang="en-US"/>
-          </ns6:p>
-        </ns0:txBody>
-      </ns0:sp>
-    </p:spTree>
-  </p:cSld>
-  <p:clrMapOvr>
-    <a:masterClrMapping/>
-  </p:clrMapOvr>
-</p:sldLayout>
-</file>
-
-<file path=ppt/slideLayouts/slideLayout9.xml><?xml version="1.0" encoding="utf-8"?>
-<p:sldLayout xmlns:a="http://schemas.openxmlformats.org/drawingml/2006/main" xmlns:r="http://schemas.openxmlformats.org/officeDocument/2006/relationships" xmlns:p="http://schemas.openxmlformats.org/presentationml/2006/main" type="obj" preserve="1" userDrawn="1">
-  <p:cSld name="Plain">
-    <p:bg>
-      <p:bgPr>
-        <a:solidFill>
-          <a:srgbClr val="FFFFFF"/>
-        </a:solidFill>
-        <a:effectLst/>
-      </p:bgPr>
-    </p:bg>
-    <p:spTree>
-      <p:nvGrpSpPr>
-        <p:cNvPr id="1" name=""/>
-        <p:cNvGrpSpPr/>
-        <p:nvPr/>
-      </p:nvGrpSpPr>
-      <p:grpSpPr>
-        <a:xfrm>
-          <a:off x="0" y="0"/>
-          <a:ext cx="0" cy="0"/>
-          <a:chOff x="0" y="0"/>
-          <a:chExt cx="0" cy="0"/>
-        </a:xfrm>
-      </p:grpSpPr>
-      <ns0:sp xmlns:ns0="http://schemas.openxmlformats.org/presentationml/2006/main">
-        <ns0:nvSpPr>
-          <ns0:cNvPr id="10" name="Eyebrow"/>
-          <ns0:cNvSpPr>
-            <ns1:spLocks xmlns:ns1="http://schemas.openxmlformats.org/drawingml/2006/main" noGrp="1"/>
-          </ns0:cNvSpPr>
-          <ns0:nvPr>
-            <ns0:ph type="body" idx="1"/>
-          </ns0:nvPr>
-        </ns0:nvSpPr>
-        <ns0:spPr>
-          <ns2:xfrm xmlns:ns2="http://schemas.openxmlformats.org/drawingml/2006/main">
-            <ns2:off x="1143000" y="2428875"/>
-            <ns2:ext cx="16002000" cy="457200"/>
-          </ns2:xfrm>
-          <ns3:prstGeom xmlns:ns3="http://schemas.openxmlformats.org/drawingml/2006/main" prst="rect">
-            <ns3:avLst/>
-          </ns3:prstGeom>
-        </ns0:spPr>
-        <ns0:txBody>
-          <ns4:bodyPr xmlns:ns4="http://schemas.openxmlformats.org/drawingml/2006/main" wrap="square" rtlCol="0" anchor="t" lIns="0" tIns="0" rIns="0" bIns="0"/>
-          <ns5:lstStyle xmlns:ns5="http://schemas.openxmlformats.org/drawingml/2006/main">
-            <ns5:lvl1pPr marL="0" indent="0" algn="l">
-              <ns5:buNone/>
-              <ns5:defRPr sz="2800" b="1" cap="all" spc="140">
-                <ns5:solidFill>
-                  <ns5:srgbClr val="0F6BFF"/>
-                </ns5:solidFill>
-                <ns5:latin typeface="Aptos"/>
-              </ns5:defRPr>
-            </ns5:lvl1pPr>
-          </ns5:lstStyle>
-          <ns6:p xmlns:ns6="http://schemas.openxmlformats.org/drawingml/2006/main">
-            <ns6:r>
-              <ns6:rPr lang="en-US"/>
-              <ns6:t>EYEBROW</ns6:t>
-            </ns6:r>
-            <ns6:endParaRPr lang="en-US"/>
-          </ns6:p>
-        </ns0:txBody>
-      </ns0:sp>
-      <ns0:sp xmlns:ns0="http://schemas.openxmlformats.org/presentationml/2006/main">
-        <ns0:nvSpPr>
-          <ns0:cNvPr id="11" name="Title"/>
-          <ns0:cNvSpPr>
-            <ns1:spLocks xmlns:ns1="http://schemas.openxmlformats.org/drawingml/2006/main" noGrp="1"/>
-          </ns0:cNvSpPr>
-          <ns0:nvPr>
-            <ns0:ph type="title" idx="2"/>
-          </ns0:nvPr>
-        </ns0:nvSpPr>
-        <ns0:spPr>
-          <ns2:xfrm xmlns:ns2="http://schemas.openxmlformats.org/drawingml/2006/main">
-            <ns2:off x="1143000" y="2933700"/>
-            <ns2:ext cx="16002000" cy="1905000"/>
-          </ns2:xfrm>
-          <ns3:prstGeom xmlns:ns3="http://schemas.openxmlformats.org/drawingml/2006/main" prst="rect">
-            <ns3:avLst/>
-          </ns3:prstGeom>
-        </ns0:spPr>
-        <ns0:txBody>
-          <ns4:bodyPr xmlns:ns4="http://schemas.openxmlformats.org/drawingml/2006/main" wrap="square" rtlCol="0" anchor="t" lIns="0" tIns="0" rIns="0" bIns="0"/>
-          <ns5:lstStyle xmlns:ns5="http://schemas.openxmlformats.org/drawingml/2006/main">
-            <ns5:lvl1pPr marL="0" indent="0" algn="l">
-              <ns5:lnSpc>
-                <ns5:spcPct val="90000"/>
-              </ns5:lnSpc>
-              <ns5:buNone/>
-              <ns5:defRPr sz="6400" b="1">
-                <ns5:solidFill>
-                  <ns5:srgbClr val="000000"/>
-                </ns5:solidFill>
-                <ns5:latin typeface="Aptos Display"/>
-              </ns5:defRPr>
-            </ns5:lvl1pPr>
-          </ns5:lstStyle>
-          <ns6:p xmlns:ns6="http://schemas.openxmlformats.org/drawingml/2006/main">
-            <ns6:r>
-              <ns6:rPr lang="en-US"/>
-              <ns6:t>Section title goes here.</ns6:t>
-            </ns6:r>
-            <ns6:endParaRPr lang="en-US"/>
-          </ns6:p>
-        </ns0:txBody>
-      </ns0:sp>
-      <ns0:sp xmlns:ns0="http://schemas.openxmlformats.org/presentationml/2006/main">
-        <ns0:nvSpPr>
-          <ns0:cNvPr id="12" name="Body"/>
-          <ns0:cNvSpPr>
-            <ns1:spLocks xmlns:ns1="http://schemas.openxmlformats.org/drawingml/2006/main" noGrp="1"/>
-          </ns0:cNvSpPr>
-          <ns0:nvPr>
-            <ns0:ph type="body" idx="10"/>
-          </ns0:nvPr>
-        </ns0:nvSpPr>
-        <ns0:spPr>
-          <ns2:xfrm xmlns:ns2="http://schemas.openxmlformats.org/drawingml/2006/main">
-            <ns2:off x="1143000" y="5524500"/>
-            <ns2:ext cx="16002000" cy="3810000"/>
           </ns2:xfrm>
           <ns3:prstGeom xmlns:ns3="http://schemas.openxmlformats.org/drawingml/2006/main" prst="rect">
             <ns3:avLst/>
@@ -3334,7 +3083,6 @@
     <p:sldLayoutId id="2147483655" r:id="rId8"/>
     <p:sldLayoutId id="2147483656" r:id="rId9"/>
     <p:sldLayoutId id="2147483657" r:id="rId10"/>
-    <p:sldLayoutId id="2147483658" r:id="rId11"/>
   </p:sldLayoutIdLst>
   <p:txStyles>
     <p:titleStyle>
@@ -5219,7 +4967,7 @@
           <a:lstStyle/>
           <a:p>
             <a:r>
-              <a:t>THE STANDARDIZATION WINDOW IS CLOSING</a:t>
+              <a:t>THE WINDOW IS CLOSING</a:t>
             </a:r>
           </a:p>
         </p:txBody>
@@ -5240,7 +4988,7 @@
           <a:lstStyle/>
           <a:p>
             <a:r>
-              <a:t>Adoption is consolidating. Late entrants pay migration cost; early stewards keep optionality.</a:t>
+              <a:t>Adoption is consolidating. NeoNephos governance, CRA enforcement, sovereign-cloud market formation — the rails are being laid now. Late entrants pay migration cost; early stewards keep optionality.</a:t>
             </a:r>
           </a:p>
         </p:txBody>
@@ -5349,7 +5097,7 @@
       </p:sp>
       <p:pic>
         <p:nvPicPr>
-          <p:cNvPr id="4" name="Picture 3" descr="03-meet-ocm-hub-and-spoke_1680.png"/>
+          <p:cNvPr id="4" name="Picture 3" descr="03-meet-ocm-hub-and-spoke_1890.png"/>
           <p:cNvPicPr>
             <a:picLocks noChangeAspect="1"/>
           </p:cNvPicPr>
@@ -5363,8 +5111,8 @@
         </p:blipFill>
         <p:spPr>
           <a:xfrm>
-            <a:off x="1143000" y="4953000"/>
-            <a:ext cx="16002000" cy="4914900"/>
+            <a:off x="-866775" y="4191000"/>
+            <a:ext cx="18002250" cy="5734050"/>
           </a:xfrm>
           <a:prstGeom prst="rect">
             <a:avLst/>
@@ -5690,7 +5438,7 @@
           <a:lstStyle/>
           <a:p>
             <a:r>
-              <a:t>OCM doesn't replace your tools. It gives them something to sign together.</a:t>
+              <a:t>OCM doesn't replace your tools. It gives them an envelope to compose around.</a:t>
             </a:r>
           </a:p>
         </p:txBody>
@@ -5711,7 +5459,7 @@
           <a:lstStyle/>
           <a:p>
             <a:r>
-              <a:t>KEYLESS (SIGSTORE) / KEY-BASED (YOUR PKI)</a:t>
+              <a:t>SIGNING</a:t>
             </a:r>
           </a:p>
         </p:txBody>
@@ -5732,7 +5480,7 @@
           <a:lstStyle/>
           <a:p>
             <a:r>
-              <a:t>Only signs one artifact. OCM gives them the complete SBoD to sign. One signature, covering every artifact in the delivery, by digest. Your existing keys still work.</a:t>
+              <a:t>Keyless (Sigstore) or key-based (your PKI) signs one artifact at a time. OCM gives them the complete SBoD to sign — one signature covers every artifact in the delivery, by digest.</a:t>
             </a:r>
           </a:p>
         </p:txBody>
@@ -5753,7 +5501,7 @@
           <a:lstStyle/>
           <a:p>
             <a:r>
-              <a:t>YOUR SBOM TOOL OR FORMAT (SYFT, CYCLONEDX, SPDX)</a:t>
+              <a:t>TRANSPORT</a:t>
             </a:r>
           </a:p>
         </p:txBody>
@@ -5774,7 +5522,7 @@
           <a:lstStyle/>
           <a:p>
             <a:r>
-              <a:t>Lists what's in your software. The SBoD contains or references it. Your SBOM tool is unchanged; the SBOM now travels with the signature.</a:t>
+              <a:t>Helm registries, S3, OCI — each moves artifacts. OCM moves a signed envelope across any boundary: registry to registry, registry to air-gapped archive. The signature travels intact.</a:t>
             </a:r>
           </a:p>
         </p:txBody>
@@ -5795,7 +5543,7 @@
           <a:lstStyle/>
           <a:p>
             <a:r>
-              <a:t>A BIT OF OCI + SIGSTORE + YOUR OWN SCRIPTS</a:t>
+              <a:t>COMPLIANCE</a:t>
             </a:r>
           </a:p>
         </p:txBody>
@@ -5816,7 +5564,7 @@
           <a:lstStyle/>
           <a:p>
             <a:r>
-              <a:t>Can almost get you there, in pieces. OCM is the standardised version, openly governed, with conformance tests and the SBoD vocabulary your auditors are starting to expect.</a:t>
+              <a:t>Trivy, Grype, your SBOM tools — each scans in isolation. OCM (via Open Delivery Gear) correlates every finding by component identity. Compliance is a system output, not a quarterly project.</a:t>
             </a:r>
           </a:p>
         </p:txBody>

--- a/docs/community/marketing/decks/exec-phase1/OCM-Sovereign-Delivery-Internal-Sponsor.pptx
+++ b/docs/community/marketing/decks/exec-phase1/OCM-Sovereign-Delivery-Internal-Sponsor.pptx
@@ -157,8 +157,8 @@
         </ns0:nvSpPr>
         <ns0:spPr>
           <ns2:xfrm xmlns:ns2="http://schemas.openxmlformats.org/drawingml/2006/main">
-            <ns2:off x="914400" y="1905000"/>
-            <ns2:ext cx="16192500" cy="1333500"/>
+            <ns2:off x="914400" y="1714500"/>
+            <ns2:ext cx="16192500" cy="1524000"/>
           </ns2:xfrm>
           <ns3:prstGeom xmlns:ns3="http://schemas.openxmlformats.org/drawingml/2006/main" prst="rect">
             <ns3:avLst/>
@@ -200,8 +200,8 @@
         </ns0:nvSpPr>
         <ns0:spPr>
           <ns2:xfrm xmlns:ns2="http://schemas.openxmlformats.org/drawingml/2006/main">
-            <ns2:off x="914400" y="3333750"/>
-            <ns2:ext cx="16192500" cy="1333500"/>
+            <ns2:off x="914400" y="3524250"/>
+            <ns2:ext cx="16192500" cy="1524000"/>
           </ns2:xfrm>
           <ns3:prstGeom xmlns:ns3="http://schemas.openxmlformats.org/drawingml/2006/main" prst="rect">
             <ns3:avLst/>
@@ -243,7 +243,7 @@
         </ns0:nvSpPr>
         <ns0:spPr>
           <ns2:xfrm xmlns:ns2="http://schemas.openxmlformats.org/drawingml/2006/main">
-            <ns2:off x="914400" y="5048250"/>
+            <ns2:off x="914400" y="5334000"/>
             <ns2:ext cx="16192500" cy="857250"/>
           </ns2:xfrm>
           <ns3:prstGeom xmlns:ns3="http://schemas.openxmlformats.org/drawingml/2006/main" prst="rect">
@@ -289,7 +289,7 @@
         </ns0:nvSpPr>
         <ns0:spPr>
           <ns2:xfrm xmlns:ns2="http://schemas.openxmlformats.org/drawingml/2006/main">
-            <ns2:off x="914400" y="6286500"/>
+            <ns2:off x="914400" y="6572250"/>
             <ns2:ext cx="16192500" cy="571500"/>
           </ns2:xfrm>
           <ns3:prstGeom xmlns:ns3="http://schemas.openxmlformats.org/drawingml/2006/main" prst="rect">
@@ -3392,7 +3392,7 @@
                   <a:srgbClr val="FFFFFF"/>
                 </a:solidFill>
               </a:rPr>
-              <a:t>Why OCM matters more now —</a:t>
+              <a:t>Every LoB rebuilds</a:t>
             </a:r>
           </a:p>
         </p:txBody>
@@ -3419,7 +3419,7 @@
                   <a:srgbClr val="FFFFFF"/>
                 </a:solidFill>
               </a:rPr>
-              <a:t>and </a:t>
+              <a:t/>
             </a:r>
             <a:r>
               <a:rPr>
@@ -3438,7 +3438,7 @@
                   <a:lin ang="0" scaled="1"/>
                 </a:gradFill>
               </a:rPr>
-              <a:t>what we lose by walking away</a:t>
+              <a:t>the same delivery stack.</a:t>
             </a:r>
           </a:p>
         </p:txBody>
@@ -3464,7 +3464,7 @@
                   <a:srgbClr val="5CD6FF"/>
                 </a:solidFill>
               </a:rPr>
-              <a:t>Compounding strategic position in the open standard for regulated delivery.</a:t>
+              <a:t>OCM is the shared standard. Each LoB still ships — but on the same model.</a:t>
             </a:r>
           </a:p>
         </p:txBody>
@@ -3645,7 +3645,7 @@
                   <a:srgbClr val="000000"/>
                 </a:solidFill>
               </a:rPr>
-              <a:t>Open Delivery Gear (ODG) is OCM's compliance automation engine.</a:t>
+              <a:t>Open Delivery Gear (ODG) is the OCM compliance automation engine.</a:t>
             </a:r>
           </a:p>
           <a:p>
@@ -4359,7 +4359,7 @@
                   <a:srgbClr val="000000"/>
                 </a:solidFill>
               </a:rPr>
-              <a:t>Kyma — SAP's open-source Kubernetes-based runtime.</a:t>
+              <a:t>Kyma — SAP-originated open-source Kubernetes-based runtime.</a:t>
             </a:r>
           </a:p>
           <a:p>
@@ -5030,7 +5030,7 @@
           <a:lstStyle/>
           <a:p>
             <a:r>
-              <a:t>Walking away costs more than staying. Each LoB that builds its own retrofit pays the cost OCM was supposed to amortize. Competitors who keep investing get the standard built around their preferences, not SAP's.</a:t>
+              <a:t>Walking away costs more than staying. Each LoB that builds its own retrofit pays the cost OCM was supposed to amortize. Competitors who keep investing get the standard built around their preferences. SAP doesn't.</a:t>
             </a:r>
           </a:p>
         </p:txBody>
@@ -5895,7 +5895,7 @@
       </p:sp>
       <p:pic>
         <p:nvPicPr>
-          <p:cNvPr id="4" name="Picture 3" descr="06-sovereign-airgap_1680.png"/>
+          <p:cNvPr id="4" name="Picture 3" descr="06-sovereign-airgap_1519.png"/>
           <p:cNvPicPr>
             <a:picLocks noChangeAspect="1"/>
           </p:cNvPicPr>
@@ -5909,8 +5909,8 @@
         </p:blipFill>
         <p:spPr>
           <a:xfrm>
-            <a:off x="3483429" y="4953000"/>
-            <a:ext cx="11321142" cy="4953000"/>
+            <a:off x="1914149" y="3686175"/>
+            <a:ext cx="13326226" cy="6334125"/>
           </a:xfrm>
           <a:prstGeom prst="rect">
             <a:avLst/>

--- a/docs/community/marketing/decks/exec-phase1/OCM-Sovereign-Delivery-Internal-Sponsor.pptx
+++ b/docs/community/marketing/decks/exec-phase1/OCM-Sovereign-Delivery-Internal-Sponsor.pptx
@@ -3780,6 +3780,41 @@
           </a:p>
         </p:txBody>
       </p:sp>
+      <p:sp>
+        <p:nvSpPr>
+          <p:cNvPr id="5" name="TextBox 4"/>
+          <p:cNvSpPr txBox="1"/>
+          <p:nvPr/>
+        </p:nvSpPr>
+        <p:spPr>
+          <a:xfrm>
+            <a:off x="1143000" y="9715500"/>
+            <a:ext cx="16002000" cy="381000"/>
+          </a:xfrm>
+          <a:prstGeom prst="rect">
+            <a:avLst/>
+          </a:prstGeom>
+          <a:noFill/>
+        </p:spPr>
+        <p:txBody>
+          <a:bodyPr wrap="none" lIns="0" rIns="0" tIns="0" bIns="0">
+            <a:spAutoFit/>
+          </a:bodyPr>
+          <a:lstStyle/>
+          <a:p>
+            <a:pPr algn="ctr"/>
+            <a:r>
+              <a:rPr sz="1300">
+                <a:solidFill>
+                  <a:srgbClr val="6B7280"/>
+                </a:solidFill>
+                <a:latin typeface="Aptos"/>
+              </a:rPr>
+              <a:t>github.com/open-component-model/open-delivery-gear</a:t>
+            </a:r>
+          </a:p>
+        </p:txBody>
+      </p:sp>
     </p:spTree>
   </p:cSld>
   <p:clrMapOvr>
@@ -3877,7 +3912,7 @@
           <a:lstStyle/>
           <a:p>
             <a:r>
-              <a:t>Pack a complete component once. From source into a regulated sovereign environment — every operator, every region, every air-gap.</a:t>
+              <a:t>Pack once, ship everywhere. Validated end-to-end in OCM's open-source sovereign conformance scenario.</a:t>
             </a:r>
           </a:p>
         </p:txBody>
@@ -3919,7 +3954,7 @@
           <a:lstStyle/>
           <a:p>
             <a:r>
-              <a:t>Each LoB gets DORA-aligned reporting from one shared primitive — not built N times.</a:t>
+              <a:t>DORA-aligned reporting from one shared primitive — ODG correlates findings by component identity, not built N times.</a:t>
             </a:r>
           </a:p>
         </p:txBody>
@@ -4003,7 +4038,7 @@
           <a:lstStyle/>
           <a:p>
             <a:r>
-              <a:t>An incident's blast radius is one query — “which deployments contain OCM component X?” — across every LoB on OCM.</a:t>
+              <a:t>Blast radius is one query — “which deployments contain OCM component X?” — answered via the OCM coordinate system.</a:t>
             </a:r>
           </a:p>
         </p:txBody>
@@ -4087,7 +4122,7 @@
           <a:lstStyle/>
           <a:p>
             <a:r>
-              <a:t>SAP investment in OCM compounds with the open-peer ecosystem (Gardener, Konfidence, OCP, NeoNephos).</a:t>
+              <a:t>SAP investment compounds with Gardener, OpenControlPlane, Konfidence, NeoNephos — the open-peer ecosystem.</a:t>
             </a:r>
           </a:p>
         </p:txBody>
@@ -4385,7 +4420,7 @@
                   <a:srgbClr val="000000"/>
                 </a:solidFill>
               </a:rPr>
-              <a:t>Konfidence — a development and delivery framework (SAP-originated, now open source).</a:t>
+              <a:t>OpenControlPlane — a platform for creating and managing Kubernetes-based ControlPlanes for your teams (open-control-plane.io).</a:t>
             </a:r>
           </a:p>
           <a:p>
@@ -4411,7 +4446,7 @@
                   <a:srgbClr val="000000"/>
                 </a:solidFill>
               </a:rPr>
-              <a:t>Open Control Plane (OCP) — a platform that lets you create and manage Kubernetes-based ControlPlanes for your teams.</a:t>
+              <a:t>Konfidence — a development and delivery framework (SAP-originated, now open source).</a:t>
             </a:r>
           </a:p>
           <a:p>
@@ -4438,6 +4473,41 @@
                 </a:solidFill>
               </a:rPr>
               <a:t>And forthcoming: every NeoNephos foundation project as it lands.</a:t>
+            </a:r>
+          </a:p>
+        </p:txBody>
+      </p:sp>
+      <p:sp>
+        <p:nvSpPr>
+          <p:cNvPr id="5" name="TextBox 4"/>
+          <p:cNvSpPr txBox="1"/>
+          <p:nvPr/>
+        </p:nvSpPr>
+        <p:spPr>
+          <a:xfrm>
+            <a:off x="1143000" y="9715500"/>
+            <a:ext cx="16002000" cy="381000"/>
+          </a:xfrm>
+          <a:prstGeom prst="rect">
+            <a:avLst/>
+          </a:prstGeom>
+          <a:noFill/>
+        </p:spPr>
+        <p:txBody>
+          <a:bodyPr wrap="none" lIns="0" rIns="0" tIns="0" bIns="0">
+            <a:spAutoFit/>
+          </a:bodyPr>
+          <a:lstStyle/>
+          <a:p>
+            <a:pPr algn="ctr"/>
+            <a:r>
+              <a:rPr sz="1300">
+                <a:solidFill>
+                  <a:srgbClr val="6B7280"/>
+                </a:solidFill>
+                <a:latin typeface="Aptos"/>
+              </a:rPr>
+              <a:t>gardener.cloud · kyma-project.io · open-control-plane.io · konfidence.cloud · neonephos.org</a:t>
             </a:r>
           </a:p>
         </p:txBody>
@@ -4946,7 +5016,7 @@
           <a:lstStyle/>
           <a:p>
             <a:r>
-              <a:t>OCM-shaped abstractions are landing in adjacent OSS projects. NeoNephos is operationalizing. The peer ecosystem (Gardener, Kyma, Konfidence, OCP, Hyperspace, RBSC, CSI) shares the primitive.</a:t>
+              <a:t>OCM-shaped abstractions are landing in adjacent OSS projects. NeoNephos is operationalizing. The peer ecosystem (Gardener, Kyma, OpenControlPlane, Konfidence, Hyperspace, RBSC, CSI) shares the primitive.</a:t>
             </a:r>
           </a:p>
         </p:txBody>
@@ -5216,7 +5286,7 @@
                   <a:srgbClr val="000000"/>
                 </a:solidFill>
               </a:rPr>
-              <a:t>An SBOM tells you what's in your software. It was built for inventory.</a:t>
+              <a:t>An SBOM (Software Bill of Materials) tells you what's in your software. It was built for inventory.</a:t>
             </a:r>
           </a:p>
           <a:p>

--- a/docs/community/marketing/decks/exec-phase1/OCM-Sovereign-Delivery-Internal-Sponsor.pptx
+++ b/docs/community/marketing/decks/exec-phase1/OCM-Sovereign-Delivery-Internal-Sponsor.pptx
@@ -19,6 +19,7 @@
     <p:sldId id="267" r:id="rId18"/>
     <p:sldId id="268" r:id="rId19"/>
     <p:sldId id="269" r:id="rId20"/>
+    <p:sldId id="270" r:id="rId21"/>
   </p:sldIdLst>
   <p:sldSz cx="18288000" cy="10287000"/>
   <p:notesSz cx="6858000" cy="9144000"/>
@@ -4333,144 +4334,201 @@
       </p:sp>
       <p:sp>
         <p:nvSpPr>
-          <p:cNvPr id="4" name="Text Placeholder 3"/>
-          <p:cNvSpPr>
-            <a:spLocks noGrp="1"/>
-          </p:cNvSpPr>
-          <p:nvPr>
-            <p:ph type="body" idx="10"/>
-          </p:nvPr>
-        </p:nvSpPr>
-        <p:spPr/>
-        <p:txBody>
-          <a:bodyPr/>
-          <a:lstStyle/>
-          <a:p>
-            <a:pPr>
-              <a:spcBef>
-                <a:spcPts val="800"/>
-              </a:spcBef>
-              <a:spcAft>
-                <a:spcPts val="800"/>
-              </a:spcAft>
+          <p:cNvPr id="4" name="TextBox 3"/>
+          <p:cNvSpPr txBox="1"/>
+          <p:nvPr/>
+        </p:nvSpPr>
+        <p:spPr>
+          <a:xfrm>
+            <a:off x="1143000" y="4857750"/>
+            <a:ext cx="16002000" cy="342900"/>
+          </a:xfrm>
+          <a:prstGeom prst="rect">
+            <a:avLst/>
+          </a:prstGeom>
+          <a:noFill/>
+        </p:spPr>
+        <p:txBody>
+          <a:bodyPr wrap="none" lIns="0" rIns="0" tIns="0" bIns="0">
+            <a:spAutoFit/>
+          </a:bodyPr>
+          <a:lstStyle/>
+          <a:p>
+            <a:r>
+              <a:rPr sz="1800" b="1" cap="all" spc="110">
+                <a:solidFill>
+                  <a:srgbClr val="0F6BFF"/>
+                </a:solidFill>
+                <a:latin typeface="Aptos"/>
+              </a:rPr>
+              <a:t>OPEN PEER PROJECTS BUILDING ON OCM</a:t>
+            </a:r>
+          </a:p>
+        </p:txBody>
+      </p:sp>
+      <p:pic>
+        <p:nvPicPr>
+          <p:cNvPr id="5" name="Picture 4" descr="gardener-horizontal-color_640.png">
+            <a:hlinkClick r:id="rId3"/>
+          </p:cNvPr>
+          <p:cNvPicPr>
+            <a:picLocks noChangeAspect="1"/>
+          </p:cNvPicPr>
+          <p:nvPr/>
+        </p:nvPicPr>
+        <p:blipFill>
+          <a:blip r:embed="rId2"/>
+          <a:stretch>
+            <a:fillRect/>
+          </a:stretch>
+        </p:blipFill>
+        <p:spPr>
+          <a:xfrm>
+            <a:off x="1715541" y="6096000"/>
+            <a:ext cx="2664918" cy="762000"/>
+          </a:xfrm>
+          <a:prstGeom prst="rect">
+            <a:avLst/>
+          </a:prstGeom>
+        </p:spPr>
+      </p:pic>
+      <p:pic>
+        <p:nvPicPr>
+          <p:cNvPr id="6" name="Picture 5" descr="kyma-icon-color_640.png">
+            <a:hlinkClick r:id="rId5"/>
+          </p:cNvPr>
+          <p:cNvPicPr>
+            <a:picLocks noChangeAspect="1"/>
+          </p:cNvPicPr>
+          <p:nvPr/>
+        </p:nvPicPr>
+        <p:blipFill>
+          <a:blip r:embed="rId4"/>
+          <a:stretch>
+            <a:fillRect/>
+          </a:stretch>
+        </p:blipFill>
+        <p:spPr>
+          <a:xfrm>
+            <a:off x="5702710" y="6096000"/>
+            <a:ext cx="786580" cy="762000"/>
+          </a:xfrm>
+          <a:prstGeom prst="rect">
+            <a:avLst/>
+          </a:prstGeom>
+        </p:spPr>
+      </p:pic>
+      <p:pic>
+        <p:nvPicPr>
+          <p:cNvPr id="7" name="Picture 6" descr="opencontrolplane-icon-color_640.png">
+            <a:hlinkClick r:id="rId7"/>
+          </p:cNvPr>
+          <p:cNvPicPr>
+            <a:picLocks noChangeAspect="1"/>
+          </p:cNvPicPr>
+          <p:nvPr/>
+        </p:nvPicPr>
+        <p:blipFill>
+          <a:blip r:embed="rId6"/>
+          <a:stretch>
+            <a:fillRect/>
+          </a:stretch>
+        </p:blipFill>
+        <p:spPr>
+          <a:xfrm>
+            <a:off x="8816258" y="6096000"/>
+            <a:ext cx="655483" cy="762000"/>
+          </a:xfrm>
+          <a:prstGeom prst="rect">
+            <a:avLst/>
+          </a:prstGeom>
+        </p:spPr>
+      </p:pic>
+      <p:pic>
+        <p:nvPicPr>
+          <p:cNvPr id="8" name="Picture 7" descr="konfidence-horizontal-light_640.png">
+            <a:hlinkClick r:id="rId9"/>
+          </p:cNvPr>
+          <p:cNvPicPr>
+            <a:picLocks noChangeAspect="1"/>
+          </p:cNvPicPr>
+          <p:nvPr/>
+        </p:nvPicPr>
+        <p:blipFill>
+          <a:blip r:embed="rId8"/>
+          <a:stretch>
+            <a:fillRect/>
+          </a:stretch>
+        </p:blipFill>
+        <p:spPr>
+          <a:xfrm>
+            <a:off x="10668000" y="6298406"/>
+            <a:ext cx="3048000" cy="357187"/>
+          </a:xfrm>
+          <a:prstGeom prst="rect">
+            <a:avLst/>
+          </a:prstGeom>
+        </p:spPr>
+      </p:pic>
+      <p:pic>
+        <p:nvPicPr>
+          <p:cNvPr id="9" name="Picture 8" descr="neonephos-foundation-horizontal-color_640.png">
+            <a:hlinkClick r:id="rId11"/>
+          </p:cNvPr>
+          <p:cNvPicPr>
+            <a:picLocks noChangeAspect="1"/>
+          </p:cNvPicPr>
+          <p:nvPr/>
+        </p:nvPicPr>
+        <p:blipFill>
+          <a:blip r:embed="rId10"/>
+          <a:stretch>
+            <a:fillRect/>
+          </a:stretch>
+        </p:blipFill>
+        <p:spPr>
+          <a:xfrm>
+            <a:off x="13716000" y="6181725"/>
+            <a:ext cx="3048000" cy="590550"/>
+          </a:xfrm>
+          <a:prstGeom prst="rect">
+            <a:avLst/>
+          </a:prstGeom>
+        </p:spPr>
+      </p:pic>
+      <p:sp>
+        <p:nvSpPr>
+          <p:cNvPr id="10" name="TextBox 9"/>
+          <p:cNvSpPr txBox="1"/>
+          <p:nvPr/>
+        </p:nvSpPr>
+        <p:spPr>
+          <a:xfrm>
+            <a:off x="1143000" y="8096250"/>
+            <a:ext cx="16002000" cy="762000"/>
+          </a:xfrm>
+          <a:prstGeom prst="rect">
+            <a:avLst/>
+          </a:prstGeom>
+          <a:noFill/>
+        </p:spPr>
+        <p:txBody>
+          <a:bodyPr wrap="square" lIns="0" rIns="0" tIns="0" bIns="0">
+            <a:spAutoFit/>
+          </a:bodyPr>
+          <a:lstStyle/>
+          <a:p>
+            <a:pPr algn="ctr">
+              <a:lnSpc>
+                <a:spcPct val="130000"/>
+              </a:lnSpc>
             </a:pPr>
             <a:r>
-              <a:rPr b="1">
-                <a:solidFill>
-                  <a:srgbClr val="0F6BFF"/>
-                </a:solidFill>
-              </a:rPr>
-              <a:t>▪  </a:t>
-            </a:r>
-            <a:r>
-              <a:rPr>
-                <a:solidFill>
-                  <a:srgbClr val="000000"/>
-                </a:solidFill>
-              </a:rPr>
-              <a:t>Gardener — Kubernetes-as-a-service, open ecosystem.</a:t>
-            </a:r>
-          </a:p>
-          <a:p>
-            <a:pPr>
-              <a:spcBef>
-                <a:spcPts val="800"/>
-              </a:spcBef>
-              <a:spcAft>
-                <a:spcPts val="800"/>
-              </a:spcAft>
-            </a:pPr>
-            <a:r>
-              <a:rPr b="1">
-                <a:solidFill>
-                  <a:srgbClr val="0F6BFF"/>
-                </a:solidFill>
-              </a:rPr>
-              <a:t>▪  </a:t>
-            </a:r>
-            <a:r>
-              <a:rPr>
-                <a:solidFill>
-                  <a:srgbClr val="000000"/>
-                </a:solidFill>
-              </a:rPr>
-              <a:t>Kyma — SAP-originated open-source Kubernetes-based runtime.</a:t>
-            </a:r>
-          </a:p>
-          <a:p>
-            <a:pPr>
-              <a:spcBef>
-                <a:spcPts val="800"/>
-              </a:spcBef>
-              <a:spcAft>
-                <a:spcPts val="800"/>
-              </a:spcAft>
-            </a:pPr>
-            <a:r>
-              <a:rPr b="1">
-                <a:solidFill>
-                  <a:srgbClr val="0F6BFF"/>
-                </a:solidFill>
-              </a:rPr>
-              <a:t>▪  </a:t>
-            </a:r>
-            <a:r>
-              <a:rPr>
-                <a:solidFill>
-                  <a:srgbClr val="000000"/>
-                </a:solidFill>
-              </a:rPr>
-              <a:t>OpenControlPlane — a platform for creating and managing Kubernetes-based ControlPlanes for your teams (open-control-plane.io).</a:t>
-            </a:r>
-          </a:p>
-          <a:p>
-            <a:pPr>
-              <a:spcBef>
-                <a:spcPts val="800"/>
-              </a:spcBef>
-              <a:spcAft>
-                <a:spcPts val="800"/>
-              </a:spcAft>
-            </a:pPr>
-            <a:r>
-              <a:rPr b="1">
-                <a:solidFill>
-                  <a:srgbClr val="0F6BFF"/>
-                </a:solidFill>
-              </a:rPr>
-              <a:t>▪  </a:t>
-            </a:r>
-            <a:r>
-              <a:rPr>
-                <a:solidFill>
-                  <a:srgbClr val="000000"/>
-                </a:solidFill>
-              </a:rPr>
-              <a:t>Konfidence — a development and delivery framework (SAP-originated, now open source).</a:t>
-            </a:r>
-          </a:p>
-          <a:p>
-            <a:pPr>
-              <a:spcBef>
-                <a:spcPts val="800"/>
-              </a:spcBef>
-              <a:spcAft>
-                <a:spcPts val="800"/>
-              </a:spcAft>
-            </a:pPr>
-            <a:r>
-              <a:rPr b="1">
-                <a:solidFill>
-                  <a:srgbClr val="0F6BFF"/>
-                </a:solidFill>
-              </a:rPr>
-              <a:t>▪  </a:t>
-            </a:r>
-            <a:r>
-              <a:rPr>
-                <a:solidFill>
-                  <a:srgbClr val="000000"/>
-                </a:solidFill>
+              <a:rPr sz="1600" i="1">
+                <a:solidFill>
+                  <a:srgbClr val="0A3A99"/>
+                </a:solidFill>
+                <a:latin typeface="Aptos"/>
               </a:rPr>
               <a:t>And forthcoming: every NeoNephos foundation project as it lands.</a:t>
             </a:r>
@@ -4479,7 +4537,7 @@
       </p:sp>
       <p:sp>
         <p:nvSpPr>
-          <p:cNvPr id="5" name="TextBox 4"/>
+          <p:cNvPr id="11" name="TextBox 10"/>
           <p:cNvSpPr txBox="1"/>
           <p:nvPr/>
         </p:nvSpPr>
@@ -4927,6 +4985,316 @@
 </p:sld>
 </file>
 
+<file path=ppt/slides/slide15.xml><?xml version="1.0" encoding="utf-8"?>
+<p:sld xmlns:a="http://schemas.openxmlformats.org/drawingml/2006/main" xmlns:p="http://schemas.openxmlformats.org/presentationml/2006/main" xmlns:r="http://schemas.openxmlformats.org/officeDocument/2006/relationships" show="0">
+  <p:cSld>
+    <p:spTree>
+      <p:nvGrpSpPr>
+        <p:cNvPr id="1" name=""/>
+        <p:cNvGrpSpPr/>
+        <p:nvPr/>
+      </p:nvGrpSpPr>
+      <p:grpSpPr/>
+      <p:sp>
+        <p:nvSpPr>
+          <p:cNvPr id="2" name="Text Placeholder 1"/>
+          <p:cNvSpPr>
+            <a:spLocks noGrp="1"/>
+          </p:cNvSpPr>
+          <p:nvPr>
+            <p:ph type="body" idx="1"/>
+          </p:nvPr>
+        </p:nvSpPr>
+        <p:spPr/>
+        <p:txBody>
+          <a:bodyPr/>
+          <a:lstStyle/>
+          <a:p>
+            <a:r>
+              <a:t>TRADEMARK &amp; LICENSE NOTICES</a:t>
+            </a:r>
+          </a:p>
+        </p:txBody>
+      </p:sp>
+      <p:sp>
+        <p:nvSpPr>
+          <p:cNvPr id="3" name="Title 2"/>
+          <p:cNvSpPr>
+            <a:spLocks noGrp="1"/>
+          </p:cNvSpPr>
+          <p:nvPr>
+            <p:ph type="title" idx="2"/>
+          </p:nvPr>
+        </p:nvSpPr>
+        <p:spPr/>
+        <p:txBody>
+          <a:bodyPr/>
+          <a:lstStyle/>
+          <a:p>
+            <a:r>
+              <a:t>Logos and trademarks belong to their respective owners.</a:t>
+            </a:r>
+          </a:p>
+        </p:txBody>
+      </p:sp>
+      <p:sp>
+        <p:nvSpPr>
+          <p:cNvPr id="4" name="Text Placeholder 3"/>
+          <p:cNvSpPr>
+            <a:spLocks noGrp="1"/>
+          </p:cNvSpPr>
+          <p:nvPr>
+            <p:ph type="body" idx="10"/>
+          </p:nvPr>
+        </p:nvSpPr>
+        <p:spPr/>
+        <p:txBody>
+          <a:bodyPr/>
+          <a:lstStyle/>
+          <a:p>
+            <a:pPr>
+              <a:spcBef>
+                <a:spcPts val="800"/>
+              </a:spcBef>
+              <a:spcAft>
+                <a:spcPts val="800"/>
+              </a:spcAft>
+            </a:pPr>
+            <a:r>
+              <a:rPr b="1">
+                <a:solidFill>
+                  <a:srgbClr val="0F6BFF"/>
+                </a:solidFill>
+              </a:rPr>
+              <a:t>▪  </a:t>
+            </a:r>
+            <a:r>
+              <a:rPr>
+                <a:solidFill>
+                  <a:srgbClr val="000000"/>
+                </a:solidFill>
+              </a:rPr>
+              <a:t>SAP, SAP NS2 — trademarks of SAP SE / SAP National Security Services. Editorial use only; no endorsement implied. sap.com · sapns2.com</a:t>
+            </a:r>
+          </a:p>
+          <a:p>
+            <a:pPr>
+              <a:spcBef>
+                <a:spcPts val="800"/>
+              </a:spcBef>
+              <a:spcAft>
+                <a:spcPts val="800"/>
+              </a:spcAft>
+            </a:pPr>
+            <a:r>
+              <a:rPr b="1">
+                <a:solidFill>
+                  <a:srgbClr val="0F6BFF"/>
+                </a:solidFill>
+              </a:rPr>
+              <a:t>▪  </a:t>
+            </a:r>
+            <a:r>
+              <a:rPr>
+                <a:solidFill>
+                  <a:srgbClr val="000000"/>
+                </a:solidFill>
+              </a:rPr>
+              <a:t>BWI — trademark of BWI GmbH (Bundeswehr-IT). Editorial use of the Wikimedia public-domain wordmark; verify against BWI press conditions before external publication. bwi.de</a:t>
+            </a:r>
+          </a:p>
+          <a:p>
+            <a:pPr>
+              <a:spcBef>
+                <a:spcPts val="800"/>
+              </a:spcBef>
+              <a:spcAft>
+                <a:spcPts val="800"/>
+              </a:spcAft>
+            </a:pPr>
+            <a:r>
+              <a:rPr b="1">
+                <a:solidFill>
+                  <a:srgbClr val="0F6BFF"/>
+                </a:solidFill>
+              </a:rPr>
+              <a:t>▪  </a:t>
+            </a:r>
+            <a:r>
+              <a:rPr>
+                <a:solidFill>
+                  <a:srgbClr val="000000"/>
+                </a:solidFill>
+              </a:rPr>
+              <a:t>Gardener, Platform Mesh, NeoNephos Foundation — Linux Foundation Europe artwork; usage governed by the Linux Foundation trademark usage guidelines (linuxfoundation.org/legal/trademark-usage). gardener.cloud · platform-mesh.io · neonephos.org</a:t>
+            </a:r>
+          </a:p>
+          <a:p>
+            <a:pPr>
+              <a:spcBef>
+                <a:spcPts val="800"/>
+              </a:spcBef>
+              <a:spcAft>
+                <a:spcPts val="800"/>
+              </a:spcAft>
+            </a:pPr>
+            <a:r>
+              <a:rPr b="1">
+                <a:solidFill>
+                  <a:srgbClr val="0F6BFF"/>
+                </a:solidFill>
+              </a:rPr>
+              <a:t>▪  </a:t>
+            </a:r>
+            <a:r>
+              <a:rPr>
+                <a:solidFill>
+                  <a:srgbClr val="000000"/>
+                </a:solidFill>
+              </a:rPr>
+              <a:t>Konfidence — SAP-supported open project; logo from konfidence.cloud. Editorial use only; verify with the Konfidence project before external publication. konfidence.cloud</a:t>
+            </a:r>
+          </a:p>
+          <a:p>
+            <a:pPr>
+              <a:spcBef>
+                <a:spcPts val="800"/>
+              </a:spcBef>
+              <a:spcAft>
+                <a:spcPts val="800"/>
+              </a:spcAft>
+            </a:pPr>
+            <a:r>
+              <a:rPr b="1">
+                <a:solidFill>
+                  <a:srgbClr val="0F6BFF"/>
+                </a:solidFill>
+              </a:rPr>
+              <a:t>▪  </a:t>
+            </a:r>
+            <a:r>
+              <a:rPr>
+                <a:solidFill>
+                  <a:srgbClr val="000000"/>
+                </a:solidFill>
+              </a:rPr>
+              <a:t>OpenControlPlane — open-source project at open-control-plane.io. Editorial use only; verify with the project before external publication. open-control-plane.io</a:t>
+            </a:r>
+          </a:p>
+          <a:p>
+            <a:pPr>
+              <a:spcBef>
+                <a:spcPts val="800"/>
+              </a:spcBef>
+              <a:spcAft>
+                <a:spcPts val="800"/>
+              </a:spcAft>
+            </a:pPr>
+            <a:r>
+              <a:rPr b="1">
+                <a:solidFill>
+                  <a:srgbClr val="0F6BFF"/>
+                </a:solidFill>
+              </a:rPr>
+              <a:t>▪  </a:t>
+            </a:r>
+            <a:r>
+              <a:rPr>
+                <a:solidFill>
+                  <a:srgbClr val="000000"/>
+                </a:solidFill>
+              </a:rPr>
+              <a:t>Kyma — SAP-originated open-source project at kyma-project.io. Editorial use only. kyma-project.io</a:t>
+            </a:r>
+          </a:p>
+          <a:p>
+            <a:pPr>
+              <a:spcBef>
+                <a:spcPts val="800"/>
+              </a:spcBef>
+              <a:spcAft>
+                <a:spcPts val="800"/>
+              </a:spcAft>
+            </a:pPr>
+            <a:r>
+              <a:rPr b="1">
+                <a:solidFill>
+                  <a:srgbClr val="0F6BFF"/>
+                </a:solidFill>
+              </a:rPr>
+              <a:t>▪  </a:t>
+            </a:r>
+            <a:r>
+              <a:rPr>
+                <a:solidFill>
+                  <a:srgbClr val="000000"/>
+                </a:solidFill>
+              </a:rPr>
+              <a:t>Hyperspace, RBSC, CSI, Greenhouse, Steampunk — internal SAP delivery infrastructure named for context; not third-party marks.</a:t>
+            </a:r>
+          </a:p>
+          <a:p>
+            <a:pPr>
+              <a:spcBef>
+                <a:spcPts val="800"/>
+              </a:spcBef>
+              <a:spcAft>
+                <a:spcPts val="800"/>
+              </a:spcAft>
+            </a:pPr>
+            <a:r>
+              <a:rPr b="1">
+                <a:solidFill>
+                  <a:srgbClr val="0F6BFF"/>
+                </a:solidFill>
+              </a:rPr>
+              <a:t>▪  </a:t>
+            </a:r>
+            <a:r>
+              <a:rPr>
+                <a:solidFill>
+                  <a:srgbClr val="000000"/>
+                </a:solidFill>
+              </a:rPr>
+              <a:t>Trivy, Grype, Sigstore, Helm, OCI, Kubernetes, kro, Flux, Argo CD — third-party trademarks named for technical reference; ownership remains with their respective projects and organisations.</a:t>
+            </a:r>
+          </a:p>
+          <a:p>
+            <a:pPr>
+              <a:spcBef>
+                <a:spcPts val="800"/>
+              </a:spcBef>
+              <a:spcAft>
+                <a:spcPts val="800"/>
+              </a:spcAft>
+            </a:pPr>
+            <a:r>
+              <a:rPr b="1">
+                <a:solidFill>
+                  <a:srgbClr val="0F6BFF"/>
+                </a:solidFill>
+              </a:rPr>
+              <a:t>▪  </a:t>
+            </a:r>
+            <a:r>
+              <a:rPr>
+                <a:solidFill>
+                  <a:srgbClr val="000000"/>
+                </a:solidFill>
+              </a:rPr>
+              <a:t>Full sourcing record: assets/adopters/LICENSING.md in the OCM marketing repository.</a:t>
+            </a:r>
+          </a:p>
+        </p:txBody>
+      </p:sp>
+    </p:spTree>
+  </p:cSld>
+  <p:clrMapOvr>
+    <a:masterClrMapping/>
+  </p:clrMapOvr>
+</p:sld>
+</file>
+
 <file path=ppt/slides/slide2.xml><?xml version="1.0" encoding="utf-8"?>
 <p:sld xmlns:a="http://schemas.openxmlformats.org/drawingml/2006/main" xmlns:p="http://schemas.openxmlformats.org/presentationml/2006/main" xmlns:r="http://schemas.openxmlformats.org/officeDocument/2006/relationships">
   <p:cSld>
@@ -5592,7 +5960,7 @@
           <a:lstStyle/>
           <a:p>
             <a:r>
-              <a:t>Helm registries, S3, OCI — each moves artifacts. OCM moves a signed envelope across any boundary: registry to registry, registry to air-gapped archive. The signature travels intact.</a:t>
+              <a:t>S3, OCI and Helm registries — each stores artifacts differently. OCM transports a signed envelope of artifacts across any boundary: registry to registry, registry to air-gapped archive. The signature travels intact.</a:t>
             </a:r>
           </a:p>
         </p:txBody>

--- a/docs/community/marketing/decks/exec-phase1/OCM-Sovereign-Delivery-Internal-Sponsor.pptx
+++ b/docs/community/marketing/decks/exec-phase1/OCM-Sovereign-Delivery-Internal-Sponsor.pptx
@@ -20,6 +20,7 @@
     <p:sldId id="268" r:id="rId19"/>
     <p:sldId id="269" r:id="rId20"/>
     <p:sldId id="270" r:id="rId21"/>
+    <p:sldId id="271" r:id="rId22"/>
   </p:sldIdLst>
   <p:sldSz cx="18288000" cy="10287000"/>
   <p:notesSz cx="6858000" cy="9144000"/>
@@ -201,7 +202,7 @@
         </ns0:nvSpPr>
         <ns0:spPr>
           <ns2:xfrm xmlns:ns2="http://schemas.openxmlformats.org/drawingml/2006/main">
-            <ns2:off x="914400" y="3524250"/>
+            <ns2:off x="914400" y="3286125"/>
             <ns2:ext cx="16192500" cy="1524000"/>
           </ns2:xfrm>
           <ns3:prstGeom xmlns:ns3="http://schemas.openxmlformats.org/drawingml/2006/main" prst="rect">
@@ -3781,41 +3782,6 @@
           </a:p>
         </p:txBody>
       </p:sp>
-      <p:sp>
-        <p:nvSpPr>
-          <p:cNvPr id="5" name="TextBox 4"/>
-          <p:cNvSpPr txBox="1"/>
-          <p:nvPr/>
-        </p:nvSpPr>
-        <p:spPr>
-          <a:xfrm>
-            <a:off x="1143000" y="9715500"/>
-            <a:ext cx="16002000" cy="381000"/>
-          </a:xfrm>
-          <a:prstGeom prst="rect">
-            <a:avLst/>
-          </a:prstGeom>
-          <a:noFill/>
-        </p:spPr>
-        <p:txBody>
-          <a:bodyPr wrap="none" lIns="0" rIns="0" tIns="0" bIns="0">
-            <a:spAutoFit/>
-          </a:bodyPr>
-          <a:lstStyle/>
-          <a:p>
-            <a:pPr algn="ctr"/>
-            <a:r>
-              <a:rPr sz="1300">
-                <a:solidFill>
-                  <a:srgbClr val="6B7280"/>
-                </a:solidFill>
-                <a:latin typeface="Aptos"/>
-              </a:rPr>
-              <a:t>github.com/open-component-model/open-delivery-gear</a:t>
-            </a:r>
-          </a:p>
-        </p:txBody>
-      </p:sp>
     </p:spTree>
   </p:cSld>
   <p:clrMapOvr>
@@ -3913,7 +3879,7 @@
           <a:lstStyle/>
           <a:p>
             <a:r>
-              <a:t>Pack once, ship everywhere. Validated end-to-end in OCM's open-source sovereign conformance scenario.</a:t>
+              <a:t>Pack once, ship everywhere. Validated end-to-end in the OCM open-source sovereign conformance scenario.</a:t>
             </a:r>
           </a:p>
         </p:txBody>
@@ -4130,7 +4096,7 @@
       </p:sp>
       <p:pic>
         <p:nvPicPr>
-          <p:cNvPr id="16" name="Picture 15" descr="cloud-upload_72.png"/>
+          <p:cNvPr id="16" name="Picture 15" descr="package-export_72.png"/>
           <p:cNvPicPr>
             <a:picLocks noChangeAspect="1"/>
           </p:cNvPicPr>
@@ -4368,7 +4334,7 @@
       </p:sp>
       <p:pic>
         <p:nvPicPr>
-          <p:cNvPr id="5" name="Picture 4" descr="gardener-horizontal-color_640.png">
+          <p:cNvPr id="5" name="Picture 4" descr="gardener-horizontal-color_600.png">
             <a:hlinkClick r:id="rId3"/>
           </p:cNvPr>
           <p:cNvPicPr>
@@ -4384,17 +4350,53 @@
         </p:blipFill>
         <p:spPr>
           <a:xfrm>
-            <a:off x="1715541" y="6096000"/>
-            <a:ext cx="2664918" cy="762000"/>
+            <a:off x="2000250" y="6067425"/>
+            <a:ext cx="2857500" cy="819150"/>
           </a:xfrm>
           <a:prstGeom prst="rect">
             <a:avLst/>
           </a:prstGeom>
         </p:spPr>
       </p:pic>
+      <p:sp>
+        <p:nvSpPr>
+          <p:cNvPr id="6" name="TextBox 5"/>
+          <p:cNvSpPr txBox="1"/>
+          <p:nvPr/>
+        </p:nvSpPr>
+        <p:spPr>
+          <a:xfrm>
+            <a:off x="1524000" y="7105650"/>
+            <a:ext cx="3810000" cy="266700"/>
+          </a:xfrm>
+          <a:prstGeom prst="rect">
+            <a:avLst/>
+          </a:prstGeom>
+          <a:noFill/>
+        </p:spPr>
+        <p:txBody>
+          <a:bodyPr wrap="none" lIns="0" rIns="0" tIns="0" bIns="0">
+            <a:spAutoFit/>
+          </a:bodyPr>
+          <a:lstStyle/>
+          <a:p>
+            <a:pPr algn="ctr"/>
+            <a:r>
+              <a:rPr sz="2000">
+                <a:solidFill>
+                  <a:srgbClr val="6B7280"/>
+                </a:solidFill>
+                <a:latin typeface="Aptos"/>
+                <a:hlinkClick r:id="rId3"/>
+              </a:rPr>
+              <a:t>Gardener</a:t>
+            </a:r>
+          </a:p>
+        </p:txBody>
+      </p:sp>
       <p:pic>
         <p:nvPicPr>
-          <p:cNvPr id="6" name="Picture 5" descr="kyma-icon-color_640.png">
+          <p:cNvPr id="7" name="Picture 6" descr="kyma-icon-color_600.png">
             <a:hlinkClick r:id="rId5"/>
           </p:cNvPr>
           <p:cNvPicPr>
@@ -4410,17 +4412,53 @@
         </p:blipFill>
         <p:spPr>
           <a:xfrm>
-            <a:off x="5702710" y="6096000"/>
-            <a:ext cx="786580" cy="762000"/>
+            <a:off x="6766849" y="6019800"/>
+            <a:ext cx="944302" cy="914400"/>
           </a:xfrm>
           <a:prstGeom prst="rect">
             <a:avLst/>
           </a:prstGeom>
         </p:spPr>
       </p:pic>
+      <p:sp>
+        <p:nvSpPr>
+          <p:cNvPr id="8" name="TextBox 7"/>
+          <p:cNvSpPr txBox="1"/>
+          <p:nvPr/>
+        </p:nvSpPr>
+        <p:spPr>
+          <a:xfrm>
+            <a:off x="5334000" y="7105650"/>
+            <a:ext cx="3810000" cy="266700"/>
+          </a:xfrm>
+          <a:prstGeom prst="rect">
+            <a:avLst/>
+          </a:prstGeom>
+          <a:noFill/>
+        </p:spPr>
+        <p:txBody>
+          <a:bodyPr wrap="none" lIns="0" rIns="0" tIns="0" bIns="0">
+            <a:spAutoFit/>
+          </a:bodyPr>
+          <a:lstStyle/>
+          <a:p>
+            <a:pPr algn="ctr"/>
+            <a:r>
+              <a:rPr sz="2000">
+                <a:solidFill>
+                  <a:srgbClr val="6B7280"/>
+                </a:solidFill>
+                <a:latin typeface="Aptos"/>
+                <a:hlinkClick r:id="rId5"/>
+              </a:rPr>
+              <a:t>Kyma</a:t>
+            </a:r>
+          </a:p>
+        </p:txBody>
+      </p:sp>
       <p:pic>
         <p:nvPicPr>
-          <p:cNvPr id="7" name="Picture 6" descr="opencontrolplane-icon-color_640.png">
+          <p:cNvPr id="9" name="Picture 8" descr="opencontrolplane-icon-color_600.png">
             <a:hlinkClick r:id="rId7"/>
           </p:cNvPr>
           <p:cNvPicPr>
@@ -4436,17 +4474,53 @@
         </p:blipFill>
         <p:spPr>
           <a:xfrm>
-            <a:off x="8816258" y="6096000"/>
-            <a:ext cx="655483" cy="762000"/>
+            <a:off x="10655991" y="6019800"/>
+            <a:ext cx="786017" cy="914400"/>
           </a:xfrm>
           <a:prstGeom prst="rect">
             <a:avLst/>
           </a:prstGeom>
         </p:spPr>
       </p:pic>
+      <p:sp>
+        <p:nvSpPr>
+          <p:cNvPr id="10" name="TextBox 9"/>
+          <p:cNvSpPr txBox="1"/>
+          <p:nvPr/>
+        </p:nvSpPr>
+        <p:spPr>
+          <a:xfrm>
+            <a:off x="9144000" y="7105650"/>
+            <a:ext cx="3810000" cy="266700"/>
+          </a:xfrm>
+          <a:prstGeom prst="rect">
+            <a:avLst/>
+          </a:prstGeom>
+          <a:noFill/>
+        </p:spPr>
+        <p:txBody>
+          <a:bodyPr wrap="none" lIns="0" rIns="0" tIns="0" bIns="0">
+            <a:spAutoFit/>
+          </a:bodyPr>
+          <a:lstStyle/>
+          <a:p>
+            <a:pPr algn="ctr"/>
+            <a:r>
+              <a:rPr sz="2000">
+                <a:solidFill>
+                  <a:srgbClr val="6B7280"/>
+                </a:solidFill>
+                <a:latin typeface="Aptos"/>
+                <a:hlinkClick r:id="rId7"/>
+              </a:rPr>
+              <a:t>OpenControlPlane</a:t>
+            </a:r>
+          </a:p>
+        </p:txBody>
+      </p:sp>
       <p:pic>
         <p:nvPicPr>
-          <p:cNvPr id="8" name="Picture 7" descr="konfidence-horizontal-light_640.png">
+          <p:cNvPr id="11" name="Picture 10" descr="konfidence-horizontal-light_600.png">
             <a:hlinkClick r:id="rId9"/>
           </p:cNvPr>
           <p:cNvPicPr>
@@ -4462,17 +4536,53 @@
         </p:blipFill>
         <p:spPr>
           <a:xfrm>
-            <a:off x="10668000" y="6298406"/>
-            <a:ext cx="3048000" cy="357187"/>
+            <a:off x="13430250" y="6310312"/>
+            <a:ext cx="2857500" cy="333375"/>
           </a:xfrm>
           <a:prstGeom prst="rect">
             <a:avLst/>
           </a:prstGeom>
         </p:spPr>
       </p:pic>
+      <p:sp>
+        <p:nvSpPr>
+          <p:cNvPr id="12" name="TextBox 11"/>
+          <p:cNvSpPr txBox="1"/>
+          <p:nvPr/>
+        </p:nvSpPr>
+        <p:spPr>
+          <a:xfrm>
+            <a:off x="12954000" y="7105650"/>
+            <a:ext cx="3810000" cy="266700"/>
+          </a:xfrm>
+          <a:prstGeom prst="rect">
+            <a:avLst/>
+          </a:prstGeom>
+          <a:noFill/>
+        </p:spPr>
+        <p:txBody>
+          <a:bodyPr wrap="none" lIns="0" rIns="0" tIns="0" bIns="0">
+            <a:spAutoFit/>
+          </a:bodyPr>
+          <a:lstStyle/>
+          <a:p>
+            <a:pPr algn="ctr"/>
+            <a:r>
+              <a:rPr sz="2000">
+                <a:solidFill>
+                  <a:srgbClr val="6B7280"/>
+                </a:solidFill>
+                <a:latin typeface="Aptos"/>
+                <a:hlinkClick r:id="rId9"/>
+              </a:rPr>
+              <a:t>Konfidence</a:t>
+            </a:r>
+          </a:p>
+        </p:txBody>
+      </p:sp>
       <p:pic>
         <p:nvPicPr>
-          <p:cNvPr id="9" name="Picture 8" descr="neonephos-foundation-horizontal-color_640.png">
+          <p:cNvPr id="13" name="Picture 12" descr="neonephos-foundation-horizontal-color_600.png">
             <a:hlinkClick r:id="rId11"/>
           </p:cNvPr>
           <p:cNvPicPr>
@@ -4488,8 +4598,8 @@
         </p:blipFill>
         <p:spPr>
           <a:xfrm>
-            <a:off x="13716000" y="6181725"/>
-            <a:ext cx="3048000" cy="590550"/>
+            <a:off x="8814777" y="8305800"/>
+            <a:ext cx="1953846" cy="381000"/>
           </a:xfrm>
           <a:prstGeom prst="rect">
             <a:avLst/>
@@ -4498,14 +4608,14 @@
       </p:pic>
       <p:sp>
         <p:nvSpPr>
-          <p:cNvPr id="10" name="TextBox 9"/>
+          <p:cNvPr id="14" name="TextBox 13"/>
           <p:cNvSpPr txBox="1"/>
           <p:nvPr/>
         </p:nvSpPr>
         <p:spPr>
           <a:xfrm>
-            <a:off x="1143000" y="8096250"/>
-            <a:ext cx="16002000" cy="762000"/>
+            <a:off x="7290777" y="8286750"/>
+            <a:ext cx="1371600" cy="476250"/>
           </a:xfrm>
           <a:prstGeom prst="rect">
             <a:avLst/>
@@ -4513,38 +4623,34 @@
           <a:noFill/>
         </p:spPr>
         <p:txBody>
-          <a:bodyPr wrap="square" lIns="0" rIns="0" tIns="0" bIns="0">
+          <a:bodyPr wrap="none" lIns="0" rIns="0" tIns="0" bIns="0">
             <a:spAutoFit/>
           </a:bodyPr>
           <a:lstStyle/>
           <a:p>
-            <a:pPr algn="ctr">
-              <a:lnSpc>
-                <a:spcPct val="130000"/>
-              </a:lnSpc>
-            </a:pPr>
-            <a:r>
-              <a:rPr sz="1600" i="1">
+            <a:pPr algn="r"/>
+            <a:r>
+              <a:rPr sz="2000" i="1">
                 <a:solidFill>
                   <a:srgbClr val="0A3A99"/>
                 </a:solidFill>
                 <a:latin typeface="Aptos"/>
               </a:rPr>
-              <a:t>And forthcoming: every NeoNephos foundation project as it lands.</a:t>
-            </a:r>
-          </a:p>
-        </p:txBody>
-      </p:sp>
-      <p:sp>
-        <p:nvSpPr>
-          <p:cNvPr id="11" name="TextBox 10"/>
+              <a:t>Aligned with </a:t>
+            </a:r>
+          </a:p>
+        </p:txBody>
+      </p:sp>
+      <p:sp>
+        <p:nvSpPr>
+          <p:cNvPr id="15" name="TextBox 14"/>
           <p:cNvSpPr txBox="1"/>
           <p:nvPr/>
         </p:nvSpPr>
         <p:spPr>
           <a:xfrm>
-            <a:off x="1143000" y="9715500"/>
-            <a:ext cx="16002000" cy="381000"/>
+            <a:off x="7291387" y="8743950"/>
+            <a:ext cx="3705225" cy="266700"/>
           </a:xfrm>
           <a:prstGeom prst="rect">
             <a:avLst/>
@@ -4559,13 +4665,14 @@
           <a:p>
             <a:pPr algn="ctr"/>
             <a:r>
-              <a:rPr sz="1300">
+              <a:rPr sz="2000">
                 <a:solidFill>
                   <a:srgbClr val="6B7280"/>
                 </a:solidFill>
                 <a:latin typeface="Aptos"/>
-              </a:rPr>
-              <a:t>gardener.cloud · kyma-project.io · open-control-plane.io · konfidence.cloud · neonephos.org</a:t>
+                <a:hlinkClick r:id="rId11"/>
+              </a:rPr>
+              <a:t>NeoNephos</a:t>
             </a:r>
           </a:p>
         </p:txBody>
@@ -4745,7 +4852,7 @@
                   <a:srgbClr val="000000"/>
                 </a:solidFill>
               </a:rPr>
-              <a:t>Greenhouse — a cloud operations platform that streamlines management of large-scale, distributed infrastructure.</a:t>
+              <a:t>Steampunk — internal name for SAP BTP ABAP Environment (PaaS within SAP BTP); large user of OCM and ODG.</a:t>
             </a:r>
           </a:p>
           <a:p>
@@ -4771,7 +4878,7 @@
                   <a:srgbClr val="000000"/>
                 </a:solidFill>
               </a:rPr>
-              <a:t>Steampunk — internal name for SAP BTP ABAP Environment (PaaS within SAP BTP); large user of OCM and ODG.</a:t>
+              <a:t>Greenhouse — a cloud operations platform that streamlines management of large-scale, distributed infrastructure.</a:t>
             </a:r>
           </a:p>
         </p:txBody>
@@ -5011,7 +5118,7 @@
           <a:lstStyle/>
           <a:p>
             <a:r>
-              <a:t>TRADEMARK &amp; LICENSE NOTICES</a:t>
+              <a:t>TRADEMARK &amp; LICENSE NOTICES (1/2)</a:t>
             </a:r>
           </a:p>
         </p:txBody>
@@ -5181,6 +5288,82 @@
               <a:t>OpenControlPlane — open-source project at open-control-plane.io. Editorial use only; verify with the project before external publication. open-control-plane.io</a:t>
             </a:r>
           </a:p>
+        </p:txBody>
+      </p:sp>
+    </p:spTree>
+  </p:cSld>
+  <p:clrMapOvr>
+    <a:masterClrMapping/>
+  </p:clrMapOvr>
+</p:sld>
+</file>
+
+<file path=ppt/slides/slide16.xml><?xml version="1.0" encoding="utf-8"?>
+<p:sld xmlns:a="http://schemas.openxmlformats.org/drawingml/2006/main" xmlns:p="http://schemas.openxmlformats.org/presentationml/2006/main" xmlns:r="http://schemas.openxmlformats.org/officeDocument/2006/relationships" show="0">
+  <p:cSld>
+    <p:spTree>
+      <p:nvGrpSpPr>
+        <p:cNvPr id="1" name=""/>
+        <p:cNvGrpSpPr/>
+        <p:nvPr/>
+      </p:nvGrpSpPr>
+      <p:grpSpPr/>
+      <p:sp>
+        <p:nvSpPr>
+          <p:cNvPr id="2" name="Text Placeholder 1"/>
+          <p:cNvSpPr>
+            <a:spLocks noGrp="1"/>
+          </p:cNvSpPr>
+          <p:nvPr>
+            <p:ph type="body" idx="1"/>
+          </p:nvPr>
+        </p:nvSpPr>
+        <p:spPr/>
+        <p:txBody>
+          <a:bodyPr/>
+          <a:lstStyle/>
+          <a:p>
+            <a:r>
+              <a:t>TRADEMARK &amp; LICENSE NOTICES (2/2)</a:t>
+            </a:r>
+          </a:p>
+        </p:txBody>
+      </p:sp>
+      <p:sp>
+        <p:nvSpPr>
+          <p:cNvPr id="3" name="Title 2"/>
+          <p:cNvSpPr>
+            <a:spLocks noGrp="1"/>
+          </p:cNvSpPr>
+          <p:nvPr>
+            <p:ph type="title" idx="2"/>
+          </p:nvPr>
+        </p:nvSpPr>
+        <p:spPr/>
+        <p:txBody>
+          <a:bodyPr/>
+          <a:lstStyle/>
+          <a:p>
+            <a:r>
+              <a:t>Third-party trademarks named for technical reference.</a:t>
+            </a:r>
+          </a:p>
+        </p:txBody>
+      </p:sp>
+      <p:sp>
+        <p:nvSpPr>
+          <p:cNvPr id="4" name="Text Placeholder 3"/>
+          <p:cNvSpPr>
+            <a:spLocks noGrp="1"/>
+          </p:cNvSpPr>
+          <p:nvPr>
+            <p:ph type="body" idx="10"/>
+          </p:nvPr>
+        </p:nvSpPr>
+        <p:spPr/>
+        <p:txBody>
+          <a:bodyPr/>
+          <a:lstStyle/>
           <a:p>
             <a:pPr>
               <a:spcBef>

--- a/docs/community/marketing/decks/exec-phase1/OCM-Sovereign-Delivery-Internal-Sponsor.pptx
+++ b/docs/community/marketing/decks/exec-phase1/OCM-Sovereign-Delivery-Internal-Sponsor.pptx
@@ -21,6 +21,7 @@
     <p:sldId id="269" r:id="rId20"/>
     <p:sldId id="270" r:id="rId21"/>
     <p:sldId id="271" r:id="rId22"/>
+    <p:sldId id="272" r:id="rId23"/>
   </p:sldIdLst>
   <p:sldSz cx="18288000" cy="10287000"/>
   <p:notesSz cx="6858000" cy="9144000"/>
@@ -1305,8 +1306,8 @@
         </ns0:nvSpPr>
         <ns0:spPr>
           <ns2:xfrm xmlns:ns2="http://schemas.openxmlformats.org/drawingml/2006/main">
-            <ns2:off x="1371600" y="5791200"/>
-            <ns2:ext cx="4724400" cy="304800"/>
+            <ns2:off x="1981200" y="5181600"/>
+            <ns2:ext cx="4114800" cy="457200"/>
           </ns2:xfrm>
           <ns3:prstGeom xmlns:ns3="http://schemas.openxmlformats.org/drawingml/2006/main" prst="rect">
             <ns3:avLst/>
@@ -1317,7 +1318,7 @@
           <ns5:lstStyle xmlns:ns5="http://schemas.openxmlformats.org/drawingml/2006/main">
             <ns5:lvl1pPr marL="0" indent="0" algn="l">
               <ns5:buNone/>
-              <ns5:defRPr sz="1600" b="1">
+              <ns5:defRPr sz="1800" b="1">
                 <ns5:solidFill>
                   <ns5:srgbClr val="0F6BFF"/>
                 </ns5:solidFill>
@@ -1346,8 +1347,8 @@
         </ns0:nvSpPr>
         <ns0:spPr>
           <ns2:xfrm xmlns:ns2="http://schemas.openxmlformats.org/drawingml/2006/main">
-            <ns2:off x="1371600" y="6134100"/>
-            <ns2:ext cx="4724400" cy="857250"/>
+            <ns2:off x="1371600" y="5867400"/>
+            <ns2:ext cx="4724400" cy="1085850"/>
           </ns2:xfrm>
           <ns3:prstGeom xmlns:ns3="http://schemas.openxmlformats.org/drawingml/2006/main" prst="rect">
             <ns3:avLst/>
@@ -1445,8 +1446,8 @@
         </ns0:nvSpPr>
         <ns0:spPr>
           <ns2:xfrm xmlns:ns2="http://schemas.openxmlformats.org/drawingml/2006/main">
-            <ns2:off x="6781800" y="5791200"/>
-            <ns2:ext cx="4724400" cy="304800"/>
+            <ns2:off x="7391400" y="5181600"/>
+            <ns2:ext cx="4114800" cy="457200"/>
           </ns2:xfrm>
           <ns3:prstGeom xmlns:ns3="http://schemas.openxmlformats.org/drawingml/2006/main" prst="rect">
             <ns3:avLst/>
@@ -1457,7 +1458,7 @@
           <ns5:lstStyle xmlns:ns5="http://schemas.openxmlformats.org/drawingml/2006/main">
             <ns5:lvl1pPr marL="0" indent="0" algn="l">
               <ns5:buNone/>
-              <ns5:defRPr sz="1600" b="1">
+              <ns5:defRPr sz="1800" b="1">
                 <ns5:solidFill>
                   <ns5:srgbClr val="0F6BFF"/>
                 </ns5:solidFill>
@@ -1486,8 +1487,8 @@
         </ns0:nvSpPr>
         <ns0:spPr>
           <ns2:xfrm xmlns:ns2="http://schemas.openxmlformats.org/drawingml/2006/main">
-            <ns2:off x="6781800" y="6134100"/>
-            <ns2:ext cx="4724400" cy="857250"/>
+            <ns2:off x="6781800" y="5867400"/>
+            <ns2:ext cx="4724400" cy="1085850"/>
           </ns2:xfrm>
           <ns3:prstGeom xmlns:ns3="http://schemas.openxmlformats.org/drawingml/2006/main" prst="rect">
             <ns3:avLst/>
@@ -1585,8 +1586,8 @@
         </ns0:nvSpPr>
         <ns0:spPr>
           <ns2:xfrm xmlns:ns2="http://schemas.openxmlformats.org/drawingml/2006/main">
-            <ns2:off x="12192000" y="5791200"/>
-            <ns2:ext cx="4724400" cy="304800"/>
+            <ns2:off x="12801600" y="5181600"/>
+            <ns2:ext cx="4114800" cy="457200"/>
           </ns2:xfrm>
           <ns3:prstGeom xmlns:ns3="http://schemas.openxmlformats.org/drawingml/2006/main" prst="rect">
             <ns3:avLst/>
@@ -1597,7 +1598,7 @@
           <ns5:lstStyle xmlns:ns5="http://schemas.openxmlformats.org/drawingml/2006/main">
             <ns5:lvl1pPr marL="0" indent="0" algn="l">
               <ns5:buNone/>
-              <ns5:defRPr sz="1600" b="1">
+              <ns5:defRPr sz="1800" b="1">
                 <ns5:solidFill>
                   <ns5:srgbClr val="0F6BFF"/>
                 </ns5:solidFill>
@@ -1626,8 +1627,8 @@
         </ns0:nvSpPr>
         <ns0:spPr>
           <ns2:xfrm xmlns:ns2="http://schemas.openxmlformats.org/drawingml/2006/main">
-            <ns2:off x="12192000" y="6134100"/>
-            <ns2:ext cx="4724400" cy="857250"/>
+            <ns2:off x="12192000" y="5867400"/>
+            <ns2:ext cx="4724400" cy="1085850"/>
           </ns2:xfrm>
           <ns3:prstGeom xmlns:ns3="http://schemas.openxmlformats.org/drawingml/2006/main" prst="rect">
             <ns3:avLst/>
@@ -1725,8 +1726,8 @@
         </ns0:nvSpPr>
         <ns0:spPr>
           <ns2:xfrm xmlns:ns2="http://schemas.openxmlformats.org/drawingml/2006/main">
-            <ns2:off x="1371600" y="8210550"/>
-            <ns2:ext cx="4724400" cy="304800"/>
+            <ns2:off x="1981200" y="7600950"/>
+            <ns2:ext cx="4114800" cy="457200"/>
           </ns2:xfrm>
           <ns3:prstGeom xmlns:ns3="http://schemas.openxmlformats.org/drawingml/2006/main" prst="rect">
             <ns3:avLst/>
@@ -1737,7 +1738,7 @@
           <ns5:lstStyle xmlns:ns5="http://schemas.openxmlformats.org/drawingml/2006/main">
             <ns5:lvl1pPr marL="0" indent="0" algn="l">
               <ns5:buNone/>
-              <ns5:defRPr sz="1600" b="1">
+              <ns5:defRPr sz="1800" b="1">
                 <ns5:solidFill>
                   <ns5:srgbClr val="0F6BFF"/>
                 </ns5:solidFill>
@@ -1766,8 +1767,8 @@
         </ns0:nvSpPr>
         <ns0:spPr>
           <ns2:xfrm xmlns:ns2="http://schemas.openxmlformats.org/drawingml/2006/main">
-            <ns2:off x="1371600" y="8553450"/>
-            <ns2:ext cx="4724400" cy="857250"/>
+            <ns2:off x="1371600" y="8286750"/>
+            <ns2:ext cx="4724400" cy="1085850"/>
           </ns2:xfrm>
           <ns3:prstGeom xmlns:ns3="http://schemas.openxmlformats.org/drawingml/2006/main" prst="rect">
             <ns3:avLst/>
@@ -1865,8 +1866,8 @@
         </ns0:nvSpPr>
         <ns0:spPr>
           <ns2:xfrm xmlns:ns2="http://schemas.openxmlformats.org/drawingml/2006/main">
-            <ns2:off x="6781800" y="8210550"/>
-            <ns2:ext cx="4724400" cy="304800"/>
+            <ns2:off x="7391400" y="7600950"/>
+            <ns2:ext cx="4114800" cy="457200"/>
           </ns2:xfrm>
           <ns3:prstGeom xmlns:ns3="http://schemas.openxmlformats.org/drawingml/2006/main" prst="rect">
             <ns3:avLst/>
@@ -1877,7 +1878,7 @@
           <ns5:lstStyle xmlns:ns5="http://schemas.openxmlformats.org/drawingml/2006/main">
             <ns5:lvl1pPr marL="0" indent="0" algn="l">
               <ns5:buNone/>
-              <ns5:defRPr sz="1600" b="1">
+              <ns5:defRPr sz="1800" b="1">
                 <ns5:solidFill>
                   <ns5:srgbClr val="0F6BFF"/>
                 </ns5:solidFill>
@@ -1906,8 +1907,8 @@
         </ns0:nvSpPr>
         <ns0:spPr>
           <ns2:xfrm xmlns:ns2="http://schemas.openxmlformats.org/drawingml/2006/main">
-            <ns2:off x="6781800" y="8553450"/>
-            <ns2:ext cx="4724400" cy="857250"/>
+            <ns2:off x="6781800" y="8286750"/>
+            <ns2:ext cx="4724400" cy="1085850"/>
           </ns2:xfrm>
           <ns3:prstGeom xmlns:ns3="http://schemas.openxmlformats.org/drawingml/2006/main" prst="rect">
             <ns3:avLst/>
@@ -2005,8 +2006,8 @@
         </ns0:nvSpPr>
         <ns0:spPr>
           <ns2:xfrm xmlns:ns2="http://schemas.openxmlformats.org/drawingml/2006/main">
-            <ns2:off x="12192000" y="8210550"/>
-            <ns2:ext cx="4724400" cy="304800"/>
+            <ns2:off x="12801600" y="7600950"/>
+            <ns2:ext cx="4114800" cy="457200"/>
           </ns2:xfrm>
           <ns3:prstGeom xmlns:ns3="http://schemas.openxmlformats.org/drawingml/2006/main" prst="rect">
             <ns3:avLst/>
@@ -2017,7 +2018,7 @@
           <ns5:lstStyle xmlns:ns5="http://schemas.openxmlformats.org/drawingml/2006/main">
             <ns5:lvl1pPr marL="0" indent="0" algn="l">
               <ns5:buNone/>
-              <ns5:defRPr sz="1600" b="1">
+              <ns5:defRPr sz="1800" b="1">
                 <ns5:solidFill>
                   <ns5:srgbClr val="0F6BFF"/>
                 </ns5:solidFill>
@@ -2046,8 +2047,8 @@
         </ns0:nvSpPr>
         <ns0:spPr>
           <ns2:xfrm xmlns:ns2="http://schemas.openxmlformats.org/drawingml/2006/main">
-            <ns2:off x="12192000" y="8553450"/>
-            <ns2:ext cx="4724400" cy="857250"/>
+            <ns2:off x="12192000" y="8286750"/>
+            <ns2:ext cx="4724400" cy="1085850"/>
           </ns2:xfrm>
           <ns3:prstGeom xmlns:ns3="http://schemas.openxmlformats.org/drawingml/2006/main" prst="rect">
             <ns3:avLst/>
@@ -3879,7 +3880,7 @@
           <a:lstStyle/>
           <a:p>
             <a:r>
-              <a:t>Pack once, ship everywhere. Validated end-to-end in the OCM open-source sovereign conformance scenario.</a:t>
+              <a:t>Pack once, ship everywhere.Sovereign Cloud for all products.</a:t>
             </a:r>
           </a:p>
         </p:txBody>
@@ -3921,7 +3922,7 @@
           <a:lstStyle/>
           <a:p>
             <a:r>
-              <a:t>DORA-aligned reporting from one shared primitive — ODG correlates findings by component identity, not built N times.</a:t>
+              <a:t>Report from one shared primitive — ODG correlates all findings.</a:t>
             </a:r>
           </a:p>
         </p:txBody>
@@ -3963,7 +3964,7 @@
           <a:lstStyle/>
           <a:p>
             <a:r>
-              <a:t>Acquired teams' signing schemes converge on one mechanism. The retire-list shrinks every quarter.</a:t>
+              <a:t>Let's be efficient:Delivery schemes converge on one mechanism.</a:t>
             </a:r>
           </a:p>
         </p:txBody>
@@ -4005,7 +4006,7 @@
           <a:lstStyle/>
           <a:p>
             <a:r>
-              <a:t>Blast radius is one query — “which deployments contain OCM component X?” — answered via the OCM coordinate system.</a:t>
+              <a:t>Blast radius is one query —answered via the OCM coordinate system.</a:t>
             </a:r>
           </a:p>
         </p:txBody>
@@ -4047,7 +4048,7 @@
           <a:lstStyle/>
           <a:p>
             <a:r>
-              <a:t>One signed descriptor per delivery. Rebuild any landscape. Audit prep is composition, not archaeology.</a:t>
+              <a:t>One signed descriptor per delivery.Rebuild any landscape.</a:t>
             </a:r>
           </a:p>
         </p:txBody>
@@ -4089,14 +4090,14 @@
           <a:lstStyle/>
           <a:p>
             <a:r>
-              <a:t>SAP investment compounds with Gardener, OpenControlPlane, Konfidence, NeoNephos — the open-peer ecosystem.</a:t>
+              <a:t>SAP investment compounds with the open-peer ecosystem.</a:t>
             </a:r>
           </a:p>
         </p:txBody>
       </p:sp>
       <p:pic>
         <p:nvPicPr>
-          <p:cNvPr id="16" name="Picture 15" descr="package-export_72.png"/>
+          <p:cNvPr id="16" name="Picture 15" descr="package-export_96_0F6BFF.png"/>
           <p:cNvPicPr>
             <a:picLocks noChangeAspect="1"/>
           </p:cNvPicPr>
@@ -4111,7 +4112,7 @@
         <p:spPr>
           <a:xfrm>
             <a:off x="1371600" y="5181600"/>
-            <a:ext cx="381000" cy="381000"/>
+            <a:ext cx="457200" cy="457200"/>
           </a:xfrm>
           <a:prstGeom prst="rect">
             <a:avLst/>
@@ -4120,7 +4121,7 @@
       </p:pic>
       <p:pic>
         <p:nvPicPr>
-          <p:cNvPr id="17" name="Picture 16" descr="report-analytics_72.png"/>
+          <p:cNvPr id="17" name="Picture 16" descr="report-analytics_96_0F6BFF.png"/>
           <p:cNvPicPr>
             <a:picLocks noChangeAspect="1"/>
           </p:cNvPicPr>
@@ -4135,7 +4136,7 @@
         <p:spPr>
           <a:xfrm>
             <a:off x="6781800" y="5181600"/>
-            <a:ext cx="381000" cy="381000"/>
+            <a:ext cx="457200" cy="457200"/>
           </a:xfrm>
           <a:prstGeom prst="rect">
             <a:avLst/>
@@ -4144,7 +4145,7 @@
       </p:pic>
       <p:pic>
         <p:nvPicPr>
-          <p:cNvPr id="18" name="Picture 17" descr="rocket_72.png"/>
+          <p:cNvPr id="18" name="Picture 17" descr="rocket_96_0F6BFF.png"/>
           <p:cNvPicPr>
             <a:picLocks noChangeAspect="1"/>
           </p:cNvPicPr>
@@ -4159,7 +4160,7 @@
         <p:spPr>
           <a:xfrm>
             <a:off x="12192000" y="5181600"/>
-            <a:ext cx="381000" cy="381000"/>
+            <a:ext cx="457200" cy="457200"/>
           </a:xfrm>
           <a:prstGeom prst="rect">
             <a:avLst/>
@@ -4168,7 +4169,7 @@
       </p:pic>
       <p:pic>
         <p:nvPicPr>
-          <p:cNvPr id="19" name="Picture 18" descr="radar_72.png"/>
+          <p:cNvPr id="19" name="Picture 18" descr="radar_96_0F6BFF.png"/>
           <p:cNvPicPr>
             <a:picLocks noChangeAspect="1"/>
           </p:cNvPicPr>
@@ -4183,7 +4184,7 @@
         <p:spPr>
           <a:xfrm>
             <a:off x="1371600" y="7600950"/>
-            <a:ext cx="381000" cy="381000"/>
+            <a:ext cx="457200" cy="457200"/>
           </a:xfrm>
           <a:prstGeom prst="rect">
             <a:avLst/>
@@ -4192,7 +4193,7 @@
       </p:pic>
       <p:pic>
         <p:nvPicPr>
-          <p:cNvPr id="20" name="Picture 19" descr="source-of-truth_72.png"/>
+          <p:cNvPr id="20" name="Picture 19" descr="source-of-truth_96_0F6BFF.png"/>
           <p:cNvPicPr>
             <a:picLocks noChangeAspect="1"/>
           </p:cNvPicPr>
@@ -4207,7 +4208,7 @@
         <p:spPr>
           <a:xfrm>
             <a:off x="6781800" y="7600950"/>
-            <a:ext cx="381000" cy="381000"/>
+            <a:ext cx="457200" cy="457200"/>
           </a:xfrm>
           <a:prstGeom prst="rect">
             <a:avLst/>
@@ -4216,7 +4217,7 @@
       </p:pic>
       <p:pic>
         <p:nvPicPr>
-          <p:cNvPr id="21" name="Picture 20" descr="lock_72.png"/>
+          <p:cNvPr id="21" name="Picture 20" descr="lock_96_0F6BFF.png"/>
           <p:cNvPicPr>
             <a:picLocks noChangeAspect="1"/>
           </p:cNvPicPr>
@@ -4231,7 +4232,7 @@
         <p:spPr>
           <a:xfrm>
             <a:off x="12192000" y="7600950"/>
-            <a:ext cx="381000" cy="381000"/>
+            <a:ext cx="457200" cy="457200"/>
           </a:xfrm>
           <a:prstGeom prst="rect">
             <a:avLst/>
@@ -5093,6 +5094,756 @@
 </file>
 
 <file path=ppt/slides/slide15.xml><?xml version="1.0" encoding="utf-8"?>
+<p:sld xmlns:a="http://schemas.openxmlformats.org/drawingml/2006/main" xmlns:p="http://schemas.openxmlformats.org/presentationml/2006/main" xmlns:r="http://schemas.openxmlformats.org/officeDocument/2006/relationships">
+  <p:cSld>
+    <p:spTree>
+      <p:nvGrpSpPr>
+        <p:cNvPr id="1" name=""/>
+        <p:cNvGrpSpPr/>
+        <p:nvPr/>
+      </p:nvGrpSpPr>
+      <p:grpSpPr/>
+      <p:sp>
+        <p:nvSpPr>
+          <p:cNvPr id="2" name="Text Placeholder 1"/>
+          <p:cNvSpPr>
+            <a:spLocks noGrp="1"/>
+          </p:cNvSpPr>
+          <p:nvPr>
+            <p:ph type="body" idx="1"/>
+          </p:nvPr>
+        </p:nvSpPr>
+        <p:spPr/>
+        <p:txBody>
+          <a:bodyPr/>
+          <a:lstStyle/>
+          <a:p>
+            <a:r>
+              <a:t>APPENDIX — ABBREVIATIONS</a:t>
+            </a:r>
+          </a:p>
+        </p:txBody>
+      </p:sp>
+      <p:sp>
+        <p:nvSpPr>
+          <p:cNvPr id="3" name="Title 2"/>
+          <p:cNvSpPr>
+            <a:spLocks noGrp="1"/>
+          </p:cNvSpPr>
+          <p:nvPr>
+            <p:ph type="title" idx="2"/>
+          </p:nvPr>
+        </p:nvSpPr>
+        <p:spPr/>
+        <p:txBody>
+          <a:bodyPr/>
+          <a:lstStyle/>
+          <a:p>
+            <a:r>
+              <a:t>Quick reference for the acronyms used in this deck.</a:t>
+            </a:r>
+          </a:p>
+        </p:txBody>
+      </p:sp>
+      <p:sp>
+        <p:nvSpPr>
+          <p:cNvPr id="4" name="TextBox 3"/>
+          <p:cNvSpPr txBox="1"/>
+          <p:nvPr/>
+        </p:nvSpPr>
+        <p:spPr>
+          <a:xfrm>
+            <a:off x="1143000" y="3429000"/>
+            <a:ext cx="7715250" cy="4572000"/>
+          </a:xfrm>
+          <a:prstGeom prst="rect">
+            <a:avLst/>
+          </a:prstGeom>
+          <a:noFill/>
+        </p:spPr>
+        <p:txBody>
+          <a:bodyPr wrap="square" lIns="0" rIns="0" tIns="0" bIns="0">
+            <a:spAutoFit/>
+          </a:bodyPr>
+          <a:lstStyle/>
+          <a:p>
+            <a:pPr>
+              <a:spcBef>
+                <a:spcPts val="200"/>
+              </a:spcBef>
+              <a:spcAft>
+                <a:spcPts val="600"/>
+              </a:spcAft>
+            </a:pPr>
+            <a:r>
+              <a:rPr sz="1400" b="1">
+                <a:solidFill>
+                  <a:srgbClr val="0F6BFF"/>
+                </a:solidFill>
+                <a:latin typeface="Aptos"/>
+              </a:rPr>
+              <a:t>CRA</a:t>
+            </a:r>
+            <a:r>
+              <a:rPr sz="1300">
+                <a:solidFill>
+                  <a:srgbClr val="000000"/>
+                </a:solidFill>
+                <a:latin typeface="Aptos"/>
+              </a:rPr>
+              <a:t>  —  Cyber Resilience Act — EU regulation on cybersecurity for products with digital elements.</a:t>
+            </a:r>
+          </a:p>
+          <a:p>
+            <a:pPr>
+              <a:spcBef>
+                <a:spcPts val="200"/>
+              </a:spcBef>
+              <a:spcAft>
+                <a:spcPts val="600"/>
+              </a:spcAft>
+            </a:pPr>
+            <a:r>
+              <a:rPr sz="1400" b="1">
+                <a:solidFill>
+                  <a:srgbClr val="0F6BFF"/>
+                </a:solidFill>
+                <a:latin typeface="Aptos"/>
+              </a:rPr>
+              <a:t>DORA</a:t>
+            </a:r>
+            <a:r>
+              <a:rPr sz="1300">
+                <a:solidFill>
+                  <a:srgbClr val="000000"/>
+                </a:solidFill>
+                <a:latin typeface="Aptos"/>
+              </a:rPr>
+              <a:t>  —  Digital Operational Resilience Act — EU regulation for ICT risk in financial services.</a:t>
+            </a:r>
+          </a:p>
+          <a:p>
+            <a:pPr>
+              <a:spcBef>
+                <a:spcPts val="200"/>
+              </a:spcBef>
+              <a:spcAft>
+                <a:spcPts val="600"/>
+              </a:spcAft>
+            </a:pPr>
+            <a:r>
+              <a:rPr sz="1400" b="1">
+                <a:solidFill>
+                  <a:srgbClr val="0F6BFF"/>
+                </a:solidFill>
+                <a:latin typeface="Aptos"/>
+              </a:rPr>
+              <a:t>NIS2</a:t>
+            </a:r>
+            <a:r>
+              <a:rPr sz="1300">
+                <a:solidFill>
+                  <a:srgbClr val="000000"/>
+                </a:solidFill>
+                <a:latin typeface="Aptos"/>
+              </a:rPr>
+              <a:t>  —  Network and Information Security Directive 2 — EU baseline for cybersecurity of essential entities.</a:t>
+            </a:r>
+          </a:p>
+          <a:p>
+            <a:pPr>
+              <a:spcBef>
+                <a:spcPts val="200"/>
+              </a:spcBef>
+              <a:spcAft>
+                <a:spcPts val="600"/>
+              </a:spcAft>
+            </a:pPr>
+            <a:r>
+              <a:rPr sz="1400" b="1">
+                <a:solidFill>
+                  <a:srgbClr val="0F6BFF"/>
+                </a:solidFill>
+                <a:latin typeface="Aptos"/>
+              </a:rPr>
+              <a:t>FedRAMP</a:t>
+            </a:r>
+            <a:r>
+              <a:rPr sz="1300">
+                <a:solidFill>
+                  <a:srgbClr val="000000"/>
+                </a:solidFill>
+                <a:latin typeface="Aptos"/>
+              </a:rPr>
+              <a:t>  —  Federal Risk and Authorization Management Program — US standardised cloud security assessment.</a:t>
+            </a:r>
+          </a:p>
+          <a:p>
+            <a:pPr>
+              <a:spcBef>
+                <a:spcPts val="200"/>
+              </a:spcBef>
+              <a:spcAft>
+                <a:spcPts val="600"/>
+              </a:spcAft>
+            </a:pPr>
+            <a:r>
+              <a:rPr sz="1400" b="1">
+                <a:solidFill>
+                  <a:srgbClr val="0F6BFF"/>
+                </a:solidFill>
+                <a:latin typeface="Aptos"/>
+              </a:rPr>
+              <a:t>FISMA</a:t>
+            </a:r>
+            <a:r>
+              <a:rPr sz="1300">
+                <a:solidFill>
+                  <a:srgbClr val="000000"/>
+                </a:solidFill>
+                <a:latin typeface="Aptos"/>
+              </a:rPr>
+              <a:t>  —  Federal Information Security Modernization Act — US federal information security mandate.</a:t>
+            </a:r>
+          </a:p>
+          <a:p>
+            <a:pPr>
+              <a:spcBef>
+                <a:spcPts val="200"/>
+              </a:spcBef>
+              <a:spcAft>
+                <a:spcPts val="600"/>
+              </a:spcAft>
+            </a:pPr>
+            <a:r>
+              <a:rPr sz="1400" b="1">
+                <a:solidFill>
+                  <a:srgbClr val="0F6BFF"/>
+                </a:solidFill>
+                <a:latin typeface="Aptos"/>
+              </a:rPr>
+              <a:t>BSI C5</a:t>
+            </a:r>
+            <a:r>
+              <a:rPr sz="1300">
+                <a:solidFill>
+                  <a:srgbClr val="000000"/>
+                </a:solidFill>
+                <a:latin typeface="Aptos"/>
+              </a:rPr>
+              <a:t>  —  Bundesamt für Sicherheit in der Informationstechnik — Cloud Computing Compliance Criteria Catalogue.</a:t>
+            </a:r>
+          </a:p>
+          <a:p>
+            <a:pPr>
+              <a:spcBef>
+                <a:spcPts val="200"/>
+              </a:spcBef>
+              <a:spcAft>
+                <a:spcPts val="600"/>
+              </a:spcAft>
+            </a:pPr>
+            <a:r>
+              <a:rPr sz="1400" b="1">
+                <a:solidFill>
+                  <a:srgbClr val="0F6BFF"/>
+                </a:solidFill>
+                <a:latin typeface="Aptos"/>
+              </a:rPr>
+              <a:t>SecNumCloud</a:t>
+            </a:r>
+            <a:r>
+              <a:rPr sz="1300">
+                <a:solidFill>
+                  <a:srgbClr val="000000"/>
+                </a:solidFill>
+                <a:latin typeface="Aptos"/>
+              </a:rPr>
+              <a:t>  —  French cloud security qualification scheme operated by ANSSI.</a:t>
+            </a:r>
+          </a:p>
+          <a:p>
+            <a:pPr>
+              <a:spcBef>
+                <a:spcPts val="200"/>
+              </a:spcBef>
+              <a:spcAft>
+                <a:spcPts val="600"/>
+              </a:spcAft>
+            </a:pPr>
+            <a:r>
+              <a:rPr sz="1400" b="1">
+                <a:solidFill>
+                  <a:srgbClr val="0F6BFF"/>
+                </a:solidFill>
+                <a:latin typeface="Aptos"/>
+              </a:rPr>
+              <a:t>OCM</a:t>
+            </a:r>
+            <a:r>
+              <a:rPr sz="1300">
+                <a:solidFill>
+                  <a:srgbClr val="000000"/>
+                </a:solidFill>
+                <a:latin typeface="Aptos"/>
+              </a:rPr>
+              <a:t>  —  Open Component Model — vendor-neutral specification for signed, transportable software components.</a:t>
+            </a:r>
+          </a:p>
+          <a:p>
+            <a:pPr>
+              <a:spcBef>
+                <a:spcPts val="200"/>
+              </a:spcBef>
+              <a:spcAft>
+                <a:spcPts val="600"/>
+              </a:spcAft>
+            </a:pPr>
+            <a:r>
+              <a:rPr sz="1400" b="1">
+                <a:solidFill>
+                  <a:srgbClr val="0F6BFF"/>
+                </a:solidFill>
+                <a:latin typeface="Aptos"/>
+              </a:rPr>
+              <a:t>ODG</a:t>
+            </a:r>
+            <a:r>
+              <a:rPr sz="1300">
+                <a:solidFill>
+                  <a:srgbClr val="000000"/>
+                </a:solidFill>
+                <a:latin typeface="Aptos"/>
+              </a:rPr>
+              <a:t>  —  Open Delivery Gear — OCM-native compliance automation engine and dashboard.</a:t>
+            </a:r>
+          </a:p>
+          <a:p>
+            <a:pPr>
+              <a:spcBef>
+                <a:spcPts val="200"/>
+              </a:spcBef>
+              <a:spcAft>
+                <a:spcPts val="600"/>
+              </a:spcAft>
+            </a:pPr>
+            <a:r>
+              <a:rPr sz="1400" b="1">
+                <a:solidFill>
+                  <a:srgbClr val="0F6BFF"/>
+                </a:solidFill>
+                <a:latin typeface="Aptos"/>
+              </a:rPr>
+              <a:t>OCI</a:t>
+            </a:r>
+            <a:r>
+              <a:rPr sz="1300">
+                <a:solidFill>
+                  <a:srgbClr val="000000"/>
+                </a:solidFill>
+                <a:latin typeface="Aptos"/>
+              </a:rPr>
+              <a:t>  —  Open Container Initiative — open standards for container image format and distribution.</a:t>
+            </a:r>
+          </a:p>
+          <a:p>
+            <a:pPr>
+              <a:spcBef>
+                <a:spcPts val="200"/>
+              </a:spcBef>
+              <a:spcAft>
+                <a:spcPts val="600"/>
+              </a:spcAft>
+            </a:pPr>
+            <a:r>
+              <a:rPr sz="1400" b="1">
+                <a:solidFill>
+                  <a:srgbClr val="0F6BFF"/>
+                </a:solidFill>
+                <a:latin typeface="Aptos"/>
+              </a:rPr>
+              <a:t>SBOM</a:t>
+            </a:r>
+            <a:r>
+              <a:rPr sz="1300">
+                <a:solidFill>
+                  <a:srgbClr val="000000"/>
+                </a:solidFill>
+                <a:latin typeface="Aptos"/>
+              </a:rPr>
+              <a:t>  —  Software Bill of Materials — inventory of components and dependencies inside a software artifact.</a:t>
+            </a:r>
+          </a:p>
+          <a:p>
+            <a:pPr>
+              <a:spcBef>
+                <a:spcPts val="200"/>
+              </a:spcBef>
+              <a:spcAft>
+                <a:spcPts val="600"/>
+              </a:spcAft>
+            </a:pPr>
+            <a:r>
+              <a:rPr sz="1400" b="1">
+                <a:solidFill>
+                  <a:srgbClr val="0F6BFF"/>
+                </a:solidFill>
+                <a:latin typeface="Aptos"/>
+              </a:rPr>
+              <a:t>SBoD</a:t>
+            </a:r>
+            <a:r>
+              <a:rPr sz="1300">
+                <a:solidFill>
+                  <a:srgbClr val="000000"/>
+                </a:solidFill>
+                <a:latin typeface="Aptos"/>
+              </a:rPr>
+              <a:t>  —  Signed Bill of Delivery — OCM's signed envelope describing what was actually delivered, where, and by whom.</a:t>
+            </a:r>
+          </a:p>
+        </p:txBody>
+      </p:sp>
+      <p:sp>
+        <p:nvSpPr>
+          <p:cNvPr id="5" name="TextBox 4"/>
+          <p:cNvSpPr txBox="1"/>
+          <p:nvPr/>
+        </p:nvSpPr>
+        <p:spPr>
+          <a:xfrm>
+            <a:off x="9429750" y="3429000"/>
+            <a:ext cx="7715250" cy="4572000"/>
+          </a:xfrm>
+          <a:prstGeom prst="rect">
+            <a:avLst/>
+          </a:prstGeom>
+          <a:noFill/>
+        </p:spPr>
+        <p:txBody>
+          <a:bodyPr wrap="square" lIns="0" rIns="0" tIns="0" bIns="0">
+            <a:spAutoFit/>
+          </a:bodyPr>
+          <a:lstStyle/>
+          <a:p>
+            <a:pPr>
+              <a:spcBef>
+                <a:spcPts val="200"/>
+              </a:spcBef>
+              <a:spcAft>
+                <a:spcPts val="600"/>
+              </a:spcAft>
+            </a:pPr>
+            <a:r>
+              <a:rPr sz="1400" b="1">
+                <a:solidFill>
+                  <a:srgbClr val="0F6BFF"/>
+                </a:solidFill>
+                <a:latin typeface="Aptos"/>
+              </a:rPr>
+              <a:t>SPDX</a:t>
+            </a:r>
+            <a:r>
+              <a:rPr sz="1300">
+                <a:solidFill>
+                  <a:srgbClr val="000000"/>
+                </a:solidFill>
+                <a:latin typeface="Aptos"/>
+              </a:rPr>
+              <a:t>  —  Software Package Data Exchange — ISO/IEC 5962 standard format for SBOM data.</a:t>
+            </a:r>
+          </a:p>
+          <a:p>
+            <a:pPr>
+              <a:spcBef>
+                <a:spcPts val="200"/>
+              </a:spcBef>
+              <a:spcAft>
+                <a:spcPts val="600"/>
+              </a:spcAft>
+            </a:pPr>
+            <a:r>
+              <a:rPr sz="1400" b="1">
+                <a:solidFill>
+                  <a:srgbClr val="0F6BFF"/>
+                </a:solidFill>
+                <a:latin typeface="Aptos"/>
+              </a:rPr>
+              <a:t>SWID</a:t>
+            </a:r>
+            <a:r>
+              <a:rPr sz="1300">
+                <a:solidFill>
+                  <a:srgbClr val="000000"/>
+                </a:solidFill>
+                <a:latin typeface="Aptos"/>
+              </a:rPr>
+              <a:t>  —  Software Identification Tags — ISO/IEC 19770-2 standard for software inventory.</a:t>
+            </a:r>
+          </a:p>
+          <a:p>
+            <a:pPr>
+              <a:spcBef>
+                <a:spcPts val="200"/>
+              </a:spcBef>
+              <a:spcAft>
+                <a:spcPts val="600"/>
+              </a:spcAft>
+            </a:pPr>
+            <a:r>
+              <a:rPr sz="1400" b="1">
+                <a:solidFill>
+                  <a:srgbClr val="0F6BFF"/>
+                </a:solidFill>
+                <a:latin typeface="Aptos"/>
+              </a:rPr>
+              <a:t>PKI</a:t>
+            </a:r>
+            <a:r>
+              <a:rPr sz="1300">
+                <a:solidFill>
+                  <a:srgbClr val="000000"/>
+                </a:solidFill>
+                <a:latin typeface="Aptos"/>
+              </a:rPr>
+              <a:t>  —  Public Key Infrastructure — framework for managing certificates and signing keys.</a:t>
+            </a:r>
+          </a:p>
+          <a:p>
+            <a:pPr>
+              <a:spcBef>
+                <a:spcPts val="200"/>
+              </a:spcBef>
+              <a:spcAft>
+                <a:spcPts val="600"/>
+              </a:spcAft>
+            </a:pPr>
+            <a:r>
+              <a:rPr sz="1400" b="1">
+                <a:solidFill>
+                  <a:srgbClr val="0F6BFF"/>
+                </a:solidFill>
+                <a:latin typeface="Aptos"/>
+              </a:rPr>
+              <a:t>Sigstore</a:t>
+            </a:r>
+            <a:r>
+              <a:rPr sz="1300">
+                <a:solidFill>
+                  <a:srgbClr val="000000"/>
+                </a:solidFill>
+                <a:latin typeface="Aptos"/>
+              </a:rPr>
+              <a:t>  —  Open-source project for keyless software signing using OIDC identities.</a:t>
+            </a:r>
+          </a:p>
+          <a:p>
+            <a:pPr>
+              <a:spcBef>
+                <a:spcPts val="200"/>
+              </a:spcBef>
+              <a:spcAft>
+                <a:spcPts val="600"/>
+              </a:spcAft>
+            </a:pPr>
+            <a:r>
+              <a:rPr sz="1400" b="1">
+                <a:solidFill>
+                  <a:srgbClr val="0F6BFF"/>
+                </a:solidFill>
+                <a:latin typeface="Aptos"/>
+              </a:rPr>
+              <a:t>LoB</a:t>
+            </a:r>
+            <a:r>
+              <a:rPr sz="1300">
+                <a:solidFill>
+                  <a:srgbClr val="000000"/>
+                </a:solidFill>
+                <a:latin typeface="Aptos"/>
+              </a:rPr>
+              <a:t>  —  Line of Business — SAP organisational unit owning a product portfolio.</a:t>
+            </a:r>
+          </a:p>
+          <a:p>
+            <a:pPr>
+              <a:spcBef>
+                <a:spcPts val="200"/>
+              </a:spcBef>
+              <a:spcAft>
+                <a:spcPts val="600"/>
+              </a:spcAft>
+            </a:pPr>
+            <a:r>
+              <a:rPr sz="1400" b="1">
+                <a:solidFill>
+                  <a:srgbClr val="0F6BFF"/>
+                </a:solidFill>
+                <a:latin typeface="Aptos"/>
+              </a:rPr>
+              <a:t>BTP</a:t>
+            </a:r>
+            <a:r>
+              <a:rPr sz="1300">
+                <a:solidFill>
+                  <a:srgbClr val="000000"/>
+                </a:solidFill>
+                <a:latin typeface="Aptos"/>
+              </a:rPr>
+              <a:t>  —  SAP Business Technology Platform.</a:t>
+            </a:r>
+          </a:p>
+          <a:p>
+            <a:pPr>
+              <a:spcBef>
+                <a:spcPts val="200"/>
+              </a:spcBef>
+              <a:spcAft>
+                <a:spcPts val="600"/>
+              </a:spcAft>
+            </a:pPr>
+            <a:r>
+              <a:rPr sz="1400" b="1">
+                <a:solidFill>
+                  <a:srgbClr val="0F6BFF"/>
+                </a:solidFill>
+                <a:latin typeface="Aptos"/>
+              </a:rPr>
+              <a:t>OSS</a:t>
+            </a:r>
+            <a:r>
+              <a:rPr sz="1300">
+                <a:solidFill>
+                  <a:srgbClr val="000000"/>
+                </a:solidFill>
+                <a:latin typeface="Aptos"/>
+              </a:rPr>
+              <a:t>  —  Open Source Software.</a:t>
+            </a:r>
+          </a:p>
+          <a:p>
+            <a:pPr>
+              <a:spcBef>
+                <a:spcPts val="200"/>
+              </a:spcBef>
+              <a:spcAft>
+                <a:spcPts val="600"/>
+              </a:spcAft>
+            </a:pPr>
+            <a:r>
+              <a:rPr sz="1400" b="1">
+                <a:solidFill>
+                  <a:srgbClr val="0F6BFF"/>
+                </a:solidFill>
+                <a:latin typeface="Aptos"/>
+              </a:rPr>
+              <a:t>NeoNephos</a:t>
+            </a:r>
+            <a:r>
+              <a:rPr sz="1300">
+                <a:solidFill>
+                  <a:srgbClr val="000000"/>
+                </a:solidFill>
+                <a:latin typeface="Aptos"/>
+              </a:rPr>
+              <a:t>  —  European foundation for sovereign cloud open-source projects, hosted under the Linux Foundation.</a:t>
+            </a:r>
+          </a:p>
+          <a:p>
+            <a:pPr>
+              <a:spcBef>
+                <a:spcPts val="200"/>
+              </a:spcBef>
+              <a:spcAft>
+                <a:spcPts val="600"/>
+              </a:spcAft>
+            </a:pPr>
+            <a:r>
+              <a:rPr sz="1400" b="1">
+                <a:solidFill>
+                  <a:srgbClr val="0F6BFF"/>
+                </a:solidFill>
+                <a:latin typeface="Aptos"/>
+              </a:rPr>
+              <a:t>Grype</a:t>
+            </a:r>
+            <a:r>
+              <a:rPr sz="1300">
+                <a:solidFill>
+                  <a:srgbClr val="000000"/>
+                </a:solidFill>
+                <a:latin typeface="Aptos"/>
+              </a:rPr>
+              <a:t>  —  Open-source vulnerability scanner for container images and filesystems (Anchore).</a:t>
+            </a:r>
+          </a:p>
+          <a:p>
+            <a:pPr>
+              <a:spcBef>
+                <a:spcPts val="200"/>
+              </a:spcBef>
+              <a:spcAft>
+                <a:spcPts val="600"/>
+              </a:spcAft>
+            </a:pPr>
+            <a:r>
+              <a:rPr sz="1400" b="1">
+                <a:solidFill>
+                  <a:srgbClr val="0F6BFF"/>
+                </a:solidFill>
+                <a:latin typeface="Aptos"/>
+              </a:rPr>
+              <a:t>Trivy</a:t>
+            </a:r>
+            <a:r>
+              <a:rPr sz="1300">
+                <a:solidFill>
+                  <a:srgbClr val="000000"/>
+                </a:solidFill>
+                <a:latin typeface="Aptos"/>
+              </a:rPr>
+              <a:t>  —  Open-source security scanner for containers, IaC, and code (Aqua Security).</a:t>
+            </a:r>
+          </a:p>
+          <a:p>
+            <a:pPr>
+              <a:spcBef>
+                <a:spcPts val="200"/>
+              </a:spcBef>
+              <a:spcAft>
+                <a:spcPts val="600"/>
+              </a:spcAft>
+            </a:pPr>
+            <a:r>
+              <a:rPr sz="1400" b="1">
+                <a:solidFill>
+                  <a:srgbClr val="0F6BFF"/>
+                </a:solidFill>
+                <a:latin typeface="Aptos"/>
+              </a:rPr>
+              <a:t>Helm</a:t>
+            </a:r>
+            <a:r>
+              <a:rPr sz="1300">
+                <a:solidFill>
+                  <a:srgbClr val="000000"/>
+                </a:solidFill>
+                <a:latin typeface="Aptos"/>
+              </a:rPr>
+              <a:t>  —  Package manager for Kubernetes; reference artifact type for OCM.</a:t>
+            </a:r>
+          </a:p>
+        </p:txBody>
+      </p:sp>
+    </p:spTree>
+  </p:cSld>
+  <p:clrMapOvr>
+    <a:masterClrMapping/>
+  </p:clrMapOvr>
+</p:sld>
+</file>
+
+<file path=ppt/slides/slide16.xml><?xml version="1.0" encoding="utf-8"?>
 <p:sld xmlns:a="http://schemas.openxmlformats.org/drawingml/2006/main" xmlns:p="http://schemas.openxmlformats.org/presentationml/2006/main" xmlns:r="http://schemas.openxmlformats.org/officeDocument/2006/relationships" show="0">
   <p:cSld>
     <p:spTree>
@@ -5298,7 +6049,7 @@
 </p:sld>
 </file>
 
-<file path=ppt/slides/slide16.xml><?xml version="1.0" encoding="utf-8"?>
+<file path=ppt/slides/slide17.xml><?xml version="1.0" encoding="utf-8"?>
 <p:sld xmlns:a="http://schemas.openxmlformats.org/drawingml/2006/main" xmlns:p="http://schemas.openxmlformats.org/presentationml/2006/main" xmlns:r="http://schemas.openxmlformats.org/officeDocument/2006/relationships" show="0">
   <p:cSld>
     <p:spTree>
@@ -5837,7 +6588,7 @@
                   <a:srgbClr val="000000"/>
                 </a:solidFill>
               </a:rPr>
-              <a:t>An SBOM (Software Bill of Materials) tells you what's in your software. It was built for inventory.</a:t>
+              <a:t>An SBOM tells you what's in your software. It was built for inventory.</a:t>
             </a:r>
           </a:p>
           <a:p>
@@ -5863,7 +6614,7 @@
                   <a:srgbClr val="000000"/>
                 </a:solidFill>
               </a:rPr>
-              <a:t>A Software Bill of Delivery (SBoD) tells you what you delivered, how to verify it, how to transport it, and how to operate it. It was built for delivery.</a:t>
+              <a:t>A Software Bill of Delivery (SBoD) tells you what you delivered, how to verify, transport, and operate it. It was built for delivery.</a:t>
             </a:r>
           </a:p>
           <a:p>

--- a/docs/community/marketing/decks/exec-phase1/OCM-Sovereign-Delivery-Internal-Sponsor.pptx
+++ b/docs/community/marketing/decks/exec-phase1/OCM-Sovereign-Delivery-Internal-Sponsor.pptx
@@ -1314,7 +1314,7 @@
           </ns3:prstGeom>
         </ns0:spPr>
         <ns0:txBody>
-          <ns4:bodyPr xmlns:ns4="http://schemas.openxmlformats.org/drawingml/2006/main" wrap="square" rtlCol="0" anchor="t" lIns="0" tIns="0" rIns="0" bIns="0"/>
+          <ns4:bodyPr xmlns:ns4="http://schemas.openxmlformats.org/drawingml/2006/main" wrap="square" rtlCol="0" anchor="ctr" lIns="0" tIns="0" rIns="0" bIns="0"/>
           <ns5:lstStyle xmlns:ns5="http://schemas.openxmlformats.org/drawingml/2006/main">
             <ns5:lvl1pPr marL="0" indent="0" algn="l">
               <ns5:buNone/>
@@ -1454,7 +1454,7 @@
           </ns3:prstGeom>
         </ns0:spPr>
         <ns0:txBody>
-          <ns4:bodyPr xmlns:ns4="http://schemas.openxmlformats.org/drawingml/2006/main" wrap="square" rtlCol="0" anchor="t" lIns="0" tIns="0" rIns="0" bIns="0"/>
+          <ns4:bodyPr xmlns:ns4="http://schemas.openxmlformats.org/drawingml/2006/main" wrap="square" rtlCol="0" anchor="ctr" lIns="0" tIns="0" rIns="0" bIns="0"/>
           <ns5:lstStyle xmlns:ns5="http://schemas.openxmlformats.org/drawingml/2006/main">
             <ns5:lvl1pPr marL="0" indent="0" algn="l">
               <ns5:buNone/>
@@ -1594,7 +1594,7 @@
           </ns3:prstGeom>
         </ns0:spPr>
         <ns0:txBody>
-          <ns4:bodyPr xmlns:ns4="http://schemas.openxmlformats.org/drawingml/2006/main" wrap="square" rtlCol="0" anchor="t" lIns="0" tIns="0" rIns="0" bIns="0"/>
+          <ns4:bodyPr xmlns:ns4="http://schemas.openxmlformats.org/drawingml/2006/main" wrap="square" rtlCol="0" anchor="ctr" lIns="0" tIns="0" rIns="0" bIns="0"/>
           <ns5:lstStyle xmlns:ns5="http://schemas.openxmlformats.org/drawingml/2006/main">
             <ns5:lvl1pPr marL="0" indent="0" algn="l">
               <ns5:buNone/>
@@ -1734,7 +1734,7 @@
           </ns3:prstGeom>
         </ns0:spPr>
         <ns0:txBody>
-          <ns4:bodyPr xmlns:ns4="http://schemas.openxmlformats.org/drawingml/2006/main" wrap="square" rtlCol="0" anchor="t" lIns="0" tIns="0" rIns="0" bIns="0"/>
+          <ns4:bodyPr xmlns:ns4="http://schemas.openxmlformats.org/drawingml/2006/main" wrap="square" rtlCol="0" anchor="ctr" lIns="0" tIns="0" rIns="0" bIns="0"/>
           <ns5:lstStyle xmlns:ns5="http://schemas.openxmlformats.org/drawingml/2006/main">
             <ns5:lvl1pPr marL="0" indent="0" algn="l">
               <ns5:buNone/>
@@ -1874,7 +1874,7 @@
           </ns3:prstGeom>
         </ns0:spPr>
         <ns0:txBody>
-          <ns4:bodyPr xmlns:ns4="http://schemas.openxmlformats.org/drawingml/2006/main" wrap="square" rtlCol="0" anchor="t" lIns="0" tIns="0" rIns="0" bIns="0"/>
+          <ns4:bodyPr xmlns:ns4="http://schemas.openxmlformats.org/drawingml/2006/main" wrap="square" rtlCol="0" anchor="ctr" lIns="0" tIns="0" rIns="0" bIns="0"/>
           <ns5:lstStyle xmlns:ns5="http://schemas.openxmlformats.org/drawingml/2006/main">
             <ns5:lvl1pPr marL="0" indent="0" algn="l">
               <ns5:buNone/>
@@ -2014,7 +2014,7 @@
           </ns3:prstGeom>
         </ns0:spPr>
         <ns0:txBody>
-          <ns4:bodyPr xmlns:ns4="http://schemas.openxmlformats.org/drawingml/2006/main" wrap="square" rtlCol="0" anchor="t" lIns="0" tIns="0" rIns="0" bIns="0"/>
+          <ns4:bodyPr xmlns:ns4="http://schemas.openxmlformats.org/drawingml/2006/main" wrap="square" rtlCol="0" anchor="ctr" lIns="0" tIns="0" rIns="0" bIns="0"/>
           <ns5:lstStyle xmlns:ns5="http://schemas.openxmlformats.org/drawingml/2006/main">
             <ns5:lvl1pPr marL="0" indent="0" algn="l">
               <ns5:buNone/>
@@ -3674,7 +3674,7 @@
                   <a:srgbClr val="000000"/>
                 </a:solidFill>
               </a:rPr>
-              <a:t>The Compliance Dashboard is your entry point: every component, every finding, every signature in one view.</a:t>
+              <a:t>The Compliance Dashboard is your entry point: every component, every finding in one view.</a:t>
             </a:r>
           </a:p>
           <a:p>
@@ -3726,7 +3726,7 @@
                   <a:srgbClr val="000000"/>
                 </a:solidFill>
               </a:rPr>
-              <a:t>Findings get rescored against contextual risk, so your team patches what actually matters.</a:t>
+              <a:t>Findings get rescored against contextual risk. Your team only patches what actually matters.</a:t>
             </a:r>
           </a:p>
           <a:p>
@@ -3753,32 +3753,6 @@
                 </a:solidFill>
               </a:rPr>
               <a:t>Every compliance signal correlates by component identity. Auditors get evidence, not spreadsheets.</a:t>
-            </a:r>
-          </a:p>
-          <a:p>
-            <a:pPr>
-              <a:spcBef>
-                <a:spcPts val="800"/>
-              </a:spcBef>
-              <a:spcAft>
-                <a:spcPts val="800"/>
-              </a:spcAft>
-            </a:pPr>
-            <a:r>
-              <a:rPr b="1">
-                <a:solidFill>
-                  <a:srgbClr val="0F6BFF"/>
-                </a:solidFill>
-              </a:rPr>
-              <a:t>▪  </a:t>
-            </a:r>
-            <a:r>
-              <a:rPr>
-                <a:solidFill>
-                  <a:srgbClr val="000000"/>
-                </a:solidFill>
-              </a:rPr>
-              <a:t>Every SAP LoB gets compliance correlation by component identity, without each LoB building its own retrofit.</a:t>
             </a:r>
           </a:p>
         </p:txBody>
@@ -3880,7 +3854,12 @@
           <a:lstStyle/>
           <a:p>
             <a:r>
-              <a:t>Pack once, ship everywhere.Sovereign Cloud for all products.</a:t>
+              <a:t>Pack once, ship everywhere.</a:t>
+            </a:r>
+          </a:p>
+          <a:p>
+            <a:r>
+              <a:t>Sovereign Cloud for all products.</a:t>
             </a:r>
           </a:p>
         </p:txBody>
@@ -3922,7 +3901,12 @@
           <a:lstStyle/>
           <a:p>
             <a:r>
-              <a:t>Report from one shared primitive — ODG correlates all findings.</a:t>
+              <a:t>Report from one shared primitive —</a:t>
+            </a:r>
+          </a:p>
+          <a:p>
+            <a:r>
+              <a:t>ODG correlates all findings.</a:t>
             </a:r>
           </a:p>
         </p:txBody>
@@ -3964,7 +3948,12 @@
           <a:lstStyle/>
           <a:p>
             <a:r>
-              <a:t>Let's be efficient:Delivery schemes converge on one mechanism.</a:t>
+              <a:t>Let's be efficient:</a:t>
+            </a:r>
+          </a:p>
+          <a:p>
+            <a:r>
+              <a:t>Delivery schemes converge on one mechanism.</a:t>
             </a:r>
           </a:p>
         </p:txBody>
@@ -4006,7 +3995,12 @@
           <a:lstStyle/>
           <a:p>
             <a:r>
-              <a:t>Blast radius is one query —answered via the OCM coordinate system.</a:t>
+              <a:t>Blast radius is one query —</a:t>
+            </a:r>
+          </a:p>
+          <a:p>
+            <a:r>
+              <a:t>answered via the OCM coordinate system.</a:t>
             </a:r>
           </a:p>
         </p:txBody>
@@ -4048,7 +4042,12 @@
           <a:lstStyle/>
           <a:p>
             <a:r>
-              <a:t>One signed descriptor per delivery.Rebuild any landscape.</a:t>
+              <a:t>One signed descriptor per delivery.</a:t>
+            </a:r>
+          </a:p>
+          <a:p>
+            <a:r>
+              <a:t>Rebuild any landscape easily.</a:t>
             </a:r>
           </a:p>
         </p:txBody>
@@ -4090,7 +4089,12 @@
           <a:lstStyle/>
           <a:p>
             <a:r>
-              <a:t>SAP investment compounds with the open-peer ecosystem.</a:t>
+              <a:t>SAP investment compounds with</a:t>
+            </a:r>
+          </a:p>
+          <a:p>
+            <a:r>
+              <a:t>the open-peer ecosystem.</a:t>
             </a:r>
           </a:p>
         </p:txBody>
@@ -4145,7 +4149,7 @@
       </p:pic>
       <p:pic>
         <p:nvPicPr>
-          <p:cNvPr id="18" name="Picture 17" descr="rocket_96_0F6BFF.png"/>
+          <p:cNvPr id="18" name="Picture 17" descr="git-merge_96_0F6BFF.png"/>
           <p:cNvPicPr>
             <a:picLocks noChangeAspect="1"/>
           </p:cNvPicPr>
@@ -4217,7 +4221,7 @@
       </p:pic>
       <p:pic>
         <p:nvPicPr>
-          <p:cNvPr id="21" name="Picture 20" descr="lock_96_0F6BFF.png"/>
+          <p:cNvPr id="21" name="Picture 20" descr="heart-handshake_96_0F6BFF.png"/>
           <p:cNvPicPr>
             <a:picLocks noChangeAspect="1"/>
           </p:cNvPicPr>
@@ -4299,43 +4303,9 @@
           </a:p>
         </p:txBody>
       </p:sp>
-      <p:sp>
-        <p:nvSpPr>
-          <p:cNvPr id="4" name="TextBox 3"/>
-          <p:cNvSpPr txBox="1"/>
-          <p:nvPr/>
-        </p:nvSpPr>
-        <p:spPr>
-          <a:xfrm>
-            <a:off x="1143000" y="4857750"/>
-            <a:ext cx="16002000" cy="342900"/>
-          </a:xfrm>
-          <a:prstGeom prst="rect">
-            <a:avLst/>
-          </a:prstGeom>
-          <a:noFill/>
-        </p:spPr>
-        <p:txBody>
-          <a:bodyPr wrap="none" lIns="0" rIns="0" tIns="0" bIns="0">
-            <a:spAutoFit/>
-          </a:bodyPr>
-          <a:lstStyle/>
-          <a:p>
-            <a:r>
-              <a:rPr sz="1800" b="1" cap="all" spc="110">
-                <a:solidFill>
-                  <a:srgbClr val="0F6BFF"/>
-                </a:solidFill>
-                <a:latin typeface="Aptos"/>
-              </a:rPr>
-              <a:t>OPEN PEER PROJECTS BUILDING ON OCM</a:t>
-            </a:r>
-          </a:p>
-        </p:txBody>
-      </p:sp>
       <p:pic>
         <p:nvPicPr>
-          <p:cNvPr id="5" name="Picture 4" descr="gardener-horizontal-color_600.png">
+          <p:cNvPr id="4" name="Picture 3" descr="gardener-horizontal-color_720.png">
             <a:hlinkClick r:id="rId3"/>
           </p:cNvPr>
           <p:cNvPicPr>
@@ -4351,8 +4321,8 @@
         </p:blipFill>
         <p:spPr>
           <a:xfrm>
-            <a:off x="2000250" y="6067425"/>
-            <a:ext cx="2857500" cy="819150"/>
+            <a:off x="1714500" y="5414962"/>
+            <a:ext cx="3429000" cy="981075"/>
           </a:xfrm>
           <a:prstGeom prst="rect">
             <a:avLst/>
@@ -4361,13 +4331,13 @@
       </p:pic>
       <p:sp>
         <p:nvSpPr>
-          <p:cNvPr id="6" name="TextBox 5"/>
+          <p:cNvPr id="5" name="TextBox 4"/>
           <p:cNvSpPr txBox="1"/>
           <p:nvPr/>
         </p:nvSpPr>
         <p:spPr>
           <a:xfrm>
-            <a:off x="1524000" y="7105650"/>
+            <a:off x="1524000" y="6534150"/>
             <a:ext cx="3810000" cy="266700"/>
           </a:xfrm>
           <a:prstGeom prst="rect">
@@ -4397,7 +4367,7 @@
       </p:sp>
       <p:pic>
         <p:nvPicPr>
-          <p:cNvPr id="7" name="Picture 6" descr="kyma-icon-color_600.png">
+          <p:cNvPr id="6" name="Picture 5" descr="kyma-icon-color_720.png">
             <a:hlinkClick r:id="rId5"/>
           </p:cNvPr>
           <p:cNvPicPr>
@@ -4413,8 +4383,8 @@
         </p:blipFill>
         <p:spPr>
           <a:xfrm>
-            <a:off x="6766849" y="6019800"/>
-            <a:ext cx="944302" cy="914400"/>
+            <a:off x="6649487" y="5334000"/>
+            <a:ext cx="1179025" cy="1143000"/>
           </a:xfrm>
           <a:prstGeom prst="rect">
             <a:avLst/>
@@ -4423,13 +4393,13 @@
       </p:pic>
       <p:sp>
         <p:nvSpPr>
-          <p:cNvPr id="8" name="TextBox 7"/>
+          <p:cNvPr id="7" name="TextBox 6"/>
           <p:cNvSpPr txBox="1"/>
           <p:nvPr/>
         </p:nvSpPr>
         <p:spPr>
           <a:xfrm>
-            <a:off x="5334000" y="7105650"/>
+            <a:off x="5334000" y="6534150"/>
             <a:ext cx="3810000" cy="266700"/>
           </a:xfrm>
           <a:prstGeom prst="rect">
@@ -4459,7 +4429,7 @@
       </p:sp>
       <p:pic>
         <p:nvPicPr>
-          <p:cNvPr id="9" name="Picture 8" descr="opencontrolplane-icon-color_600.png">
+          <p:cNvPr id="8" name="Picture 7" descr="opencontrolplane-icon-color_720.png">
             <a:hlinkClick r:id="rId7"/>
           </p:cNvPr>
           <p:cNvPicPr>
@@ -4475,8 +4445,8 @@
         </p:blipFill>
         <p:spPr>
           <a:xfrm>
-            <a:off x="10655991" y="6019800"/>
-            <a:ext cx="786017" cy="914400"/>
+            <a:off x="10557387" y="5334000"/>
+            <a:ext cx="983225" cy="1143000"/>
           </a:xfrm>
           <a:prstGeom prst="rect">
             <a:avLst/>
@@ -4485,13 +4455,13 @@
       </p:pic>
       <p:sp>
         <p:nvSpPr>
-          <p:cNvPr id="10" name="TextBox 9"/>
+          <p:cNvPr id="9" name="TextBox 8"/>
           <p:cNvSpPr txBox="1"/>
           <p:nvPr/>
         </p:nvSpPr>
         <p:spPr>
           <a:xfrm>
-            <a:off x="9144000" y="7105650"/>
+            <a:off x="9144000" y="6534150"/>
             <a:ext cx="3810000" cy="266700"/>
           </a:xfrm>
           <a:prstGeom prst="rect">
@@ -4521,7 +4491,7 @@
       </p:sp>
       <p:pic>
         <p:nvPicPr>
-          <p:cNvPr id="11" name="Picture 10" descr="konfidence-horizontal-light_600.png">
+          <p:cNvPr id="10" name="Picture 9" descr="konfidence-horizontal-light_720.png">
             <a:hlinkClick r:id="rId9"/>
           </p:cNvPr>
           <p:cNvPicPr>
@@ -4537,8 +4507,8 @@
         </p:blipFill>
         <p:spPr>
           <a:xfrm>
-            <a:off x="13430250" y="6310312"/>
-            <a:ext cx="2857500" cy="333375"/>
+            <a:off x="13144500" y="5705475"/>
+            <a:ext cx="3429000" cy="400050"/>
           </a:xfrm>
           <a:prstGeom prst="rect">
             <a:avLst/>
@@ -4547,13 +4517,13 @@
       </p:pic>
       <p:sp>
         <p:nvSpPr>
-          <p:cNvPr id="12" name="TextBox 11"/>
+          <p:cNvPr id="11" name="TextBox 10"/>
           <p:cNvSpPr txBox="1"/>
           <p:nvPr/>
         </p:nvSpPr>
         <p:spPr>
           <a:xfrm>
-            <a:off x="12954000" y="7105650"/>
+            <a:off x="12954000" y="6534150"/>
             <a:ext cx="3810000" cy="266700"/>
           </a:xfrm>
           <a:prstGeom prst="rect">
@@ -4583,7 +4553,7 @@
       </p:sp>
       <p:pic>
         <p:nvPicPr>
-          <p:cNvPr id="13" name="Picture 12" descr="neonephos-foundation-horizontal-color_600.png">
+          <p:cNvPr id="12" name="Picture 11" descr="neonephos-foundation-horizontal-color_600.png">
             <a:hlinkClick r:id="rId11"/>
           </p:cNvPr>
           <p:cNvPicPr>
@@ -4599,7 +4569,7 @@
         </p:blipFill>
         <p:spPr>
           <a:xfrm>
-            <a:off x="8814777" y="8305800"/>
+            <a:off x="8848114" y="7829550"/>
             <a:ext cx="1953846" cy="381000"/>
           </a:xfrm>
           <a:prstGeom prst="rect">
@@ -4609,14 +4579,14 @@
       </p:pic>
       <p:sp>
         <p:nvSpPr>
-          <p:cNvPr id="14" name="TextBox 13"/>
+          <p:cNvPr id="13" name="TextBox 12"/>
           <p:cNvSpPr txBox="1"/>
           <p:nvPr/>
         </p:nvSpPr>
         <p:spPr>
           <a:xfrm>
-            <a:off x="7290777" y="8286750"/>
-            <a:ext cx="1371600" cy="476250"/>
+            <a:off x="7257439" y="7810500"/>
+            <a:ext cx="1438275" cy="476250"/>
           </a:xfrm>
           <a:prstGeom prst="rect">
             <a:avLst/>
@@ -4631,7 +4601,7 @@
           <a:p>
             <a:pPr algn="r"/>
             <a:r>
-              <a:rPr sz="2000" i="1">
+              <a:rPr sz="2000" i="0">
                 <a:solidFill>
                   <a:srgbClr val="0A3A99"/>
                 </a:solidFill>
@@ -4644,14 +4614,14 @@
       </p:sp>
       <p:sp>
         <p:nvSpPr>
-          <p:cNvPr id="15" name="TextBox 14"/>
+          <p:cNvPr id="14" name="TextBox 13"/>
           <p:cNvSpPr txBox="1"/>
           <p:nvPr/>
         </p:nvSpPr>
         <p:spPr>
           <a:xfrm>
-            <a:off x="7291387" y="8743950"/>
-            <a:ext cx="3705225" cy="266700"/>
+            <a:off x="7258050" y="8267700"/>
+            <a:ext cx="3771900" cy="266700"/>
           </a:xfrm>
           <a:prstGeom prst="rect">
             <a:avLst/>
@@ -4712,7 +4682,7 @@
           <a:lstStyle/>
           <a:p>
             <a:r>
-              <a:t>WHERE OCM IS SHIPPING — INTERNAL SAP</a:t>
+              <a:t>WHERE OCM IS SHIPPING — SAP</a:t>
             </a:r>
           </a:p>
         </p:txBody>
@@ -4775,7 +4745,7 @@
                   <a:srgbClr val="000000"/>
                 </a:solidFill>
               </a:rPr>
-              <a:t>Hyperspace — hosts the internal Dev Portal, lifecycle processes, and the shipment / delivery of SAP products. Direct OCM consumer.</a:t>
+              <a:t>Hyperspace — hosts the internal Dev Portal, lifecycle processes, and delivery of SAP products.</a:t>
             </a:r>
           </a:p>
           <a:p>
@@ -4801,7 +4771,7 @@
                   <a:srgbClr val="000000"/>
                 </a:solidFill>
               </a:rPr>
-              <a:t>Release-Based Shipment Channel (RBSC) — internal SAP delivery infrastructure converging on OCM.</a:t>
+              <a:t>Release-Based Shipment Channel (RBSC) — SAP delivery infrastructure for customer shipments.</a:t>
             </a:r>
           </a:p>
           <a:p>
@@ -4853,7 +4823,7 @@
                   <a:srgbClr val="000000"/>
                 </a:solidFill>
               </a:rPr>
-              <a:t>Steampunk — internal name for SAP BTP ABAP Environment (PaaS within SAP BTP); large user of OCM and ODG.</a:t>
+              <a:t>Steampunk — SAP BTP PaaS for ABAP Development. </a:t>
             </a:r>
           </a:p>
           <a:p>
@@ -4879,46 +4849,7 @@
                   <a:srgbClr val="000000"/>
                 </a:solidFill>
               </a:rPr>
-              <a:t>Greenhouse — a cloud operations platform that streamlines management of large-scale, distributed infrastructure.</a:t>
-            </a:r>
-          </a:p>
-        </p:txBody>
-      </p:sp>
-      <p:sp>
-        <p:nvSpPr>
-          <p:cNvPr id="5" name="TextBox 4"/>
-          <p:cNvSpPr txBox="1"/>
-          <p:nvPr/>
-        </p:nvSpPr>
-        <p:spPr>
-          <a:xfrm>
-            <a:off x="1143000" y="9001125"/>
-            <a:ext cx="16002000" cy="762000"/>
-          </a:xfrm>
-          <a:prstGeom prst="rect">
-            <a:avLst/>
-          </a:prstGeom>
-          <a:noFill/>
-        </p:spPr>
-        <p:txBody>
-          <a:bodyPr wrap="square" lIns="0" rIns="0" tIns="0" bIns="0">
-            <a:spAutoFit/>
-          </a:bodyPr>
-          <a:lstStyle/>
-          <a:p>
-            <a:pPr algn="ctr">
-              <a:lnSpc>
-                <a:spcPct val="130000"/>
-              </a:lnSpc>
-            </a:pPr>
-            <a:r>
-              <a:rPr sz="1600" i="1">
-                <a:solidFill>
-                  <a:srgbClr val="0A3A99"/>
-                </a:solidFill>
-                <a:latin typeface="Aptos"/>
-              </a:rPr>
-              <a:t>Stewardship is leverage. Disinvestment forfeits it. The window for shaping the open standard for regulated delivery is closing — what compounds for SAP today migrates elsewhere if we step back.</a:t>
+              <a:t>Greenhouse — Cloud operations platform designed to streamline the management of distributed infrastructure.</a:t>
             </a:r>
           </a:p>
         </p:txBody>
@@ -5153,7 +5084,7 @@
         </p:nvSpPr>
         <p:spPr>
           <a:xfrm>
-            <a:off x="1143000" y="3429000"/>
+            <a:off x="1143000" y="4953000"/>
             <a:ext cx="7715250" cy="4572000"/>
           </a:xfrm>
           <a:prstGeom prst="rect">
@@ -5182,7 +5113,7 @@
                 </a:solidFill>
                 <a:latin typeface="Aptos"/>
               </a:rPr>
-              <a:t>CRA</a:t>
+              <a:t>BSI C5</a:t>
             </a:r>
             <a:r>
               <a:rPr sz="1300">
@@ -5191,7 +5122,7 @@
                 </a:solidFill>
                 <a:latin typeface="Aptos"/>
               </a:rPr>
-              <a:t>  —  Cyber Resilience Act — EU regulation on cybersecurity for products with digital elements.</a:t>
+              <a:t>  —  Bundesamt für Sicherheit in der Informationstechnik — Cloud Computing Compliance Criteria Catalogue.</a:t>
             </a:r>
           </a:p>
           <a:p>
@@ -5210,7 +5141,7 @@
                 </a:solidFill>
                 <a:latin typeface="Aptos"/>
               </a:rPr>
-              <a:t>DORA</a:t>
+              <a:t>BTP</a:t>
             </a:r>
             <a:r>
               <a:rPr sz="1300">
@@ -5219,7 +5150,7 @@
                 </a:solidFill>
                 <a:latin typeface="Aptos"/>
               </a:rPr>
-              <a:t>  —  Digital Operational Resilience Act — EU regulation for ICT risk in financial services.</a:t>
+              <a:t>  —  SAP Business Technology Platform.</a:t>
             </a:r>
           </a:p>
           <a:p>
@@ -5238,7 +5169,7 @@
                 </a:solidFill>
                 <a:latin typeface="Aptos"/>
               </a:rPr>
-              <a:t>NIS2</a:t>
+              <a:t>CRA</a:t>
             </a:r>
             <a:r>
               <a:rPr sz="1300">
@@ -5247,7 +5178,7 @@
                 </a:solidFill>
                 <a:latin typeface="Aptos"/>
               </a:rPr>
-              <a:t>  —  Network and Information Security Directive 2 — EU baseline for cybersecurity of essential entities.</a:t>
+              <a:t>  —  Cyber Resilience Act — EU regulation on cybersecurity for products with digital elements.</a:t>
             </a:r>
           </a:p>
           <a:p>
@@ -5266,7 +5197,7 @@
                 </a:solidFill>
                 <a:latin typeface="Aptos"/>
               </a:rPr>
-              <a:t>FedRAMP</a:t>
+              <a:t>DORA</a:t>
             </a:r>
             <a:r>
               <a:rPr sz="1300">
@@ -5275,7 +5206,7 @@
                 </a:solidFill>
                 <a:latin typeface="Aptos"/>
               </a:rPr>
-              <a:t>  —  Federal Risk and Authorization Management Program — US standardised cloud security assessment.</a:t>
+              <a:t>  —  Digital Operational Resilience Act — EU regulation for ICT risk in financial services.</a:t>
             </a:r>
           </a:p>
           <a:p>
@@ -5294,7 +5225,7 @@
                 </a:solidFill>
                 <a:latin typeface="Aptos"/>
               </a:rPr>
-              <a:t>FISMA</a:t>
+              <a:t>FedRAMP</a:t>
             </a:r>
             <a:r>
               <a:rPr sz="1300">
@@ -5303,7 +5234,7 @@
                 </a:solidFill>
                 <a:latin typeface="Aptos"/>
               </a:rPr>
-              <a:t>  —  Federal Information Security Modernization Act — US federal information security mandate.</a:t>
+              <a:t>  —  Federal Risk and Authorization Management Program — US standardised cloud security assessment.</a:t>
             </a:r>
           </a:p>
           <a:p>
@@ -5322,7 +5253,7 @@
                 </a:solidFill>
                 <a:latin typeface="Aptos"/>
               </a:rPr>
-              <a:t>BSI C5</a:t>
+              <a:t>FISMA</a:t>
             </a:r>
             <a:r>
               <a:rPr sz="1300">
@@ -5331,7 +5262,7 @@
                 </a:solidFill>
                 <a:latin typeface="Aptos"/>
               </a:rPr>
-              <a:t>  —  Bundesamt für Sicherheit in der Informationstechnik — Cloud Computing Compliance Criteria Catalogue.</a:t>
+              <a:t>  —  Federal Information Security Modernization Act — US federal information security mandate.</a:t>
             </a:r>
           </a:p>
           <a:p>
@@ -5350,7 +5281,7 @@
                 </a:solidFill>
                 <a:latin typeface="Aptos"/>
               </a:rPr>
-              <a:t>SecNumCloud</a:t>
+              <a:t>Grype</a:t>
             </a:r>
             <a:r>
               <a:rPr sz="1300">
@@ -5359,7 +5290,7 @@
                 </a:solidFill>
                 <a:latin typeface="Aptos"/>
               </a:rPr>
-              <a:t>  —  French cloud security qualification scheme operated by ANSSI.</a:t>
+              <a:t>  —  Open-source vulnerability scanner for container images and filesystems (Anchore).</a:t>
             </a:r>
           </a:p>
           <a:p>
@@ -5378,7 +5309,7 @@
                 </a:solidFill>
                 <a:latin typeface="Aptos"/>
               </a:rPr>
-              <a:t>OCM</a:t>
+              <a:t>Helm</a:t>
             </a:r>
             <a:r>
               <a:rPr sz="1300">
@@ -5387,7 +5318,7 @@
                 </a:solidFill>
                 <a:latin typeface="Aptos"/>
               </a:rPr>
-              <a:t>  —  Open Component Model — vendor-neutral specification for signed, transportable software components.</a:t>
+              <a:t>  —  Package manager for Kubernetes; reference artifact type for OCM.</a:t>
             </a:r>
           </a:p>
           <a:p>
@@ -5406,7 +5337,7 @@
                 </a:solidFill>
                 <a:latin typeface="Aptos"/>
               </a:rPr>
-              <a:t>ODG</a:t>
+              <a:t>LoB</a:t>
             </a:r>
             <a:r>
               <a:rPr sz="1300">
@@ -5415,7 +5346,7 @@
                 </a:solidFill>
                 <a:latin typeface="Aptos"/>
               </a:rPr>
-              <a:t>  —  Open Delivery Gear — OCM-native compliance automation engine and dashboard.</a:t>
+              <a:t>  —  Line of Business — SAP organisational unit owning a product portfolio.</a:t>
             </a:r>
           </a:p>
           <a:p>
@@ -5434,7 +5365,7 @@
                 </a:solidFill>
                 <a:latin typeface="Aptos"/>
               </a:rPr>
-              <a:t>OCI</a:t>
+              <a:t>NeoNephos</a:t>
             </a:r>
             <a:r>
               <a:rPr sz="1300">
@@ -5443,7 +5374,7 @@
                 </a:solidFill>
                 <a:latin typeface="Aptos"/>
               </a:rPr>
-              <a:t>  —  Open Container Initiative — open standards for container image format and distribution.</a:t>
+              <a:t>  —  European foundation for sovereign cloud open-source projects, hosted under the Linux Foundation.</a:t>
             </a:r>
           </a:p>
           <a:p>
@@ -5462,7 +5393,7 @@
                 </a:solidFill>
                 <a:latin typeface="Aptos"/>
               </a:rPr>
-              <a:t>SBOM</a:t>
+              <a:t>NIS2</a:t>
             </a:r>
             <a:r>
               <a:rPr sz="1300">
@@ -5471,7 +5402,7 @@
                 </a:solidFill>
                 <a:latin typeface="Aptos"/>
               </a:rPr>
-              <a:t>  —  Software Bill of Materials — inventory of components and dependencies inside a software artifact.</a:t>
+              <a:t>  —  Network and Information Security Directive 2 — EU baseline for cybersecurity of essential entities.</a:t>
             </a:r>
           </a:p>
           <a:p>
@@ -5490,7 +5421,7 @@
                 </a:solidFill>
                 <a:latin typeface="Aptos"/>
               </a:rPr>
-              <a:t>SBoD</a:t>
+              <a:t>OCI</a:t>
             </a:r>
             <a:r>
               <a:rPr sz="1300">
@@ -5499,7 +5430,7 @@
                 </a:solidFill>
                 <a:latin typeface="Aptos"/>
               </a:rPr>
-              <a:t>  —  Signed Bill of Delivery — OCM's signed envelope describing what was actually delivered, where, and by whom.</a:t>
+              <a:t>  —  Open Container Initiative — open standards for container image format and distribution.</a:t>
             </a:r>
           </a:p>
         </p:txBody>
@@ -5512,7 +5443,7 @@
         </p:nvSpPr>
         <p:spPr>
           <a:xfrm>
-            <a:off x="9429750" y="3429000"/>
+            <a:off x="9429750" y="4953000"/>
             <a:ext cx="7715250" cy="4572000"/>
           </a:xfrm>
           <a:prstGeom prst="rect">
@@ -5541,7 +5472,7 @@
                 </a:solidFill>
                 <a:latin typeface="Aptos"/>
               </a:rPr>
-              <a:t>SPDX</a:t>
+              <a:t>OCM</a:t>
             </a:r>
             <a:r>
               <a:rPr sz="1300">
@@ -5550,7 +5481,7 @@
                 </a:solidFill>
                 <a:latin typeface="Aptos"/>
               </a:rPr>
-              <a:t>  —  Software Package Data Exchange — ISO/IEC 5962 standard format for SBOM data.</a:t>
+              <a:t>  —  Open Component Model — vendor-neutral specification for signed, transportable software components.</a:t>
             </a:r>
           </a:p>
           <a:p>
@@ -5569,7 +5500,7 @@
                 </a:solidFill>
                 <a:latin typeface="Aptos"/>
               </a:rPr>
-              <a:t>SWID</a:t>
+              <a:t>ODG</a:t>
             </a:r>
             <a:r>
               <a:rPr sz="1300">
@@ -5578,7 +5509,7 @@
                 </a:solidFill>
                 <a:latin typeface="Aptos"/>
               </a:rPr>
-              <a:t>  —  Software Identification Tags — ISO/IEC 19770-2 standard for software inventory.</a:t>
+              <a:t>  —  Open Delivery Gear — OCM-native compliance automation engine and dashboard.</a:t>
             </a:r>
           </a:p>
           <a:p>
@@ -5597,7 +5528,7 @@
                 </a:solidFill>
                 <a:latin typeface="Aptos"/>
               </a:rPr>
-              <a:t>PKI</a:t>
+              <a:t>OSS</a:t>
             </a:r>
             <a:r>
               <a:rPr sz="1300">
@@ -5606,7 +5537,7 @@
                 </a:solidFill>
                 <a:latin typeface="Aptos"/>
               </a:rPr>
-              <a:t>  —  Public Key Infrastructure — framework for managing certificates and signing keys.</a:t>
+              <a:t>  —  Open Source Software.</a:t>
             </a:r>
           </a:p>
           <a:p>
@@ -5625,7 +5556,7 @@
                 </a:solidFill>
                 <a:latin typeface="Aptos"/>
               </a:rPr>
-              <a:t>Sigstore</a:t>
+              <a:t>PKI</a:t>
             </a:r>
             <a:r>
               <a:rPr sz="1300">
@@ -5634,7 +5565,7 @@
                 </a:solidFill>
                 <a:latin typeface="Aptos"/>
               </a:rPr>
-              <a:t>  —  Open-source project for keyless software signing using OIDC identities.</a:t>
+              <a:t>  —  Public Key Infrastructure — framework for managing certificates and signing keys.</a:t>
             </a:r>
           </a:p>
           <a:p>
@@ -5653,7 +5584,7 @@
                 </a:solidFill>
                 <a:latin typeface="Aptos"/>
               </a:rPr>
-              <a:t>LoB</a:t>
+              <a:t>SBOD</a:t>
             </a:r>
             <a:r>
               <a:rPr sz="1300">
@@ -5662,7 +5593,7 @@
                 </a:solidFill>
                 <a:latin typeface="Aptos"/>
               </a:rPr>
-              <a:t>  —  Line of Business — SAP organisational unit owning a product portfolio.</a:t>
+              <a:t>  —  Software Bill of Delivery — the OCM component descriptor, signed and traceable. Containing all artifacts and metadata for delivery and deployment.</a:t>
             </a:r>
           </a:p>
           <a:p>
@@ -5681,7 +5612,7 @@
                 </a:solidFill>
                 <a:latin typeface="Aptos"/>
               </a:rPr>
-              <a:t>BTP</a:t>
+              <a:t>SBOM</a:t>
             </a:r>
             <a:r>
               <a:rPr sz="1300">
@@ -5690,7 +5621,7 @@
                 </a:solidFill>
                 <a:latin typeface="Aptos"/>
               </a:rPr>
-              <a:t>  —  SAP Business Technology Platform.</a:t>
+              <a:t>  —  Software Bill of Materials — inventory of components and dependencies inside a software artifact.</a:t>
             </a:r>
           </a:p>
           <a:p>
@@ -5709,7 +5640,7 @@
                 </a:solidFill>
                 <a:latin typeface="Aptos"/>
               </a:rPr>
-              <a:t>OSS</a:t>
+              <a:t>SecNumCloud</a:t>
             </a:r>
             <a:r>
               <a:rPr sz="1300">
@@ -5718,7 +5649,7 @@
                 </a:solidFill>
                 <a:latin typeface="Aptos"/>
               </a:rPr>
-              <a:t>  —  Open Source Software.</a:t>
+              <a:t>  —  French cloud security qualification scheme operated by ANSSI.</a:t>
             </a:r>
           </a:p>
           <a:p>
@@ -5737,7 +5668,7 @@
                 </a:solidFill>
                 <a:latin typeface="Aptos"/>
               </a:rPr>
-              <a:t>NeoNephos</a:t>
+              <a:t>Sigstore</a:t>
             </a:r>
             <a:r>
               <a:rPr sz="1300">
@@ -5746,7 +5677,7 @@
                 </a:solidFill>
                 <a:latin typeface="Aptos"/>
               </a:rPr>
-              <a:t>  —  European foundation for sovereign cloud open-source projects, hosted under the Linux Foundation.</a:t>
+              <a:t>  —  Open-source project for keyless software signing using OIDC identities.</a:t>
             </a:r>
           </a:p>
           <a:p>
@@ -5765,7 +5696,7 @@
                 </a:solidFill>
                 <a:latin typeface="Aptos"/>
               </a:rPr>
-              <a:t>Grype</a:t>
+              <a:t>SPDX</a:t>
             </a:r>
             <a:r>
               <a:rPr sz="1300">
@@ -5774,7 +5705,7 @@
                 </a:solidFill>
                 <a:latin typeface="Aptos"/>
               </a:rPr>
-              <a:t>  —  Open-source vulnerability scanner for container images and filesystems (Anchore).</a:t>
+              <a:t>  —  Software Package Data Exchange — ISO/IEC 5962 standard format for SBOM data.</a:t>
             </a:r>
           </a:p>
           <a:p>
@@ -5793,7 +5724,7 @@
                 </a:solidFill>
                 <a:latin typeface="Aptos"/>
               </a:rPr>
-              <a:t>Trivy</a:t>
+              <a:t>SWID</a:t>
             </a:r>
             <a:r>
               <a:rPr sz="1300">
@@ -5802,7 +5733,7 @@
                 </a:solidFill>
                 <a:latin typeface="Aptos"/>
               </a:rPr>
-              <a:t>  —  Open-source security scanner for containers, IaC, and code (Aqua Security).</a:t>
+              <a:t>  —  Software Identification Tags — ISO/IEC 19770-2 standard for software inventory.</a:t>
             </a:r>
           </a:p>
           <a:p>
@@ -5821,7 +5752,7 @@
                 </a:solidFill>
                 <a:latin typeface="Aptos"/>
               </a:rPr>
-              <a:t>Helm</a:t>
+              <a:t>Trivy</a:t>
             </a:r>
             <a:r>
               <a:rPr sz="1300">
@@ -5830,7 +5761,7 @@
                 </a:solidFill>
                 <a:latin typeface="Aptos"/>
               </a:rPr>
-              <a:t>  —  Package manager for Kubernetes; reference artifact type for OCM.</a:t>
+              <a:t>  —  Open-source security scanner for containers, IaC, and code (Aqua Security).</a:t>
             </a:r>
           </a:p>
         </p:txBody>
@@ -6193,32 +6124,6 @@
               <a:t>Trivy, Grype, Sigstore, Helm, OCI, Kubernetes, kro, Flux, Argo CD — third-party trademarks named for technical reference; ownership remains with their respective projects and organisations.</a:t>
             </a:r>
           </a:p>
-          <a:p>
-            <a:pPr>
-              <a:spcBef>
-                <a:spcPts val="800"/>
-              </a:spcBef>
-              <a:spcAft>
-                <a:spcPts val="800"/>
-              </a:spcAft>
-            </a:pPr>
-            <a:r>
-              <a:rPr b="1">
-                <a:solidFill>
-                  <a:srgbClr val="0F6BFF"/>
-                </a:solidFill>
-              </a:rPr>
-              <a:t>▪  </a:t>
-            </a:r>
-            <a:r>
-              <a:rPr>
-                <a:solidFill>
-                  <a:srgbClr val="000000"/>
-                </a:solidFill>
-              </a:rPr>
-              <a:t>Full sourcing record: assets/adopters/LICENSING.md in the OCM marketing repository.</a:t>
-            </a:r>
-          </a:p>
         </p:txBody>
       </p:sp>
     </p:spTree>
@@ -6255,7 +6160,7 @@
           <a:lstStyle/>
           <a:p>
             <a:r>
-              <a:t>WHY NOW — INTERNAL</a:t>
+              <a:t>WHY NOW</a:t>
             </a:r>
           </a:p>
         </p:txBody>
@@ -6276,7 +6181,12 @@
           <a:lstStyle/>
           <a:p>
             <a:r>
-              <a:t>Compliance and sovereignty are given. The strategic position is not.</a:t>
+              <a:t>Compliance and sovereignty are given.</a:t>
+            </a:r>
+          </a:p>
+          <a:p>
+            <a:r>
+              <a:t>Our strategic position is a choice.</a:t>
             </a:r>
           </a:p>
         </p:txBody>
@@ -6546,7 +6456,7 @@
           <a:lstStyle/>
           <a:p>
             <a:r>
-              <a:t>SBOM lists. SBoD delivers.</a:t>
+              <a:t>SBOM lists. SBOD delivers.</a:t>
             </a:r>
           </a:p>
         </p:txBody>
@@ -6614,7 +6524,7 @@
                   <a:srgbClr val="000000"/>
                 </a:solidFill>
               </a:rPr>
-              <a:t>A Software Bill of Delivery (SBoD) tells you what you delivered, how to verify, transport, and operate it. It was built for delivery.</a:t>
+              <a:t>A Software Bill of Delivery (SBOD) tells you what you delivered, how to verify, transport, and operate it. It was built for delivery.</a:t>
             </a:r>
           </a:p>
           <a:p>
@@ -6640,7 +6550,7 @@
                   <a:srgbClr val="000000"/>
                 </a:solidFill>
               </a:rPr>
-              <a:t>The SBoD contains the SBOM. OCM doesn't replace your SBOM tooling — it gives the SBOM an envelope that's compliance-native, signed once, and travels intact across any boundary.</a:t>
+              <a:t>The SBOD contains the SBOM. OCM doesn't replace your SBOM tooling — it gives the SBOM an envelope that's compliance-native, signed once, and travels intact across any boundary.</a:t>
             </a:r>
           </a:p>
           <a:p>
@@ -6666,7 +6576,7 @@
                   <a:srgbClr val="000000"/>
                 </a:solidFill>
               </a:rPr>
-              <a:t>SBoD is the category SAP led the definition of — now standardised through NeoNephos governance.</a:t>
+              <a:t>SBOD is the category SAP led the definition of — now standardised through NeoNephos governance.</a:t>
             </a:r>
           </a:p>
         </p:txBody>
@@ -6705,7 +6615,7 @@
           <a:lstStyle/>
           <a:p>
             <a:r>
-              <a:t>THE SHIFT — SBOM INSIDE SBoD</a:t>
+              <a:t>THE SHIFT — SBOM INSIDE SBOD</a:t>
             </a:r>
           </a:p>
         </p:txBody>
@@ -6852,7 +6762,7 @@
           <a:lstStyle/>
           <a:p>
             <a:r>
-              <a:t>Keyless (Sigstore) or key-based (your PKI) signs one artifact at a time. OCM gives them the complete SBoD to sign — one signature covers every artifact in the delivery, by digest.</a:t>
+              <a:t>Keyless (Sigstore) or key-based (your PKI) signs one artifact at a time. OCM gives them the complete SBOD to sign — one signature covers every artifact in the delivery, by digest.</a:t>
             </a:r>
           </a:p>
         </p:txBody>
@@ -7122,7 +7032,7 @@
                   <a:srgbClr val="000000"/>
                 </a:solidFill>
               </a:rPr>
-              <a:t>Identity is location-independent. A component carries its name regardless of which registry it lives in.</a:t>
+              <a:t>Identity is location-independent. A component carries its name regardless where it lives.</a:t>
             </a:r>
           </a:p>
           <a:p>
@@ -7148,7 +7058,7 @@
                   <a:srgbClr val="000000"/>
                 </a:solidFill>
               </a:rPr>
-              <a:t>Signatures are location-independent. Sign once at source; verify at the destination, or at any hop in between, with no callback upstream.</a:t>
+              <a:t>Signatures are location-independent. Sign once at source, verify at all hops up to the destination. No callback upstream.</a:t>
             </a:r>
           </a:p>
           <a:p>
@@ -7174,7 +7084,7 @@
                   <a:srgbClr val="000000"/>
                 </a:solidFill>
               </a:rPr>
-              <a:t>Day-2 ops happen inside the boundary. Subscribe to the component and pull upgrades on your schedule, scale across regions, all without reaching back upstream.</a:t>
+              <a:t>Day-2 ops happen inside the boundary. Subscribe to a component and pull upgrades when needed. Again, no callback upstream.</a:t>
             </a:r>
           </a:p>
           <a:p>
@@ -7200,7 +7110,7 @@
                   <a:srgbClr val="000000"/>
                 </a:solidFill>
               </a:rPr>
-              <a:t>On transfer into a sovereign environment, a component can carry every artifact it needs along with it. The destination needs nothing more.</a:t>
+              <a:t>On transfer into a sovereign environment, a component can carry every artifact it needs along with it. Completely self-contained.</a:t>
             </a:r>
           </a:p>
         </p:txBody>
